--- a/ground-vehicle/docs/courses/advanced/l2_motors_and_ramping.pptx
+++ b/ground-vehicle/docs/courses/advanced/l2_motors_and_ramping.pptx
@@ -3147,267 +3147,9 @@
           </a:p>
         </p:txBody>
       </p:sp>
-      <p:sp>
-        <p:nvSpPr>
-          <p:cNvPr id="3" name="TextBox 2"/>
-          <p:cNvSpPr txBox="1"/>
-          <p:nvPr/>
-        </p:nvSpPr>
-        <p:spPr>
-          <a:xfrm>
-            <a:off x="502920" y="1051560"/>
-            <a:ext cx="6492240" cy="365760"/>
-          </a:xfrm>
-          <a:prstGeom prst="rect">
-            <a:avLst/>
-          </a:prstGeom>
-          <a:noFill/>
-        </p:spPr>
-        <p:txBody>
-          <a:bodyPr wrap="square" lIns="0" tIns="0" rIns="0" bIns="0">
-            <a:spAutoFit/>
-          </a:bodyPr>
-          <a:lstStyle/>
-          <a:p>
-            <a:pPr algn="l">
-              <a:lnSpc>
-                <a:spcPct val="100000"/>
-              </a:lnSpc>
-              <a:spcAft>
-                <a:spcPts val="0"/>
-              </a:spcAft>
-              <a:defRPr sz="1600" b="1">
-                <a:solidFill>
-                  <a:srgbClr val="0E7C86"/>
-                </a:solidFill>
-                <a:latin typeface="Calibri"/>
-              </a:defRPr>
-            </a:pPr>
-            <a:r>
-              <a:rPr sz="1600" b="1">
-                <a:solidFill>
-                  <a:srgbClr val="0E7C86"/>
-                </a:solidFill>
-                <a:latin typeface="Calibri"/>
-              </a:rPr>
-              <a:t>LESSON 2</a:t>
-            </a:r>
-          </a:p>
-        </p:txBody>
-      </p:sp>
-      <p:sp>
-        <p:nvSpPr>
-          <p:cNvPr id="4" name="TextBox 3"/>
-          <p:cNvSpPr txBox="1"/>
-          <p:nvPr/>
-        </p:nvSpPr>
-        <p:spPr>
-          <a:xfrm>
-            <a:off x="502920" y="1481328"/>
-            <a:ext cx="6492240" cy="1554480"/>
-          </a:xfrm>
-          <a:prstGeom prst="rect">
-            <a:avLst/>
-          </a:prstGeom>
-          <a:noFill/>
-        </p:spPr>
-        <p:txBody>
-          <a:bodyPr wrap="square" lIns="0" tIns="0" rIns="0" bIns="0">
-            <a:spAutoFit/>
-          </a:bodyPr>
-          <a:lstStyle/>
-          <a:p>
-            <a:pPr algn="l">
-              <a:lnSpc>
-                <a:spcPct val="95000"/>
-              </a:lnSpc>
-              <a:spcAft>
-                <a:spcPts val="0"/>
-              </a:spcAft>
-              <a:defRPr sz="4000" b="1">
-                <a:solidFill>
-                  <a:srgbClr val="1F3A5F"/>
-                </a:solidFill>
-                <a:latin typeface="Calibri"/>
-              </a:defRPr>
-            </a:pPr>
-            <a:r>
-              <a:rPr sz="4000" b="1">
-                <a:solidFill>
-                  <a:srgbClr val="1F3A5F"/>
-                </a:solidFill>
-                <a:latin typeface="Calibri"/>
-              </a:rPr>
-              <a:t>Motors, Resolution and Ramping</a:t>
-            </a:r>
-          </a:p>
-        </p:txBody>
-      </p:sp>
-      <p:sp>
-        <p:nvSpPr>
-          <p:cNvPr id="5" name="TextBox 4"/>
-          <p:cNvSpPr txBox="1"/>
-          <p:nvPr/>
-        </p:nvSpPr>
-        <p:spPr>
-          <a:xfrm>
-            <a:off x="502920" y="3154680"/>
-            <a:ext cx="6492240" cy="960120"/>
-          </a:xfrm>
-          <a:prstGeom prst="rect">
-            <a:avLst/>
-          </a:prstGeom>
-          <a:noFill/>
-        </p:spPr>
-        <p:txBody>
-          <a:bodyPr wrap="square" lIns="0" tIns="0" rIns="0" bIns="0">
-            <a:spAutoFit/>
-          </a:bodyPr>
-          <a:lstStyle/>
-          <a:p>
-            <a:pPr algn="l">
-              <a:lnSpc>
-                <a:spcPct val="100000"/>
-              </a:lnSpc>
-              <a:spcAft>
-                <a:spcPts val="0"/>
-              </a:spcAft>
-              <a:defRPr sz="1700" b="0">
-                <a:solidFill>
-                  <a:srgbClr val="222222"/>
-                </a:solidFill>
-                <a:latin typeface="Calibri"/>
-              </a:defRPr>
-            </a:pPr>
-            <a:r>
-              <a:rPr sz="1700" b="0">
-                <a:solidFill>
-                  <a:srgbClr val="222222"/>
-                </a:solidFill>
-                <a:latin typeface="Calibri"/>
-              </a:rPr>
-              <a:t>Resolution against frequency, four states of an H-bridge, fast decay, and a ramp that used to stall one count short.</a:t>
-            </a:r>
-          </a:p>
-        </p:txBody>
-      </p:sp>
-      <p:sp>
-        <p:nvSpPr>
-          <p:cNvPr id="6" name="TextBox 5"/>
-          <p:cNvSpPr txBox="1"/>
-          <p:nvPr/>
-        </p:nvSpPr>
-        <p:spPr>
-          <a:xfrm>
-            <a:off x="502920" y="4224528"/>
-            <a:ext cx="6492240" cy="1371600"/>
-          </a:xfrm>
-          <a:prstGeom prst="rect">
-            <a:avLst/>
-          </a:prstGeom>
-          <a:noFill/>
-        </p:spPr>
-        <p:txBody>
-          <a:bodyPr wrap="square" lIns="0" tIns="0" rIns="0" bIns="0">
-            <a:spAutoFit/>
-          </a:bodyPr>
-          <a:lstStyle/>
-          <a:p>
-            <a:pPr algn="l">
-              <a:lnSpc>
-                <a:spcPct val="100000"/>
-              </a:lnSpc>
-              <a:spcAft>
-                <a:spcPts val="200"/>
-              </a:spcAft>
-              <a:defRPr sz="1300" b="0">
-                <a:solidFill>
-                  <a:srgbClr val="666666"/>
-                </a:solidFill>
-                <a:latin typeface="Calibri"/>
-              </a:defRPr>
-            </a:pPr>
-            <a:r>
-              <a:rPr sz="1300" b="0">
-                <a:solidFill>
-                  <a:srgbClr val="666666"/>
-                </a:solidFill>
-                <a:latin typeface="Calibri"/>
-              </a:rPr>
-              <a:t>Porpoise Robotics  -  porpoiserobotics.org</a:t>
-            </a:r>
-          </a:p>
-          <a:p>
-            <a:pPr algn="l">
-              <a:lnSpc>
-                <a:spcPct val="100000"/>
-              </a:lnSpc>
-              <a:spcAft>
-                <a:spcPts val="200"/>
-              </a:spcAft>
-              <a:defRPr sz="1300" b="0">
-                <a:solidFill>
-                  <a:srgbClr val="666666"/>
-                </a:solidFill>
-                <a:latin typeface="Calibri"/>
-              </a:defRPr>
-            </a:pPr>
-            <a:r>
-              <a:rPr sz="1300" b="0">
-                <a:solidFill>
-                  <a:srgbClr val="666666"/>
-                </a:solidFill>
-                <a:latin typeface="Calibri"/>
-              </a:rPr>
-              <a:t>Kevin P. Bowen, President  -  kbowen6@icloud.com</a:t>
-            </a:r>
-          </a:p>
-          <a:p>
-            <a:pPr algn="l">
-              <a:lnSpc>
-                <a:spcPct val="100000"/>
-              </a:lnSpc>
-              <a:spcAft>
-                <a:spcPts val="200"/>
-              </a:spcAft>
-              <a:defRPr sz="1300" b="0">
-                <a:solidFill>
-                  <a:srgbClr val="666666"/>
-                </a:solidFill>
-                <a:latin typeface="Calibri"/>
-              </a:defRPr>
-            </a:pPr>
-          </a:p>
-          <a:p>
-            <a:pPr algn="l">
-              <a:lnSpc>
-                <a:spcPct val="100000"/>
-              </a:lnSpc>
-              <a:spcAft>
-                <a:spcPts val="200"/>
-              </a:spcAft>
-              <a:defRPr sz="1300" b="0">
-                <a:solidFill>
-                  <a:srgbClr val="666666"/>
-                </a:solidFill>
-                <a:latin typeface="Calibri"/>
-              </a:defRPr>
-            </a:pPr>
-            <a:r>
-              <a:rPr sz="1300" b="0">
-                <a:solidFill>
-                  <a:srgbClr val="666666"/>
-                </a:solidFill>
-                <a:latin typeface="Calibri"/>
-              </a:rPr>
-              <a:t>Three hours.  Wheels off the ground throughout.</a:t>
-            </a:r>
-          </a:p>
-        </p:txBody>
-      </p:sp>
       <p:pic>
         <p:nvPicPr>
-          <p:cNvPr id="7" name="Picture 6" descr="vehicle-rear-battery.jpg"/>
+          <p:cNvPr id="3" name="Picture 2" descr="porpoise-logo.png"/>
           <p:cNvPicPr>
             <a:picLocks noChangeAspect="1"/>
           </p:cNvPicPr>
@@ -3421,6 +3163,288 @@
         </p:blipFill>
         <p:spPr>
           <a:xfrm>
+            <a:off x="10922762" y="457200"/>
+            <a:ext cx="766013" cy="777240"/>
+          </a:xfrm>
+          <a:prstGeom prst="rect">
+            <a:avLst/>
+          </a:prstGeom>
+        </p:spPr>
+      </p:pic>
+      <p:sp>
+        <p:nvSpPr>
+          <p:cNvPr id="4" name="TextBox 3"/>
+          <p:cNvSpPr txBox="1"/>
+          <p:nvPr/>
+        </p:nvSpPr>
+        <p:spPr>
+          <a:xfrm>
+            <a:off x="502920" y="1051560"/>
+            <a:ext cx="6492240" cy="365760"/>
+          </a:xfrm>
+          <a:prstGeom prst="rect">
+            <a:avLst/>
+          </a:prstGeom>
+          <a:noFill/>
+        </p:spPr>
+        <p:txBody>
+          <a:bodyPr wrap="square" lIns="0" tIns="0" rIns="0" bIns="0">
+            <a:spAutoFit/>
+          </a:bodyPr>
+          <a:lstStyle/>
+          <a:p>
+            <a:pPr algn="l">
+              <a:lnSpc>
+                <a:spcPct val="100000"/>
+              </a:lnSpc>
+              <a:spcAft>
+                <a:spcPts val="0"/>
+              </a:spcAft>
+              <a:defRPr sz="1600" b="1">
+                <a:solidFill>
+                  <a:srgbClr val="0E7C86"/>
+                </a:solidFill>
+                <a:latin typeface="Calibri"/>
+              </a:defRPr>
+            </a:pPr>
+            <a:r>
+              <a:rPr sz="1600" b="1">
+                <a:solidFill>
+                  <a:srgbClr val="0E7C86"/>
+                </a:solidFill>
+                <a:latin typeface="Calibri"/>
+              </a:rPr>
+              <a:t>LESSON 2</a:t>
+            </a:r>
+          </a:p>
+        </p:txBody>
+      </p:sp>
+      <p:sp>
+        <p:nvSpPr>
+          <p:cNvPr id="5" name="TextBox 4"/>
+          <p:cNvSpPr txBox="1"/>
+          <p:nvPr/>
+        </p:nvSpPr>
+        <p:spPr>
+          <a:xfrm>
+            <a:off x="502920" y="1481328"/>
+            <a:ext cx="6492240" cy="1554480"/>
+          </a:xfrm>
+          <a:prstGeom prst="rect">
+            <a:avLst/>
+          </a:prstGeom>
+          <a:noFill/>
+        </p:spPr>
+        <p:txBody>
+          <a:bodyPr wrap="square" lIns="0" tIns="0" rIns="0" bIns="0">
+            <a:spAutoFit/>
+          </a:bodyPr>
+          <a:lstStyle/>
+          <a:p>
+            <a:pPr algn="l">
+              <a:lnSpc>
+                <a:spcPct val="95000"/>
+              </a:lnSpc>
+              <a:spcAft>
+                <a:spcPts val="0"/>
+              </a:spcAft>
+              <a:defRPr sz="4000" b="1">
+                <a:solidFill>
+                  <a:srgbClr val="1F3A5F"/>
+                </a:solidFill>
+                <a:latin typeface="Calibri"/>
+              </a:defRPr>
+            </a:pPr>
+            <a:r>
+              <a:rPr sz="4000" b="1">
+                <a:solidFill>
+                  <a:srgbClr val="1F3A5F"/>
+                </a:solidFill>
+                <a:latin typeface="Calibri"/>
+              </a:rPr>
+              <a:t>Motors, Resolution and Ramping</a:t>
+            </a:r>
+          </a:p>
+        </p:txBody>
+      </p:sp>
+      <p:sp>
+        <p:nvSpPr>
+          <p:cNvPr id="6" name="TextBox 5"/>
+          <p:cNvSpPr txBox="1"/>
+          <p:nvPr/>
+        </p:nvSpPr>
+        <p:spPr>
+          <a:xfrm>
+            <a:off x="502920" y="3154680"/>
+            <a:ext cx="6492240" cy="960120"/>
+          </a:xfrm>
+          <a:prstGeom prst="rect">
+            <a:avLst/>
+          </a:prstGeom>
+          <a:noFill/>
+        </p:spPr>
+        <p:txBody>
+          <a:bodyPr wrap="square" lIns="0" tIns="0" rIns="0" bIns="0">
+            <a:spAutoFit/>
+          </a:bodyPr>
+          <a:lstStyle/>
+          <a:p>
+            <a:pPr algn="l">
+              <a:lnSpc>
+                <a:spcPct val="100000"/>
+              </a:lnSpc>
+              <a:spcAft>
+                <a:spcPts val="0"/>
+              </a:spcAft>
+              <a:defRPr sz="1700" b="0">
+                <a:solidFill>
+                  <a:srgbClr val="222222"/>
+                </a:solidFill>
+                <a:latin typeface="Calibri"/>
+              </a:defRPr>
+            </a:pPr>
+            <a:r>
+              <a:rPr sz="1700" b="0">
+                <a:solidFill>
+                  <a:srgbClr val="222222"/>
+                </a:solidFill>
+                <a:latin typeface="Calibri"/>
+              </a:rPr>
+              <a:t>Resolution against frequency, four states of an H-bridge, fast decay, and a ramp that used to stall one count short.</a:t>
+            </a:r>
+          </a:p>
+        </p:txBody>
+      </p:sp>
+      <p:sp>
+        <p:nvSpPr>
+          <p:cNvPr id="7" name="TextBox 6"/>
+          <p:cNvSpPr txBox="1"/>
+          <p:nvPr/>
+        </p:nvSpPr>
+        <p:spPr>
+          <a:xfrm>
+            <a:off x="502920" y="4224528"/>
+            <a:ext cx="6492240" cy="1371600"/>
+          </a:xfrm>
+          <a:prstGeom prst="rect">
+            <a:avLst/>
+          </a:prstGeom>
+          <a:noFill/>
+        </p:spPr>
+        <p:txBody>
+          <a:bodyPr wrap="square" lIns="0" tIns="0" rIns="0" bIns="0">
+            <a:spAutoFit/>
+          </a:bodyPr>
+          <a:lstStyle/>
+          <a:p>
+            <a:pPr algn="l">
+              <a:lnSpc>
+                <a:spcPct val="100000"/>
+              </a:lnSpc>
+              <a:spcAft>
+                <a:spcPts val="200"/>
+              </a:spcAft>
+              <a:defRPr sz="1300" b="0">
+                <a:solidFill>
+                  <a:srgbClr val="666666"/>
+                </a:solidFill>
+                <a:latin typeface="Calibri"/>
+              </a:defRPr>
+            </a:pPr>
+            <a:r>
+              <a:rPr sz="1300" b="0">
+                <a:solidFill>
+                  <a:srgbClr val="666666"/>
+                </a:solidFill>
+                <a:latin typeface="Calibri"/>
+              </a:rPr>
+              <a:t>Porpoise Robotics  -  porpoiserobotics.org</a:t>
+            </a:r>
+          </a:p>
+          <a:p>
+            <a:pPr algn="l">
+              <a:lnSpc>
+                <a:spcPct val="100000"/>
+              </a:lnSpc>
+              <a:spcAft>
+                <a:spcPts val="200"/>
+              </a:spcAft>
+              <a:defRPr sz="1300" b="0">
+                <a:solidFill>
+                  <a:srgbClr val="666666"/>
+                </a:solidFill>
+                <a:latin typeface="Calibri"/>
+              </a:defRPr>
+            </a:pPr>
+            <a:r>
+              <a:rPr sz="1300" b="0">
+                <a:solidFill>
+                  <a:srgbClr val="666666"/>
+                </a:solidFill>
+                <a:latin typeface="Calibri"/>
+              </a:rPr>
+              <a:t>Kevin P. Bowen, President  -  kbowen6@icloud.com</a:t>
+            </a:r>
+          </a:p>
+          <a:p>
+            <a:pPr algn="l">
+              <a:lnSpc>
+                <a:spcPct val="100000"/>
+              </a:lnSpc>
+              <a:spcAft>
+                <a:spcPts val="200"/>
+              </a:spcAft>
+              <a:defRPr sz="1300" b="0">
+                <a:solidFill>
+                  <a:srgbClr val="666666"/>
+                </a:solidFill>
+                <a:latin typeface="Calibri"/>
+              </a:defRPr>
+            </a:pPr>
+          </a:p>
+          <a:p>
+            <a:pPr algn="l">
+              <a:lnSpc>
+                <a:spcPct val="100000"/>
+              </a:lnSpc>
+              <a:spcAft>
+                <a:spcPts val="200"/>
+              </a:spcAft>
+              <a:defRPr sz="1300" b="0">
+                <a:solidFill>
+                  <a:srgbClr val="666666"/>
+                </a:solidFill>
+                <a:latin typeface="Calibri"/>
+              </a:defRPr>
+            </a:pPr>
+            <a:r>
+              <a:rPr sz="1300" b="0">
+                <a:solidFill>
+                  <a:srgbClr val="666666"/>
+                </a:solidFill>
+                <a:latin typeface="Calibri"/>
+              </a:rPr>
+              <a:t>Three hours.  Wheels off the ground throughout.</a:t>
+            </a:r>
+          </a:p>
+        </p:txBody>
+      </p:sp>
+      <p:pic>
+        <p:nvPicPr>
+          <p:cNvPr id="8" name="Picture 7" descr="vehicle-rear-battery.jpg"/>
+          <p:cNvPicPr>
+            <a:picLocks noChangeAspect="1"/>
+          </p:cNvPicPr>
+          <p:nvPr/>
+        </p:nvPicPr>
+        <p:blipFill>
+          <a:blip r:embed="rId3"/>
+          <a:stretch>
+            <a:fillRect/>
+          </a:stretch>
+        </p:blipFill>
+        <p:spPr>
+          <a:xfrm>
             <a:off x="7223760" y="1371600"/>
             <a:ext cx="4480560" cy="3233131"/>
           </a:xfrm>
@@ -3431,7 +3455,7 @@
       </p:pic>
       <p:sp>
         <p:nvSpPr>
-          <p:cNvPr id="8" name="TextBox 7"/>
+          <p:cNvPr id="9" name="TextBox 8"/>
           <p:cNvSpPr txBox="1"/>
           <p:nvPr/>
         </p:nvSpPr>

--- a/ground-vehicle/docs/courses/advanced/l2_motors_and_ramping.pptx
+++ b/ground-vehicle/docs/courses/advanced/l2_motors_and_ramping.pptx
@@ -3755,7 +3755,7 @@
       </p:sp>
       <p:sp>
         <p:nvSpPr>
-          <p:cNvPr id="7" name="Rounded Rectangle 6"/>
+          <p:cNvPr id="7" name="CODE_PANEL"/>
           <p:cNvSpPr/>
           <p:nvPr/>
         </p:nvSpPr>
@@ -7490,7 +7490,7 @@
       </p:sp>
       <p:sp>
         <p:nvSpPr>
-          <p:cNvPr id="7" name="Rounded Rectangle 6"/>
+          <p:cNvPr id="7" name="CODE_PANEL"/>
           <p:cNvSpPr/>
           <p:nvPr/>
         </p:nvSpPr>
@@ -15065,7 +15065,7 @@
       </p:sp>
       <p:sp>
         <p:nvSpPr>
-          <p:cNvPr id="7" name="Rounded Rectangle 6"/>
+          <p:cNvPr id="7" name="CODE_PANEL"/>
           <p:cNvSpPr/>
           <p:nvPr/>
         </p:nvSpPr>

--- a/ground-vehicle/docs/courses/advanced/l2_motors_and_ramping.pptx
+++ b/ground-vehicle/docs/courses/advanced/l2_motors_and_ramping.pptx
@@ -6,28 +6,28 @@
   </p:sldMasterIdLst>
   <p:sldIdLst>
     <p:sldId id="256" r:id="rId7"/>
-    <p:sldId id="257" r:id="rId8"/>
-    <p:sldId id="258" r:id="rId9"/>
-    <p:sldId id="259" r:id="rId10"/>
-    <p:sldId id="260" r:id="rId11"/>
-    <p:sldId id="261" r:id="rId12"/>
-    <p:sldId id="262" r:id="rId13"/>
-    <p:sldId id="263" r:id="rId14"/>
-    <p:sldId id="264" r:id="rId15"/>
-    <p:sldId id="265" r:id="rId16"/>
-    <p:sldId id="266" r:id="rId17"/>
-    <p:sldId id="267" r:id="rId18"/>
-    <p:sldId id="268" r:id="rId19"/>
-    <p:sldId id="269" r:id="rId20"/>
-    <p:sldId id="270" r:id="rId21"/>
-    <p:sldId id="271" r:id="rId22"/>
-    <p:sldId id="272" r:id="rId23"/>
-    <p:sldId id="273" r:id="rId24"/>
-    <p:sldId id="274" r:id="rId25"/>
-    <p:sldId id="275" r:id="rId26"/>
-    <p:sldId id="276" r:id="rId27"/>
-    <p:sldId id="277" r:id="rId28"/>
-    <p:sldId id="278" r:id="rId29"/>
+    <p:sldId id="257" r:id="rId9"/>
+    <p:sldId id="258" r:id="rId10"/>
+    <p:sldId id="259" r:id="rId11"/>
+    <p:sldId id="260" r:id="rId12"/>
+    <p:sldId id="261" r:id="rId13"/>
+    <p:sldId id="262" r:id="rId14"/>
+    <p:sldId id="263" r:id="rId15"/>
+    <p:sldId id="264" r:id="rId16"/>
+    <p:sldId id="265" r:id="rId17"/>
+    <p:sldId id="266" r:id="rId18"/>
+    <p:sldId id="267" r:id="rId19"/>
+    <p:sldId id="268" r:id="rId20"/>
+    <p:sldId id="269" r:id="rId21"/>
+    <p:sldId id="270" r:id="rId22"/>
+    <p:sldId id="271" r:id="rId23"/>
+    <p:sldId id="272" r:id="rId24"/>
+    <p:sldId id="273" r:id="rId25"/>
+    <p:sldId id="274" r:id="rId26"/>
+    <p:sldId id="275" r:id="rId27"/>
+    <p:sldId id="276" r:id="rId28"/>
+    <p:sldId id="277" r:id="rId29"/>
+    <p:sldId id="278" r:id="rId30"/>
   </p:sldIdLst>
   <p:sldSz cx="12191695" cy="6858000" type="screen4x3"/>
   <p:notesSz cx="6858000" cy="9144000"/>
@@ -127,6 +127,2577 @@
     </a:lvl9pPr>
   </p:defaultTextStyle>
 </p:presentation>
+</file>
+
+<file path=ppt/notesMasters/notesMaster1.xml><?xml version="1.0" encoding="utf-8"?>
+<p:notesMaster xmlns:a="http://schemas.openxmlformats.org/drawingml/2006/main" xmlns:p="http://schemas.openxmlformats.org/presentationml/2006/main" xmlns:r="http://schemas.openxmlformats.org/officeDocument/2006/relationships">
+  <p:cSld>
+    <p:bg>
+      <p:bgRef idx="1001">
+        <a:schemeClr val="bg1"/>
+      </p:bgRef>
+    </p:bg>
+    <p:spTree>
+      <p:nvGrpSpPr>
+        <p:cNvPr id="1" name=""/>
+        <p:cNvGrpSpPr/>
+        <p:nvPr/>
+      </p:nvGrpSpPr>
+      <p:grpSpPr>
+        <a:xfrm>
+          <a:off x="0" y="0"/>
+          <a:ext cx="0" cy="0"/>
+          <a:chOff x="0" y="0"/>
+          <a:chExt cx="0" cy="0"/>
+        </a:xfrm>
+      </p:grpSpPr>
+      <p:sp>
+        <p:nvSpPr>
+          <p:cNvPr id="2" name="Header Placeholder 1"/>
+          <p:cNvSpPr>
+            <a:spLocks noGrp="1"/>
+          </p:cNvSpPr>
+          <p:nvPr>
+            <p:ph type="hdr" sz="quarter"/>
+          </p:nvPr>
+        </p:nvSpPr>
+        <p:spPr>
+          <a:xfrm>
+            <a:off x="0" y="0"/>
+            <a:ext cx="2971800" cy="457200"/>
+          </a:xfrm>
+          <a:prstGeom prst="rect">
+            <a:avLst/>
+          </a:prstGeom>
+        </p:spPr>
+        <p:txBody>
+          <a:bodyPr vert="horz" lIns="91440" tIns="45720" rIns="91440" bIns="45720" rtlCol="0"/>
+          <a:lstStyle>
+            <a:lvl1pPr algn="l">
+              <a:defRPr sz="1200"/>
+            </a:lvl1pPr>
+          </a:lstStyle>
+          <a:p>
+            <a:endParaRPr lang="en-US"/>
+          </a:p>
+        </p:txBody>
+      </p:sp>
+      <p:sp>
+        <p:nvSpPr>
+          <p:cNvPr id="3" name="Date Placeholder 2"/>
+          <p:cNvSpPr>
+            <a:spLocks noGrp="1"/>
+          </p:cNvSpPr>
+          <p:nvPr>
+            <p:ph type="dt" idx="1"/>
+          </p:nvPr>
+        </p:nvSpPr>
+        <p:spPr>
+          <a:xfrm>
+            <a:off x="3884613" y="0"/>
+            <a:ext cx="2971800" cy="457200"/>
+          </a:xfrm>
+          <a:prstGeom prst="rect">
+            <a:avLst/>
+          </a:prstGeom>
+        </p:spPr>
+        <p:txBody>
+          <a:bodyPr vert="horz" lIns="91440" tIns="45720" rIns="91440" bIns="45720" rtlCol="0"/>
+          <a:lstStyle>
+            <a:lvl1pPr algn="r">
+              <a:defRPr sz="1200"/>
+            </a:lvl1pPr>
+          </a:lstStyle>
+          <a:p>
+            <a:fld id="{0F89C1C7-3DCD-1040-A9CF-14679D8B5DDD}" type="datetimeFigureOut">
+              <a:rPr lang="en-US" smtClean="0"/>
+              <a:t>10/17/16</a:t>
+            </a:fld>
+            <a:endParaRPr lang="en-US"/>
+          </a:p>
+        </p:txBody>
+      </p:sp>
+      <p:sp>
+        <p:nvSpPr>
+          <p:cNvPr id="4" name="Slide Image Placeholder 3"/>
+          <p:cNvSpPr>
+            <a:spLocks noGrp="1" noRot="1" noChangeAspect="1"/>
+          </p:cNvSpPr>
+          <p:nvPr>
+            <p:ph type="sldImg" idx="2"/>
+          </p:nvPr>
+        </p:nvSpPr>
+        <p:spPr>
+          <a:xfrm>
+            <a:off x="1143000" y="685800"/>
+            <a:ext cx="4572000" cy="3429000"/>
+          </a:xfrm>
+          <a:prstGeom prst="rect">
+            <a:avLst/>
+          </a:prstGeom>
+          <a:noFill/>
+          <a:ln w="12700">
+            <a:solidFill>
+              <a:prstClr val="black"/>
+            </a:solidFill>
+          </a:ln>
+        </p:spPr>
+        <p:txBody>
+          <a:bodyPr vert="horz" lIns="91440" tIns="45720" rIns="91440" bIns="45720" rtlCol="0" anchor="ctr"/>
+          <a:lstStyle/>
+          <a:p>
+            <a:endParaRPr lang="en-US"/>
+          </a:p>
+        </p:txBody>
+      </p:sp>
+      <p:sp>
+        <p:nvSpPr>
+          <p:cNvPr id="5" name="Notes Placeholder 4"/>
+          <p:cNvSpPr>
+            <a:spLocks noGrp="1"/>
+          </p:cNvSpPr>
+          <p:nvPr>
+            <p:ph type="body" sz="quarter" idx="3"/>
+          </p:nvPr>
+        </p:nvSpPr>
+        <p:spPr>
+          <a:xfrm>
+            <a:off x="685800" y="4343400"/>
+            <a:ext cx="5486400" cy="4114800"/>
+          </a:xfrm>
+          <a:prstGeom prst="rect">
+            <a:avLst/>
+          </a:prstGeom>
+        </p:spPr>
+        <p:txBody>
+          <a:bodyPr vert="horz" lIns="91440" tIns="45720" rIns="91440" bIns="45720" rtlCol="0"/>
+          <a:lstStyle/>
+          <a:p>
+            <a:pPr lvl="0"/>
+            <a:r>
+              <a:rPr lang="en-US" smtClean="0"/>
+              <a:t>Click to edit Master text styles</a:t>
+            </a:r>
+          </a:p>
+          <a:p>
+            <a:pPr lvl="1"/>
+            <a:r>
+              <a:rPr lang="en-US" smtClean="0"/>
+              <a:t>Second level</a:t>
+            </a:r>
+          </a:p>
+          <a:p>
+            <a:pPr lvl="2"/>
+            <a:r>
+              <a:rPr lang="en-US" smtClean="0"/>
+              <a:t>Third level</a:t>
+            </a:r>
+          </a:p>
+          <a:p>
+            <a:pPr lvl="3"/>
+            <a:r>
+              <a:rPr lang="en-US" smtClean="0"/>
+              <a:t>Fourth level</a:t>
+            </a:r>
+          </a:p>
+          <a:p>
+            <a:pPr lvl="4"/>
+            <a:r>
+              <a:rPr lang="en-US" smtClean="0"/>
+              <a:t>Fifth level</a:t>
+            </a:r>
+            <a:endParaRPr lang="en-US"/>
+          </a:p>
+        </p:txBody>
+      </p:sp>
+      <p:sp>
+        <p:nvSpPr>
+          <p:cNvPr id="6" name="Footer Placeholder 5"/>
+          <p:cNvSpPr>
+            <a:spLocks noGrp="1"/>
+          </p:cNvSpPr>
+          <p:nvPr>
+            <p:ph type="ftr" sz="quarter" idx="4"/>
+          </p:nvPr>
+        </p:nvSpPr>
+        <p:spPr>
+          <a:xfrm>
+            <a:off x="0" y="8685213"/>
+            <a:ext cx="2971800" cy="457200"/>
+          </a:xfrm>
+          <a:prstGeom prst="rect">
+            <a:avLst/>
+          </a:prstGeom>
+        </p:spPr>
+        <p:txBody>
+          <a:bodyPr vert="horz" lIns="91440" tIns="45720" rIns="91440" bIns="45720" rtlCol="0" anchor="b"/>
+          <a:lstStyle>
+            <a:lvl1pPr algn="l">
+              <a:defRPr sz="1200"/>
+            </a:lvl1pPr>
+          </a:lstStyle>
+          <a:p>
+            <a:endParaRPr lang="en-US"/>
+          </a:p>
+        </p:txBody>
+      </p:sp>
+      <p:sp>
+        <p:nvSpPr>
+          <p:cNvPr id="7" name="Slide Number Placeholder 6"/>
+          <p:cNvSpPr>
+            <a:spLocks noGrp="1"/>
+          </p:cNvSpPr>
+          <p:nvPr>
+            <p:ph type="sldNum" sz="quarter" idx="5"/>
+          </p:nvPr>
+        </p:nvSpPr>
+        <p:spPr>
+          <a:xfrm>
+            <a:off x="3884613" y="8685213"/>
+            <a:ext cx="2971800" cy="457200"/>
+          </a:xfrm>
+          <a:prstGeom prst="rect">
+            <a:avLst/>
+          </a:prstGeom>
+        </p:spPr>
+        <p:txBody>
+          <a:bodyPr vert="horz" lIns="91440" tIns="45720" rIns="91440" bIns="45720" rtlCol="0" anchor="b"/>
+          <a:lstStyle>
+            <a:lvl1pPr algn="r">
+              <a:defRPr sz="1200"/>
+            </a:lvl1pPr>
+          </a:lstStyle>
+          <a:p>
+            <a:fld id="{BB5E49A5-4136-284D-997B-48E1D791AD67}" type="slidenum">
+              <a:rPr lang="en-US" smtClean="0"/>
+              <a:t>‹#›</a:t>
+            </a:fld>
+            <a:endParaRPr lang="en-US"/>
+          </a:p>
+        </p:txBody>
+      </p:sp>
+    </p:spTree>
+    <p:extLst>
+      <p:ext uri="{BB962C8B-B14F-4D97-AF65-F5344CB8AC3E}">
+        <p14:creationId xmlns:p14="http://schemas.microsoft.com/office/powerpoint/2010/main" val="2623252185"/>
+      </p:ext>
+    </p:extLst>
+  </p:cSld>
+  <p:clrMap bg1="lt1" tx1="dk1" bg2="lt2" tx2="dk2" accent1="accent1" accent2="accent2" accent3="accent3" accent4="accent4" accent5="accent5" accent6="accent6" hlink="hlink" folHlink="folHlink"/>
+  <p:notesStyle>
+    <a:lvl1pPr marL="0" algn="l" defTabSz="457200" rtl="0" eaLnBrk="1" latinLnBrk="0" hangingPunct="1">
+      <a:defRPr sz="1200" kern="1200">
+        <a:solidFill>
+          <a:schemeClr val="tx1"/>
+        </a:solidFill>
+        <a:latin typeface="+mn-lt"/>
+        <a:ea typeface="+mn-ea"/>
+        <a:cs typeface="+mn-cs"/>
+      </a:defRPr>
+    </a:lvl1pPr>
+    <a:lvl2pPr marL="457200" algn="l" defTabSz="457200" rtl="0" eaLnBrk="1" latinLnBrk="0" hangingPunct="1">
+      <a:defRPr sz="1200" kern="1200">
+        <a:solidFill>
+          <a:schemeClr val="tx1"/>
+        </a:solidFill>
+        <a:latin typeface="+mn-lt"/>
+        <a:ea typeface="+mn-ea"/>
+        <a:cs typeface="+mn-cs"/>
+      </a:defRPr>
+    </a:lvl2pPr>
+    <a:lvl3pPr marL="914400" algn="l" defTabSz="457200" rtl="0" eaLnBrk="1" latinLnBrk="0" hangingPunct="1">
+      <a:defRPr sz="1200" kern="1200">
+        <a:solidFill>
+          <a:schemeClr val="tx1"/>
+        </a:solidFill>
+        <a:latin typeface="+mn-lt"/>
+        <a:ea typeface="+mn-ea"/>
+        <a:cs typeface="+mn-cs"/>
+      </a:defRPr>
+    </a:lvl3pPr>
+    <a:lvl4pPr marL="1371600" algn="l" defTabSz="457200" rtl="0" eaLnBrk="1" latinLnBrk="0" hangingPunct="1">
+      <a:defRPr sz="1200" kern="1200">
+        <a:solidFill>
+          <a:schemeClr val="tx1"/>
+        </a:solidFill>
+        <a:latin typeface="+mn-lt"/>
+        <a:ea typeface="+mn-ea"/>
+        <a:cs typeface="+mn-cs"/>
+      </a:defRPr>
+    </a:lvl4pPr>
+    <a:lvl5pPr marL="1828800" algn="l" defTabSz="457200" rtl="0" eaLnBrk="1" latinLnBrk="0" hangingPunct="1">
+      <a:defRPr sz="1200" kern="1200">
+        <a:solidFill>
+          <a:schemeClr val="tx1"/>
+        </a:solidFill>
+        <a:latin typeface="+mn-lt"/>
+        <a:ea typeface="+mn-ea"/>
+        <a:cs typeface="+mn-cs"/>
+      </a:defRPr>
+    </a:lvl5pPr>
+    <a:lvl6pPr marL="2286000" algn="l" defTabSz="457200" rtl="0" eaLnBrk="1" latinLnBrk="0" hangingPunct="1">
+      <a:defRPr sz="1200" kern="1200">
+        <a:solidFill>
+          <a:schemeClr val="tx1"/>
+        </a:solidFill>
+        <a:latin typeface="+mn-lt"/>
+        <a:ea typeface="+mn-ea"/>
+        <a:cs typeface="+mn-cs"/>
+      </a:defRPr>
+    </a:lvl6pPr>
+    <a:lvl7pPr marL="2743200" algn="l" defTabSz="457200" rtl="0" eaLnBrk="1" latinLnBrk="0" hangingPunct="1">
+      <a:defRPr sz="1200" kern="1200">
+        <a:solidFill>
+          <a:schemeClr val="tx1"/>
+        </a:solidFill>
+        <a:latin typeface="+mn-lt"/>
+        <a:ea typeface="+mn-ea"/>
+        <a:cs typeface="+mn-cs"/>
+      </a:defRPr>
+    </a:lvl7pPr>
+    <a:lvl8pPr marL="3200400" algn="l" defTabSz="457200" rtl="0" eaLnBrk="1" latinLnBrk="0" hangingPunct="1">
+      <a:defRPr sz="1200" kern="1200">
+        <a:solidFill>
+          <a:schemeClr val="tx1"/>
+        </a:solidFill>
+        <a:latin typeface="+mn-lt"/>
+        <a:ea typeface="+mn-ea"/>
+        <a:cs typeface="+mn-cs"/>
+      </a:defRPr>
+    </a:lvl8pPr>
+    <a:lvl9pPr marL="3657600" algn="l" defTabSz="457200" rtl="0" eaLnBrk="1" latinLnBrk="0" hangingPunct="1">
+      <a:defRPr sz="1200" kern="1200">
+        <a:solidFill>
+          <a:schemeClr val="tx1"/>
+        </a:solidFill>
+        <a:latin typeface="+mn-lt"/>
+        <a:ea typeface="+mn-ea"/>
+        <a:cs typeface="+mn-cs"/>
+      </a:defRPr>
+    </a:lvl9pPr>
+  </p:notesStyle>
+</p:notesMaster>
+</file>
+
+<file path=ppt/notesSlides/notesSlide1.xml><?xml version="1.0" encoding="utf-8"?>
+<p:notes xmlns:a="http://schemas.openxmlformats.org/drawingml/2006/main" xmlns:p="http://schemas.openxmlformats.org/presentationml/2006/main" xmlns:r="http://schemas.openxmlformats.org/officeDocument/2006/relationships">
+  <p:cSld>
+    <p:spTree>
+      <p:nvGrpSpPr>
+        <p:cNvPr id="1" name=""/>
+        <p:cNvGrpSpPr/>
+        <p:nvPr/>
+      </p:nvGrpSpPr>
+      <p:grpSpPr>
+        <a:xfrm>
+          <a:off x="0" y="0"/>
+          <a:ext cx="0" cy="0"/>
+          <a:chOff x="0" y="0"/>
+          <a:chExt cx="0" cy="0"/>
+        </a:xfrm>
+      </p:grpSpPr>
+      <p:sp>
+        <p:nvSpPr>
+          <p:cNvPr id="2" name="Slide Image Placeholder 1"/>
+          <p:cNvSpPr>
+            <a:spLocks noGrp="1"/>
+          </p:cNvSpPr>
+          <p:nvPr>
+            <p:ph type="sldImg" idx="2"/>
+          </p:nvPr>
+        </p:nvSpPr>
+        <p:spPr/>
+      </p:sp>
+      <p:sp>
+        <p:nvSpPr>
+          <p:cNvPr id="3" name="Notes Placeholder 2"/>
+          <p:cNvSpPr>
+            <a:spLocks noGrp="1"/>
+          </p:cNvSpPr>
+          <p:nvPr>
+            <p:ph type="body" idx="3" sz="quarter"/>
+          </p:nvPr>
+        </p:nvSpPr>
+        <p:spPr/>
+        <p:txBody>
+          <a:bodyPr/>
+          <a:lstStyle/>
+          <a:p>
+            <a:r>
+              <a:rPr sz="1200">
+                <a:latin typeface="Calibri"/>
+              </a:rPr>
+              <a:t>Blocks on every desk. Everything today runs a motor at up to full power and none of it should touch the floor.</a:t>
+            </a:r>
+          </a:p>
+          <a:p>
+            <a:r>
+              <a:rPr sz="1200">
+                <a:latin typeface="Calibri"/>
+              </a:rPr>
+              <a:t>Have a multimeter to hand for the voltage column in the first activity.</a:t>
+            </a:r>
+          </a:p>
+        </p:txBody>
+      </p:sp>
+      <p:sp>
+        <p:nvSpPr>
+          <p:cNvPr id="4" name="Slide Number Placeholder 3"/>
+          <p:cNvSpPr>
+            <a:spLocks noGrp="1"/>
+          </p:cNvSpPr>
+          <p:nvPr>
+            <p:ph type="sldNum" idx="5" sz="quarter"/>
+          </p:nvPr>
+        </p:nvSpPr>
+        <p:spPr/>
+      </p:sp>
+    </p:spTree>
+  </p:cSld>
+  <p:clrMapOvr>
+    <a:masterClrMapping/>
+  </p:clrMapOvr>
+</p:notes>
+</file>
+
+<file path=ppt/notesSlides/notesSlide10.xml><?xml version="1.0" encoding="utf-8"?>
+<p:notes xmlns:a="http://schemas.openxmlformats.org/drawingml/2006/main" xmlns:p="http://schemas.openxmlformats.org/presentationml/2006/main" xmlns:r="http://schemas.openxmlformats.org/officeDocument/2006/relationships">
+  <p:cSld>
+    <p:spTree>
+      <p:nvGrpSpPr>
+        <p:cNvPr id="1" name=""/>
+        <p:cNvGrpSpPr/>
+        <p:nvPr/>
+      </p:nvGrpSpPr>
+      <p:grpSpPr>
+        <a:xfrm>
+          <a:off x="0" y="0"/>
+          <a:ext cx="0" cy="0"/>
+          <a:chOff x="0" y="0"/>
+          <a:chExt cx="0" cy="0"/>
+        </a:xfrm>
+      </p:grpSpPr>
+      <p:sp>
+        <p:nvSpPr>
+          <p:cNvPr id="2" name="Slide Image Placeholder 1"/>
+          <p:cNvSpPr>
+            <a:spLocks noGrp="1"/>
+          </p:cNvSpPr>
+          <p:nvPr>
+            <p:ph type="sldImg" idx="2"/>
+          </p:nvPr>
+        </p:nvSpPr>
+        <p:spPr/>
+      </p:sp>
+      <p:sp>
+        <p:nvSpPr>
+          <p:cNvPr id="3" name="Notes Placeholder 2"/>
+          <p:cNvSpPr>
+            <a:spLocks noGrp="1"/>
+          </p:cNvSpPr>
+          <p:nvPr>
+            <p:ph type="body" idx="3" sz="quarter"/>
+          </p:nvPr>
+        </p:nvSpPr>
+        <p:spPr/>
+        <p:txBody>
+          <a:bodyPr/>
+          <a:lstStyle/>
+          <a:p>
+            <a:r>
+              <a:rPr sz="1200">
+                <a:latin typeface="Calibri"/>
+              </a:rPr>
+              <a:t>Four switches, and only the two diagonal pairs are useful. Trace each path with a finger on the projected slide.</a:t>
+            </a:r>
+          </a:p>
+          <a:p>
+            <a:r>
+              <a:rPr sz="1200">
+                <a:latin typeface="Calibri"/>
+              </a:rPr>
+              <a:t>Ask what happens if you close both switches on one side. Somebody will work out that it shorts the supply - which is exactly why the driver chip will not let you.</a:t>
+            </a:r>
+          </a:p>
+          <a:p>
+            <a:r>
+              <a:rPr sz="1200">
+                <a:latin typeface="Calibri"/>
+              </a:rPr>
+              <a:t>Forward and reverse are the same circuit with the current running the other way. That is the whole trick, and it is why direction costs nothing extra in the program.</a:t>
+            </a:r>
+          </a:p>
+          <a:p>
+            <a:r>
+              <a:rPr sz="1200">
+                <a:latin typeface="Calibri"/>
+              </a:rPr>
+              <a:t>Brake and coast are worth ten seconds each here; they come back properly in the advanced course.</a:t>
+            </a:r>
+          </a:p>
+        </p:txBody>
+      </p:sp>
+      <p:sp>
+        <p:nvSpPr>
+          <p:cNvPr id="4" name="Slide Number Placeholder 3"/>
+          <p:cNvSpPr>
+            <a:spLocks noGrp="1"/>
+          </p:cNvSpPr>
+          <p:nvPr>
+            <p:ph type="sldNum" idx="5" sz="quarter"/>
+          </p:nvPr>
+        </p:nvSpPr>
+        <p:spPr/>
+      </p:sp>
+    </p:spTree>
+  </p:cSld>
+  <p:clrMapOvr>
+    <a:masterClrMapping/>
+  </p:clrMapOvr>
+</p:notes>
+</file>
+
+<file path=ppt/notesSlides/notesSlide11.xml><?xml version="1.0" encoding="utf-8"?>
+<p:notes xmlns:a="http://schemas.openxmlformats.org/drawingml/2006/main" xmlns:p="http://schemas.openxmlformats.org/presentationml/2006/main" xmlns:r="http://schemas.openxmlformats.org/officeDocument/2006/relationships">
+  <p:cSld>
+    <p:spTree>
+      <p:nvGrpSpPr>
+        <p:cNvPr id="1" name=""/>
+        <p:cNvGrpSpPr/>
+        <p:nvPr/>
+      </p:nvGrpSpPr>
+      <p:grpSpPr>
+        <a:xfrm>
+          <a:off x="0" y="0"/>
+          <a:ext cx="0" cy="0"/>
+          <a:chOff x="0" y="0"/>
+          <a:chExt cx="0" cy="0"/>
+        </a:xfrm>
+      </p:grpSpPr>
+      <p:sp>
+        <p:nvSpPr>
+          <p:cNvPr id="2" name="Slide Image Placeholder 1"/>
+          <p:cNvSpPr>
+            <a:spLocks noGrp="1"/>
+          </p:cNvSpPr>
+          <p:nvPr>
+            <p:ph type="sldImg" idx="2"/>
+          </p:nvPr>
+        </p:nvSpPr>
+        <p:spPr/>
+      </p:sp>
+      <p:sp>
+        <p:nvSpPr>
+          <p:cNvPr id="3" name="Notes Placeholder 2"/>
+          <p:cNvSpPr>
+            <a:spLocks noGrp="1"/>
+          </p:cNvSpPr>
+          <p:nvPr>
+            <p:ph type="body" idx="3" sz="quarter"/>
+          </p:nvPr>
+        </p:nvSpPr>
+        <p:spPr/>
+        <p:txBody>
+          <a:bodyPr/>
+          <a:lstStyle/>
+          <a:p>
+            <a:r>
+              <a:rPr sz="1200">
+                <a:latin typeface="Calibri"/>
+              </a:rPr>
+              <a:t>Both columns describe the same H-bridge. What changes is what happens during the off part of each cycle.</a:t>
+            </a:r>
+          </a:p>
+          <a:p>
+            <a:r>
+              <a:rPr sz="1200">
+                <a:latin typeface="Calibri"/>
+              </a:rPr>
+              <a:t>Sign-magnitude alternates driven and coast. Hybrid alternates driven and brake, which actively pulls the current down.</a:t>
+            </a:r>
+          </a:p>
+          <a:p>
+            <a:r>
+              <a:rPr sz="1200">
+                <a:latin typeface="Calibri"/>
+              </a:rPr>
+              <a:t>The practical consequence: hybrid holds the speed you asked for when the load changes. They will feel this in the activity.</a:t>
+            </a:r>
+          </a:p>
+          <a:p>
+            <a:r>
+              <a:rPr sz="1200">
+                <a:latin typeface="Calibri"/>
+              </a:rPr>
+              <a:t>Sign-magnitude is not wrong. It is simpler to read, and that is why the beginner programs use it.</a:t>
+            </a:r>
+          </a:p>
+        </p:txBody>
+      </p:sp>
+      <p:sp>
+        <p:nvSpPr>
+          <p:cNvPr id="4" name="Slide Number Placeholder 3"/>
+          <p:cNvSpPr>
+            <a:spLocks noGrp="1"/>
+          </p:cNvSpPr>
+          <p:nvPr>
+            <p:ph type="sldNum" idx="5" sz="quarter"/>
+          </p:nvPr>
+        </p:nvSpPr>
+        <p:spPr/>
+      </p:sp>
+    </p:spTree>
+  </p:cSld>
+  <p:clrMapOvr>
+    <a:masterClrMapping/>
+  </p:clrMapOvr>
+</p:notes>
+</file>
+
+<file path=ppt/notesSlides/notesSlide12.xml><?xml version="1.0" encoding="utf-8"?>
+<p:notes xmlns:a="http://schemas.openxmlformats.org/drawingml/2006/main" xmlns:p="http://schemas.openxmlformats.org/presentationml/2006/main" xmlns:r="http://schemas.openxmlformats.org/officeDocument/2006/relationships">
+  <p:cSld>
+    <p:spTree>
+      <p:nvGrpSpPr>
+        <p:cNvPr id="1" name=""/>
+        <p:cNvGrpSpPr/>
+        <p:nvPr/>
+      </p:nvGrpSpPr>
+      <p:grpSpPr>
+        <a:xfrm>
+          <a:off x="0" y="0"/>
+          <a:ext cx="0" cy="0"/>
+          <a:chOff x="0" y="0"/>
+          <a:chExt cx="0" cy="0"/>
+        </a:xfrm>
+      </p:grpSpPr>
+      <p:sp>
+        <p:nvSpPr>
+          <p:cNvPr id="2" name="Slide Image Placeholder 1"/>
+          <p:cNvSpPr>
+            <a:spLocks noGrp="1"/>
+          </p:cNvSpPr>
+          <p:nvPr>
+            <p:ph type="sldImg" idx="2"/>
+          </p:nvPr>
+        </p:nvSpPr>
+        <p:spPr/>
+      </p:sp>
+      <p:sp>
+        <p:nvSpPr>
+          <p:cNvPr id="3" name="Notes Placeholder 2"/>
+          <p:cNvSpPr>
+            <a:spLocks noGrp="1"/>
+          </p:cNvSpPr>
+          <p:nvPr>
+            <p:ph type="body" idx="3" sz="quarter"/>
+          </p:nvPr>
+        </p:nvSpPr>
+        <p:spPr/>
+        <p:txBody>
+          <a:bodyPr/>
+          <a:lstStyle/>
+          <a:p>
+            <a:r>
+              <a:rPr sz="1200">
+                <a:latin typeface="Calibri"/>
+              </a:rPr>
+              <a:t>(Continued from the previous slide - the same notes apply.)</a:t>
+            </a:r>
+          </a:p>
+          <a:p/>
+          <a:p>
+            <a:r>
+              <a:rPr sz="1200">
+                <a:latin typeface="Calibri"/>
+              </a:rPr>
+              <a:t>Both columns describe the same H-bridge. What changes is what happens during the off part of each cycle.</a:t>
+            </a:r>
+          </a:p>
+          <a:p>
+            <a:r>
+              <a:rPr sz="1200">
+                <a:latin typeface="Calibri"/>
+              </a:rPr>
+              <a:t>Sign-magnitude alternates driven and coast. Hybrid alternates driven and brake, which actively pulls the current down.</a:t>
+            </a:r>
+          </a:p>
+          <a:p>
+            <a:r>
+              <a:rPr sz="1200">
+                <a:latin typeface="Calibri"/>
+              </a:rPr>
+              <a:t>The practical consequence: hybrid holds the speed you asked for when the load changes. They will feel this in the activity.</a:t>
+            </a:r>
+          </a:p>
+          <a:p>
+            <a:r>
+              <a:rPr sz="1200">
+                <a:latin typeface="Calibri"/>
+              </a:rPr>
+              <a:t>Sign-magnitude is not wrong. It is simpler to read, and that is why the beginner programs use it.</a:t>
+            </a:r>
+          </a:p>
+        </p:txBody>
+      </p:sp>
+      <p:sp>
+        <p:nvSpPr>
+          <p:cNvPr id="4" name="Slide Number Placeholder 3"/>
+          <p:cNvSpPr>
+            <a:spLocks noGrp="1"/>
+          </p:cNvSpPr>
+          <p:nvPr>
+            <p:ph type="sldNum" idx="5" sz="quarter"/>
+          </p:nvPr>
+        </p:nvSpPr>
+        <p:spPr/>
+      </p:sp>
+    </p:spTree>
+  </p:cSld>
+  <p:clrMapOvr>
+    <a:masterClrMapping/>
+  </p:clrMapOvr>
+</p:notes>
+</file>
+
+<file path=ppt/notesSlides/notesSlide13.xml><?xml version="1.0" encoding="utf-8"?>
+<p:notes xmlns:a="http://schemas.openxmlformats.org/drawingml/2006/main" xmlns:p="http://schemas.openxmlformats.org/presentationml/2006/main" xmlns:r="http://schemas.openxmlformats.org/officeDocument/2006/relationships">
+  <p:cSld>
+    <p:spTree>
+      <p:nvGrpSpPr>
+        <p:cNvPr id="1" name=""/>
+        <p:cNvGrpSpPr/>
+        <p:nvPr/>
+      </p:nvGrpSpPr>
+      <p:grpSpPr>
+        <a:xfrm>
+          <a:off x="0" y="0"/>
+          <a:ext cx="0" cy="0"/>
+          <a:chOff x="0" y="0"/>
+          <a:chExt cx="0" cy="0"/>
+        </a:xfrm>
+      </p:grpSpPr>
+      <p:sp>
+        <p:nvSpPr>
+          <p:cNvPr id="2" name="Slide Image Placeholder 1"/>
+          <p:cNvSpPr>
+            <a:spLocks noGrp="1"/>
+          </p:cNvSpPr>
+          <p:nvPr>
+            <p:ph type="sldImg" idx="2"/>
+          </p:nvPr>
+        </p:nvSpPr>
+        <p:spPr/>
+      </p:sp>
+      <p:sp>
+        <p:nvSpPr>
+          <p:cNvPr id="3" name="Notes Placeholder 2"/>
+          <p:cNvSpPr>
+            <a:spLocks noGrp="1"/>
+          </p:cNvSpPr>
+          <p:nvPr>
+            <p:ph type="body" idx="3" sz="quarter"/>
+          </p:nvPr>
+        </p:nvSpPr>
+        <p:spPr/>
+        <p:txBody>
+          <a:bodyPr/>
+          <a:lstStyle/>
+          <a:p>
+            <a:r>
+              <a:rPr sz="1200">
+                <a:latin typeface="Calibri"/>
+              </a:rPr>
+              <a:t>Walk the three cases on the right-hand notes before reading the code.</a:t>
+            </a:r>
+          </a:p>
+          <a:p>
+            <a:r>
+              <a:rPr sz="1200">
+                <a:latin typeface="Calibri"/>
+              </a:rPr>
+              <a:t>The guard clause is the whole slide. Without it, duty zero puts both pins high, and both pins high is a brake.</a:t>
+            </a:r>
+          </a:p>
+          <a:p>
+            <a:r>
+              <a:rPr sz="1200">
+                <a:latin typeface="Calibri"/>
+              </a:rPr>
+              <a:t>Ask what that feels like: a vehicle that will not coast and cannot be pushed by hand when switched on. That is a real symptom somebody would report as a mechanical fault.</a:t>
+            </a:r>
+          </a:p>
+          <a:p>
+            <a:r>
+              <a:rPr sz="1200">
+                <a:latin typeface="Calibri"/>
+              </a:rPr>
+              <a:t>This is a good example of a bug that hides in the ONE case the arithmetic happens to handle differently.</a:t>
+            </a:r>
+          </a:p>
+        </p:txBody>
+      </p:sp>
+      <p:sp>
+        <p:nvSpPr>
+          <p:cNvPr id="4" name="Slide Number Placeholder 3"/>
+          <p:cNvSpPr>
+            <a:spLocks noGrp="1"/>
+          </p:cNvSpPr>
+          <p:nvPr>
+            <p:ph type="sldNum" idx="5" sz="quarter"/>
+          </p:nvPr>
+        </p:nvSpPr>
+        <p:spPr/>
+      </p:sp>
+    </p:spTree>
+  </p:cSld>
+  <p:clrMapOvr>
+    <a:masterClrMapping/>
+  </p:clrMapOvr>
+</p:notes>
+</file>
+
+<file path=ppt/notesSlides/notesSlide14.xml><?xml version="1.0" encoding="utf-8"?>
+<p:notes xmlns:a="http://schemas.openxmlformats.org/drawingml/2006/main" xmlns:p="http://schemas.openxmlformats.org/presentationml/2006/main" xmlns:r="http://schemas.openxmlformats.org/officeDocument/2006/relationships">
+  <p:cSld>
+    <p:spTree>
+      <p:nvGrpSpPr>
+        <p:cNvPr id="1" name=""/>
+        <p:cNvGrpSpPr/>
+        <p:nvPr/>
+      </p:nvGrpSpPr>
+      <p:grpSpPr>
+        <a:xfrm>
+          <a:off x="0" y="0"/>
+          <a:ext cx="0" cy="0"/>
+          <a:chOff x="0" y="0"/>
+          <a:chExt cx="0" cy="0"/>
+        </a:xfrm>
+      </p:grpSpPr>
+      <p:sp>
+        <p:nvSpPr>
+          <p:cNvPr id="2" name="Slide Image Placeholder 1"/>
+          <p:cNvSpPr>
+            <a:spLocks noGrp="1"/>
+          </p:cNvSpPr>
+          <p:nvPr>
+            <p:ph type="sldImg" idx="2"/>
+          </p:nvPr>
+        </p:nvSpPr>
+        <p:spPr/>
+      </p:sp>
+      <p:sp>
+        <p:nvSpPr>
+          <p:cNvPr id="3" name="Notes Placeholder 2"/>
+          <p:cNvSpPr>
+            <a:spLocks noGrp="1"/>
+          </p:cNvSpPr>
+          <p:nvPr>
+            <p:ph type="body" idx="3" sz="quarter"/>
+          </p:nvPr>
+        </p:nvSpPr>
+        <p:spPr/>
+        <p:txBody>
+          <a:bodyPr/>
+          <a:lstStyle/>
+          <a:p>
+            <a:r>
+              <a:rPr sz="1200">
+                <a:latin typeface="Calibri"/>
+              </a:rPr>
+              <a:t>Set the scene: this bug lived for a year in shipping code.</a:t>
+            </a:r>
+          </a:p>
+          <a:p>
+            <a:r>
+              <a:rPr sz="1200">
+                <a:latin typeface="Calibri"/>
+              </a:rPr>
+              <a:t>Do the arithmetic out loud. Gap of 1, factor of 0.5, gives 0.5, which truncates to 0 - so current never changes again.</a:t>
+            </a:r>
+          </a:p>
+          <a:p>
+            <a:r>
+              <a:rPr sz="1200">
+                <a:latin typeface="Calibri"/>
+              </a:rPr>
+              <a:t>The ramp stalls one count short, forever. On a 1024-count scale that is 0.1%, which nobody can see on a wheel.</a:t>
+            </a:r>
+          </a:p>
+          <a:p>
+            <a:r>
+              <a:rPr sz="1200">
+                <a:latin typeface="Calibri"/>
+              </a:rPr>
+              <a:t>Ask why it still matters. Because a value that never reaches its target breaks anything that tests for equality, and because a bug you cannot see is worse than one you can.</a:t>
+            </a:r>
+          </a:p>
+          <a:p>
+            <a:r>
+              <a:rPr sz="1200">
+                <a:latin typeface="Calibri"/>
+              </a:rPr>
+              <a:t>The fix is one line: if the step rounds to nothing, take one count.</a:t>
+            </a:r>
+          </a:p>
+        </p:txBody>
+      </p:sp>
+      <p:sp>
+        <p:nvSpPr>
+          <p:cNvPr id="4" name="Slide Number Placeholder 3"/>
+          <p:cNvSpPr>
+            <a:spLocks noGrp="1"/>
+          </p:cNvSpPr>
+          <p:nvPr>
+            <p:ph type="sldNum" idx="5" sz="quarter"/>
+          </p:nvPr>
+        </p:nvSpPr>
+        <p:spPr/>
+      </p:sp>
+    </p:spTree>
+  </p:cSld>
+  <p:clrMapOvr>
+    <a:masterClrMapping/>
+  </p:clrMapOvr>
+</p:notes>
+</file>
+
+<file path=ppt/notesSlides/notesSlide15.xml><?xml version="1.0" encoding="utf-8"?>
+<p:notes xmlns:a="http://schemas.openxmlformats.org/drawingml/2006/main" xmlns:p="http://schemas.openxmlformats.org/presentationml/2006/main" xmlns:r="http://schemas.openxmlformats.org/officeDocument/2006/relationships">
+  <p:cSld>
+    <p:spTree>
+      <p:nvGrpSpPr>
+        <p:cNvPr id="1" name=""/>
+        <p:cNvGrpSpPr/>
+        <p:nvPr/>
+      </p:nvGrpSpPr>
+      <p:grpSpPr>
+        <a:xfrm>
+          <a:off x="0" y="0"/>
+          <a:ext cx="0" cy="0"/>
+          <a:chOff x="0" y="0"/>
+          <a:chExt cx="0" cy="0"/>
+        </a:xfrm>
+      </p:grpSpPr>
+      <p:sp>
+        <p:nvSpPr>
+          <p:cNvPr id="2" name="Slide Image Placeholder 1"/>
+          <p:cNvSpPr>
+            <a:spLocks noGrp="1"/>
+          </p:cNvSpPr>
+          <p:nvPr>
+            <p:ph type="sldImg" idx="2"/>
+          </p:nvPr>
+        </p:nvSpPr>
+        <p:spPr/>
+      </p:sp>
+      <p:sp>
+        <p:nvSpPr>
+          <p:cNvPr id="3" name="Notes Placeholder 2"/>
+          <p:cNvSpPr>
+            <a:spLocks noGrp="1"/>
+          </p:cNvSpPr>
+          <p:nvPr>
+            <p:ph type="body" idx="3" sz="quarter"/>
+          </p:nvPr>
+        </p:nvSpPr>
+        <p:spPr/>
+        <p:txBody>
+          <a:bodyPr/>
+          <a:lstStyle/>
+          <a:p>
+            <a:r>
+              <a:rPr sz="1200">
+                <a:latin typeface="Calibri"/>
+              </a:rPr>
+              <a:t>Twenty seconds. Second activity.</a:t>
+            </a:r>
+          </a:p>
+        </p:txBody>
+      </p:sp>
+      <p:sp>
+        <p:nvSpPr>
+          <p:cNvPr id="4" name="Slide Number Placeholder 3"/>
+          <p:cNvSpPr>
+            <a:spLocks noGrp="1"/>
+          </p:cNvSpPr>
+          <p:nvPr>
+            <p:ph type="sldNum" idx="5" sz="quarter"/>
+          </p:nvPr>
+        </p:nvSpPr>
+        <p:spPr/>
+      </p:sp>
+    </p:spTree>
+  </p:cSld>
+  <p:clrMapOvr>
+    <a:masterClrMapping/>
+  </p:clrMapOvr>
+</p:notes>
+</file>
+
+<file path=ppt/notesSlides/notesSlide16.xml><?xml version="1.0" encoding="utf-8"?>
+<p:notes xmlns:a="http://schemas.openxmlformats.org/drawingml/2006/main" xmlns:p="http://schemas.openxmlformats.org/presentationml/2006/main" xmlns:r="http://schemas.openxmlformats.org/officeDocument/2006/relationships">
+  <p:cSld>
+    <p:spTree>
+      <p:nvGrpSpPr>
+        <p:cNvPr id="1" name=""/>
+        <p:cNvGrpSpPr/>
+        <p:nvPr/>
+      </p:nvGrpSpPr>
+      <p:grpSpPr>
+        <a:xfrm>
+          <a:off x="0" y="0"/>
+          <a:ext cx="0" cy="0"/>
+          <a:chOff x="0" y="0"/>
+          <a:chExt cx="0" cy="0"/>
+        </a:xfrm>
+      </p:grpSpPr>
+      <p:sp>
+        <p:nvSpPr>
+          <p:cNvPr id="2" name="Slide Image Placeholder 1"/>
+          <p:cNvSpPr>
+            <a:spLocks noGrp="1"/>
+          </p:cNvSpPr>
+          <p:nvPr>
+            <p:ph type="sldImg" idx="2"/>
+          </p:nvPr>
+        </p:nvSpPr>
+        <p:spPr/>
+      </p:sp>
+      <p:sp>
+        <p:nvSpPr>
+          <p:cNvPr id="3" name="Notes Placeholder 2"/>
+          <p:cNvSpPr>
+            <a:spLocks noGrp="1"/>
+          </p:cNvSpPr>
+          <p:nvPr>
+            <p:ph type="body" idx="3" sz="quarter"/>
+          </p:nvPr>
+        </p:nvSpPr>
+        <p:spPr/>
+        <p:txBody>
+          <a:bodyPr/>
+          <a:lstStyle/>
+          <a:p>
+            <a:r>
+              <a:rPr sz="1200">
+                <a:latin typeface="Calibri"/>
+              </a:rPr>
+              <a:t>Steps 1 and 2 are a feel test. Pinching the tyre gently is the load - warn them to be gentle and to keep fingers clear of the spokes.</a:t>
+            </a:r>
+          </a:p>
+          <a:p>
+            <a:r>
+              <a:rPr sz="1200">
+                <a:latin typeface="Calibri"/>
+              </a:rPr>
+              <a:t>Step 6 recreates the bug deliberately. Watching the printout stop one count short is the memorable part of this lesson.</a:t>
+            </a:r>
+          </a:p>
+          <a:p>
+            <a:r>
+              <a:rPr sz="1200">
+                <a:latin typeface="Calibri"/>
+              </a:rPr>
+              <a:t>Answer to the first question: fast decay actively pulls the winding current down during the off part, so the average tracks the command.</a:t>
+            </a:r>
+          </a:p>
+          <a:p>
+            <a:r>
+              <a:rPr sz="1200">
+                <a:latin typeface="Calibri"/>
+              </a:rPr>
+              <a:t>Answer to the second: a 0.1% error is invisible but it means a value that never reaches its target, and anything comparing for equality never fires.</a:t>
+            </a:r>
+          </a:p>
+        </p:txBody>
+      </p:sp>
+      <p:sp>
+        <p:nvSpPr>
+          <p:cNvPr id="4" name="Slide Number Placeholder 3"/>
+          <p:cNvSpPr>
+            <a:spLocks noGrp="1"/>
+          </p:cNvSpPr>
+          <p:nvPr>
+            <p:ph type="sldNum" idx="5" sz="quarter"/>
+          </p:nvPr>
+        </p:nvSpPr>
+        <p:spPr/>
+      </p:sp>
+    </p:spTree>
+  </p:cSld>
+  <p:clrMapOvr>
+    <a:masterClrMapping/>
+  </p:clrMapOvr>
+</p:notes>
+</file>
+
+<file path=ppt/notesSlides/notesSlide17.xml><?xml version="1.0" encoding="utf-8"?>
+<p:notes xmlns:a="http://schemas.openxmlformats.org/drawingml/2006/main" xmlns:p="http://schemas.openxmlformats.org/presentationml/2006/main" xmlns:r="http://schemas.openxmlformats.org/officeDocument/2006/relationships">
+  <p:cSld>
+    <p:spTree>
+      <p:nvGrpSpPr>
+        <p:cNvPr id="1" name=""/>
+        <p:cNvGrpSpPr/>
+        <p:nvPr/>
+      </p:nvGrpSpPr>
+      <p:grpSpPr>
+        <a:xfrm>
+          <a:off x="0" y="0"/>
+          <a:ext cx="0" cy="0"/>
+          <a:chOff x="0" y="0"/>
+          <a:chExt cx="0" cy="0"/>
+        </a:xfrm>
+      </p:grpSpPr>
+      <p:sp>
+        <p:nvSpPr>
+          <p:cNvPr id="2" name="Slide Image Placeholder 1"/>
+          <p:cNvSpPr>
+            <a:spLocks noGrp="1"/>
+          </p:cNvSpPr>
+          <p:nvPr>
+            <p:ph type="sldImg" idx="2"/>
+          </p:nvPr>
+        </p:nvSpPr>
+        <p:spPr/>
+      </p:sp>
+      <p:sp>
+        <p:nvSpPr>
+          <p:cNvPr id="3" name="Notes Placeholder 2"/>
+          <p:cNvSpPr>
+            <a:spLocks noGrp="1"/>
+          </p:cNvSpPr>
+          <p:nvPr>
+            <p:ph type="body" idx="3" sz="quarter"/>
+          </p:nvPr>
+        </p:nvSpPr>
+        <p:spPr/>
+        <p:txBody>
+          <a:bodyPr/>
+          <a:lstStyle/>
+          <a:p>
+            <a:r>
+              <a:rPr sz="1200">
+                <a:latin typeface="Calibri"/>
+              </a:rPr>
+              <a:t>(Continued from the previous slide - the same notes apply.)</a:t>
+            </a:r>
+          </a:p>
+          <a:p/>
+          <a:p>
+            <a:r>
+              <a:rPr sz="1200">
+                <a:latin typeface="Calibri"/>
+              </a:rPr>
+              <a:t>Steps 1 and 2 are a feel test. Pinching the tyre gently is the load - warn them to be gentle and to keep fingers clear of the spokes.</a:t>
+            </a:r>
+          </a:p>
+          <a:p>
+            <a:r>
+              <a:rPr sz="1200">
+                <a:latin typeface="Calibri"/>
+              </a:rPr>
+              <a:t>Step 6 recreates the bug deliberately. Watching the printout stop one count short is the memorable part of this lesson.</a:t>
+            </a:r>
+          </a:p>
+          <a:p>
+            <a:r>
+              <a:rPr sz="1200">
+                <a:latin typeface="Calibri"/>
+              </a:rPr>
+              <a:t>Answer to the first question: fast decay actively pulls the winding current down during the off part, so the average tracks the command.</a:t>
+            </a:r>
+          </a:p>
+          <a:p>
+            <a:r>
+              <a:rPr sz="1200">
+                <a:latin typeface="Calibri"/>
+              </a:rPr>
+              <a:t>Answer to the second: a 0.1% error is invisible but it means a value that never reaches its target, and anything comparing for equality never fires.</a:t>
+            </a:r>
+          </a:p>
+        </p:txBody>
+      </p:sp>
+      <p:sp>
+        <p:nvSpPr>
+          <p:cNvPr id="4" name="Slide Number Placeholder 3"/>
+          <p:cNvSpPr>
+            <a:spLocks noGrp="1"/>
+          </p:cNvSpPr>
+          <p:nvPr>
+            <p:ph type="sldNum" idx="5" sz="quarter"/>
+          </p:nvPr>
+        </p:nvSpPr>
+        <p:spPr/>
+      </p:sp>
+    </p:spTree>
+  </p:cSld>
+  <p:clrMapOvr>
+    <a:masterClrMapping/>
+  </p:clrMapOvr>
+</p:notes>
+</file>
+
+<file path=ppt/notesSlides/notesSlide18.xml><?xml version="1.0" encoding="utf-8"?>
+<p:notes xmlns:a="http://schemas.openxmlformats.org/drawingml/2006/main" xmlns:p="http://schemas.openxmlformats.org/presentationml/2006/main" xmlns:r="http://schemas.openxmlformats.org/officeDocument/2006/relationships">
+  <p:cSld>
+    <p:spTree>
+      <p:nvGrpSpPr>
+        <p:cNvPr id="1" name=""/>
+        <p:cNvGrpSpPr/>
+        <p:nvPr/>
+      </p:nvGrpSpPr>
+      <p:grpSpPr>
+        <a:xfrm>
+          <a:off x="0" y="0"/>
+          <a:ext cx="0" cy="0"/>
+          <a:chOff x="0" y="0"/>
+          <a:chExt cx="0" cy="0"/>
+        </a:xfrm>
+      </p:grpSpPr>
+      <p:sp>
+        <p:nvSpPr>
+          <p:cNvPr id="2" name="Slide Image Placeholder 1"/>
+          <p:cNvSpPr>
+            <a:spLocks noGrp="1"/>
+          </p:cNvSpPr>
+          <p:nvPr>
+            <p:ph type="sldImg" idx="2"/>
+          </p:nvPr>
+        </p:nvSpPr>
+        <p:spPr/>
+      </p:sp>
+      <p:sp>
+        <p:nvSpPr>
+          <p:cNvPr id="3" name="Notes Placeholder 2"/>
+          <p:cNvSpPr>
+            <a:spLocks noGrp="1"/>
+          </p:cNvSpPr>
+          <p:nvPr>
+            <p:ph type="body" idx="3" sz="quarter"/>
+          </p:nvPr>
+        </p:nvSpPr>
+        <p:spPr/>
+        <p:txBody>
+          <a:bodyPr/>
+          <a:lstStyle/>
+          <a:p>
+            <a:r>
+              <a:rPr sz="1200">
+                <a:latin typeface="Calibri"/>
+              </a:rPr>
+              <a:t>Draw the square wave on the board first, then reveal the slide. It lands better if they have watched it being built.</a:t>
+            </a:r>
+          </a:p>
+          <a:p>
+            <a:r>
+              <a:rPr sz="1200">
+                <a:latin typeface="Calibri"/>
+              </a:rPr>
+              <a:t>The idea to land: the pin is only ever fully on or fully off. Half speed is half the TIME on, not half the voltage.</a:t>
+            </a:r>
+          </a:p>
+          <a:p>
+            <a:r>
+              <a:rPr sz="1200">
+                <a:latin typeface="Calibri"/>
+              </a:rPr>
+              <a:t>Analogy that works: a light switch flicked very fast. Too fast to see flicker, so the room looks half lit.</a:t>
+            </a:r>
+          </a:p>
+          <a:p>
+            <a:r>
+              <a:rPr sz="1200">
+                <a:latin typeface="Calibri"/>
+              </a:rPr>
+              <a:t>Duty cycle is a percentage, which is why the maths lesson and the motor lesson are the same lesson.</a:t>
+            </a:r>
+          </a:p>
+        </p:txBody>
+      </p:sp>
+      <p:sp>
+        <p:nvSpPr>
+          <p:cNvPr id="4" name="Slide Number Placeholder 3"/>
+          <p:cNvSpPr>
+            <a:spLocks noGrp="1"/>
+          </p:cNvSpPr>
+          <p:nvPr>
+            <p:ph type="sldNum" idx="5" sz="quarter"/>
+          </p:nvPr>
+        </p:nvSpPr>
+        <p:spPr/>
+      </p:sp>
+    </p:spTree>
+  </p:cSld>
+  <p:clrMapOvr>
+    <a:masterClrMapping/>
+  </p:clrMapOvr>
+</p:notes>
+</file>
+
+<file path=ppt/notesSlides/notesSlide19.xml><?xml version="1.0" encoding="utf-8"?>
+<p:notes xmlns:a="http://schemas.openxmlformats.org/drawingml/2006/main" xmlns:p="http://schemas.openxmlformats.org/presentationml/2006/main" xmlns:r="http://schemas.openxmlformats.org/officeDocument/2006/relationships">
+  <p:cSld>
+    <p:spTree>
+      <p:nvGrpSpPr>
+        <p:cNvPr id="1" name=""/>
+        <p:cNvGrpSpPr/>
+        <p:nvPr/>
+      </p:nvGrpSpPr>
+      <p:grpSpPr>
+        <a:xfrm>
+          <a:off x="0" y="0"/>
+          <a:ext cx="0" cy="0"/>
+          <a:chOff x="0" y="0"/>
+          <a:chExt cx="0" cy="0"/>
+        </a:xfrm>
+      </p:grpSpPr>
+      <p:sp>
+        <p:nvSpPr>
+          <p:cNvPr id="2" name="Slide Image Placeholder 1"/>
+          <p:cNvSpPr>
+            <a:spLocks noGrp="1"/>
+          </p:cNvSpPr>
+          <p:nvPr>
+            <p:ph type="sldImg" idx="2"/>
+          </p:nvPr>
+        </p:nvSpPr>
+        <p:spPr/>
+      </p:sp>
+      <p:sp>
+        <p:nvSpPr>
+          <p:cNvPr id="3" name="Notes Placeholder 2"/>
+          <p:cNvSpPr>
+            <a:spLocks noGrp="1"/>
+          </p:cNvSpPr>
+          <p:nvPr>
+            <p:ph type="body" idx="3" sz="quarter"/>
+          </p:nvPr>
+        </p:nvSpPr>
+        <p:spPr/>
+        <p:txBody>
+          <a:bodyPr/>
+          <a:lstStyle/>
+          <a:p>
+            <a:r>
+              <a:rPr sz="1200">
+                <a:latin typeface="Calibri"/>
+              </a:rPr>
+              <a:t>Four ideas in ten lines. Take them one at a time.</a:t>
+            </a:r>
+          </a:p>
+          <a:p>
+            <a:r>
+              <a:rPr sz="1200">
+                <a:latin typeface="Calibri"/>
+              </a:rPr>
+              <a:t>The -1 sentinel for a per-axis deadzone gives you a default and an override with no second flag. That is a pattern worth naming.</a:t>
+            </a:r>
+          </a:p>
+          <a:p>
+            <a:r>
+              <a:rPr sz="1200">
+                <a:latin typeface="Calibri"/>
+              </a:rPr>
+              <a:t>lround() rather than a cast, so 0.5 rounds up. Point out that this is the SAME class of bug as the ramp, avoided this time.</a:t>
+            </a:r>
+          </a:p>
+          <a:p>
+            <a:r>
+              <a:rPr sz="1200">
+                <a:latin typeface="Calibri"/>
+              </a:rPr>
+              <a:t>constrain() before map(), because map() does not clamp. Ask what happens if you do it the other way round.</a:t>
+            </a:r>
+          </a:p>
+          <a:p>
+            <a:r>
+              <a:rPr sz="1200">
+                <a:latin typeface="Calibri"/>
+              </a:rPr>
+              <a:t>Sign comes off at the start and goes back on at the end, so the maths in the middle only ever deals with positive numbers.</a:t>
+            </a:r>
+          </a:p>
+        </p:txBody>
+      </p:sp>
+      <p:sp>
+        <p:nvSpPr>
+          <p:cNvPr id="4" name="Slide Number Placeholder 3"/>
+          <p:cNvSpPr>
+            <a:spLocks noGrp="1"/>
+          </p:cNvSpPr>
+          <p:nvPr>
+            <p:ph type="sldNum" idx="5" sz="quarter"/>
+          </p:nvPr>
+        </p:nvSpPr>
+        <p:spPr/>
+      </p:sp>
+    </p:spTree>
+  </p:cSld>
+  <p:clrMapOvr>
+    <a:masterClrMapping/>
+  </p:clrMapOvr>
+</p:notes>
+</file>
+
+<file path=ppt/notesSlides/notesSlide2.xml><?xml version="1.0" encoding="utf-8"?>
+<p:notes xmlns:a="http://schemas.openxmlformats.org/drawingml/2006/main" xmlns:p="http://schemas.openxmlformats.org/presentationml/2006/main" xmlns:r="http://schemas.openxmlformats.org/officeDocument/2006/relationships">
+  <p:cSld>
+    <p:spTree>
+      <p:nvGrpSpPr>
+        <p:cNvPr id="1" name=""/>
+        <p:cNvGrpSpPr/>
+        <p:nvPr/>
+      </p:nvGrpSpPr>
+      <p:grpSpPr>
+        <a:xfrm>
+          <a:off x="0" y="0"/>
+          <a:ext cx="0" cy="0"/>
+          <a:chOff x="0" y="0"/>
+          <a:chExt cx="0" cy="0"/>
+        </a:xfrm>
+      </p:grpSpPr>
+      <p:sp>
+        <p:nvSpPr>
+          <p:cNvPr id="2" name="Slide Image Placeholder 1"/>
+          <p:cNvSpPr>
+            <a:spLocks noGrp="1"/>
+          </p:cNvSpPr>
+          <p:nvPr>
+            <p:ph type="sldImg" idx="2"/>
+          </p:nvPr>
+        </p:nvSpPr>
+        <p:spPr/>
+      </p:sp>
+      <p:sp>
+        <p:nvSpPr>
+          <p:cNvPr id="3" name="Notes Placeholder 2"/>
+          <p:cNvSpPr>
+            <a:spLocks noGrp="1"/>
+          </p:cNvSpPr>
+          <p:nvPr>
+            <p:ph type="body" idx="3" sz="quarter"/>
+          </p:nvPr>
+        </p:nvSpPr>
+        <p:spPr/>
+        <p:txBody>
+          <a:bodyPr/>
+          <a:lstStyle/>
+          <a:p>
+            <a:r>
+              <a:rPr sz="1200">
+                <a:latin typeface="Calibri"/>
+              </a:rPr>
+              <a:t>Objective four - spotting the truncation bug - is the one they will remember. It is a real bug from a real program.</a:t>
+            </a:r>
+          </a:p>
+        </p:txBody>
+      </p:sp>
+      <p:sp>
+        <p:nvSpPr>
+          <p:cNvPr id="4" name="Slide Number Placeholder 3"/>
+          <p:cNvSpPr>
+            <a:spLocks noGrp="1"/>
+          </p:cNvSpPr>
+          <p:nvPr>
+            <p:ph type="sldNum" idx="5" sz="quarter"/>
+          </p:nvPr>
+        </p:nvSpPr>
+        <p:spPr/>
+      </p:sp>
+    </p:spTree>
+  </p:cSld>
+  <p:clrMapOvr>
+    <a:masterClrMapping/>
+  </p:clrMapOvr>
+</p:notes>
+</file>
+
+<file path=ppt/notesSlides/notesSlide20.xml><?xml version="1.0" encoding="utf-8"?>
+<p:notes xmlns:a="http://schemas.openxmlformats.org/drawingml/2006/main" xmlns:p="http://schemas.openxmlformats.org/presentationml/2006/main" xmlns:r="http://schemas.openxmlformats.org/officeDocument/2006/relationships">
+  <p:cSld>
+    <p:spTree>
+      <p:nvGrpSpPr>
+        <p:cNvPr id="1" name=""/>
+        <p:cNvGrpSpPr/>
+        <p:nvPr/>
+      </p:nvGrpSpPr>
+      <p:grpSpPr>
+        <a:xfrm>
+          <a:off x="0" y="0"/>
+          <a:ext cx="0" cy="0"/>
+          <a:chOff x="0" y="0"/>
+          <a:chExt cx="0" cy="0"/>
+        </a:xfrm>
+      </p:grpSpPr>
+      <p:sp>
+        <p:nvSpPr>
+          <p:cNvPr id="2" name="Slide Image Placeholder 1"/>
+          <p:cNvSpPr>
+            <a:spLocks noGrp="1"/>
+          </p:cNvSpPr>
+          <p:nvPr>
+            <p:ph type="sldImg" idx="2"/>
+          </p:nvPr>
+        </p:nvSpPr>
+        <p:spPr/>
+      </p:sp>
+      <p:sp>
+        <p:nvSpPr>
+          <p:cNvPr id="3" name="Notes Placeholder 2"/>
+          <p:cNvSpPr>
+            <a:spLocks noGrp="1"/>
+          </p:cNvSpPr>
+          <p:nvPr>
+            <p:ph type="body" idx="3" sz="quarter"/>
+          </p:nvPr>
+        </p:nvSpPr>
+        <p:spPr/>
+        <p:txBody>
+          <a:bodyPr/>
+          <a:lstStyle/>
+          <a:p>
+            <a:r>
+              <a:rPr sz="1200">
+                <a:latin typeface="Calibri"/>
+              </a:rPr>
+              <a:t>The left column is a design argument, not a feature list. Only the steering scale changes between the modes.</a:t>
+            </a:r>
+          </a:p>
+          <a:p>
+            <a:r>
+              <a:rPr sz="1200">
+                <a:latin typeface="Calibri"/>
+              </a:rPr>
+              <a:t>The reasoning is worth hearing: a global speed cap makes a vehicle feel broken, a steering cap makes it feel controllable. Ask whether they agree.</a:t>
+            </a:r>
+          </a:p>
+          <a:p>
+            <a:r>
+              <a:rPr sz="1200">
+                <a:latin typeface="Calibri"/>
+              </a:rPr>
+              <a:t>The four-servo scheme surprises people. One stick, four servos, each owning one direction and centred otherwise.</a:t>
+            </a:r>
+          </a:p>
+          <a:p>
+            <a:r>
+              <a:rPr sz="1200">
+                <a:latin typeface="Calibri"/>
+              </a:rPr>
+              <a:t>1.0 to 2.0 ms is the corrected travel. Point back to the change log in Lesson 1 - the old range could drive a servo into its stops.</a:t>
+            </a:r>
+          </a:p>
+        </p:txBody>
+      </p:sp>
+      <p:sp>
+        <p:nvSpPr>
+          <p:cNvPr id="4" name="Slide Number Placeholder 3"/>
+          <p:cNvSpPr>
+            <a:spLocks noGrp="1"/>
+          </p:cNvSpPr>
+          <p:nvPr>
+            <p:ph type="sldNum" idx="5" sz="quarter"/>
+          </p:nvPr>
+        </p:nvSpPr>
+        <p:spPr/>
+      </p:sp>
+    </p:spTree>
+  </p:cSld>
+  <p:clrMapOvr>
+    <a:masterClrMapping/>
+  </p:clrMapOvr>
+</p:notes>
+</file>
+
+<file path=ppt/notesSlides/notesSlide21.xml><?xml version="1.0" encoding="utf-8"?>
+<p:notes xmlns:a="http://schemas.openxmlformats.org/drawingml/2006/main" xmlns:p="http://schemas.openxmlformats.org/presentationml/2006/main" xmlns:r="http://schemas.openxmlformats.org/officeDocument/2006/relationships">
+  <p:cSld>
+    <p:spTree>
+      <p:nvGrpSpPr>
+        <p:cNvPr id="1" name=""/>
+        <p:cNvGrpSpPr/>
+        <p:nvPr/>
+      </p:nvGrpSpPr>
+      <p:grpSpPr>
+        <a:xfrm>
+          <a:off x="0" y="0"/>
+          <a:ext cx="0" cy="0"/>
+          <a:chOff x="0" y="0"/>
+          <a:chExt cx="0" cy="0"/>
+        </a:xfrm>
+      </p:grpSpPr>
+      <p:sp>
+        <p:nvSpPr>
+          <p:cNvPr id="2" name="Slide Image Placeholder 1"/>
+          <p:cNvSpPr>
+            <a:spLocks noGrp="1"/>
+          </p:cNvSpPr>
+          <p:nvPr>
+            <p:ph type="sldImg" idx="2"/>
+          </p:nvPr>
+        </p:nvSpPr>
+        <p:spPr/>
+      </p:sp>
+      <p:sp>
+        <p:nvSpPr>
+          <p:cNvPr id="3" name="Notes Placeholder 2"/>
+          <p:cNvSpPr>
+            <a:spLocks noGrp="1"/>
+          </p:cNvSpPr>
+          <p:nvPr>
+            <p:ph type="body" idx="3" sz="quarter"/>
+          </p:nvPr>
+        </p:nvSpPr>
+        <p:spPr/>
+        <p:txBody>
+          <a:bodyPr/>
+          <a:lstStyle/>
+          <a:p>
+            <a:r>
+              <a:rPr sz="1200">
+                <a:latin typeface="Calibri"/>
+              </a:rPr>
+              <a:t>(Continued from the previous slide - the same notes apply.)</a:t>
+            </a:r>
+          </a:p>
+          <a:p/>
+          <a:p>
+            <a:r>
+              <a:rPr sz="1200">
+                <a:latin typeface="Calibri"/>
+              </a:rPr>
+              <a:t>The left column is a design argument, not a feature list. Only the steering scale changes between the modes.</a:t>
+            </a:r>
+          </a:p>
+          <a:p>
+            <a:r>
+              <a:rPr sz="1200">
+                <a:latin typeface="Calibri"/>
+              </a:rPr>
+              <a:t>The reasoning is worth hearing: a global speed cap makes a vehicle feel broken, a steering cap makes it feel controllable. Ask whether they agree.</a:t>
+            </a:r>
+          </a:p>
+          <a:p>
+            <a:r>
+              <a:rPr sz="1200">
+                <a:latin typeface="Calibri"/>
+              </a:rPr>
+              <a:t>The four-servo scheme surprises people. One stick, four servos, each owning one direction and centred otherwise.</a:t>
+            </a:r>
+          </a:p>
+          <a:p>
+            <a:r>
+              <a:rPr sz="1200">
+                <a:latin typeface="Calibri"/>
+              </a:rPr>
+              <a:t>1.0 to 2.0 ms is the corrected travel. Point back to the change log in Lesson 1 - the old range could drive a servo into its stops.</a:t>
+            </a:r>
+          </a:p>
+        </p:txBody>
+      </p:sp>
+      <p:sp>
+        <p:nvSpPr>
+          <p:cNvPr id="4" name="Slide Number Placeholder 3"/>
+          <p:cNvSpPr>
+            <a:spLocks noGrp="1"/>
+          </p:cNvSpPr>
+          <p:nvPr>
+            <p:ph type="sldNum" idx="5" sz="quarter"/>
+          </p:nvPr>
+        </p:nvSpPr>
+        <p:spPr/>
+      </p:sp>
+    </p:spTree>
+  </p:cSld>
+  <p:clrMapOvr>
+    <a:masterClrMapping/>
+  </p:clrMapOvr>
+</p:notes>
+</file>
+
+<file path=ppt/notesSlides/notesSlide22.xml><?xml version="1.0" encoding="utf-8"?>
+<p:notes xmlns:a="http://schemas.openxmlformats.org/drawingml/2006/main" xmlns:p="http://schemas.openxmlformats.org/presentationml/2006/main" xmlns:r="http://schemas.openxmlformats.org/officeDocument/2006/relationships">
+  <p:cSld>
+    <p:spTree>
+      <p:nvGrpSpPr>
+        <p:cNvPr id="1" name=""/>
+        <p:cNvGrpSpPr/>
+        <p:nvPr/>
+      </p:nvGrpSpPr>
+      <p:grpSpPr>
+        <a:xfrm>
+          <a:off x="0" y="0"/>
+          <a:ext cx="0" cy="0"/>
+          <a:chOff x="0" y="0"/>
+          <a:chExt cx="0" cy="0"/>
+        </a:xfrm>
+      </p:grpSpPr>
+      <p:sp>
+        <p:nvSpPr>
+          <p:cNvPr id="2" name="Slide Image Placeholder 1"/>
+          <p:cNvSpPr>
+            <a:spLocks noGrp="1"/>
+          </p:cNvSpPr>
+          <p:nvPr>
+            <p:ph type="sldImg" idx="2"/>
+          </p:nvPr>
+        </p:nvSpPr>
+        <p:spPr/>
+      </p:sp>
+      <p:sp>
+        <p:nvSpPr>
+          <p:cNvPr id="3" name="Notes Placeholder 2"/>
+          <p:cNvSpPr>
+            <a:spLocks noGrp="1"/>
+          </p:cNvSpPr>
+          <p:nvPr>
+            <p:ph type="body" idx="3" sz="quarter"/>
+          </p:nvPr>
+        </p:nvSpPr>
+        <p:spPr/>
+        <p:txBody>
+          <a:bodyPr/>
+          <a:lstStyle/>
+          <a:p>
+            <a:r>
+              <a:rPr sz="1200">
+                <a:latin typeface="Calibri"/>
+              </a:rPr>
+              <a:t>A servo does not listen to voltage, or to duty in the way a motor does. It listens to how LONG the pulse is, and it wants one every 20 ms.</a:t>
+            </a:r>
+          </a:p>
+          <a:p>
+            <a:r>
+              <a:rPr sz="1200">
+                <a:latin typeface="Calibri"/>
+              </a:rPr>
+              <a:t>1.0 ms is one end, 1.5 ms is centre, 2.0 ms is the other end. Those three numbers are the whole protocol.</a:t>
+            </a:r>
+          </a:p>
+          <a:p>
+            <a:r>
+              <a:rPr sz="1200">
+                <a:latin typeface="Calibri"/>
+              </a:rPr>
+              <a:t>The ESP32 counts duty, not microseconds, so the program has to convert. Walk the arithmetic once, slowly.</a:t>
+            </a:r>
+          </a:p>
+          <a:p>
+            <a:r>
+              <a:rPr sz="1200">
+                <a:latin typeface="Calibri"/>
+              </a:rPr>
+              <a:t>Continuous-rotation servos read the same pulse as a SPEED rather than a position. Worth flagging before somebody buys the wrong one.</a:t>
+            </a:r>
+          </a:p>
+        </p:txBody>
+      </p:sp>
+      <p:sp>
+        <p:nvSpPr>
+          <p:cNvPr id="4" name="Slide Number Placeholder 3"/>
+          <p:cNvSpPr>
+            <a:spLocks noGrp="1"/>
+          </p:cNvSpPr>
+          <p:nvPr>
+            <p:ph type="sldNum" idx="5" sz="quarter"/>
+          </p:nvPr>
+        </p:nvSpPr>
+        <p:spPr/>
+      </p:sp>
+    </p:spTree>
+  </p:cSld>
+  <p:clrMapOvr>
+    <a:masterClrMapping/>
+  </p:clrMapOvr>
+</p:notes>
+</file>
+
+<file path=ppt/notesSlides/notesSlide23.xml><?xml version="1.0" encoding="utf-8"?>
+<p:notes xmlns:a="http://schemas.openxmlformats.org/drawingml/2006/main" xmlns:p="http://schemas.openxmlformats.org/presentationml/2006/main" xmlns:r="http://schemas.openxmlformats.org/officeDocument/2006/relationships">
+  <p:cSld>
+    <p:spTree>
+      <p:nvGrpSpPr>
+        <p:cNvPr id="1" name=""/>
+        <p:cNvGrpSpPr/>
+        <p:nvPr/>
+      </p:nvGrpSpPr>
+      <p:grpSpPr>
+        <a:xfrm>
+          <a:off x="0" y="0"/>
+          <a:ext cx="0" cy="0"/>
+          <a:chOff x="0" y="0"/>
+          <a:chExt cx="0" cy="0"/>
+        </a:xfrm>
+      </p:grpSpPr>
+      <p:sp>
+        <p:nvSpPr>
+          <p:cNvPr id="2" name="Slide Image Placeholder 1"/>
+          <p:cNvSpPr>
+            <a:spLocks noGrp="1"/>
+          </p:cNvSpPr>
+          <p:nvPr>
+            <p:ph type="sldImg" idx="2"/>
+          </p:nvPr>
+        </p:nvSpPr>
+        <p:spPr/>
+      </p:sp>
+      <p:sp>
+        <p:nvSpPr>
+          <p:cNvPr id="3" name="Notes Placeholder 2"/>
+          <p:cNvSpPr>
+            <a:spLocks noGrp="1"/>
+          </p:cNvSpPr>
+          <p:nvPr>
+            <p:ph type="body" idx="3" sz="quarter"/>
+          </p:nvPr>
+        </p:nvSpPr>
+        <p:spPr/>
+        <p:txBody>
+          <a:bodyPr/>
+          <a:lstStyle/>
+          <a:p>
+            <a:r>
+              <a:rPr sz="1200">
+                <a:latin typeface="Calibri"/>
+              </a:rPr>
+              <a:t>Conversation, not a test.</a:t>
+            </a:r>
+          </a:p>
+          <a:p>
+            <a:r>
+              <a:rPr sz="1200">
+                <a:latin typeface="Calibri"/>
+              </a:rPr>
+              <a:t>Answers: 12 bits caps at 19.5 kHz because 80 MHz divided by 4096 is 19,531; resolution buys fine control at the bottom of the range; the four states are forward, reverse, coast and brake.</a:t>
+            </a:r>
+          </a:p>
+          <a:p>
+            <a:r>
+              <a:rPr sz="1200">
+                <a:latin typeface="Calibri"/>
+              </a:rPr>
+              <a:t>Hybrid drive holds speed because the braking part actively pulls current down. At duty 0 without the guard, both pins go high and the motor brakes.</a:t>
+            </a:r>
+          </a:p>
+          <a:p>
+            <a:r>
+              <a:rPr sz="1200">
+                <a:latin typeface="Calibri"/>
+              </a:rPr>
+              <a:t>The truncation bug leaves the ramp one count short, which is 0.1% and invisible on a wheel.</a:t>
+            </a:r>
+          </a:p>
+          <a:p>
+            <a:r>
+              <a:rPr sz="1200">
+                <a:latin typeface="Calibri"/>
+              </a:rPr>
+              <a:t>constrain before map because map does not clamp. NORMAL scales steering because steering authority was the problem, not top speed.</a:t>
+            </a:r>
+          </a:p>
+        </p:txBody>
+      </p:sp>
+      <p:sp>
+        <p:nvSpPr>
+          <p:cNvPr id="4" name="Slide Number Placeholder 3"/>
+          <p:cNvSpPr>
+            <a:spLocks noGrp="1"/>
+          </p:cNvSpPr>
+          <p:nvPr>
+            <p:ph type="sldNum" idx="5" sz="quarter"/>
+          </p:nvPr>
+        </p:nvSpPr>
+        <p:spPr/>
+      </p:sp>
+    </p:spTree>
+  </p:cSld>
+  <p:clrMapOvr>
+    <a:masterClrMapping/>
+  </p:clrMapOvr>
+</p:notes>
+</file>
+
+<file path=ppt/notesSlides/notesSlide3.xml><?xml version="1.0" encoding="utf-8"?>
+<p:notes xmlns:a="http://schemas.openxmlformats.org/drawingml/2006/main" xmlns:p="http://schemas.openxmlformats.org/presentationml/2006/main" xmlns:r="http://schemas.openxmlformats.org/officeDocument/2006/relationships">
+  <p:cSld>
+    <p:spTree>
+      <p:nvGrpSpPr>
+        <p:cNvPr id="1" name=""/>
+        <p:cNvGrpSpPr/>
+        <p:nvPr/>
+      </p:nvGrpSpPr>
+      <p:grpSpPr>
+        <a:xfrm>
+          <a:off x="0" y="0"/>
+          <a:ext cx="0" cy="0"/>
+          <a:chOff x="0" y="0"/>
+          <a:chExt cx="0" cy="0"/>
+        </a:xfrm>
+      </p:grpSpPr>
+      <p:sp>
+        <p:nvSpPr>
+          <p:cNvPr id="2" name="Slide Image Placeholder 1"/>
+          <p:cNvSpPr>
+            <a:spLocks noGrp="1"/>
+          </p:cNvSpPr>
+          <p:nvPr>
+            <p:ph type="sldImg" idx="2"/>
+          </p:nvPr>
+        </p:nvSpPr>
+        <p:spPr/>
+      </p:sp>
+      <p:sp>
+        <p:nvSpPr>
+          <p:cNvPr id="3" name="Notes Placeholder 2"/>
+          <p:cNvSpPr>
+            <a:spLocks noGrp="1"/>
+          </p:cNvSpPr>
+          <p:nvPr>
+            <p:ph type="body" idx="3" sz="quarter"/>
+          </p:nvPr>
+        </p:nvSpPr>
+        <p:spPr/>
+        <p:txBody>
+          <a:bodyPr/>
+          <a:lstStyle/>
+          <a:p>
+            <a:r>
+              <a:rPr sz="1200">
+                <a:latin typeface="Calibri"/>
+              </a:rPr>
+              <a:t>Two breaks. The first activity is thirty-five minutes and it earns them; do not compress it.</a:t>
+            </a:r>
+          </a:p>
+        </p:txBody>
+      </p:sp>
+      <p:sp>
+        <p:nvSpPr>
+          <p:cNvPr id="4" name="Slide Number Placeholder 3"/>
+          <p:cNvSpPr>
+            <a:spLocks noGrp="1"/>
+          </p:cNvSpPr>
+          <p:nvPr>
+            <p:ph type="sldNum" idx="5" sz="quarter"/>
+          </p:nvPr>
+        </p:nvSpPr>
+        <p:spPr/>
+      </p:sp>
+    </p:spTree>
+  </p:cSld>
+  <p:clrMapOvr>
+    <a:masterClrMapping/>
+  </p:clrMapOvr>
+</p:notes>
+</file>
+
+<file path=ppt/notesSlides/notesSlide4.xml><?xml version="1.0" encoding="utf-8"?>
+<p:notes xmlns:a="http://schemas.openxmlformats.org/drawingml/2006/main" xmlns:p="http://schemas.openxmlformats.org/presentationml/2006/main" xmlns:r="http://schemas.openxmlformats.org/officeDocument/2006/relationships">
+  <p:cSld>
+    <p:spTree>
+      <p:nvGrpSpPr>
+        <p:cNvPr id="1" name=""/>
+        <p:cNvGrpSpPr/>
+        <p:nvPr/>
+      </p:nvGrpSpPr>
+      <p:grpSpPr>
+        <a:xfrm>
+          <a:off x="0" y="0"/>
+          <a:ext cx="0" cy="0"/>
+          <a:chOff x="0" y="0"/>
+          <a:chExt cx="0" cy="0"/>
+        </a:xfrm>
+      </p:grpSpPr>
+      <p:sp>
+        <p:nvSpPr>
+          <p:cNvPr id="2" name="Slide Image Placeholder 1"/>
+          <p:cNvSpPr>
+            <a:spLocks noGrp="1"/>
+          </p:cNvSpPr>
+          <p:nvPr>
+            <p:ph type="sldImg" idx="2"/>
+          </p:nvPr>
+        </p:nvSpPr>
+        <p:spPr/>
+      </p:sp>
+      <p:sp>
+        <p:nvSpPr>
+          <p:cNvPr id="3" name="Notes Placeholder 2"/>
+          <p:cNvSpPr>
+            <a:spLocks noGrp="1"/>
+          </p:cNvSpPr>
+          <p:nvPr>
+            <p:ph type="body" idx="3" sz="quarter"/>
+          </p:nvPr>
+        </p:nvSpPr>
+        <p:spPr/>
+        <p:txBody>
+          <a:bodyPr/>
+          <a:lstStyle/>
+          <a:p>
+            <a:r>
+              <a:rPr sz="1200">
+                <a:latin typeface="Calibri"/>
+              </a:rPr>
+              <a:t>This is a genuine engineering trade-off, so present it as one rather than as a fact to memorise.</a:t>
+            </a:r>
+          </a:p>
+          <a:p>
+            <a:r>
+              <a:rPr sz="1200">
+                <a:latin typeface="Calibri"/>
+              </a:rPr>
+              <a:t>More bits buys finer control at the BOTTOM of the range, which is exactly where a motor is hardest to drive smoothly.</a:t>
+            </a:r>
+          </a:p>
+          <a:p>
+            <a:r>
+              <a:rPr sz="1200">
+                <a:latin typeface="Calibri"/>
+              </a:rPr>
+              <a:t>The cost is frequency: the counter has to run 2^N times per cycle. Do the division on the board.</a:t>
+            </a:r>
+          </a:p>
+          <a:p>
+            <a:r>
+              <a:rPr sz="1200">
+                <a:latin typeface="Calibri"/>
+              </a:rPr>
+              <a:t>Op 12 sits at 10 bits and 30 kHz. Ask them to check that against the formula before you confirm it.</a:t>
+            </a:r>
+          </a:p>
+          <a:p>
+            <a:r>
+              <a:rPr sz="1200">
+                <a:latin typeface="Calibri"/>
+              </a:rPr>
+              <a:t>Connect it back: the beginner course ran 8 bits, and this is what the extra two bits are for.</a:t>
+            </a:r>
+          </a:p>
+        </p:txBody>
+      </p:sp>
+      <p:sp>
+        <p:nvSpPr>
+          <p:cNvPr id="4" name="Slide Number Placeholder 3"/>
+          <p:cNvSpPr>
+            <a:spLocks noGrp="1"/>
+          </p:cNvSpPr>
+          <p:nvPr>
+            <p:ph type="sldNum" idx="5" sz="quarter"/>
+          </p:nvPr>
+        </p:nvSpPr>
+        <p:spPr/>
+      </p:sp>
+    </p:spTree>
+  </p:cSld>
+  <p:clrMapOvr>
+    <a:masterClrMapping/>
+  </p:clrMapOvr>
+</p:notes>
+</file>
+
+<file path=ppt/notesSlides/notesSlide5.xml><?xml version="1.0" encoding="utf-8"?>
+<p:notes xmlns:a="http://schemas.openxmlformats.org/drawingml/2006/main" xmlns:p="http://schemas.openxmlformats.org/presentationml/2006/main" xmlns:r="http://schemas.openxmlformats.org/officeDocument/2006/relationships">
+  <p:cSld>
+    <p:spTree>
+      <p:nvGrpSpPr>
+        <p:cNvPr id="1" name=""/>
+        <p:cNvGrpSpPr/>
+        <p:nvPr/>
+      </p:nvGrpSpPr>
+      <p:grpSpPr>
+        <a:xfrm>
+          <a:off x="0" y="0"/>
+          <a:ext cx="0" cy="0"/>
+          <a:chOff x="0" y="0"/>
+          <a:chExt cx="0" cy="0"/>
+        </a:xfrm>
+      </p:grpSpPr>
+      <p:sp>
+        <p:nvSpPr>
+          <p:cNvPr id="2" name="Slide Image Placeholder 1"/>
+          <p:cNvSpPr>
+            <a:spLocks noGrp="1"/>
+          </p:cNvSpPr>
+          <p:nvPr>
+            <p:ph type="sldImg" idx="2"/>
+          </p:nvPr>
+        </p:nvSpPr>
+        <p:spPr/>
+      </p:sp>
+      <p:sp>
+        <p:nvSpPr>
+          <p:cNvPr id="3" name="Notes Placeholder 2"/>
+          <p:cNvSpPr>
+            <a:spLocks noGrp="1"/>
+          </p:cNvSpPr>
+          <p:nvPr>
+            <p:ph type="body" idx="3" sz="quarter"/>
+          </p:nvPr>
+        </p:nvSpPr>
+        <p:spPr/>
+        <p:txBody>
+          <a:bodyPr/>
+          <a:lstStyle/>
+          <a:p>
+            <a:r>
+              <a:rPr sz="1200">
+                <a:latin typeface="Calibri"/>
+              </a:rPr>
+              <a:t>(Continued from the previous slide - the same notes apply.)</a:t>
+            </a:r>
+          </a:p>
+          <a:p/>
+          <a:p>
+            <a:r>
+              <a:rPr sz="1200">
+                <a:latin typeface="Calibri"/>
+              </a:rPr>
+              <a:t>This is a genuine engineering trade-off, so present it as one rather than as a fact to memorise.</a:t>
+            </a:r>
+          </a:p>
+          <a:p>
+            <a:r>
+              <a:rPr sz="1200">
+                <a:latin typeface="Calibri"/>
+              </a:rPr>
+              <a:t>More bits buys finer control at the BOTTOM of the range, which is exactly where a motor is hardest to drive smoothly.</a:t>
+            </a:r>
+          </a:p>
+          <a:p>
+            <a:r>
+              <a:rPr sz="1200">
+                <a:latin typeface="Calibri"/>
+              </a:rPr>
+              <a:t>The cost is frequency: the counter has to run 2^N times per cycle. Do the division on the board.</a:t>
+            </a:r>
+          </a:p>
+          <a:p>
+            <a:r>
+              <a:rPr sz="1200">
+                <a:latin typeface="Calibri"/>
+              </a:rPr>
+              <a:t>Op 12 sits at 10 bits and 30 kHz. Ask them to check that against the formula before you confirm it.</a:t>
+            </a:r>
+          </a:p>
+          <a:p>
+            <a:r>
+              <a:rPr sz="1200">
+                <a:latin typeface="Calibri"/>
+              </a:rPr>
+              <a:t>Connect it back: the beginner course ran 8 bits, and this is what the extra two bits are for.</a:t>
+            </a:r>
+          </a:p>
+        </p:txBody>
+      </p:sp>
+      <p:sp>
+        <p:nvSpPr>
+          <p:cNvPr id="4" name="Slide Number Placeholder 3"/>
+          <p:cNvSpPr>
+            <a:spLocks noGrp="1"/>
+          </p:cNvSpPr>
+          <p:nvPr>
+            <p:ph type="sldNum" idx="5" sz="quarter"/>
+          </p:nvPr>
+        </p:nvSpPr>
+        <p:spPr/>
+      </p:sp>
+    </p:spTree>
+  </p:cSld>
+  <p:clrMapOvr>
+    <a:masterClrMapping/>
+  </p:clrMapOvr>
+</p:notes>
+</file>
+
+<file path=ppt/notesSlides/notesSlide6.xml><?xml version="1.0" encoding="utf-8"?>
+<p:notes xmlns:a="http://schemas.openxmlformats.org/drawingml/2006/main" xmlns:p="http://schemas.openxmlformats.org/presentationml/2006/main" xmlns:r="http://schemas.openxmlformats.org/officeDocument/2006/relationships">
+  <p:cSld>
+    <p:spTree>
+      <p:nvGrpSpPr>
+        <p:cNvPr id="1" name=""/>
+        <p:cNvGrpSpPr/>
+        <p:nvPr/>
+      </p:nvGrpSpPr>
+      <p:grpSpPr>
+        <a:xfrm>
+          <a:off x="0" y="0"/>
+          <a:ext cx="0" cy="0"/>
+          <a:chOff x="0" y="0"/>
+          <a:chExt cx="0" cy="0"/>
+        </a:xfrm>
+      </p:grpSpPr>
+      <p:sp>
+        <p:nvSpPr>
+          <p:cNvPr id="2" name="Slide Image Placeholder 1"/>
+          <p:cNvSpPr>
+            <a:spLocks noGrp="1"/>
+          </p:cNvSpPr>
+          <p:nvPr>
+            <p:ph type="sldImg" idx="2"/>
+          </p:nvPr>
+        </p:nvSpPr>
+        <p:spPr/>
+      </p:sp>
+      <p:sp>
+        <p:nvSpPr>
+          <p:cNvPr id="3" name="Notes Placeholder 2"/>
+          <p:cNvSpPr>
+            <a:spLocks noGrp="1"/>
+          </p:cNvSpPr>
+          <p:nvPr>
+            <p:ph type="body" idx="3" sz="quarter"/>
+          </p:nvPr>
+        </p:nvSpPr>
+        <p:spPr/>
+        <p:txBody>
+          <a:bodyPr/>
+          <a:lstStyle/>
+          <a:p>
+            <a:r>
+              <a:rPr sz="1200">
+                <a:latin typeface="Calibri"/>
+              </a:rPr>
+              <a:t>(Continued from the previous slide - the same notes apply.)</a:t>
+            </a:r>
+          </a:p>
+          <a:p/>
+          <a:p>
+            <a:r>
+              <a:rPr sz="1200">
+                <a:latin typeface="Calibri"/>
+              </a:rPr>
+              <a:t>This is a genuine engineering trade-off, so present it as one rather than as a fact to memorise.</a:t>
+            </a:r>
+          </a:p>
+          <a:p>
+            <a:r>
+              <a:rPr sz="1200">
+                <a:latin typeface="Calibri"/>
+              </a:rPr>
+              <a:t>More bits buys finer control at the BOTTOM of the range, which is exactly where a motor is hardest to drive smoothly.</a:t>
+            </a:r>
+          </a:p>
+          <a:p>
+            <a:r>
+              <a:rPr sz="1200">
+                <a:latin typeface="Calibri"/>
+              </a:rPr>
+              <a:t>The cost is frequency: the counter has to run 2^N times per cycle. Do the division on the board.</a:t>
+            </a:r>
+          </a:p>
+          <a:p>
+            <a:r>
+              <a:rPr sz="1200">
+                <a:latin typeface="Calibri"/>
+              </a:rPr>
+              <a:t>Op 12 sits at 10 bits and 30 kHz. Ask them to check that against the formula before you confirm it.</a:t>
+            </a:r>
+          </a:p>
+          <a:p>
+            <a:r>
+              <a:rPr sz="1200">
+                <a:latin typeface="Calibri"/>
+              </a:rPr>
+              <a:t>Connect it back: the beginner course ran 8 bits, and this is what the extra two bits are for.</a:t>
+            </a:r>
+          </a:p>
+        </p:txBody>
+      </p:sp>
+      <p:sp>
+        <p:nvSpPr>
+          <p:cNvPr id="4" name="Slide Number Placeholder 3"/>
+          <p:cNvSpPr>
+            <a:spLocks noGrp="1"/>
+          </p:cNvSpPr>
+          <p:nvPr>
+            <p:ph type="sldNum" idx="5" sz="quarter"/>
+          </p:nvPr>
+        </p:nvSpPr>
+        <p:spPr/>
+      </p:sp>
+    </p:spTree>
+  </p:cSld>
+  <p:clrMapOvr>
+    <a:masterClrMapping/>
+  </p:clrMapOvr>
+</p:notes>
+</file>
+
+<file path=ppt/notesSlides/notesSlide7.xml><?xml version="1.0" encoding="utf-8"?>
+<p:notes xmlns:a="http://schemas.openxmlformats.org/drawingml/2006/main" xmlns:p="http://schemas.openxmlformats.org/presentationml/2006/main" xmlns:r="http://schemas.openxmlformats.org/officeDocument/2006/relationships">
+  <p:cSld>
+    <p:spTree>
+      <p:nvGrpSpPr>
+        <p:cNvPr id="1" name=""/>
+        <p:cNvGrpSpPr/>
+        <p:nvPr/>
+      </p:nvGrpSpPr>
+      <p:grpSpPr>
+        <a:xfrm>
+          <a:off x="0" y="0"/>
+          <a:ext cx="0" cy="0"/>
+          <a:chOff x="0" y="0"/>
+          <a:chExt cx="0" cy="0"/>
+        </a:xfrm>
+      </p:grpSpPr>
+      <p:sp>
+        <p:nvSpPr>
+          <p:cNvPr id="2" name="Slide Image Placeholder 1"/>
+          <p:cNvSpPr>
+            <a:spLocks noGrp="1"/>
+          </p:cNvSpPr>
+          <p:nvPr>
+            <p:ph type="sldImg" idx="2"/>
+          </p:nvPr>
+        </p:nvSpPr>
+        <p:spPr/>
+      </p:sp>
+      <p:sp>
+        <p:nvSpPr>
+          <p:cNvPr id="3" name="Notes Placeholder 2"/>
+          <p:cNvSpPr>
+            <a:spLocks noGrp="1"/>
+          </p:cNvSpPr>
+          <p:nvPr>
+            <p:ph type="body" idx="3" sz="quarter"/>
+          </p:nvPr>
+        </p:nvSpPr>
+        <p:spPr/>
+        <p:txBody>
+          <a:bodyPr/>
+          <a:lstStyle/>
+          <a:p>
+            <a:r>
+              <a:rPr sz="1200">
+                <a:latin typeface="Calibri"/>
+              </a:rPr>
+              <a:t>Twenty seconds. First activity.</a:t>
+            </a:r>
+          </a:p>
+        </p:txBody>
+      </p:sp>
+      <p:sp>
+        <p:nvSpPr>
+          <p:cNvPr id="4" name="Slide Number Placeholder 3"/>
+          <p:cNvSpPr>
+            <a:spLocks noGrp="1"/>
+          </p:cNvSpPr>
+          <p:nvPr>
+            <p:ph type="sldNum" idx="5" sz="quarter"/>
+          </p:nvPr>
+        </p:nvSpPr>
+        <p:spPr/>
+      </p:sp>
+    </p:spTree>
+  </p:cSld>
+  <p:clrMapOvr>
+    <a:masterClrMapping/>
+  </p:clrMapOvr>
+</p:notes>
+</file>
+
+<file path=ppt/notesSlides/notesSlide8.xml><?xml version="1.0" encoding="utf-8"?>
+<p:notes xmlns:a="http://schemas.openxmlformats.org/drawingml/2006/main" xmlns:p="http://schemas.openxmlformats.org/presentationml/2006/main" xmlns:r="http://schemas.openxmlformats.org/officeDocument/2006/relationships">
+  <p:cSld>
+    <p:spTree>
+      <p:nvGrpSpPr>
+        <p:cNvPr id="1" name=""/>
+        <p:cNvGrpSpPr/>
+        <p:nvPr/>
+      </p:nvGrpSpPr>
+      <p:grpSpPr>
+        <a:xfrm>
+          <a:off x="0" y="0"/>
+          <a:ext cx="0" cy="0"/>
+          <a:chOff x="0" y="0"/>
+          <a:chExt cx="0" cy="0"/>
+        </a:xfrm>
+      </p:grpSpPr>
+      <p:sp>
+        <p:nvSpPr>
+          <p:cNvPr id="2" name="Slide Image Placeholder 1"/>
+          <p:cNvSpPr>
+            <a:spLocks noGrp="1"/>
+          </p:cNvSpPr>
+          <p:nvPr>
+            <p:ph type="sldImg" idx="2"/>
+          </p:nvPr>
+        </p:nvSpPr>
+        <p:spPr/>
+      </p:sp>
+      <p:sp>
+        <p:nvSpPr>
+          <p:cNvPr id="3" name="Notes Placeholder 2"/>
+          <p:cNvSpPr>
+            <a:spLocks noGrp="1"/>
+          </p:cNvSpPr>
+          <p:nvPr>
+            <p:ph type="body" idx="3" sz="quarter"/>
+          </p:nvPr>
+        </p:nvSpPr>
+        <p:spPr/>
+        <p:txBody>
+          <a:bodyPr/>
+          <a:lstStyle/>
+          <a:p>
+            <a:r>
+              <a:rPr sz="1200">
+                <a:latin typeface="Calibri"/>
+              </a:rPr>
+              <a:t>The console is the tool for the whole activity. Make sure everybody has typed help and got a response before moving on.</a:t>
+            </a:r>
+          </a:p>
+          <a:p>
+            <a:r>
+              <a:rPr sz="1200">
+                <a:latin typeface="Calibri"/>
+              </a:rPr>
+              <a:t>Step 2 and 3 are a listening exercise as much as a reading one. The bottom of the range is where the difference lives.</a:t>
+            </a:r>
+          </a:p>
+          <a:p>
+            <a:r>
+              <a:rPr sz="1200">
+                <a:latin typeface="Calibri"/>
+              </a:rPr>
+              <a:t>Step 4 is refused by the console on purpose. 12 bits caps out at 19.5 kHz, so 30 kHz is impossible - and the console says so rather than silently doing something else.</a:t>
+            </a:r>
+          </a:p>
+          <a:p>
+            <a:r>
+              <a:rPr sz="1200">
+                <a:latin typeface="Calibri"/>
+              </a:rPr>
+              <a:t>The second question is the subtle one: more resolution does NOT lower the speed at which the motor starts turning. It only lets you approach it more finely.</a:t>
+            </a:r>
+          </a:p>
+        </p:txBody>
+      </p:sp>
+      <p:sp>
+        <p:nvSpPr>
+          <p:cNvPr id="4" name="Slide Number Placeholder 3"/>
+          <p:cNvSpPr>
+            <a:spLocks noGrp="1"/>
+          </p:cNvSpPr>
+          <p:nvPr>
+            <p:ph type="sldNum" idx="5" sz="quarter"/>
+          </p:nvPr>
+        </p:nvSpPr>
+        <p:spPr/>
+      </p:sp>
+    </p:spTree>
+  </p:cSld>
+  <p:clrMapOvr>
+    <a:masterClrMapping/>
+  </p:clrMapOvr>
+</p:notes>
+</file>
+
+<file path=ppt/notesSlides/notesSlide9.xml><?xml version="1.0" encoding="utf-8"?>
+<p:notes xmlns:a="http://schemas.openxmlformats.org/drawingml/2006/main" xmlns:p="http://schemas.openxmlformats.org/presentationml/2006/main" xmlns:r="http://schemas.openxmlformats.org/officeDocument/2006/relationships">
+  <p:cSld>
+    <p:spTree>
+      <p:nvGrpSpPr>
+        <p:cNvPr id="1" name=""/>
+        <p:cNvGrpSpPr/>
+        <p:nvPr/>
+      </p:nvGrpSpPr>
+      <p:grpSpPr>
+        <a:xfrm>
+          <a:off x="0" y="0"/>
+          <a:ext cx="0" cy="0"/>
+          <a:chOff x="0" y="0"/>
+          <a:chExt cx="0" cy="0"/>
+        </a:xfrm>
+      </p:grpSpPr>
+      <p:sp>
+        <p:nvSpPr>
+          <p:cNvPr id="2" name="Slide Image Placeholder 1"/>
+          <p:cNvSpPr>
+            <a:spLocks noGrp="1"/>
+          </p:cNvSpPr>
+          <p:nvPr>
+            <p:ph type="sldImg" idx="2"/>
+          </p:nvPr>
+        </p:nvSpPr>
+        <p:spPr/>
+      </p:sp>
+      <p:sp>
+        <p:nvSpPr>
+          <p:cNvPr id="3" name="Notes Placeholder 2"/>
+          <p:cNvSpPr>
+            <a:spLocks noGrp="1"/>
+          </p:cNvSpPr>
+          <p:nvPr>
+            <p:ph type="body" idx="3" sz="quarter"/>
+          </p:nvPr>
+        </p:nvSpPr>
+        <p:spPr/>
+        <p:txBody>
+          <a:bodyPr/>
+          <a:lstStyle/>
+          <a:p>
+            <a:r>
+              <a:rPr sz="1200">
+                <a:latin typeface="Calibri"/>
+              </a:rPr>
+              <a:t>(Continued from the previous slide - the same notes apply.)</a:t>
+            </a:r>
+          </a:p>
+          <a:p/>
+          <a:p>
+            <a:r>
+              <a:rPr sz="1200">
+                <a:latin typeface="Calibri"/>
+              </a:rPr>
+              <a:t>The console is the tool for the whole activity. Make sure everybody has typed help and got a response before moving on.</a:t>
+            </a:r>
+          </a:p>
+          <a:p>
+            <a:r>
+              <a:rPr sz="1200">
+                <a:latin typeface="Calibri"/>
+              </a:rPr>
+              <a:t>Step 2 and 3 are a listening exercise as much as a reading one. The bottom of the range is where the difference lives.</a:t>
+            </a:r>
+          </a:p>
+          <a:p>
+            <a:r>
+              <a:rPr sz="1200">
+                <a:latin typeface="Calibri"/>
+              </a:rPr>
+              <a:t>Step 4 is refused by the console on purpose. 12 bits caps out at 19.5 kHz, so 30 kHz is impossible - and the console says so rather than silently doing something else.</a:t>
+            </a:r>
+          </a:p>
+          <a:p>
+            <a:r>
+              <a:rPr sz="1200">
+                <a:latin typeface="Calibri"/>
+              </a:rPr>
+              <a:t>The second question is the subtle one: more resolution does NOT lower the speed at which the motor starts turning. It only lets you approach it more finely.</a:t>
+            </a:r>
+          </a:p>
+        </p:txBody>
+      </p:sp>
+      <p:sp>
+        <p:nvSpPr>
+          <p:cNvPr id="4" name="Slide Number Placeholder 3"/>
+          <p:cNvSpPr>
+            <a:spLocks noGrp="1"/>
+          </p:cNvSpPr>
+          <p:nvPr>
+            <p:ph type="sldNum" idx="5" sz="quarter"/>
+          </p:nvPr>
+        </p:nvSpPr>
+        <p:spPr/>
+      </p:sp>
+    </p:spTree>
+  </p:cSld>
+  <p:clrMapOvr>
+    <a:masterClrMapping/>
+  </p:clrMapOvr>
+</p:notes>
 </file>
 
 <file path=ppt/slideLayouts/slideLayout1.xml><?xml version="1.0" encoding="utf-8"?>
@@ -3593,7 +6164,7 @@
         </p:blipFill>
         <p:spPr>
           <a:xfrm>
-            <a:off x="7223760" y="1371600"/>
+            <a:off x="7223760" y="2086754"/>
             <a:ext cx="4480560" cy="3233131"/>
           </a:xfrm>
           <a:prstGeom prst="rect">
@@ -5485,47 +8056,6 @@
               <a:t>During the off part nothing controls the motor at all, so the current in the windings decays slowly and the actual speed depends heavily on the load.</a:t>
             </a:r>
           </a:p>
-          <a:p>
-            <a:pPr algn="l">
-              <a:lnSpc>
-                <a:spcPct val="100000"/>
-              </a:lnSpc>
-              <a:spcAft>
-                <a:spcPts val="400"/>
-              </a:spcAft>
-              <a:defRPr sz="1800" b="0">
-                <a:solidFill>
-                  <a:srgbClr val="222222"/>
-                </a:solidFill>
-                <a:latin typeface="Calibri"/>
-              </a:defRPr>
-            </a:pPr>
-          </a:p>
-          <a:p>
-            <a:pPr algn="l">
-              <a:lnSpc>
-                <a:spcPct val="100000"/>
-              </a:lnSpc>
-              <a:spcAft>
-                <a:spcPts val="400"/>
-              </a:spcAft>
-              <a:defRPr sz="1800" b="0">
-                <a:solidFill>
-                  <a:srgbClr val="222222"/>
-                </a:solidFill>
-                <a:latin typeface="Calibri"/>
-              </a:defRPr>
-            </a:pPr>
-            <a:r>
-              <a:rPr sz="1800" b="0">
-                <a:solidFill>
-                  <a:srgbClr val="222222"/>
-                </a:solidFill>
-                <a:latin typeface="Calibri"/>
-              </a:rPr>
-              <a:t>Simple to read, and perfectly good for learning.</a:t>
-            </a:r>
-          </a:p>
         </p:txBody>
       </p:sp>
       <p:sp>
@@ -5670,47 +8200,6 @@
                 <a:latin typeface="Calibri"/>
               </a:rPr>
               <a:t>The braking part actively pulls the current down, so the average is much closer to what you asked for, and speed holds up under load.</a:t>
-            </a:r>
-          </a:p>
-          <a:p>
-            <a:pPr algn="l">
-              <a:lnSpc>
-                <a:spcPct val="100000"/>
-              </a:lnSpc>
-              <a:spcAft>
-                <a:spcPts val="400"/>
-              </a:spcAft>
-              <a:defRPr sz="1800" b="0">
-                <a:solidFill>
-                  <a:srgbClr val="222222"/>
-                </a:solidFill>
-                <a:latin typeface="Calibri"/>
-              </a:defRPr>
-            </a:pPr>
-          </a:p>
-          <a:p>
-            <a:pPr algn="l">
-              <a:lnSpc>
-                <a:spcPct val="100000"/>
-              </a:lnSpc>
-              <a:spcAft>
-                <a:spcPts val="400"/>
-              </a:spcAft>
-              <a:defRPr sz="1800" b="0">
-                <a:solidFill>
-                  <a:srgbClr val="222222"/>
-                </a:solidFill>
-                <a:latin typeface="Calibri"/>
-              </a:defRPr>
-            </a:pPr>
-            <a:r>
-              <a:rPr sz="1800" b="0">
-                <a:solidFill>
-                  <a:srgbClr val="222222"/>
-                </a:solidFill>
-                <a:latin typeface="Calibri"/>
-              </a:rPr>
-              <a:t>Noticeably better control at low duty - exactly where you need it.</a:t>
             </a:r>
           </a:p>
         </p:txBody>
@@ -6026,6 +8515,47 @@
                 </a:solidFill>
                 <a:latin typeface="Calibri"/>
               </a:rPr>
+              <a:t>Simple to read, and perfectly good for learning.</a:t>
+            </a:r>
+          </a:p>
+          <a:p>
+            <a:pPr algn="l">
+              <a:lnSpc>
+                <a:spcPct val="100000"/>
+              </a:lnSpc>
+              <a:spcAft>
+                <a:spcPts val="400"/>
+              </a:spcAft>
+              <a:defRPr sz="1800" b="0">
+                <a:solidFill>
+                  <a:srgbClr val="222222"/>
+                </a:solidFill>
+                <a:latin typeface="Calibri"/>
+              </a:defRPr>
+            </a:pPr>
+          </a:p>
+          <a:p>
+            <a:pPr algn="l">
+              <a:lnSpc>
+                <a:spcPct val="100000"/>
+              </a:lnSpc>
+              <a:spcAft>
+                <a:spcPts val="400"/>
+              </a:spcAft>
+              <a:defRPr sz="1800" b="0">
+                <a:solidFill>
+                  <a:srgbClr val="222222"/>
+                </a:solidFill>
+                <a:latin typeface="Calibri"/>
+              </a:defRPr>
+            </a:pPr>
+            <a:r>
+              <a:rPr sz="1800" b="0">
+                <a:solidFill>
+                  <a:srgbClr val="222222"/>
+                </a:solidFill>
+                <a:latin typeface="Calibri"/>
+              </a:rPr>
               <a:t>This is SLOW DECAY.</a:t>
             </a:r>
           </a:p>
@@ -6100,6 +8630,47 @@
             <a:spAutoFit/>
           </a:bodyPr>
           <a:lstStyle/>
+          <a:p>
+            <a:pPr algn="l">
+              <a:lnSpc>
+                <a:spcPct val="100000"/>
+              </a:lnSpc>
+              <a:spcAft>
+                <a:spcPts val="400"/>
+              </a:spcAft>
+              <a:defRPr sz="1800" b="0">
+                <a:solidFill>
+                  <a:srgbClr val="222222"/>
+                </a:solidFill>
+                <a:latin typeface="Calibri"/>
+              </a:defRPr>
+            </a:pPr>
+          </a:p>
+          <a:p>
+            <a:pPr algn="l">
+              <a:lnSpc>
+                <a:spcPct val="100000"/>
+              </a:lnSpc>
+              <a:spcAft>
+                <a:spcPts val="400"/>
+              </a:spcAft>
+              <a:defRPr sz="1800" b="0">
+                <a:solidFill>
+                  <a:srgbClr val="222222"/>
+                </a:solidFill>
+                <a:latin typeface="Calibri"/>
+              </a:defRPr>
+            </a:pPr>
+            <a:r>
+              <a:rPr sz="1800" b="0">
+                <a:solidFill>
+                  <a:srgbClr val="222222"/>
+                </a:solidFill>
+                <a:latin typeface="Calibri"/>
+              </a:rPr>
+              <a:t>Noticeably better control at low duty - exactly where you need it.</a:t>
+            </a:r>
+          </a:p>
           <a:p>
             <a:pPr algn="l">
               <a:lnSpc>
@@ -8788,31 +11359,6 @@
               <a:t>3.  Find the lowest  go  value that turns the wheel in each mode.</a:t>
             </a:r>
           </a:p>
-          <a:p>
-            <a:pPr algn="l">
-              <a:lnSpc>
-                <a:spcPct val="100000"/>
-              </a:lnSpc>
-              <a:spcAft>
-                <a:spcPts val="400"/>
-              </a:spcAft>
-              <a:defRPr sz="1800" b="0">
-                <a:solidFill>
-                  <a:srgbClr val="222222"/>
-                </a:solidFill>
-                <a:latin typeface="Calibri"/>
-              </a:defRPr>
-            </a:pPr>
-            <a:r>
-              <a:rPr sz="1800" b="0">
-                <a:solidFill>
-                  <a:srgbClr val="222222"/>
-                </a:solidFill>
-                <a:latin typeface="Calibri"/>
-              </a:rPr>
-              <a:t>4.  ramp off, then  go 1023  from a standstill. Then  ramp on  and do it again. Listen to the difference.</a:t>
-            </a:r>
-          </a:p>
         </p:txBody>
       </p:sp>
       <p:sp>
@@ -9343,6 +11889,31 @@
                 </a:solidFill>
                 <a:latin typeface="Calibri"/>
               </a:rPr>
+              <a:t>4.  ramp off, then  go 1023  from a standstill. Then  ramp on  and do it again. Listen to the difference.</a:t>
+            </a:r>
+          </a:p>
+          <a:p>
+            <a:pPr algn="l">
+              <a:lnSpc>
+                <a:spcPct val="100000"/>
+              </a:lnSpc>
+              <a:spcAft>
+                <a:spcPts val="400"/>
+              </a:spcAft>
+              <a:defRPr sz="1800" b="0">
+                <a:solidFill>
+                  <a:srgbClr val="222222"/>
+                </a:solidFill>
+                <a:latin typeface="Calibri"/>
+              </a:defRPr>
+            </a:pPr>
+            <a:r>
+              <a:rPr sz="1800" b="0">
+                <a:solidFill>
+                  <a:srgbClr val="222222"/>
+                </a:solidFill>
+                <a:latin typeface="Calibri"/>
+              </a:rPr>
               <a:t>5.  Set RAMP_FACTOR to 0.9, then 0.1. What does it change?</a:t>
             </a:r>
           </a:p>
@@ -9651,7 +12222,7 @@
         </p:nvSpPr>
         <p:spPr>
           <a:xfrm>
-            <a:off x="502920" y="1435608"/>
+            <a:off x="502920" y="1389888"/>
             <a:ext cx="1325880" cy="367792"/>
           </a:xfrm>
           <a:prstGeom prst="rect">
@@ -9699,7 +12270,7 @@
         </p:nvCxnSpPr>
         <p:spPr>
           <a:xfrm>
-            <a:off x="1920240" y="1892808"/>
+            <a:off x="1920240" y="1847088"/>
             <a:ext cx="7498079" cy="0"/>
           </a:xfrm>
           <a:prstGeom prst="line">
@@ -9734,7 +12305,7 @@
         </p:nvCxnSpPr>
         <p:spPr>
           <a:xfrm>
-            <a:off x="1920240" y="1325880"/>
+            <a:off x="1920240" y="1280160"/>
             <a:ext cx="468629" cy="0"/>
           </a:xfrm>
           <a:prstGeom prst="line">
@@ -9769,7 +12340,7 @@
         </p:nvCxnSpPr>
         <p:spPr>
           <a:xfrm flipV="1">
-            <a:off x="1920240" y="1325880"/>
+            <a:off x="1920240" y="1280160"/>
             <a:ext cx="0" cy="566928"/>
           </a:xfrm>
           <a:prstGeom prst="line">
@@ -9804,7 +12375,7 @@
         </p:nvCxnSpPr>
         <p:spPr>
           <a:xfrm>
-            <a:off x="2388869" y="1325880"/>
+            <a:off x="2388869" y="1280160"/>
             <a:ext cx="0" cy="566928"/>
           </a:xfrm>
           <a:prstGeom prst="line">
@@ -9839,7 +12410,7 @@
         </p:nvCxnSpPr>
         <p:spPr>
           <a:xfrm>
-            <a:off x="2388869" y="1892808"/>
+            <a:off x="2388869" y="1847088"/>
             <a:ext cx="1405890" cy="0"/>
           </a:xfrm>
           <a:prstGeom prst="line">
@@ -9874,7 +12445,7 @@
         </p:nvCxnSpPr>
         <p:spPr>
           <a:xfrm>
-            <a:off x="3794759" y="1325880"/>
+            <a:off x="3794759" y="1280160"/>
             <a:ext cx="468629" cy="0"/>
           </a:xfrm>
           <a:prstGeom prst="line">
@@ -9909,7 +12480,7 @@
         </p:nvCxnSpPr>
         <p:spPr>
           <a:xfrm flipV="1">
-            <a:off x="3794759" y="1325880"/>
+            <a:off x="3794759" y="1280160"/>
             <a:ext cx="0" cy="566928"/>
           </a:xfrm>
           <a:prstGeom prst="line">
@@ -9944,7 +12515,7 @@
         </p:nvCxnSpPr>
         <p:spPr>
           <a:xfrm>
-            <a:off x="4263388" y="1325880"/>
+            <a:off x="4263388" y="1280160"/>
             <a:ext cx="0" cy="566928"/>
           </a:xfrm>
           <a:prstGeom prst="line">
@@ -9979,7 +12550,7 @@
         </p:nvCxnSpPr>
         <p:spPr>
           <a:xfrm>
-            <a:off x="4263388" y="1892808"/>
+            <a:off x="4263388" y="1847088"/>
             <a:ext cx="1405890" cy="0"/>
           </a:xfrm>
           <a:prstGeom prst="line">
@@ -10014,7 +12585,7 @@
         </p:nvCxnSpPr>
         <p:spPr>
           <a:xfrm>
-            <a:off x="5669278" y="1325880"/>
+            <a:off x="5669278" y="1280160"/>
             <a:ext cx="468629" cy="0"/>
           </a:xfrm>
           <a:prstGeom prst="line">
@@ -10049,7 +12620,7 @@
         </p:nvCxnSpPr>
         <p:spPr>
           <a:xfrm flipV="1">
-            <a:off x="5669278" y="1325880"/>
+            <a:off x="5669278" y="1280160"/>
             <a:ext cx="0" cy="566928"/>
           </a:xfrm>
           <a:prstGeom prst="line">
@@ -10084,7 +12655,7 @@
         </p:nvCxnSpPr>
         <p:spPr>
           <a:xfrm>
-            <a:off x="6137907" y="1325880"/>
+            <a:off x="6137907" y="1280160"/>
             <a:ext cx="0" cy="566928"/>
           </a:xfrm>
           <a:prstGeom prst="line">
@@ -10119,7 +12690,7 @@
         </p:nvCxnSpPr>
         <p:spPr>
           <a:xfrm>
-            <a:off x="6137907" y="1892808"/>
+            <a:off x="6137907" y="1847088"/>
             <a:ext cx="1405890" cy="0"/>
           </a:xfrm>
           <a:prstGeom prst="line">
@@ -10154,7 +12725,7 @@
         </p:nvCxnSpPr>
         <p:spPr>
           <a:xfrm>
-            <a:off x="7543797" y="1325880"/>
+            <a:off x="7543797" y="1280160"/>
             <a:ext cx="468629" cy="0"/>
           </a:xfrm>
           <a:prstGeom prst="line">
@@ -10189,7 +12760,7 @@
         </p:nvCxnSpPr>
         <p:spPr>
           <a:xfrm flipV="1">
-            <a:off x="7543797" y="1325880"/>
+            <a:off x="7543797" y="1280160"/>
             <a:ext cx="0" cy="566928"/>
           </a:xfrm>
           <a:prstGeom prst="line">
@@ -10224,7 +12795,7 @@
         </p:nvCxnSpPr>
         <p:spPr>
           <a:xfrm>
-            <a:off x="8012426" y="1325880"/>
+            <a:off x="8012426" y="1280160"/>
             <a:ext cx="0" cy="566928"/>
           </a:xfrm>
           <a:prstGeom prst="line">
@@ -10259,7 +12830,7 @@
         </p:nvCxnSpPr>
         <p:spPr>
           <a:xfrm>
-            <a:off x="8012426" y="1892808"/>
+            <a:off x="8012426" y="1847088"/>
             <a:ext cx="1405890" cy="0"/>
           </a:xfrm>
           <a:prstGeom prst="line">
@@ -10294,7 +12865,7 @@
         </p:nvSpPr>
         <p:spPr>
           <a:xfrm>
-            <a:off x="9528047" y="1344168"/>
+            <a:off x="9528047" y="1298448"/>
             <a:ext cx="2377440" cy="659384"/>
           </a:xfrm>
           <a:prstGeom prst="rect">
@@ -10367,7 +12938,7 @@
         </p:nvSpPr>
         <p:spPr>
           <a:xfrm>
-            <a:off x="502920" y="2688336"/>
+            <a:off x="502920" y="2578608"/>
             <a:ext cx="1325880" cy="367792"/>
           </a:xfrm>
           <a:prstGeom prst="rect">
@@ -10415,7 +12986,7 @@
         </p:nvCxnSpPr>
         <p:spPr>
           <a:xfrm>
-            <a:off x="1920240" y="3145536"/>
+            <a:off x="1920240" y="3035808"/>
             <a:ext cx="7498079" cy="0"/>
           </a:xfrm>
           <a:prstGeom prst="line">
@@ -10450,7 +13021,7 @@
         </p:nvCxnSpPr>
         <p:spPr>
           <a:xfrm>
-            <a:off x="1920240" y="2578608"/>
+            <a:off x="1920240" y="2468880"/>
             <a:ext cx="937259" cy="0"/>
           </a:xfrm>
           <a:prstGeom prst="line">
@@ -10485,7 +13056,7 @@
         </p:nvCxnSpPr>
         <p:spPr>
           <a:xfrm flipV="1">
-            <a:off x="1920240" y="2578608"/>
+            <a:off x="1920240" y="2468880"/>
             <a:ext cx="0" cy="566928"/>
           </a:xfrm>
           <a:prstGeom prst="line">
@@ -10520,7 +13091,7 @@
         </p:nvCxnSpPr>
         <p:spPr>
           <a:xfrm>
-            <a:off x="2857499" y="2578608"/>
+            <a:off x="2857499" y="2468880"/>
             <a:ext cx="0" cy="566928"/>
           </a:xfrm>
           <a:prstGeom prst="line">
@@ -10555,7 +13126,7 @@
         </p:nvCxnSpPr>
         <p:spPr>
           <a:xfrm>
-            <a:off x="2857499" y="3145536"/>
+            <a:off x="2857499" y="3035808"/>
             <a:ext cx="937260" cy="0"/>
           </a:xfrm>
           <a:prstGeom prst="line">
@@ -10590,7 +13161,7 @@
         </p:nvCxnSpPr>
         <p:spPr>
           <a:xfrm>
-            <a:off x="3794759" y="2578608"/>
+            <a:off x="3794759" y="2468880"/>
             <a:ext cx="937259" cy="0"/>
           </a:xfrm>
           <a:prstGeom prst="line">
@@ -10625,7 +13196,7 @@
         </p:nvCxnSpPr>
         <p:spPr>
           <a:xfrm flipV="1">
-            <a:off x="3794759" y="2578608"/>
+            <a:off x="3794759" y="2468880"/>
             <a:ext cx="0" cy="566928"/>
           </a:xfrm>
           <a:prstGeom prst="line">
@@ -10660,7 +13231,7 @@
         </p:nvCxnSpPr>
         <p:spPr>
           <a:xfrm>
-            <a:off x="4732018" y="2578608"/>
+            <a:off x="4732018" y="2468880"/>
             <a:ext cx="0" cy="566928"/>
           </a:xfrm>
           <a:prstGeom prst="line">
@@ -10695,7 +13266,7 @@
         </p:nvCxnSpPr>
         <p:spPr>
           <a:xfrm>
-            <a:off x="4732018" y="3145536"/>
+            <a:off x="4732018" y="3035808"/>
             <a:ext cx="937260" cy="0"/>
           </a:xfrm>
           <a:prstGeom prst="line">
@@ -10730,7 +13301,7 @@
         </p:nvCxnSpPr>
         <p:spPr>
           <a:xfrm>
-            <a:off x="5669278" y="2578608"/>
+            <a:off x="5669278" y="2468880"/>
             <a:ext cx="937259" cy="0"/>
           </a:xfrm>
           <a:prstGeom prst="line">
@@ -10765,7 +13336,7 @@
         </p:nvCxnSpPr>
         <p:spPr>
           <a:xfrm flipV="1">
-            <a:off x="5669278" y="2578608"/>
+            <a:off x="5669278" y="2468880"/>
             <a:ext cx="0" cy="566928"/>
           </a:xfrm>
           <a:prstGeom prst="line">
@@ -10800,7 +13371,7 @@
         </p:nvCxnSpPr>
         <p:spPr>
           <a:xfrm>
-            <a:off x="6606537" y="2578608"/>
+            <a:off x="6606537" y="2468880"/>
             <a:ext cx="0" cy="566928"/>
           </a:xfrm>
           <a:prstGeom prst="line">
@@ -10835,7 +13406,7 @@
         </p:nvCxnSpPr>
         <p:spPr>
           <a:xfrm>
-            <a:off x="6606537" y="3145536"/>
+            <a:off x="6606537" y="3035808"/>
             <a:ext cx="937260" cy="0"/>
           </a:xfrm>
           <a:prstGeom prst="line">
@@ -10870,7 +13441,7 @@
         </p:nvCxnSpPr>
         <p:spPr>
           <a:xfrm>
-            <a:off x="7543797" y="2578608"/>
+            <a:off x="7543797" y="2468880"/>
             <a:ext cx="937259" cy="0"/>
           </a:xfrm>
           <a:prstGeom prst="line">
@@ -10905,7 +13476,7 @@
         </p:nvCxnSpPr>
         <p:spPr>
           <a:xfrm flipV="1">
-            <a:off x="7543797" y="2578608"/>
+            <a:off x="7543797" y="2468880"/>
             <a:ext cx="0" cy="566928"/>
           </a:xfrm>
           <a:prstGeom prst="line">
@@ -10940,7 +13511,7 @@
         </p:nvCxnSpPr>
         <p:spPr>
           <a:xfrm>
-            <a:off x="8481056" y="2578608"/>
+            <a:off x="8481056" y="2468880"/>
             <a:ext cx="0" cy="566928"/>
           </a:xfrm>
           <a:prstGeom prst="line">
@@ -10975,7 +13546,7 @@
         </p:nvCxnSpPr>
         <p:spPr>
           <a:xfrm>
-            <a:off x="8481056" y="3145536"/>
+            <a:off x="8481056" y="3035808"/>
             <a:ext cx="937260" cy="0"/>
           </a:xfrm>
           <a:prstGeom prst="line">
@@ -11010,7 +13581,7 @@
         </p:nvSpPr>
         <p:spPr>
           <a:xfrm>
-            <a:off x="9528047" y="2596896"/>
+            <a:off x="9528047" y="2487168"/>
             <a:ext cx="2377440" cy="659384"/>
           </a:xfrm>
           <a:prstGeom prst="rect">
@@ -11083,7 +13654,7 @@
         </p:nvSpPr>
         <p:spPr>
           <a:xfrm>
-            <a:off x="502920" y="3941064"/>
+            <a:off x="502920" y="3767328"/>
             <a:ext cx="1325880" cy="367792"/>
           </a:xfrm>
           <a:prstGeom prst="rect">
@@ -11131,7 +13702,7 @@
         </p:nvCxnSpPr>
         <p:spPr>
           <a:xfrm>
-            <a:off x="1920240" y="4398264"/>
+            <a:off x="1920240" y="4224528"/>
             <a:ext cx="7498079" cy="0"/>
           </a:xfrm>
           <a:prstGeom prst="line">
@@ -11166,7 +13737,7 @@
         </p:nvCxnSpPr>
         <p:spPr>
           <a:xfrm>
-            <a:off x="1920240" y="3831336"/>
+            <a:off x="1920240" y="3657600"/>
             <a:ext cx="1874519" cy="0"/>
           </a:xfrm>
           <a:prstGeom prst="line">
@@ -11201,7 +13772,7 @@
         </p:nvCxnSpPr>
         <p:spPr>
           <a:xfrm flipV="1">
-            <a:off x="1920240" y="3831336"/>
+            <a:off x="1920240" y="3657600"/>
             <a:ext cx="0" cy="566928"/>
           </a:xfrm>
           <a:prstGeom prst="line">
@@ -11236,7 +13807,7 @@
         </p:nvCxnSpPr>
         <p:spPr>
           <a:xfrm>
-            <a:off x="3794759" y="3831336"/>
+            <a:off x="3794759" y="3657600"/>
             <a:ext cx="1874519" cy="0"/>
           </a:xfrm>
           <a:prstGeom prst="line">
@@ -11271,7 +13842,7 @@
         </p:nvCxnSpPr>
         <p:spPr>
           <a:xfrm flipV="1">
-            <a:off x="3794759" y="3831336"/>
+            <a:off x="3794759" y="3657600"/>
             <a:ext cx="0" cy="566928"/>
           </a:xfrm>
           <a:prstGeom prst="line">
@@ -11306,7 +13877,7 @@
         </p:nvCxnSpPr>
         <p:spPr>
           <a:xfrm>
-            <a:off x="5669278" y="3831336"/>
+            <a:off x="5669278" y="3657600"/>
             <a:ext cx="1874519" cy="0"/>
           </a:xfrm>
           <a:prstGeom prst="line">
@@ -11341,7 +13912,7 @@
         </p:nvCxnSpPr>
         <p:spPr>
           <a:xfrm flipV="1">
-            <a:off x="5669278" y="3831336"/>
+            <a:off x="5669278" y="3657600"/>
             <a:ext cx="0" cy="566928"/>
           </a:xfrm>
           <a:prstGeom prst="line">
@@ -11376,7 +13947,7 @@
         </p:nvCxnSpPr>
         <p:spPr>
           <a:xfrm>
-            <a:off x="7543797" y="3831336"/>
+            <a:off x="7543797" y="3657600"/>
             <a:ext cx="1874519" cy="0"/>
           </a:xfrm>
           <a:prstGeom prst="line">
@@ -11411,7 +13982,7 @@
         </p:nvCxnSpPr>
         <p:spPr>
           <a:xfrm flipV="1">
-            <a:off x="7543797" y="3831336"/>
+            <a:off x="7543797" y="3657600"/>
             <a:ext cx="0" cy="566928"/>
           </a:xfrm>
           <a:prstGeom prst="line">
@@ -11446,7 +14017,7 @@
         </p:nvSpPr>
         <p:spPr>
           <a:xfrm>
-            <a:off x="9528047" y="3849624"/>
+            <a:off x="9528047" y="3675888"/>
             <a:ext cx="2377440" cy="659384"/>
           </a:xfrm>
           <a:prstGeom prst="rect">
@@ -11519,8 +14090,8 @@
         </p:nvSpPr>
         <p:spPr>
           <a:xfrm>
-            <a:off x="1920240" y="5303519"/>
-            <a:ext cx="7498079" cy="646684"/>
+            <a:off x="1920240" y="4956047"/>
+            <a:ext cx="7498079" cy="367792"/>
           </a:xfrm>
           <a:prstGeom prst="rect">
             <a:avLst/>
@@ -11554,7 +14125,7 @@
                 </a:solidFill>
                 <a:latin typeface="Calibri"/>
               </a:rPr>
-              <a:t>one cycle = 1/20000 second, so this whole picture happens 5000 times a second</a:t>
+              <a:t>one cycle = 1/20000 s; this picture repeats 5000 times a second</a:t>
             </a:r>
           </a:p>
         </p:txBody>
@@ -13288,47 +15859,6 @@
               <a:t>servo 4  -  stick right</a:t>
             </a:r>
           </a:p>
-          <a:p>
-            <a:pPr algn="l">
-              <a:lnSpc>
-                <a:spcPct val="100000"/>
-              </a:lnSpc>
-              <a:spcAft>
-                <a:spcPts val="400"/>
-              </a:spcAft>
-              <a:defRPr sz="1800" b="0">
-                <a:solidFill>
-                  <a:srgbClr val="222222"/>
-                </a:solidFill>
-                <a:latin typeface="Calibri"/>
-              </a:defRPr>
-            </a:pPr>
-          </a:p>
-          <a:p>
-            <a:pPr algn="l">
-              <a:lnSpc>
-                <a:spcPct val="100000"/>
-              </a:lnSpc>
-              <a:spcAft>
-                <a:spcPts val="400"/>
-              </a:spcAft>
-              <a:defRPr sz="1800" b="0">
-                <a:solidFill>
-                  <a:srgbClr val="222222"/>
-                </a:solidFill>
-                <a:latin typeface="Calibri"/>
-              </a:defRPr>
-            </a:pPr>
-            <a:r>
-              <a:rPr sz="1800" b="0">
-                <a:solidFill>
-                  <a:srgbClr val="222222"/>
-                </a:solidFill>
-                <a:latin typeface="Calibri"/>
-              </a:rPr>
-              <a:t>Each sits centred whenever the stick is not pushed its way, so one stick aims four independent things.</a:t>
-            </a:r>
-          </a:p>
         </p:txBody>
       </p:sp>
     </p:spTree>
@@ -13626,6 +16156,47 @@
                 </a:solidFill>
                 <a:latin typeface="Calibri"/>
               </a:rPr>
+              <a:t>Each sits centred whenever the stick is not pushed its way, so one stick aims four independent things.</a:t>
+            </a:r>
+          </a:p>
+          <a:p>
+            <a:pPr algn="l">
+              <a:lnSpc>
+                <a:spcPct val="100000"/>
+              </a:lnSpc>
+              <a:spcAft>
+                <a:spcPts val="400"/>
+              </a:spcAft>
+              <a:defRPr sz="1800" b="0">
+                <a:solidFill>
+                  <a:srgbClr val="222222"/>
+                </a:solidFill>
+                <a:latin typeface="Calibri"/>
+              </a:defRPr>
+            </a:pPr>
+          </a:p>
+          <a:p>
+            <a:pPr algn="l">
+              <a:lnSpc>
+                <a:spcPct val="100000"/>
+              </a:lnSpc>
+              <a:spcAft>
+                <a:spcPts val="400"/>
+              </a:spcAft>
+              <a:defRPr sz="1800" b="0">
+                <a:solidFill>
+                  <a:srgbClr val="222222"/>
+                </a:solidFill>
+                <a:latin typeface="Calibri"/>
+              </a:defRPr>
+            </a:pPr>
+            <a:r>
+              <a:rPr sz="1800" b="0">
+                <a:solidFill>
+                  <a:srgbClr val="222222"/>
+                </a:solidFill>
+                <a:latin typeface="Calibri"/>
+              </a:rPr>
               <a:t>Travel is 1.0 to 2.0 ms. 11.2 used 0.5 to 2.5, which can drive a servo into its mechanical end stops.</a:t>
             </a:r>
           </a:p>
@@ -13843,7 +16414,7 @@
         </p:nvSpPr>
         <p:spPr>
           <a:xfrm>
-            <a:off x="502920" y="1691640"/>
+            <a:off x="502920" y="1536192"/>
             <a:ext cx="1463040" cy="367792"/>
           </a:xfrm>
           <a:prstGeom prst="rect">
@@ -13891,7 +16462,7 @@
         </p:nvCxnSpPr>
         <p:spPr>
           <a:xfrm>
-            <a:off x="2057400" y="2130552"/>
+            <a:off x="2057400" y="1975104"/>
             <a:ext cx="7315200" cy="0"/>
           </a:xfrm>
           <a:prstGeom prst="line">
@@ -13926,7 +16497,7 @@
         </p:nvCxnSpPr>
         <p:spPr>
           <a:xfrm flipV="1">
-            <a:off x="2057400" y="1600200"/>
+            <a:off x="2057400" y="1444752"/>
             <a:ext cx="0" cy="530352"/>
           </a:xfrm>
           <a:prstGeom prst="line">
@@ -13961,7 +16532,7 @@
         </p:nvCxnSpPr>
         <p:spPr>
           <a:xfrm>
-            <a:off x="2057400" y="1600200"/>
+            <a:off x="2057400" y="1444752"/>
             <a:ext cx="365760" cy="0"/>
           </a:xfrm>
           <a:prstGeom prst="line">
@@ -13996,7 +16567,7 @@
         </p:nvCxnSpPr>
         <p:spPr>
           <a:xfrm>
-            <a:off x="2423160" y="1600200"/>
+            <a:off x="2423160" y="1444752"/>
             <a:ext cx="0" cy="530352"/>
           </a:xfrm>
           <a:prstGeom prst="line">
@@ -14031,7 +16602,7 @@
         </p:nvSpPr>
         <p:spPr>
           <a:xfrm>
-            <a:off x="2560320" y="1655064"/>
+            <a:off x="2560320" y="1499616"/>
             <a:ext cx="4114800" cy="367792"/>
           </a:xfrm>
           <a:prstGeom prst="rect">
@@ -14079,7 +16650,7 @@
         </p:nvSpPr>
         <p:spPr>
           <a:xfrm>
-            <a:off x="502920" y="2834640"/>
+            <a:off x="502920" y="2560320"/>
             <a:ext cx="1463040" cy="367792"/>
           </a:xfrm>
           <a:prstGeom prst="rect">
@@ -14127,7 +16698,7 @@
         </p:nvCxnSpPr>
         <p:spPr>
           <a:xfrm>
-            <a:off x="2057400" y="3273552"/>
+            <a:off x="2057400" y="2999232"/>
             <a:ext cx="7315200" cy="0"/>
           </a:xfrm>
           <a:prstGeom prst="line">
@@ -14162,7 +16733,7 @@
         </p:nvCxnSpPr>
         <p:spPr>
           <a:xfrm flipV="1">
-            <a:off x="2057400" y="2743200"/>
+            <a:off x="2057400" y="2468880"/>
             <a:ext cx="0" cy="530352"/>
           </a:xfrm>
           <a:prstGeom prst="line">
@@ -14197,7 +16768,7 @@
         </p:nvCxnSpPr>
         <p:spPr>
           <a:xfrm>
-            <a:off x="2057400" y="2743200"/>
+            <a:off x="2057400" y="2468880"/>
             <a:ext cx="548640" cy="0"/>
           </a:xfrm>
           <a:prstGeom prst="line">
@@ -14232,7 +16803,7 @@
         </p:nvCxnSpPr>
         <p:spPr>
           <a:xfrm>
-            <a:off x="2606040" y="2743200"/>
+            <a:off x="2606040" y="2468880"/>
             <a:ext cx="0" cy="530352"/>
           </a:xfrm>
           <a:prstGeom prst="line">
@@ -14267,7 +16838,7 @@
         </p:nvSpPr>
         <p:spPr>
           <a:xfrm>
-            <a:off x="2743200" y="2798064"/>
+            <a:off x="2743200" y="2523744"/>
             <a:ext cx="4114800" cy="367792"/>
           </a:xfrm>
           <a:prstGeom prst="rect">
@@ -14315,7 +16886,7 @@
         </p:nvSpPr>
         <p:spPr>
           <a:xfrm>
-            <a:off x="502920" y="3977640"/>
+            <a:off x="502920" y="3584448"/>
             <a:ext cx="1463040" cy="367792"/>
           </a:xfrm>
           <a:prstGeom prst="rect">
@@ -14363,7 +16934,7 @@
         </p:nvCxnSpPr>
         <p:spPr>
           <a:xfrm>
-            <a:off x="2057400" y="4416552"/>
+            <a:off x="2057400" y="4023360"/>
             <a:ext cx="7315200" cy="0"/>
           </a:xfrm>
           <a:prstGeom prst="line">
@@ -14398,7 +16969,7 @@
         </p:nvCxnSpPr>
         <p:spPr>
           <a:xfrm flipV="1">
-            <a:off x="2057400" y="3886200"/>
+            <a:off x="2057400" y="3493008"/>
             <a:ext cx="0" cy="530352"/>
           </a:xfrm>
           <a:prstGeom prst="line">
@@ -14433,7 +17004,7 @@
         </p:nvCxnSpPr>
         <p:spPr>
           <a:xfrm>
-            <a:off x="2057400" y="3886200"/>
+            <a:off x="2057400" y="3493008"/>
             <a:ext cx="731520" cy="0"/>
           </a:xfrm>
           <a:prstGeom prst="line">
@@ -14468,7 +17039,7 @@
         </p:nvCxnSpPr>
         <p:spPr>
           <a:xfrm>
-            <a:off x="2788920" y="3886200"/>
+            <a:off x="2788920" y="3493008"/>
             <a:ext cx="0" cy="530352"/>
           </a:xfrm>
           <a:prstGeom prst="line">
@@ -14503,7 +17074,7 @@
         </p:nvSpPr>
         <p:spPr>
           <a:xfrm>
-            <a:off x="2926080" y="3941064"/>
+            <a:off x="2926080" y="3547872"/>
             <a:ext cx="4114800" cy="367792"/>
           </a:xfrm>
           <a:prstGeom prst="rect">
@@ -14551,8 +17122,8 @@
         </p:nvSpPr>
         <p:spPr>
           <a:xfrm>
-            <a:off x="2057400" y="5029200"/>
-            <a:ext cx="7315200" cy="646684"/>
+            <a:off x="2057400" y="4517136"/>
+            <a:ext cx="7315200" cy="367792"/>
           </a:xfrm>
           <a:prstGeom prst="rect">
             <a:avLst/>
@@ -14586,7 +17157,7 @@
                 </a:solidFill>
                 <a:latin typeface="Calibri"/>
               </a:rPr>
-              <a:t>the whole cycle is 20 ms, repeated 50 times a second, whatever the pulse length</a:t>
+              <a:t>the whole cycle is 20 ms, repeated 50 times a second</a:t>
             </a:r>
           </a:p>
         </p:txBody>
@@ -14599,7 +17170,7 @@
         </p:nvSpPr>
         <p:spPr>
           <a:xfrm>
-            <a:off x="502920" y="5212080"/>
+            <a:off x="502920" y="5010911"/>
             <a:ext cx="11185855" cy="777240"/>
           </a:xfrm>
           <a:prstGeom prst="rect">
@@ -16848,6 +19419,22 @@
                 <a:latin typeface="Calibri"/>
               </a:defRPr>
             </a:pPr>
+          </a:p>
+          <a:p>
+            <a:pPr algn="l">
+              <a:lnSpc>
+                <a:spcPct val="100000"/>
+              </a:lnSpc>
+              <a:spcAft>
+                <a:spcPts val="900"/>
+              </a:spcAft>
+              <a:defRPr sz="1800" b="0">
+                <a:solidFill>
+                  <a:srgbClr val="222222"/>
+                </a:solidFill>
+                <a:latin typeface="Calibri"/>
+              </a:defRPr>
+            </a:pPr>
             <a:r>
               <a:rPr sz="1800" b="0">
                 <a:solidFill>
@@ -17809,56 +20396,6 @@
               <a:t>3.  bits 10, then  step  again. Compare.</a:t>
             </a:r>
           </a:p>
-          <a:p>
-            <a:pPr algn="l">
-              <a:lnSpc>
-                <a:spcPct val="100000"/>
-              </a:lnSpc>
-              <a:spcAft>
-                <a:spcPts val="400"/>
-              </a:spcAft>
-              <a:defRPr sz="1800" b="0">
-                <a:solidFill>
-                  <a:srgbClr val="222222"/>
-                </a:solidFill>
-                <a:latin typeface="Calibri"/>
-              </a:defRPr>
-            </a:pPr>
-            <a:r>
-              <a:rPr sz="1800" b="0">
-                <a:solidFill>
-                  <a:srgbClr val="222222"/>
-                </a:solidFill>
-                <a:latin typeface="Calibri"/>
-              </a:rPr>
-              <a:t>4.  Try  bits 12  then  freq 30000. Read what the console tells you.</a:t>
-            </a:r>
-          </a:p>
-          <a:p>
-            <a:pPr algn="l">
-              <a:lnSpc>
-                <a:spcPct val="100000"/>
-              </a:lnSpc>
-              <a:spcAft>
-                <a:spcPts val="400"/>
-              </a:spcAft>
-              <a:defRPr sz="1800" b="0">
-                <a:solidFill>
-                  <a:srgbClr val="222222"/>
-                </a:solidFill>
-                <a:latin typeface="Calibri"/>
-              </a:defRPr>
-            </a:pPr>
-            <a:r>
-              <a:rPr sz="1800" b="0">
-                <a:solidFill>
-                  <a:srgbClr val="222222"/>
-                </a:solidFill>
-                <a:latin typeface="Calibri"/>
-              </a:rPr>
-              <a:t>5.  Find the lowest  pct  at which the wheel turns at all. Is it the same at 8 bits and at 10?</a:t>
-            </a:r>
-          </a:p>
         </p:txBody>
       </p:sp>
       <p:sp>
@@ -18367,6 +20904,56 @@
             <a:spAutoFit/>
           </a:bodyPr>
           <a:lstStyle/>
+          <a:p>
+            <a:pPr algn="l">
+              <a:lnSpc>
+                <a:spcPct val="100000"/>
+              </a:lnSpc>
+              <a:spcAft>
+                <a:spcPts val="400"/>
+              </a:spcAft>
+              <a:defRPr sz="1800" b="0">
+                <a:solidFill>
+                  <a:srgbClr val="222222"/>
+                </a:solidFill>
+                <a:latin typeface="Calibri"/>
+              </a:defRPr>
+            </a:pPr>
+            <a:r>
+              <a:rPr sz="1800" b="0">
+                <a:solidFill>
+                  <a:srgbClr val="222222"/>
+                </a:solidFill>
+                <a:latin typeface="Calibri"/>
+              </a:rPr>
+              <a:t>4.  Try  bits 12  then  freq 30000. Read what the console tells you.</a:t>
+            </a:r>
+          </a:p>
+          <a:p>
+            <a:pPr algn="l">
+              <a:lnSpc>
+                <a:spcPct val="100000"/>
+              </a:lnSpc>
+              <a:spcAft>
+                <a:spcPts val="400"/>
+              </a:spcAft>
+              <a:defRPr sz="1800" b="0">
+                <a:solidFill>
+                  <a:srgbClr val="222222"/>
+                </a:solidFill>
+                <a:latin typeface="Calibri"/>
+              </a:defRPr>
+            </a:pPr>
+            <a:r>
+              <a:rPr sz="1800" b="0">
+                <a:solidFill>
+                  <a:srgbClr val="222222"/>
+                </a:solidFill>
+                <a:latin typeface="Calibri"/>
+              </a:rPr>
+              <a:t>5.  Find the lowest  pct  at which the wheel turns at all. Is it the same at 8 bits and at 10?</a:t>
+            </a:r>
+          </a:p>
           <a:p>
             <a:pPr algn="l">
               <a:lnSpc>
@@ -18786,4 +21373,324 @@
   </a:objectDefaults>
   <a:extraClrSchemeLst/>
 </a:theme>
+</file>
+
+<file path=ppt/theme/theme2.xml><?xml version="1.0" encoding="utf-8"?>
+<a:theme xmlns:a="http://schemas.openxmlformats.org/drawingml/2006/main" name="Office Theme">
+  <a:themeElements>
+    <a:clrScheme name="Office">
+      <a:dk1>
+        <a:sysClr val="windowText" lastClr="000000"/>
+      </a:dk1>
+      <a:lt1>
+        <a:sysClr val="window" lastClr="FFFFFF"/>
+      </a:lt1>
+      <a:dk2>
+        <a:srgbClr val="1F497D"/>
+      </a:dk2>
+      <a:lt2>
+        <a:srgbClr val="EEECE1"/>
+      </a:lt2>
+      <a:accent1>
+        <a:srgbClr val="4F81BD"/>
+      </a:accent1>
+      <a:accent2>
+        <a:srgbClr val="C0504D"/>
+      </a:accent2>
+      <a:accent3>
+        <a:srgbClr val="9BBB59"/>
+      </a:accent3>
+      <a:accent4>
+        <a:srgbClr val="8064A2"/>
+      </a:accent4>
+      <a:accent5>
+        <a:srgbClr val="4BACC6"/>
+      </a:accent5>
+      <a:accent6>
+        <a:srgbClr val="F79646"/>
+      </a:accent6>
+      <a:hlink>
+        <a:srgbClr val="0000FF"/>
+      </a:hlink>
+      <a:folHlink>
+        <a:srgbClr val="800080"/>
+      </a:folHlink>
+    </a:clrScheme>
+    <a:fontScheme name="Office">
+      <a:majorFont>
+        <a:latin typeface="Calibri"/>
+        <a:ea typeface=""/>
+        <a:cs typeface=""/>
+        <a:font script="Jpan" typeface="ＭＳ Ｐゴシック"/>
+        <a:font script="Hang" typeface="맑은 고딕"/>
+        <a:font script="Hans" typeface="宋体"/>
+        <a:font script="Hant" typeface="新細明體"/>
+        <a:font script="Arab" typeface="Times New Roman"/>
+        <a:font script="Hebr" typeface="Times New Roman"/>
+        <a:font script="Thai" typeface="Angsana New"/>
+        <a:font script="Ethi" typeface="Nyala"/>
+        <a:font script="Beng" typeface="Vrinda"/>
+        <a:font script="Gujr" typeface="Shruti"/>
+        <a:font script="Khmr" typeface="MoolBoran"/>
+        <a:font script="Knda" typeface="Tunga"/>
+        <a:font script="Guru" typeface="Raavi"/>
+        <a:font script="Cans" typeface="Euphemia"/>
+        <a:font script="Cher" typeface="Plantagenet Cherokee"/>
+        <a:font script="Yiii" typeface="Microsoft Yi Baiti"/>
+        <a:font script="Tibt" typeface="Microsoft Himalaya"/>
+        <a:font script="Thaa" typeface="MV Boli"/>
+        <a:font script="Deva" typeface="Mangal"/>
+        <a:font script="Telu" typeface="Gautami"/>
+        <a:font script="Taml" typeface="Latha"/>
+        <a:font script="Syrc" typeface="Estrangelo Edessa"/>
+        <a:font script="Orya" typeface="Kalinga"/>
+        <a:font script="Mlym" typeface="Kartika"/>
+        <a:font script="Laoo" typeface="DokChampa"/>
+        <a:font script="Sinh" typeface="Iskoola Pota"/>
+        <a:font script="Mong" typeface="Mongolian Baiti"/>
+        <a:font script="Viet" typeface="Times New Roman"/>
+        <a:font script="Uigh" typeface="Microsoft Uighur"/>
+        <a:font script="Geor" typeface="Sylfaen"/>
+      </a:majorFont>
+      <a:minorFont>
+        <a:latin typeface="Calibri"/>
+        <a:ea typeface=""/>
+        <a:cs typeface=""/>
+        <a:font script="Jpan" typeface="ＭＳ Ｐゴシック"/>
+        <a:font script="Hang" typeface="맑은 고딕"/>
+        <a:font script="Hans" typeface="宋体"/>
+        <a:font script="Hant" typeface="新細明體"/>
+        <a:font script="Arab" typeface="Arial"/>
+        <a:font script="Hebr" typeface="Arial"/>
+        <a:font script="Thai" typeface="Cordia New"/>
+        <a:font script="Ethi" typeface="Nyala"/>
+        <a:font script="Beng" typeface="Vrinda"/>
+        <a:font script="Gujr" typeface="Shruti"/>
+        <a:font script="Khmr" typeface="DaunPenh"/>
+        <a:font script="Knda" typeface="Tunga"/>
+        <a:font script="Guru" typeface="Raavi"/>
+        <a:font script="Cans" typeface="Euphemia"/>
+        <a:font script="Cher" typeface="Plantagenet Cherokee"/>
+        <a:font script="Yiii" typeface="Microsoft Yi Baiti"/>
+        <a:font script="Tibt" typeface="Microsoft Himalaya"/>
+        <a:font script="Thaa" typeface="MV Boli"/>
+        <a:font script="Deva" typeface="Mangal"/>
+        <a:font script="Telu" typeface="Gautami"/>
+        <a:font script="Taml" typeface="Latha"/>
+        <a:font script="Syrc" typeface="Estrangelo Edessa"/>
+        <a:font script="Orya" typeface="Kalinga"/>
+        <a:font script="Mlym" typeface="Kartika"/>
+        <a:font script="Laoo" typeface="DokChampa"/>
+        <a:font script="Sinh" typeface="Iskoola Pota"/>
+        <a:font script="Mong" typeface="Mongolian Baiti"/>
+        <a:font script="Viet" typeface="Arial"/>
+        <a:font script="Uigh" typeface="Microsoft Uighur"/>
+        <a:font script="Geor" typeface="Sylfaen"/>
+      </a:minorFont>
+    </a:fontScheme>
+    <a:fmtScheme name="Office">
+      <a:fillStyleLst>
+        <a:solidFill>
+          <a:schemeClr val="phClr"/>
+        </a:solidFill>
+        <a:gradFill rotWithShape="1">
+          <a:gsLst>
+            <a:gs pos="0">
+              <a:schemeClr val="phClr">
+                <a:tint val="50000"/>
+                <a:satMod val="300000"/>
+              </a:schemeClr>
+            </a:gs>
+            <a:gs pos="35000">
+              <a:schemeClr val="phClr">
+                <a:tint val="37000"/>
+                <a:satMod val="300000"/>
+              </a:schemeClr>
+            </a:gs>
+            <a:gs pos="100000">
+              <a:schemeClr val="phClr">
+                <a:tint val="15000"/>
+                <a:satMod val="350000"/>
+              </a:schemeClr>
+            </a:gs>
+          </a:gsLst>
+          <a:lin ang="16200000" scaled="1"/>
+        </a:gradFill>
+        <a:gradFill rotWithShape="1">
+          <a:gsLst>
+            <a:gs pos="0">
+              <a:schemeClr val="phClr">
+                <a:tint val="100000"/>
+                <a:shade val="100000"/>
+                <a:satMod val="130000"/>
+              </a:schemeClr>
+            </a:gs>
+            <a:gs pos="100000">
+              <a:schemeClr val="phClr">
+                <a:tint val="50000"/>
+                <a:shade val="100000"/>
+                <a:satMod val="350000"/>
+              </a:schemeClr>
+            </a:gs>
+          </a:gsLst>
+          <a:lin ang="16200000" scaled="0"/>
+        </a:gradFill>
+      </a:fillStyleLst>
+      <a:lnStyleLst>
+        <a:ln w="9525" cap="flat" cmpd="sng" algn="ctr">
+          <a:solidFill>
+            <a:schemeClr val="phClr">
+              <a:shade val="95000"/>
+              <a:satMod val="105000"/>
+            </a:schemeClr>
+          </a:solidFill>
+          <a:prstDash val="solid"/>
+        </a:ln>
+        <a:ln w="25400" cap="flat" cmpd="sng" algn="ctr">
+          <a:solidFill>
+            <a:schemeClr val="phClr"/>
+          </a:solidFill>
+          <a:prstDash val="solid"/>
+        </a:ln>
+        <a:ln w="38100" cap="flat" cmpd="sng" algn="ctr">
+          <a:solidFill>
+            <a:schemeClr val="phClr"/>
+          </a:solidFill>
+          <a:prstDash val="solid"/>
+        </a:ln>
+      </a:lnStyleLst>
+      <a:effectStyleLst>
+        <a:effectStyle>
+          <a:effectLst>
+            <a:outerShdw blurRad="40000" dist="20000" dir="5400000" rotWithShape="0">
+              <a:srgbClr val="000000">
+                <a:alpha val="38000"/>
+              </a:srgbClr>
+            </a:outerShdw>
+          </a:effectLst>
+        </a:effectStyle>
+        <a:effectStyle>
+          <a:effectLst>
+            <a:outerShdw blurRad="40000" dist="23000" dir="5400000" rotWithShape="0">
+              <a:srgbClr val="000000">
+                <a:alpha val="35000"/>
+              </a:srgbClr>
+            </a:outerShdw>
+          </a:effectLst>
+        </a:effectStyle>
+        <a:effectStyle>
+          <a:effectLst>
+            <a:outerShdw blurRad="40000" dist="23000" dir="5400000" rotWithShape="0">
+              <a:srgbClr val="000000">
+                <a:alpha val="35000"/>
+              </a:srgbClr>
+            </a:outerShdw>
+          </a:effectLst>
+          <a:scene3d>
+            <a:camera prst="orthographicFront">
+              <a:rot lat="0" lon="0" rev="0"/>
+            </a:camera>
+            <a:lightRig rig="threePt" dir="t">
+              <a:rot lat="0" lon="0" rev="1200000"/>
+            </a:lightRig>
+          </a:scene3d>
+          <a:sp3d>
+            <a:bevelT w="63500" h="25400"/>
+          </a:sp3d>
+        </a:effectStyle>
+      </a:effectStyleLst>
+      <a:bgFillStyleLst>
+        <a:solidFill>
+          <a:schemeClr val="phClr"/>
+        </a:solidFill>
+        <a:gradFill rotWithShape="1">
+          <a:gsLst>
+            <a:gs pos="0">
+              <a:schemeClr val="phClr">
+                <a:tint val="40000"/>
+                <a:satMod val="350000"/>
+              </a:schemeClr>
+            </a:gs>
+            <a:gs pos="40000">
+              <a:schemeClr val="phClr">
+                <a:tint val="45000"/>
+                <a:shade val="99000"/>
+                <a:satMod val="350000"/>
+              </a:schemeClr>
+            </a:gs>
+            <a:gs pos="100000">
+              <a:schemeClr val="phClr">
+                <a:shade val="20000"/>
+                <a:satMod val="255000"/>
+              </a:schemeClr>
+            </a:gs>
+          </a:gsLst>
+          <a:path path="circle">
+            <a:fillToRect l="50000" t="-80000" r="50000" b="180000"/>
+          </a:path>
+        </a:gradFill>
+        <a:gradFill rotWithShape="1">
+          <a:gsLst>
+            <a:gs pos="0">
+              <a:schemeClr val="phClr">
+                <a:tint val="80000"/>
+                <a:satMod val="300000"/>
+              </a:schemeClr>
+            </a:gs>
+            <a:gs pos="100000">
+              <a:schemeClr val="phClr">
+                <a:shade val="30000"/>
+                <a:satMod val="200000"/>
+              </a:schemeClr>
+            </a:gs>
+          </a:gsLst>
+          <a:path path="circle">
+            <a:fillToRect l="50000" t="50000" r="50000" b="50000"/>
+          </a:path>
+        </a:gradFill>
+      </a:bgFillStyleLst>
+    </a:fmtScheme>
+  </a:themeElements>
+  <a:objectDefaults>
+    <a:spDef>
+      <a:spPr/>
+      <a:bodyPr/>
+      <a:lstStyle/>
+      <a:style>
+        <a:lnRef idx="1">
+          <a:schemeClr val="accent1"/>
+        </a:lnRef>
+        <a:fillRef idx="3">
+          <a:schemeClr val="accent1"/>
+        </a:fillRef>
+        <a:effectRef idx="2">
+          <a:schemeClr val="accent1"/>
+        </a:effectRef>
+        <a:fontRef idx="minor">
+          <a:schemeClr val="lt1"/>
+        </a:fontRef>
+      </a:style>
+    </a:spDef>
+    <a:lnDef>
+      <a:spPr/>
+      <a:bodyPr/>
+      <a:lstStyle/>
+      <a:style>
+        <a:lnRef idx="2">
+          <a:schemeClr val="accent1"/>
+        </a:lnRef>
+        <a:fillRef idx="0">
+          <a:schemeClr val="accent1"/>
+        </a:fillRef>
+        <a:effectRef idx="1">
+          <a:schemeClr val="accent1"/>
+        </a:effectRef>
+        <a:fontRef idx="minor">
+          <a:schemeClr val="tx1"/>
+        </a:fontRef>
+      </a:style>
+    </a:lnDef>
+  </a:objectDefaults>
+  <a:extraClrSchemeLst/>
+</a:theme>
 </file>
--- a/ground-vehicle/docs/courses/advanced/l2_motors_and_ramping.pptx
+++ b/ground-vehicle/docs/courses/advanced/l2_motors_and_ramping.pptx
@@ -1084,7 +1084,7 @@
               <a:rPr sz="1200">
                 <a:latin typeface="Calibri"/>
               </a:rPr>
-              <a:t>Steps 1 and 2 are a feel test. Pinching the tyre gently is the load - warn them to be gentle and to keep fingers clear of the spokes.</a:t>
+              <a:t>Steps 1 and 2 are a feel test. Pinching the tire gently is the load - warn them to be gentle and to keep fingers clear of the spokes.</a:t>
             </a:r>
           </a:p>
           <a:p>
@@ -1190,7 +1190,7 @@
               <a:rPr sz="1200">
                 <a:latin typeface="Calibri"/>
               </a:rPr>
-              <a:t>Steps 1 and 2 are a feel test. Pinching the tyre gently is the load - warn them to be gentle and to keep fingers clear of the spokes.</a:t>
+              <a:t>Steps 1 and 2 are a feel test. Pinching the tire gently is the load - warn them to be gentle and to keep fingers clear of the spokes.</a:t>
             </a:r>
           </a:p>
           <a:p>
@@ -1311,7 +1311,7 @@
               <a:rPr sz="1200">
                 <a:latin typeface="Calibri"/>
               </a:rPr>
-              <a:t>Duty cycle is a percentage, which is why the maths lesson and the motor lesson are the same lesson.</a:t>
+              <a:t>Duty cycle is a percentage, which is why the math lesson and the motor lesson are the same lesson.</a:t>
             </a:r>
           </a:p>
         </p:txBody>
@@ -1416,7 +1416,7 @@
               <a:rPr sz="1200">
                 <a:latin typeface="Calibri"/>
               </a:rPr>
-              <a:t>Sign comes off at the start and goes back on at the end, so the maths in the middle only ever deals with positive numbers.</a:t>
+              <a:t>Sign comes off at the start and goes back on at the end, so the math in the middle only ever deals with positive numbers.</a:t>
             </a:r>
           </a:p>
         </p:txBody>
@@ -1505,7 +1505,7 @@
               <a:rPr sz="1200">
                 <a:latin typeface="Calibri"/>
               </a:rPr>
-              <a:t>The four-servo scheme surprises people. One stick, four servos, each owning one direction and centred otherwise.</a:t>
+              <a:t>The four-servo scheme surprises people. One stick, four servos, each owning one direction and centerd otherwise.</a:t>
             </a:r>
           </a:p>
           <a:p>
@@ -1667,7 +1667,7 @@
               <a:rPr sz="1200">
                 <a:latin typeface="Calibri"/>
               </a:rPr>
-              <a:t>1.0 ms is one end, 1.5 ms is centre, 2.0 ms is the other end. Those three numbers are the whole protocol.</a:t>
+              <a:t>1.0 ms is one end, 1.5 ms is center, 2.0 ms is the other end. Those three numbers are the whole protocol.</a:t>
             </a:r>
           </a:p>
           <a:p>
@@ -9604,7 +9604,7 @@
                 </a:solidFill>
                 <a:latin typeface="Calibri"/>
               </a:rPr>
-              <a:t>1.  sign, then  go 100. Now pinch the tyre gently.</a:t>
+              <a:t>1.  sign, then  go 100. Now pinch the tire gently.</a:t>
             </a:r>
           </a:p>
           <a:p>
@@ -13795,7 +13795,7 @@
                 </a:solidFill>
                 <a:latin typeface="Calibri"/>
               </a:rPr>
-              <a:t>Each sits centred whenever the stick is not pushed its way, so one stick aims four independent things.</a:t>
+              <a:t>Each sits centerd whenever the stick is not pushed its way, so one stick aims four independent things.</a:t>
             </a:r>
           </a:p>
           <a:p>
@@ -14912,7 +14912,7 @@
                 </a:solidFill>
                 <a:latin typeface="Calibri"/>
               </a:rPr>
-              <a:t>centred</a:t>
+              <a:t>centerd</a:t>
             </a:r>
           </a:p>
         </p:txBody>

--- a/ground-vehicle/docs/courses/advanced/l2_motors_and_ramping.pptx
+++ b/ground-vehicle/docs/courses/advanced/l2_motors_and_ramping.pptx
@@ -9570,7 +9570,7 @@
         <p:spPr>
           <a:xfrm>
             <a:off x="502920" y="1901952"/>
-            <a:ext cx="5387187" cy="4361688"/>
+            <a:ext cx="6249137" cy="4361688"/>
           </a:xfrm>
           <a:prstGeom prst="rect">
             <a:avLst/>
@@ -9667,8 +9667,8 @@
         </p:nvSpPr>
         <p:spPr>
           <a:xfrm>
-            <a:off x="6301587" y="1901952"/>
-            <a:ext cx="5387187" cy="365760"/>
+            <a:off x="7163537" y="1901952"/>
+            <a:ext cx="4525238" cy="365760"/>
           </a:xfrm>
           <a:prstGeom prst="rect">
             <a:avLst/>
@@ -9715,8 +9715,8 @@
         </p:nvSpPr>
         <p:spPr>
           <a:xfrm>
-            <a:off x="6301587" y="2304288"/>
-            <a:ext cx="5387187" cy="1778508"/>
+            <a:off x="7163537" y="2304288"/>
+            <a:ext cx="4525238" cy="1458305"/>
           </a:xfrm>
           <a:prstGeom prst="rect">
             <a:avLst/>
@@ -9736,15 +9736,15 @@
               <a:spcAft>
                 <a:spcPts val="300"/>
               </a:spcAft>
-              <a:defRPr sz="2600" b="0">
-                <a:solidFill>
-                  <a:srgbClr val="222222"/>
-                </a:solidFill>
-                <a:latin typeface="Calibri"/>
-              </a:defRPr>
-            </a:pPr>
-            <a:r>
-              <a:rPr sz="2600" b="0">
+              <a:defRPr sz="2200" b="0">
+                <a:solidFill>
+                  <a:srgbClr val="222222"/>
+                </a:solidFill>
+                <a:latin typeface="Calibri"/>
+              </a:defRPr>
+            </a:pPr>
+            <a:r>
+              <a:rPr sz="2200" b="0">
                 <a:solidFill>
                   <a:srgbClr val="222222"/>
                 </a:solidFill>
@@ -9763,8 +9763,8 @@
         </p:nvSpPr>
         <p:spPr>
           <a:xfrm>
-            <a:off x="6301587" y="4119372"/>
-            <a:ext cx="5387187" cy="365760"/>
+            <a:off x="7163537" y="3835745"/>
+            <a:ext cx="4525238" cy="365760"/>
           </a:xfrm>
           <a:prstGeom prst="rect">
             <a:avLst/>
@@ -9811,8 +9811,8 @@
         </p:nvSpPr>
         <p:spPr>
           <a:xfrm>
-            <a:off x="6301587" y="4521708"/>
-            <a:ext cx="5387187" cy="1778508"/>
+            <a:off x="7163537" y="4238081"/>
+            <a:ext cx="4525238" cy="2025558"/>
           </a:xfrm>
           <a:prstGeom prst="rect">
             <a:avLst/>
@@ -9830,17 +9830,17 @@
                 <a:spcPct val="100000"/>
               </a:lnSpc>
               <a:spcAft>
-                <a:spcPts val="300"/>
-              </a:spcAft>
-              <a:defRPr sz="2600" b="0">
-                <a:solidFill>
-                  <a:srgbClr val="222222"/>
-                </a:solidFill>
-                <a:latin typeface="Calibri"/>
-              </a:defRPr>
-            </a:pPr>
-            <a:r>
-              <a:rPr sz="2600" b="0">
+                <a:spcPts val="600"/>
+              </a:spcAft>
+              <a:defRPr sz="2800" b="0">
+                <a:solidFill>
+                  <a:srgbClr val="222222"/>
+                </a:solidFill>
+                <a:latin typeface="Calibri"/>
+              </a:defRPr>
+            </a:pPr>
+            <a:r>
+              <a:rPr sz="2800" b="0">
                 <a:solidFill>
                   <a:srgbClr val="222222"/>
                 </a:solidFill>
@@ -9855,17 +9855,17 @@
                 <a:spcPct val="100000"/>
               </a:lnSpc>
               <a:spcAft>
-                <a:spcPts val="300"/>
-              </a:spcAft>
-              <a:defRPr sz="2600" b="0">
-                <a:solidFill>
-                  <a:srgbClr val="222222"/>
-                </a:solidFill>
-                <a:latin typeface="Calibri"/>
-              </a:defRPr>
-            </a:pPr>
-            <a:r>
-              <a:rPr sz="2600" b="0">
+                <a:spcPts val="600"/>
+              </a:spcAft>
+              <a:defRPr sz="2800" b="0">
+                <a:solidFill>
+                  <a:srgbClr val="222222"/>
+                </a:solidFill>
+                <a:latin typeface="Calibri"/>
+              </a:defRPr>
+            </a:pPr>
+            <a:r>
+              <a:rPr sz="2800" b="0">
                 <a:solidFill>
                   <a:srgbClr val="222222"/>
                 </a:solidFill>
@@ -10153,7 +10153,7 @@
         <p:spPr>
           <a:xfrm>
             <a:off x="502920" y="1901952"/>
-            <a:ext cx="11185855" cy="3172968"/>
+            <a:ext cx="11185855" cy="3273552"/>
           </a:xfrm>
           <a:prstGeom prst="rect">
             <a:avLst/>
@@ -18348,7 +18348,7 @@
         <p:spPr>
           <a:xfrm>
             <a:off x="502920" y="1901952"/>
-            <a:ext cx="5387187" cy="3172968"/>
+            <a:ext cx="6249137" cy="3273552"/>
           </a:xfrm>
           <a:prstGeom prst="rect">
             <a:avLst/>
@@ -18366,7 +18366,7 @@
                 <a:spcPct val="100000"/>
               </a:lnSpc>
               <a:spcAft>
-                <a:spcPts val="400"/>
+                <a:spcPts val="800"/>
               </a:spcAft>
               <a:defRPr sz="1800" b="0">
                 <a:solidFill>
@@ -18391,7 +18391,7 @@
                 <a:spcPct val="100000"/>
               </a:lnSpc>
               <a:spcAft>
-                <a:spcPts val="400"/>
+                <a:spcPts val="800"/>
               </a:spcAft>
               <a:defRPr sz="1800" b="0">
                 <a:solidFill>
@@ -18416,7 +18416,7 @@
                 <a:spcPct val="100000"/>
               </a:lnSpc>
               <a:spcAft>
-                <a:spcPts val="400"/>
+                <a:spcPts val="800"/>
               </a:spcAft>
               <a:defRPr sz="1800" b="0">
                 <a:solidFill>
@@ -18441,7 +18441,7 @@
                 <a:spcPct val="100000"/>
               </a:lnSpc>
               <a:spcAft>
-                <a:spcPts val="400"/>
+                <a:spcPts val="800"/>
               </a:spcAft>
               <a:defRPr sz="1800" b="0">
                 <a:solidFill>
@@ -18466,7 +18466,7 @@
                 <a:spcPct val="100000"/>
               </a:lnSpc>
               <a:spcAft>
-                <a:spcPts val="400"/>
+                <a:spcPts val="800"/>
               </a:spcAft>
               <a:defRPr sz="1800" b="0">
                 <a:solidFill>
@@ -18491,7 +18491,7 @@
                 <a:spcPct val="100000"/>
               </a:lnSpc>
               <a:spcAft>
-                <a:spcPts val="400"/>
+                <a:spcPts val="800"/>
               </a:spcAft>
               <a:defRPr sz="1800" b="0">
                 <a:solidFill>
@@ -18520,8 +18520,8 @@
         </p:nvSpPr>
         <p:spPr>
           <a:xfrm>
-            <a:off x="6301587" y="1901952"/>
-            <a:ext cx="5387187" cy="365760"/>
+            <a:off x="7163537" y="1901952"/>
+            <a:ext cx="4525238" cy="365760"/>
           </a:xfrm>
           <a:prstGeom prst="rect">
             <a:avLst/>
@@ -18568,8 +18568,8 @@
         </p:nvSpPr>
         <p:spPr>
           <a:xfrm>
-            <a:off x="6301587" y="2304288"/>
-            <a:ext cx="5387187" cy="1184148"/>
+            <a:off x="7163537" y="2304288"/>
+            <a:ext cx="4525238" cy="1002823"/>
           </a:xfrm>
           <a:prstGeom prst="rect">
             <a:avLst/>
@@ -18589,15 +18589,15 @@
               <a:spcAft>
                 <a:spcPts val="300"/>
               </a:spcAft>
-              <a:defRPr sz="2300" b="0">
-                <a:solidFill>
-                  <a:srgbClr val="222222"/>
-                </a:solidFill>
-                <a:latin typeface="Calibri"/>
-              </a:defRPr>
-            </a:pPr>
-            <a:r>
-              <a:rPr sz="2300" b="0">
+              <a:defRPr sz="1900" b="0">
+                <a:solidFill>
+                  <a:srgbClr val="222222"/>
+                </a:solidFill>
+                <a:latin typeface="Calibri"/>
+              </a:defRPr>
+            </a:pPr>
+            <a:r>
+              <a:rPr sz="1900" b="0">
                 <a:solidFill>
                   <a:srgbClr val="222222"/>
                 </a:solidFill>
@@ -18616,8 +18616,8 @@
         </p:nvSpPr>
         <p:spPr>
           <a:xfrm>
-            <a:off x="6301587" y="3525012"/>
-            <a:ext cx="5387187" cy="365760"/>
+            <a:off x="7163537" y="3380263"/>
+            <a:ext cx="4525238" cy="365760"/>
           </a:xfrm>
           <a:prstGeom prst="rect">
             <a:avLst/>
@@ -18664,8 +18664,8 @@
         </p:nvSpPr>
         <p:spPr>
           <a:xfrm>
-            <a:off x="6301587" y="3927348"/>
-            <a:ext cx="5387187" cy="1184148"/>
+            <a:off x="7163537" y="3782599"/>
+            <a:ext cx="4525238" cy="1392904"/>
           </a:xfrm>
           <a:prstGeom prst="rect">
             <a:avLst/>
@@ -18683,7 +18683,7 @@
                 <a:spcPct val="100000"/>
               </a:lnSpc>
               <a:spcAft>
-                <a:spcPts val="200"/>
+                <a:spcPts val="300"/>
               </a:spcAft>
               <a:defRPr sz="1800" b="0">
                 <a:solidFill>
@@ -18708,7 +18708,7 @@
                 <a:spcPct val="100000"/>
               </a:lnSpc>
               <a:spcAft>
-                <a:spcPts val="200"/>
+                <a:spcPts val="300"/>
               </a:spcAft>
               <a:defRPr sz="1800" b="0">
                 <a:solidFill>

--- a/ground-vehicle/docs/courses/advanced/l2_motors_and_ramping.pptx
+++ b/ground-vehicle/docs/courses/advanced/l2_motors_and_ramping.pptx
@@ -6414,22 +6414,24 @@
       <p:grpSpPr/>
       <p:sp>
         <p:nvSpPr>
-          <p:cNvPr id="2" name="Title 1"/>
-          <p:cNvSpPr>
-            <a:spLocks noGrp="1"/>
-          </p:cNvSpPr>
-          <p:nvPr>
-            <p:ph type="title"/>
-          </p:nvPr>
-        </p:nvSpPr>
-        <p:spPr>
-          <a:xfrm>
-            <a:off x="502920" y="274320"/>
-            <a:ext cx="11185855" cy="777240"/>
-          </a:xfrm>
-        </p:spPr>
-        <p:txBody>
-          <a:bodyPr wrap="square" anchor="b"/>
+          <p:cNvPr id="2" name="TextBox 1"/>
+          <p:cNvSpPr txBox="1"/>
+          <p:nvPr/>
+        </p:nvSpPr>
+        <p:spPr>
+          <a:xfrm>
+            <a:off x="502920" y="6382512"/>
+            <a:ext cx="10545775" cy="274320"/>
+          </a:xfrm>
+          <a:prstGeom prst="rect">
+            <a:avLst/>
+          </a:prstGeom>
+          <a:noFill/>
+        </p:spPr>
+        <p:txBody>
+          <a:bodyPr wrap="square" lIns="0" tIns="0">
+            <a:spAutoFit/>
+          </a:bodyPr>
           <a:lstStyle/>
           <a:p>
             <a:pPr algn="l">
@@ -6439,41 +6441,89 @@
               <a:spcAft>
                 <a:spcPts val="0"/>
               </a:spcAft>
-              <a:defRPr sz="2800" b="1">
-                <a:solidFill>
-                  <a:srgbClr val="1F3A5F"/>
-                </a:solidFill>
-                <a:latin typeface="Calibri"/>
-              </a:defRPr>
-            </a:pPr>
-            <a:r>
-              <a:rPr sz="2800" b="1">
-                <a:solidFill>
-                  <a:srgbClr val="1F3A5F"/>
-                </a:solidFill>
-                <a:latin typeface="Calibri"/>
-              </a:rPr>
-              <a:t>Where we are</a:t>
-            </a:r>
-          </a:p>
-        </p:txBody>
-      </p:sp>
-      <p:sp>
-        <p:nvSpPr>
-          <p:cNvPr id="3" name="Rectangle 2"/>
+              <a:defRPr sz="1000" b="0">
+                <a:solidFill>
+                  <a:srgbClr val="666666"/>
+                </a:solidFill>
+                <a:latin typeface="Calibri"/>
+              </a:defRPr>
+            </a:pPr>
+            <a:r>
+              <a:rPr sz="1000" b="0">
+                <a:solidFill>
+                  <a:srgbClr val="666666"/>
+                </a:solidFill>
+                <a:latin typeface="Calibri"/>
+              </a:rPr>
+              <a:t>Pathfinder Advanced - Op Program 12  |  Lesson 2</a:t>
+            </a:r>
+          </a:p>
+        </p:txBody>
+      </p:sp>
+      <p:sp>
+        <p:nvSpPr>
+          <p:cNvPr id="3" name="TextBox 2"/>
+          <p:cNvSpPr txBox="1"/>
+          <p:nvPr/>
+        </p:nvSpPr>
+        <p:spPr>
+          <a:xfrm>
+            <a:off x="11231575" y="6382512"/>
+            <a:ext cx="457200" cy="274320"/>
+          </a:xfrm>
+          <a:prstGeom prst="rect">
+            <a:avLst/>
+          </a:prstGeom>
+          <a:noFill/>
+        </p:spPr>
+        <p:txBody>
+          <a:bodyPr wrap="square" lIns="0" tIns="0">
+            <a:spAutoFit/>
+          </a:bodyPr>
+          <a:lstStyle/>
+          <a:p>
+            <a:pPr algn="r">
+              <a:lnSpc>
+                <a:spcPct val="100000"/>
+              </a:lnSpc>
+              <a:spcAft>
+                <a:spcPts val="0"/>
+              </a:spcAft>
+              <a:defRPr sz="1000" b="0">
+                <a:solidFill>
+                  <a:srgbClr val="666666"/>
+                </a:solidFill>
+                <a:latin typeface="Calibri"/>
+              </a:defRPr>
+            </a:pPr>
+            <a:r>
+              <a:rPr sz="1000" b="0">
+                <a:solidFill>
+                  <a:srgbClr val="666666"/>
+                </a:solidFill>
+                <a:latin typeface="Calibri"/>
+              </a:rPr>
+              <a:t>10</a:t>
+            </a:r>
+          </a:p>
+        </p:txBody>
+      </p:sp>
+      <p:sp>
+        <p:nvSpPr>
+          <p:cNvPr id="4" name="Rectangle 3"/>
           <p:cNvSpPr/>
           <p:nvPr/>
         </p:nvSpPr>
         <p:spPr>
           <a:xfrm>
-            <a:off x="502920" y="1097280"/>
-            <a:ext cx="11185855" cy="19050"/>
+            <a:off x="0" y="1234440"/>
+            <a:ext cx="256032" cy="1554480"/>
           </a:xfrm>
           <a:prstGeom prst="rect">
             <a:avLst/>
           </a:prstGeom>
           <a:solidFill>
-            <a:srgbClr val="C8D2DE"/>
+            <a:srgbClr val="0E7C86"/>
           </a:solidFill>
           <a:ln>
             <a:noFill/>
@@ -6504,14 +6554,14 @@
       </p:sp>
       <p:sp>
         <p:nvSpPr>
-          <p:cNvPr id="4" name="TextBox 3"/>
+          <p:cNvPr id="5" name="TextBox 4"/>
           <p:cNvSpPr txBox="1"/>
           <p:nvPr/>
         </p:nvSpPr>
         <p:spPr>
           <a:xfrm>
-            <a:off x="502920" y="6382512"/>
-            <a:ext cx="10545775" cy="274320"/>
+            <a:off x="777240" y="1325880"/>
+            <a:ext cx="10515600" cy="1051560"/>
           </a:xfrm>
           <a:prstGeom prst="rect">
             <a:avLst/>
@@ -6519,7 +6569,7 @@
           <a:noFill/>
         </p:spPr>
         <p:txBody>
-          <a:bodyPr wrap="square" lIns="0" tIns="0">
+          <a:bodyPr wrap="square" lIns="0" tIns="0" rIns="0" bIns="0">
             <a:spAutoFit/>
           </a:bodyPr>
           <a:lstStyle/>
@@ -6531,35 +6581,35 @@
               <a:spcAft>
                 <a:spcPts val="0"/>
               </a:spcAft>
-              <a:defRPr sz="1000" b="0">
-                <a:solidFill>
-                  <a:srgbClr val="666666"/>
-                </a:solidFill>
-                <a:latin typeface="Calibri"/>
-              </a:defRPr>
-            </a:pPr>
-            <a:r>
-              <a:rPr sz="1000" b="0">
-                <a:solidFill>
-                  <a:srgbClr val="666666"/>
-                </a:solidFill>
-                <a:latin typeface="Calibri"/>
-              </a:rPr>
-              <a:t>Pathfinder Advanced - Op Program 12  |  Lesson 2</a:t>
-            </a:r>
-          </a:p>
-        </p:txBody>
-      </p:sp>
-      <p:sp>
-        <p:nvSpPr>
-          <p:cNvPr id="5" name="TextBox 4"/>
+              <a:defRPr sz="3600" b="1">
+                <a:solidFill>
+                  <a:srgbClr val="1F3A5F"/>
+                </a:solidFill>
+                <a:latin typeface="Calibri"/>
+              </a:defRPr>
+            </a:pPr>
+            <a:r>
+              <a:rPr sz="3600" b="1">
+                <a:solidFill>
+                  <a:srgbClr val="1F3A5F"/>
+                </a:solidFill>
+                <a:latin typeface="Calibri"/>
+              </a:rPr>
+              <a:t>Decay and ramping</a:t>
+            </a:r>
+          </a:p>
+        </p:txBody>
+      </p:sp>
+      <p:sp>
+        <p:nvSpPr>
+          <p:cNvPr id="6" name="TextBox 5"/>
           <p:cNvSpPr txBox="1"/>
           <p:nvPr/>
         </p:nvSpPr>
         <p:spPr>
           <a:xfrm>
-            <a:off x="11231575" y="6382512"/>
-            <a:ext cx="457200" cy="274320"/>
+            <a:off x="777240" y="2423160"/>
+            <a:ext cx="10515600" cy="685800"/>
           </a:xfrm>
           <a:prstGeom prst="rect">
             <a:avLst/>
@@ -6567,19 +6617,19 @@
           <a:noFill/>
         </p:spPr>
         <p:txBody>
-          <a:bodyPr wrap="square" lIns="0" tIns="0">
+          <a:bodyPr wrap="square" lIns="0" tIns="0" rIns="0" bIns="0">
             <a:spAutoFit/>
           </a:bodyPr>
           <a:lstStyle/>
           <a:p>
-            <a:pPr algn="r">
-              <a:lnSpc>
-                <a:spcPct val="100000"/>
-              </a:lnSpc>
-              <a:spcAft>
-                <a:spcPts val="0"/>
-              </a:spcAft>
-              <a:defRPr sz="1000" b="0">
+            <a:pPr algn="l">
+              <a:lnSpc>
+                <a:spcPct val="100000"/>
+              </a:lnSpc>
+              <a:spcAft>
+                <a:spcPts val="400"/>
+              </a:spcAft>
+              <a:defRPr sz="1600" b="0">
                 <a:solidFill>
                   <a:srgbClr val="666666"/>
                 </a:solidFill>
@@ -6587,27 +6637,27 @@
               </a:defRPr>
             </a:pPr>
             <a:r>
-              <a:rPr sz="1000" b="0">
+              <a:rPr sz="1600" b="0">
                 <a:solidFill>
                   <a:srgbClr val="666666"/>
                 </a:solidFill>
                 <a:latin typeface="Calibri"/>
               </a:rPr>
-              <a:t>10</a:t>
-            </a:r>
-          </a:p>
-        </p:txBody>
-      </p:sp>
-      <p:sp>
-        <p:nvSpPr>
-          <p:cNvPr id="6" name="Rounded Rectangle 5"/>
+              <a:t>About 35 minutes</a:t>
+            </a:r>
+          </a:p>
+        </p:txBody>
+      </p:sp>
+      <p:sp>
+        <p:nvSpPr>
+          <p:cNvPr id="7" name="Rounded Rectangle 6"/>
           <p:cNvSpPr/>
           <p:nvPr/>
         </p:nvSpPr>
         <p:spPr>
           <a:xfrm>
-            <a:off x="502920" y="2240280"/>
-            <a:ext cx="3631082" cy="1737360"/>
+            <a:off x="502920" y="3886200"/>
+            <a:ext cx="3631082" cy="1325880"/>
           </a:xfrm>
           <a:prstGeom prst="roundRect">
             <a:avLst>
@@ -6670,14 +6720,14 @@
       </p:sp>
       <p:sp>
         <p:nvSpPr>
-          <p:cNvPr id="7" name="TextBox 6"/>
+          <p:cNvPr id="8" name="TextBox 7"/>
           <p:cNvSpPr txBox="1"/>
           <p:nvPr/>
         </p:nvSpPr>
         <p:spPr>
           <a:xfrm>
-            <a:off x="502920" y="1856232"/>
-            <a:ext cx="3631082" cy="347472"/>
+            <a:off x="502920" y="3520440"/>
+            <a:ext cx="3631082" cy="310896"/>
           </a:xfrm>
           <a:prstGeom prst="rect">
             <a:avLst/>
@@ -6695,9 +6745,9 @@
                 <a:spcPct val="100000"/>
               </a:lnSpc>
               <a:spcAft>
-                <a:spcPts val="600"/>
-              </a:spcAft>
-              <a:defRPr sz="1200" b="1">
+                <a:spcPts val="200"/>
+              </a:spcAft>
+              <a:defRPr sz="1100" b="1">
                 <a:solidFill>
                   <a:srgbClr val="0E7C86"/>
                 </a:solidFill>
@@ -6705,7 +6755,7 @@
               </a:defRPr>
             </a:pPr>
             <a:r>
-              <a:rPr sz="1200" b="1">
+              <a:rPr sz="1100" b="1">
                 <a:solidFill>
                   <a:srgbClr val="0E7C86"/>
                 </a:solidFill>
@@ -6718,14 +6768,14 @@
       </p:sp>
       <p:sp>
         <p:nvSpPr>
-          <p:cNvPr id="8" name="Rounded Rectangle 7"/>
+          <p:cNvPr id="9" name="Rounded Rectangle 8"/>
           <p:cNvSpPr/>
           <p:nvPr/>
         </p:nvSpPr>
         <p:spPr>
           <a:xfrm>
-            <a:off x="4280306" y="2240280"/>
-            <a:ext cx="3631082" cy="1737360"/>
+            <a:off x="4280306" y="3886200"/>
+            <a:ext cx="3631082" cy="1325880"/>
           </a:xfrm>
           <a:prstGeom prst="roundRect">
             <a:avLst>
@@ -6788,14 +6838,14 @@
       </p:sp>
       <p:sp>
         <p:nvSpPr>
-          <p:cNvPr id="9" name="TextBox 8"/>
+          <p:cNvPr id="10" name="TextBox 9"/>
           <p:cNvSpPr txBox="1"/>
           <p:nvPr/>
         </p:nvSpPr>
         <p:spPr>
           <a:xfrm>
-            <a:off x="4280306" y="1856232"/>
-            <a:ext cx="3631082" cy="347472"/>
+            <a:off x="4280306" y="3520440"/>
+            <a:ext cx="3631082" cy="310896"/>
           </a:xfrm>
           <a:prstGeom prst="rect">
             <a:avLst/>
@@ -6813,9 +6863,9 @@
                 <a:spcPct val="100000"/>
               </a:lnSpc>
               <a:spcAft>
-                <a:spcPts val="600"/>
-              </a:spcAft>
-              <a:defRPr sz="1200" b="1">
+                <a:spcPts val="200"/>
+              </a:spcAft>
+              <a:defRPr sz="1100" b="1">
                 <a:solidFill>
                   <a:srgbClr val="0E7C86"/>
                 </a:solidFill>
@@ -6823,7 +6873,7 @@
               </a:defRPr>
             </a:pPr>
             <a:r>
-              <a:rPr sz="1200" b="1">
+              <a:rPr sz="1100" b="1">
                 <a:solidFill>
                   <a:srgbClr val="0E7C86"/>
                 </a:solidFill>
@@ -6836,14 +6886,14 @@
       </p:sp>
       <p:sp>
         <p:nvSpPr>
-          <p:cNvPr id="10" name="Rounded Rectangle 9"/>
+          <p:cNvPr id="11" name="Rounded Rectangle 10"/>
           <p:cNvSpPr/>
           <p:nvPr/>
         </p:nvSpPr>
         <p:spPr>
           <a:xfrm>
-            <a:off x="8057692" y="2240280"/>
-            <a:ext cx="3631082" cy="1737360"/>
+            <a:off x="8057692" y="3886200"/>
+            <a:ext cx="3631082" cy="1325880"/>
           </a:xfrm>
           <a:prstGeom prst="roundRect">
             <a:avLst>
@@ -6906,14 +6956,14 @@
       </p:sp>
       <p:sp>
         <p:nvSpPr>
-          <p:cNvPr id="11" name="TextBox 10"/>
+          <p:cNvPr id="12" name="TextBox 11"/>
           <p:cNvSpPr txBox="1"/>
           <p:nvPr/>
         </p:nvSpPr>
         <p:spPr>
           <a:xfrm>
-            <a:off x="8057692" y="1856232"/>
-            <a:ext cx="3631082" cy="347472"/>
+            <a:off x="8057692" y="3520440"/>
+            <a:ext cx="3631082" cy="310896"/>
           </a:xfrm>
           <a:prstGeom prst="rect">
             <a:avLst/>
@@ -6931,9 +6981,9 @@
                 <a:spcPct val="100000"/>
               </a:lnSpc>
               <a:spcAft>
-                <a:spcPts val="600"/>
-              </a:spcAft>
-              <a:defRPr sz="1200" b="1">
+                <a:spcPts val="200"/>
+              </a:spcAft>
+              <a:defRPr sz="1100" b="1">
                 <a:solidFill>
                   <a:srgbClr val="0E7C86"/>
                 </a:solidFill>
@@ -6941,7 +6991,7 @@
               </a:defRPr>
             </a:pPr>
             <a:r>
-              <a:rPr sz="1200" b="1">
+              <a:rPr sz="1100" b="1">
                 <a:solidFill>
                   <a:srgbClr val="0E7C86"/>
                 </a:solidFill>
@@ -14543,22 +14593,24 @@
       <p:grpSpPr/>
       <p:sp>
         <p:nvSpPr>
-          <p:cNvPr id="2" name="Title 1"/>
-          <p:cNvSpPr>
-            <a:spLocks noGrp="1"/>
-          </p:cNvSpPr>
-          <p:nvPr>
-            <p:ph type="title"/>
-          </p:nvPr>
-        </p:nvSpPr>
-        <p:spPr>
-          <a:xfrm>
-            <a:off x="502920" y="274320"/>
-            <a:ext cx="11185855" cy="777240"/>
-          </a:xfrm>
-        </p:spPr>
-        <p:txBody>
-          <a:bodyPr wrap="square" anchor="b"/>
+          <p:cNvPr id="2" name="TextBox 1"/>
+          <p:cNvSpPr txBox="1"/>
+          <p:nvPr/>
+        </p:nvSpPr>
+        <p:spPr>
+          <a:xfrm>
+            <a:off x="502920" y="6382512"/>
+            <a:ext cx="10545775" cy="274320"/>
+          </a:xfrm>
+          <a:prstGeom prst="rect">
+            <a:avLst/>
+          </a:prstGeom>
+          <a:noFill/>
+        </p:spPr>
+        <p:txBody>
+          <a:bodyPr wrap="square" lIns="0" tIns="0">
+            <a:spAutoFit/>
+          </a:bodyPr>
           <a:lstStyle/>
           <a:p>
             <a:pPr algn="l">
@@ -14568,41 +14620,89 @@
               <a:spcAft>
                 <a:spcPts val="0"/>
               </a:spcAft>
-              <a:defRPr sz="2800" b="1">
-                <a:solidFill>
-                  <a:srgbClr val="1F3A5F"/>
-                </a:solidFill>
-                <a:latin typeface="Calibri"/>
-              </a:defRPr>
-            </a:pPr>
-            <a:r>
-              <a:rPr sz="2800" b="1">
-                <a:solidFill>
-                  <a:srgbClr val="1F3A5F"/>
-                </a:solidFill>
-                <a:latin typeface="Calibri"/>
-              </a:rPr>
-              <a:t>Where we are</a:t>
-            </a:r>
-          </a:p>
-        </p:txBody>
-      </p:sp>
-      <p:sp>
-        <p:nvSpPr>
-          <p:cNvPr id="3" name="Rectangle 2"/>
+              <a:defRPr sz="1000" b="0">
+                <a:solidFill>
+                  <a:srgbClr val="666666"/>
+                </a:solidFill>
+                <a:latin typeface="Calibri"/>
+              </a:defRPr>
+            </a:pPr>
+            <a:r>
+              <a:rPr sz="1000" b="0">
+                <a:solidFill>
+                  <a:srgbClr val="666666"/>
+                </a:solidFill>
+                <a:latin typeface="Calibri"/>
+              </a:rPr>
+              <a:t>Pathfinder Advanced - Op Program 12  |  Lesson 2</a:t>
+            </a:r>
+          </a:p>
+        </p:txBody>
+      </p:sp>
+      <p:sp>
+        <p:nvSpPr>
+          <p:cNvPr id="3" name="TextBox 2"/>
+          <p:cNvSpPr txBox="1"/>
+          <p:nvPr/>
+        </p:nvSpPr>
+        <p:spPr>
+          <a:xfrm>
+            <a:off x="11231575" y="6382512"/>
+            <a:ext cx="457200" cy="274320"/>
+          </a:xfrm>
+          <a:prstGeom prst="rect">
+            <a:avLst/>
+          </a:prstGeom>
+          <a:noFill/>
+        </p:spPr>
+        <p:txBody>
+          <a:bodyPr wrap="square" lIns="0" tIns="0">
+            <a:spAutoFit/>
+          </a:bodyPr>
+          <a:lstStyle/>
+          <a:p>
+            <a:pPr algn="r">
+              <a:lnSpc>
+                <a:spcPct val="100000"/>
+              </a:lnSpc>
+              <a:spcAft>
+                <a:spcPts val="0"/>
+              </a:spcAft>
+              <a:defRPr sz="1000" b="0">
+                <a:solidFill>
+                  <a:srgbClr val="666666"/>
+                </a:solidFill>
+                <a:latin typeface="Calibri"/>
+              </a:defRPr>
+            </a:pPr>
+            <a:r>
+              <a:rPr sz="1000" b="0">
+                <a:solidFill>
+                  <a:srgbClr val="666666"/>
+                </a:solidFill>
+                <a:latin typeface="Calibri"/>
+              </a:rPr>
+              <a:t>4</a:t>
+            </a:r>
+          </a:p>
+        </p:txBody>
+      </p:sp>
+      <p:sp>
+        <p:nvSpPr>
+          <p:cNvPr id="4" name="Rectangle 3"/>
           <p:cNvSpPr/>
           <p:nvPr/>
         </p:nvSpPr>
         <p:spPr>
           <a:xfrm>
-            <a:off x="502920" y="1097280"/>
-            <a:ext cx="11185855" cy="19050"/>
+            <a:off x="0" y="1234440"/>
+            <a:ext cx="256032" cy="1554480"/>
           </a:xfrm>
           <a:prstGeom prst="rect">
             <a:avLst/>
           </a:prstGeom>
           <a:solidFill>
-            <a:srgbClr val="C8D2DE"/>
+            <a:srgbClr val="0E7C86"/>
           </a:solidFill>
           <a:ln>
             <a:noFill/>
@@ -14633,14 +14733,14 @@
       </p:sp>
       <p:sp>
         <p:nvSpPr>
-          <p:cNvPr id="4" name="TextBox 3"/>
+          <p:cNvPr id="5" name="TextBox 4"/>
           <p:cNvSpPr txBox="1"/>
           <p:nvPr/>
         </p:nvSpPr>
         <p:spPr>
           <a:xfrm>
-            <a:off x="502920" y="6382512"/>
-            <a:ext cx="10545775" cy="274320"/>
+            <a:off x="777240" y="1325880"/>
+            <a:ext cx="10515600" cy="1051560"/>
           </a:xfrm>
           <a:prstGeom prst="rect">
             <a:avLst/>
@@ -14648,7 +14748,7 @@
           <a:noFill/>
         </p:spPr>
         <p:txBody>
-          <a:bodyPr wrap="square" lIns="0" tIns="0">
+          <a:bodyPr wrap="square" lIns="0" tIns="0" rIns="0" bIns="0">
             <a:spAutoFit/>
           </a:bodyPr>
           <a:lstStyle/>
@@ -14660,35 +14760,35 @@
               <a:spcAft>
                 <a:spcPts val="0"/>
               </a:spcAft>
-              <a:defRPr sz="1000" b="0">
-                <a:solidFill>
-                  <a:srgbClr val="666666"/>
-                </a:solidFill>
-                <a:latin typeface="Calibri"/>
-              </a:defRPr>
-            </a:pPr>
-            <a:r>
-              <a:rPr sz="1000" b="0">
-                <a:solidFill>
-                  <a:srgbClr val="666666"/>
-                </a:solidFill>
-                <a:latin typeface="Calibri"/>
-              </a:rPr>
-              <a:t>Pathfinder Advanced - Op Program 12  |  Lesson 2</a:t>
-            </a:r>
-          </a:p>
-        </p:txBody>
-      </p:sp>
-      <p:sp>
-        <p:nvSpPr>
-          <p:cNvPr id="5" name="TextBox 4"/>
+              <a:defRPr sz="3600" b="1">
+                <a:solidFill>
+                  <a:srgbClr val="1F3A5F"/>
+                </a:solidFill>
+                <a:latin typeface="Calibri"/>
+              </a:defRPr>
+            </a:pPr>
+            <a:r>
+              <a:rPr sz="3600" b="1">
+                <a:solidFill>
+                  <a:srgbClr val="1F3A5F"/>
+                </a:solidFill>
+                <a:latin typeface="Calibri"/>
+              </a:rPr>
+              <a:t>Resolution</a:t>
+            </a:r>
+          </a:p>
+        </p:txBody>
+      </p:sp>
+      <p:sp>
+        <p:nvSpPr>
+          <p:cNvPr id="6" name="TextBox 5"/>
           <p:cNvSpPr txBox="1"/>
           <p:nvPr/>
         </p:nvSpPr>
         <p:spPr>
           <a:xfrm>
-            <a:off x="11231575" y="6382512"/>
-            <a:ext cx="457200" cy="274320"/>
+            <a:off x="777240" y="2423160"/>
+            <a:ext cx="10515600" cy="685800"/>
           </a:xfrm>
           <a:prstGeom prst="rect">
             <a:avLst/>
@@ -14696,19 +14796,19 @@
           <a:noFill/>
         </p:spPr>
         <p:txBody>
-          <a:bodyPr wrap="square" lIns="0" tIns="0">
+          <a:bodyPr wrap="square" lIns="0" tIns="0" rIns="0" bIns="0">
             <a:spAutoFit/>
           </a:bodyPr>
           <a:lstStyle/>
           <a:p>
-            <a:pPr algn="r">
-              <a:lnSpc>
-                <a:spcPct val="100000"/>
-              </a:lnSpc>
-              <a:spcAft>
-                <a:spcPts val="0"/>
-              </a:spcAft>
-              <a:defRPr sz="1000" b="0">
+            <a:pPr algn="l">
+              <a:lnSpc>
+                <a:spcPct val="100000"/>
+              </a:lnSpc>
+              <a:spcAft>
+                <a:spcPts val="400"/>
+              </a:spcAft>
+              <a:defRPr sz="1600" b="0">
                 <a:solidFill>
                   <a:srgbClr val="666666"/>
                 </a:solidFill>
@@ -14716,27 +14816,27 @@
               </a:defRPr>
             </a:pPr>
             <a:r>
-              <a:rPr sz="1000" b="0">
+              <a:rPr sz="1600" b="0">
                 <a:solidFill>
                   <a:srgbClr val="666666"/>
                 </a:solidFill>
                 <a:latin typeface="Calibri"/>
               </a:rPr>
-              <a:t>4</a:t>
-            </a:r>
-          </a:p>
-        </p:txBody>
-      </p:sp>
-      <p:sp>
-        <p:nvSpPr>
-          <p:cNvPr id="6" name="Rounded Rectangle 5"/>
+              <a:t>About 35 minutes</a:t>
+            </a:r>
+          </a:p>
+        </p:txBody>
+      </p:sp>
+      <p:sp>
+        <p:nvSpPr>
+          <p:cNvPr id="7" name="Rounded Rectangle 6"/>
           <p:cNvSpPr/>
           <p:nvPr/>
         </p:nvSpPr>
         <p:spPr>
           <a:xfrm>
-            <a:off x="502920" y="2240280"/>
-            <a:ext cx="3631082" cy="1737360"/>
+            <a:off x="502920" y="3886200"/>
+            <a:ext cx="3631082" cy="1325880"/>
           </a:xfrm>
           <a:prstGeom prst="roundRect">
             <a:avLst>
@@ -14799,14 +14899,14 @@
       </p:sp>
       <p:sp>
         <p:nvSpPr>
-          <p:cNvPr id="7" name="TextBox 6"/>
+          <p:cNvPr id="8" name="TextBox 7"/>
           <p:cNvSpPr txBox="1"/>
           <p:nvPr/>
         </p:nvSpPr>
         <p:spPr>
           <a:xfrm>
-            <a:off x="502920" y="1856232"/>
-            <a:ext cx="3631082" cy="347472"/>
+            <a:off x="502920" y="3520440"/>
+            <a:ext cx="3631082" cy="310896"/>
           </a:xfrm>
           <a:prstGeom prst="rect">
             <a:avLst/>
@@ -14824,9 +14924,9 @@
                 <a:spcPct val="100000"/>
               </a:lnSpc>
               <a:spcAft>
-                <a:spcPts val="600"/>
-              </a:spcAft>
-              <a:defRPr sz="1200" b="1">
+                <a:spcPts val="200"/>
+              </a:spcAft>
+              <a:defRPr sz="1100" b="1">
                 <a:solidFill>
                   <a:srgbClr val="0E7C86"/>
                 </a:solidFill>
@@ -14834,7 +14934,7 @@
               </a:defRPr>
             </a:pPr>
             <a:r>
-              <a:rPr sz="1200" b="1">
+              <a:rPr sz="1100" b="1">
                 <a:solidFill>
                   <a:srgbClr val="0E7C86"/>
                 </a:solidFill>
@@ -14847,14 +14947,14 @@
       </p:sp>
       <p:sp>
         <p:nvSpPr>
-          <p:cNvPr id="8" name="Rounded Rectangle 7"/>
+          <p:cNvPr id="9" name="Rounded Rectangle 8"/>
           <p:cNvSpPr/>
           <p:nvPr/>
         </p:nvSpPr>
         <p:spPr>
           <a:xfrm>
-            <a:off x="4280306" y="2240280"/>
-            <a:ext cx="3631082" cy="1737360"/>
+            <a:off x="4280306" y="3886200"/>
+            <a:ext cx="3631082" cy="1325880"/>
           </a:xfrm>
           <a:prstGeom prst="roundRect">
             <a:avLst>
@@ -14917,14 +15017,14 @@
       </p:sp>
       <p:sp>
         <p:nvSpPr>
-          <p:cNvPr id="9" name="TextBox 8"/>
+          <p:cNvPr id="10" name="TextBox 9"/>
           <p:cNvSpPr txBox="1"/>
           <p:nvPr/>
         </p:nvSpPr>
         <p:spPr>
           <a:xfrm>
-            <a:off x="4280306" y="1856232"/>
-            <a:ext cx="3631082" cy="347472"/>
+            <a:off x="4280306" y="3520440"/>
+            <a:ext cx="3631082" cy="310896"/>
           </a:xfrm>
           <a:prstGeom prst="rect">
             <a:avLst/>
@@ -14942,9 +15042,9 @@
                 <a:spcPct val="100000"/>
               </a:lnSpc>
               <a:spcAft>
-                <a:spcPts val="600"/>
-              </a:spcAft>
-              <a:defRPr sz="1200" b="1">
+                <a:spcPts val="200"/>
+              </a:spcAft>
+              <a:defRPr sz="1100" b="1">
                 <a:solidFill>
                   <a:srgbClr val="0E7C86"/>
                 </a:solidFill>
@@ -14952,7 +15052,7 @@
               </a:defRPr>
             </a:pPr>
             <a:r>
-              <a:rPr sz="1200" b="1">
+              <a:rPr sz="1100" b="1">
                 <a:solidFill>
                   <a:srgbClr val="0E7C86"/>
                 </a:solidFill>
@@ -14965,14 +15065,14 @@
       </p:sp>
       <p:sp>
         <p:nvSpPr>
-          <p:cNvPr id="10" name="Rounded Rectangle 9"/>
+          <p:cNvPr id="11" name="Rounded Rectangle 10"/>
           <p:cNvSpPr/>
           <p:nvPr/>
         </p:nvSpPr>
         <p:spPr>
           <a:xfrm>
-            <a:off x="8057692" y="2240280"/>
-            <a:ext cx="3631082" cy="1737360"/>
+            <a:off x="8057692" y="3886200"/>
+            <a:ext cx="3631082" cy="1325880"/>
           </a:xfrm>
           <a:prstGeom prst="roundRect">
             <a:avLst>

--- a/ground-vehicle/docs/courses/advanced/l2_motors_and_ramping.pptx
+++ b/ground-vehicle/docs/courses/advanced/l2_motors_and_ramping.pptx
@@ -602,7 +602,7 @@
               <a:rPr sz="1200">
                 <a:latin typeface="Calibri"/>
               </a:rPr>
-              <a:t>Set the scene: this bug lived for a year in shipping code.</a:t>
+              <a:t>Walk the three cases on the right-hand notes before reading the code.</a:t>
             </a:r>
           </a:p>
           <a:p>
@@ -610,7 +610,7 @@
               <a:rPr sz="1200">
                 <a:latin typeface="Calibri"/>
               </a:rPr>
-              <a:t>Do the arithmetic out loud. Gap of 1, factor of 0.5, gives 0.5, which truncates to 0 - so current never changes again.</a:t>
+              <a:t>The guard clause is the whole slide. Without it, duty zero puts both pins high, and both pins high is a brake.</a:t>
             </a:r>
           </a:p>
           <a:p>
@@ -618,7 +618,7 @@
               <a:rPr sz="1200">
                 <a:latin typeface="Calibri"/>
               </a:rPr>
-              <a:t>The ramp stalls one count short, forever. On a 1024-count scale that is 0.1%, which nobody can see on a wheel.</a:t>
+              <a:t>Ask what that feels like: a vehicle that will not coast and cannot be pushed by hand when switched on. That is a real symptom somebody would report as a mechanical fault.</a:t>
             </a:r>
           </a:p>
           <a:p>
@@ -626,15 +626,7 @@
               <a:rPr sz="1200">
                 <a:latin typeface="Calibri"/>
               </a:rPr>
-              <a:t>Ask why it still matters. Because a value that never reaches its target breaks anything that tests for equality, and because a bug you cannot see is worse than one you can.</a:t>
-            </a:r>
-          </a:p>
-          <a:p>
-            <a:r>
-              <a:rPr sz="1200">
-                <a:latin typeface="Calibri"/>
-              </a:rPr>
-              <a:t>The fix is one line: if the step rounds to nothing, take one count.</a:t>
+              <a:t>This is a good example of a bug that hides in the ONE case the arithmetic happens to handle differently.</a:t>
             </a:r>
           </a:p>
         </p:txBody>
@@ -707,7 +699,39 @@
               <a:rPr sz="1200">
                 <a:latin typeface="Calibri"/>
               </a:rPr>
-              <a:t>Twenty seconds. Second activity.</a:t>
+              <a:t>Set the scene: this bug lived for a year in shipping code.</a:t>
+            </a:r>
+          </a:p>
+          <a:p>
+            <a:r>
+              <a:rPr sz="1200">
+                <a:latin typeface="Calibri"/>
+              </a:rPr>
+              <a:t>Do the arithmetic out loud. Gap of 1, factor of 0.5, gives 0.5, which truncates to 0 - so current never changes again.</a:t>
+            </a:r>
+          </a:p>
+          <a:p>
+            <a:r>
+              <a:rPr sz="1200">
+                <a:latin typeface="Calibri"/>
+              </a:rPr>
+              <a:t>The ramp stalls one count short, forever. On a 1024-count scale that is 0.1%, which nobody can see on a wheel.</a:t>
+            </a:r>
+          </a:p>
+          <a:p>
+            <a:r>
+              <a:rPr sz="1200">
+                <a:latin typeface="Calibri"/>
+              </a:rPr>
+              <a:t>Ask why it still matters. Because a value that never reaches its target breaks anything that tests for equality, and because a bug you cannot see is worse than one you can.</a:t>
+            </a:r>
+          </a:p>
+          <a:p>
+            <a:r>
+              <a:rPr sz="1200">
+                <a:latin typeface="Calibri"/>
+              </a:rPr>
+              <a:t>The fix is one line: if the step rounds to nothing, take one count.</a:t>
             </a:r>
           </a:p>
         </p:txBody>
@@ -1912,31 +1936,7 @@
               <a:rPr sz="1200">
                 <a:latin typeface="Calibri"/>
               </a:rPr>
-              <a:t>Both columns describe the same H-bridge. What changes is what happens during the off part of each cycle.</a:t>
-            </a:r>
-          </a:p>
-          <a:p>
-            <a:r>
-              <a:rPr sz="1200">
-                <a:latin typeface="Calibri"/>
-              </a:rPr>
-              <a:t>Sign-magnitude alternates driven and coast. Hybrid alternates driven and brake, which actively pulls the current down.</a:t>
-            </a:r>
-          </a:p>
-          <a:p>
-            <a:r>
-              <a:rPr sz="1200">
-                <a:latin typeface="Calibri"/>
-              </a:rPr>
-              <a:t>The practical consequence: hybrid holds the speed you asked for when the load changes. They will feel this in the activity.</a:t>
-            </a:r>
-          </a:p>
-          <a:p>
-            <a:r>
-              <a:rPr sz="1200">
-                <a:latin typeface="Calibri"/>
-              </a:rPr>
-              <a:t>Sign-magnitude is not wrong. It is simpler to read, and that is why the beginner programs use it.</a:t>
+              <a:t>Twenty seconds. Second activity.</a:t>
             </a:r>
           </a:p>
         </p:txBody>
@@ -2009,7 +2009,7 @@
               <a:rPr sz="1200">
                 <a:latin typeface="Calibri"/>
               </a:rPr>
-              <a:t>Walk the three cases on the right-hand notes before reading the code.</a:t>
+              <a:t>Both columns describe the same H-bridge. What changes is what happens during the off part of each cycle.</a:t>
             </a:r>
           </a:p>
           <a:p>
@@ -2017,7 +2017,7 @@
               <a:rPr sz="1200">
                 <a:latin typeface="Calibri"/>
               </a:rPr>
-              <a:t>The guard clause is the whole slide. Without it, duty zero puts both pins high, and both pins high is a brake.</a:t>
+              <a:t>Sign-magnitude alternates driven and coast. Hybrid alternates driven and brake, which actively pulls the current down.</a:t>
             </a:r>
           </a:p>
           <a:p>
@@ -2025,7 +2025,7 @@
               <a:rPr sz="1200">
                 <a:latin typeface="Calibri"/>
               </a:rPr>
-              <a:t>Ask what that feels like: a vehicle that will not coast and cannot be pushed by hand when switched on. That is a real symptom somebody would report as a mechanical fault.</a:t>
+              <a:t>The practical consequence: hybrid holds the speed you asked for when the load changes. They will feel this in the activity.</a:t>
             </a:r>
           </a:p>
           <a:p>
@@ -2033,7 +2033,7 @@
               <a:rPr sz="1200">
                 <a:latin typeface="Calibri"/>
               </a:rPr>
-              <a:t>This is a good example of a bug that hides in the ONE case the arithmetic happens to handle differently.</a:t>
+              <a:t>Sign-magnitude is not wrong. It is simpler to read, and that is why the beginner programs use it.</a:t>
             </a:r>
           </a:p>
         </p:txBody>
@@ -5637,7 +5637,7 @@
                 </a:solidFill>
                 <a:latin typeface="Calibri"/>
               </a:rPr>
-              <a:t>The ramp, and the bug that hid in it for a year</a:t>
+              <a:t>Hybrid drive, and the trap in it</a:t>
             </a:r>
           </a:p>
         </p:txBody>
@@ -5881,18 +5881,18 @@
               <a:spcAft>
                 <a:spcPts val="0"/>
               </a:spcAft>
-              <a:defRPr sz="1600">
+              <a:defRPr sz="1450">
                 <a:latin typeface="Consolas"/>
               </a:defRPr>
             </a:pPr>
             <a:r>
-              <a:rPr sz="1600">
-                <a:solidFill>
-                  <a:srgbClr val="666666"/>
+              <a:rPr sz="1450">
+                <a:solidFill>
+                  <a:srgbClr val="222222"/>
                 </a:solidFill>
                 <a:latin typeface="Consolas"/>
               </a:rPr>
-              <a:t>// Op 11.2 wrote this:</a:t>
+              <a:t>void set_motor_hybrid(uint8_t in1_ch, uint8_t in2_ch, int duty) {</a:t>
             </a:r>
           </a:p>
           <a:p>
@@ -5903,18 +5903,62 @@
               <a:spcAft>
                 <a:spcPts val="0"/>
               </a:spcAft>
-              <a:defRPr sz="1600">
+              <a:defRPr sz="1450">
                 <a:latin typeface="Consolas"/>
               </a:defRPr>
             </a:pPr>
             <a:r>
-              <a:rPr sz="1600" b="1">
+              <a:rPr sz="1450">
+                <a:solidFill>
+                  <a:srgbClr val="222222"/>
+                </a:solidFill>
+                <a:latin typeface="Consolas"/>
+              </a:rPr>
+              <a:t>  duty = constrain(duty, -PWM_MAX, PWM_MAX);</a:t>
+            </a:r>
+          </a:p>
+          <a:p>
+            <a:pPr algn="l">
+              <a:lnSpc>
+                <a:spcPct val="100000"/>
+              </a:lnSpc>
+              <a:spcAft>
+                <a:spcPts val="0"/>
+              </a:spcAft>
+              <a:defRPr sz="1450">
+                <a:latin typeface="Consolas"/>
+              </a:defRPr>
+            </a:pPr>
+            <a:r>
+              <a:rPr sz="1450">
+                <a:solidFill>
+                  <a:srgbClr val="222222"/>
+                </a:solidFill>
+                <a:latin typeface="Consolas"/>
+              </a:rPr>
+              <a:t> </a:t>
+            </a:r>
+          </a:p>
+          <a:p>
+            <a:pPr algn="l">
+              <a:lnSpc>
+                <a:spcPct val="100000"/>
+              </a:lnSpc>
+              <a:spcAft>
+                <a:spcPts val="0"/>
+              </a:spcAft>
+              <a:defRPr sz="1450">
+                <a:latin typeface="Consolas"/>
+              </a:defRPr>
+            </a:pPr>
+            <a:r>
+              <a:rPr sz="1450" b="1">
                 <a:solidFill>
                   <a:srgbClr val="0E7C86"/>
                 </a:solidFill>
                 <a:latin typeface="Consolas"/>
               </a:rPr>
-              <a:t>current += (target - current) * RAMP_FACTOR;</a:t>
+              <a:t>  if (duty == 0) {           // WITHOUT THIS, ZERO IS A BRAKE</a:t>
             </a:r>
           </a:p>
           <a:p>
@@ -5925,17 +5969,105 @@
               <a:spcAft>
                 <a:spcPts val="0"/>
               </a:spcAft>
-              <a:defRPr sz="1600">
+              <a:defRPr sz="1450">
                 <a:latin typeface="Consolas"/>
               </a:defRPr>
             </a:pPr>
             <a:r>
-              <a:rPr sz="1600">
-                <a:solidFill>
-                  <a:srgbClr val="222222"/>
+              <a:rPr sz="1450" b="1">
+                <a:solidFill>
+                  <a:srgbClr val="0E7C86"/>
                 </a:solidFill>
                 <a:latin typeface="Consolas"/>
               </a:rPr>
+              <a:t>    ledcWrite(in1_ch, 0);</a:t>
+            </a:r>
+          </a:p>
+          <a:p>
+            <a:pPr algn="l">
+              <a:lnSpc>
+                <a:spcPct val="100000"/>
+              </a:lnSpc>
+              <a:spcAft>
+                <a:spcPts val="0"/>
+              </a:spcAft>
+              <a:defRPr sz="1450">
+                <a:latin typeface="Consolas"/>
+              </a:defRPr>
+            </a:pPr>
+            <a:r>
+              <a:rPr sz="1450" b="1">
+                <a:solidFill>
+                  <a:srgbClr val="0E7C86"/>
+                </a:solidFill>
+                <a:latin typeface="Consolas"/>
+              </a:rPr>
+              <a:t>    ledcWrite(in2_ch, 0);</a:t>
+            </a:r>
+          </a:p>
+          <a:p>
+            <a:pPr algn="l">
+              <a:lnSpc>
+                <a:spcPct val="100000"/>
+              </a:lnSpc>
+              <a:spcAft>
+                <a:spcPts val="0"/>
+              </a:spcAft>
+              <a:defRPr sz="1450">
+                <a:latin typeface="Consolas"/>
+              </a:defRPr>
+            </a:pPr>
+            <a:r>
+              <a:rPr sz="1450" b="1">
+                <a:solidFill>
+                  <a:srgbClr val="0E7C86"/>
+                </a:solidFill>
+                <a:latin typeface="Consolas"/>
+              </a:rPr>
+              <a:t>    return;</a:t>
+            </a:r>
+          </a:p>
+          <a:p>
+            <a:pPr algn="l">
+              <a:lnSpc>
+                <a:spcPct val="100000"/>
+              </a:lnSpc>
+              <a:spcAft>
+                <a:spcPts val="0"/>
+              </a:spcAft>
+              <a:defRPr sz="1450">
+                <a:latin typeface="Consolas"/>
+              </a:defRPr>
+            </a:pPr>
+            <a:r>
+              <a:rPr sz="1450" b="1">
+                <a:solidFill>
+                  <a:srgbClr val="0E7C86"/>
+                </a:solidFill>
+                <a:latin typeface="Consolas"/>
+              </a:rPr>
+              <a:t>  }</a:t>
+            </a:r>
+          </a:p>
+          <a:p>
+            <a:pPr algn="l">
+              <a:lnSpc>
+                <a:spcPct val="100000"/>
+              </a:lnSpc>
+              <a:spcAft>
+                <a:spcPts val="0"/>
+              </a:spcAft>
+              <a:defRPr sz="1450">
+                <a:latin typeface="Consolas"/>
+              </a:defRPr>
+            </a:pPr>
+            <a:r>
+              <a:rPr sz="1450">
+                <a:solidFill>
+                  <a:srgbClr val="222222"/>
+                </a:solidFill>
+                <a:latin typeface="Consolas"/>
+              </a:rPr>
               <a:t> </a:t>
             </a:r>
           </a:p>
@@ -5947,18 +6079,18 @@
               <a:spcAft>
                 <a:spcPts val="0"/>
               </a:spcAft>
-              <a:defRPr sz="1600">
+              <a:defRPr sz="1450">
                 <a:latin typeface="Consolas"/>
               </a:defRPr>
             </a:pPr>
             <a:r>
-              <a:rPr sz="1600">
-                <a:solidFill>
-                  <a:srgbClr val="666666"/>
+              <a:rPr sz="1450">
+                <a:solidFill>
+                  <a:srgbClr val="222222"/>
                 </a:solidFill>
                 <a:latin typeface="Consolas"/>
               </a:rPr>
-              <a:t>// With RAMP_FACTOR = 0.5 and a gap of 1:</a:t>
+              <a:t>  int inverse = PWM_MAX - abs(duty);</a:t>
             </a:r>
           </a:p>
           <a:p>
@@ -5969,18 +6101,18 @@
               <a:spcAft>
                 <a:spcPts val="0"/>
               </a:spcAft>
-              <a:defRPr sz="1600">
+              <a:defRPr sz="1450">
                 <a:latin typeface="Consolas"/>
               </a:defRPr>
             </a:pPr>
             <a:r>
-              <a:rPr sz="1600">
-                <a:solidFill>
-                  <a:srgbClr val="666666"/>
+              <a:rPr sz="1450">
+                <a:solidFill>
+                  <a:srgbClr val="222222"/>
                 </a:solidFill>
                 <a:latin typeface="Consolas"/>
               </a:rPr>
-              <a:t>//    1 * 0.5 = 0.5,  truncated to 0</a:t>
+              <a:t>  if (duty &gt; 0) {</a:t>
             </a:r>
           </a:p>
           <a:p>
@@ -5991,18 +6123,18 @@
               <a:spcAft>
                 <a:spcPts val="0"/>
               </a:spcAft>
-              <a:defRPr sz="1600">
+              <a:defRPr sz="1450">
                 <a:latin typeface="Consolas"/>
               </a:defRPr>
             </a:pPr>
             <a:r>
-              <a:rPr sz="1600">
-                <a:solidFill>
-                  <a:srgbClr val="666666"/>
+              <a:rPr sz="1450">
+                <a:solidFill>
+                  <a:srgbClr val="222222"/>
                 </a:solidFill>
                 <a:latin typeface="Consolas"/>
               </a:rPr>
-              <a:t>//    -&gt; current never changes again</a:t>
+              <a:t>    ledcWrite(in1_ch, PWM_MAX);</a:t>
             </a:r>
           </a:p>
           <a:p>
@@ -6013,18 +6145,18 @@
               <a:spcAft>
                 <a:spcPts val="0"/>
               </a:spcAft>
-              <a:defRPr sz="1600">
+              <a:defRPr sz="1450">
                 <a:latin typeface="Consolas"/>
               </a:defRPr>
             </a:pPr>
             <a:r>
-              <a:rPr sz="1600">
-                <a:solidFill>
-                  <a:srgbClr val="666666"/>
+              <a:rPr sz="1450">
+                <a:solidFill>
+                  <a:srgbClr val="222222"/>
                 </a:solidFill>
                 <a:latin typeface="Consolas"/>
               </a:rPr>
-              <a:t>//    -&gt; the ramp stalls ONE COUNT short, forever</a:t>
+              <a:t>    ledcWrite(in2_ch, inverse);</a:t>
             </a:r>
           </a:p>
           <a:p>
@@ -6035,18 +6167,18 @@
               <a:spcAft>
                 <a:spcPts val="0"/>
               </a:spcAft>
-              <a:defRPr sz="1600">
+              <a:defRPr sz="1450">
                 <a:latin typeface="Consolas"/>
               </a:defRPr>
             </a:pPr>
             <a:r>
-              <a:rPr sz="1600">
+              <a:rPr sz="1450">
                 <a:solidFill>
                   <a:srgbClr val="222222"/>
                 </a:solidFill>
                 <a:latin typeface="Consolas"/>
               </a:rPr>
-              <a:t> </a:t>
+              <a:t>  } else {</a:t>
             </a:r>
           </a:p>
           <a:p>
@@ -6057,18 +6189,18 @@
               <a:spcAft>
                 <a:spcPts val="0"/>
               </a:spcAft>
-              <a:defRPr sz="1600">
+              <a:defRPr sz="1450">
                 <a:latin typeface="Consolas"/>
               </a:defRPr>
             </a:pPr>
             <a:r>
-              <a:rPr sz="1600">
-                <a:solidFill>
-                  <a:srgbClr val="666666"/>
+              <a:rPr sz="1450">
+                <a:solidFill>
+                  <a:srgbClr val="222222"/>
                 </a:solidFill>
                 <a:latin typeface="Consolas"/>
               </a:rPr>
-              <a:t>// Op 12:</a:t>
+              <a:t>    ledcWrite(in1_ch, inverse);</a:t>
             </a:r>
           </a:p>
           <a:p>
@@ -6079,18 +6211,18 @@
               <a:spcAft>
                 <a:spcPts val="0"/>
               </a:spcAft>
-              <a:defRPr sz="1600">
+              <a:defRPr sz="1450">
                 <a:latin typeface="Consolas"/>
               </a:defRPr>
             </a:pPr>
             <a:r>
-              <a:rPr sz="1600">
+              <a:rPr sz="1450">
                 <a:solidFill>
                   <a:srgbClr val="222222"/>
                 </a:solidFill>
                 <a:latin typeface="Consolas"/>
               </a:rPr>
-              <a:t>int ramp_towards(int current, int target) {</a:t>
+              <a:t>    ledcWrite(in2_ch, PWM_MAX);</a:t>
             </a:r>
           </a:p>
           <a:p>
@@ -6101,18 +6233,18 @@
               <a:spcAft>
                 <a:spcPts val="0"/>
               </a:spcAft>
-              <a:defRPr sz="1600">
+              <a:defRPr sz="1450">
                 <a:latin typeface="Consolas"/>
               </a:defRPr>
             </a:pPr>
             <a:r>
-              <a:rPr sz="1600">
+              <a:rPr sz="1450">
                 <a:solidFill>
                   <a:srgbClr val="222222"/>
                 </a:solidFill>
                 <a:latin typeface="Consolas"/>
               </a:rPr>
-              <a:t>  int gap = target - current;</a:t>
+              <a:t>  }</a:t>
             </a:r>
           </a:p>
           <a:p>
@@ -6123,144 +6255,12 @@
               <a:spcAft>
                 <a:spcPts val="0"/>
               </a:spcAft>
-              <a:defRPr sz="1600">
+              <a:defRPr sz="1450">
                 <a:latin typeface="Consolas"/>
               </a:defRPr>
             </a:pPr>
             <a:r>
-              <a:rPr sz="1600">
-                <a:solidFill>
-                  <a:srgbClr val="222222"/>
-                </a:solidFill>
-                <a:latin typeface="Consolas"/>
-              </a:rPr>
-              <a:t>  if (gap == 0) return current;</a:t>
-            </a:r>
-          </a:p>
-          <a:p>
-            <a:pPr algn="l">
-              <a:lnSpc>
-                <a:spcPct val="100000"/>
-              </a:lnSpc>
-              <a:spcAft>
-                <a:spcPts val="0"/>
-              </a:spcAft>
-              <a:defRPr sz="1600">
-                <a:latin typeface="Consolas"/>
-              </a:defRPr>
-            </a:pPr>
-            <a:r>
-              <a:rPr sz="1600">
-                <a:solidFill>
-                  <a:srgbClr val="222222"/>
-                </a:solidFill>
-                <a:latin typeface="Consolas"/>
-              </a:rPr>
-              <a:t> </a:t>
-            </a:r>
-          </a:p>
-          <a:p>
-            <a:pPr algn="l">
-              <a:lnSpc>
-                <a:spcPct val="100000"/>
-              </a:lnSpc>
-              <a:spcAft>
-                <a:spcPts val="0"/>
-              </a:spcAft>
-              <a:defRPr sz="1600">
-                <a:latin typeface="Consolas"/>
-              </a:defRPr>
-            </a:pPr>
-            <a:r>
-              <a:rPr sz="1600">
-                <a:solidFill>
-                  <a:srgbClr val="222222"/>
-                </a:solidFill>
-                <a:latin typeface="Consolas"/>
-              </a:rPr>
-              <a:t>  int step = (int)(gap * RAMP_FACTOR);</a:t>
-            </a:r>
-          </a:p>
-          <a:p>
-            <a:pPr algn="l">
-              <a:lnSpc>
-                <a:spcPct val="100000"/>
-              </a:lnSpc>
-              <a:spcAft>
-                <a:spcPts val="0"/>
-              </a:spcAft>
-              <a:defRPr sz="1600">
-                <a:latin typeface="Consolas"/>
-              </a:defRPr>
-            </a:pPr>
-            <a:r>
-              <a:rPr sz="1600" b="1">
-                <a:solidFill>
-                  <a:srgbClr val="0E7C86"/>
-                </a:solidFill>
-                <a:latin typeface="Consolas"/>
-              </a:rPr>
-              <a:t>  if (step == 0) step = (gap &gt; 0) ? 1 : -1;   // the fix</a:t>
-            </a:r>
-          </a:p>
-          <a:p>
-            <a:pPr algn="l">
-              <a:lnSpc>
-                <a:spcPct val="100000"/>
-              </a:lnSpc>
-              <a:spcAft>
-                <a:spcPts val="0"/>
-              </a:spcAft>
-              <a:defRPr sz="1600">
-                <a:latin typeface="Consolas"/>
-              </a:defRPr>
-            </a:pPr>
-            <a:r>
-              <a:rPr sz="1600">
-                <a:solidFill>
-                  <a:srgbClr val="222222"/>
-                </a:solidFill>
-                <a:latin typeface="Consolas"/>
-              </a:rPr>
-              <a:t> </a:t>
-            </a:r>
-          </a:p>
-          <a:p>
-            <a:pPr algn="l">
-              <a:lnSpc>
-                <a:spcPct val="100000"/>
-              </a:lnSpc>
-              <a:spcAft>
-                <a:spcPts val="0"/>
-              </a:spcAft>
-              <a:defRPr sz="1600">
-                <a:latin typeface="Consolas"/>
-              </a:defRPr>
-            </a:pPr>
-            <a:r>
-              <a:rPr sz="1600">
-                <a:solidFill>
-                  <a:srgbClr val="222222"/>
-                </a:solidFill>
-                <a:latin typeface="Consolas"/>
-              </a:rPr>
-              <a:t>  return current + step;</a:t>
-            </a:r>
-          </a:p>
-          <a:p>
-            <a:pPr algn="l">
-              <a:lnSpc>
-                <a:spcPct val="100000"/>
-              </a:lnSpc>
-              <a:spcAft>
-                <a:spcPts val="0"/>
-              </a:spcAft>
-              <a:defRPr sz="1600">
-                <a:latin typeface="Consolas"/>
-              </a:defRPr>
-            </a:pPr>
-            <a:r>
-              <a:rPr sz="1600">
+              <a:rPr sz="1450">
                 <a:solidFill>
                   <a:srgbClr val="222222"/>
                 </a:solidFill>
@@ -6298,98 +6298,114 @@
                 <a:spcPct val="100000"/>
               </a:lnSpc>
               <a:spcAft>
-                <a:spcPts val="600"/>
-              </a:spcAft>
-              <a:defRPr sz="1800" b="0">
-                <a:solidFill>
-                  <a:srgbClr val="222222"/>
-                </a:solidFill>
-                <a:latin typeface="Calibri"/>
-              </a:defRPr>
-            </a:pPr>
-            <a:r>
-              <a:rPr sz="1800" b="0">
-                <a:solidFill>
-                  <a:srgbClr val="222222"/>
-                </a:solidFill>
-                <a:latin typeface="Calibri"/>
-              </a:rPr>
-              <a:t>Ramping stops the vehicle lurching and stops it yanking a large current out of the battery on every stick movement.</a:t>
-            </a:r>
-          </a:p>
-          <a:p>
-            <a:pPr algn="l">
-              <a:lnSpc>
-                <a:spcPct val="100000"/>
-              </a:lnSpc>
-              <a:spcAft>
-                <a:spcPts val="600"/>
-              </a:spcAft>
-              <a:defRPr sz="1800" b="0">
-                <a:solidFill>
-                  <a:srgbClr val="222222"/>
-                </a:solidFill>
-                <a:latin typeface="Calibri"/>
-              </a:defRPr>
-            </a:pPr>
-            <a:r>
-              <a:rPr sz="1800" b="0">
-                <a:solidFill>
-                  <a:srgbClr val="222222"/>
-                </a:solidFill>
-                <a:latin typeface="Calibri"/>
-              </a:rPr>
-              <a:t>Closing a FRACTION of the gap each step gives a smooth exponential approach - fast at first, gentle at the end.</a:t>
-            </a:r>
-          </a:p>
-          <a:p>
-            <a:pPr algn="l">
-              <a:lnSpc>
-                <a:spcPct val="100000"/>
-              </a:lnSpc>
-              <a:spcAft>
-                <a:spcPts val="600"/>
-              </a:spcAft>
-              <a:defRPr sz="1800" b="0">
-                <a:solidFill>
-                  <a:srgbClr val="222222"/>
-                </a:solidFill>
-                <a:latin typeface="Calibri"/>
-              </a:defRPr>
-            </a:pPr>
-            <a:r>
-              <a:rPr sz="1800" b="0">
-                <a:solidFill>
-                  <a:srgbClr val="222222"/>
-                </a:solidFill>
-                <a:latin typeface="Calibri"/>
-              </a:rPr>
-              <a:t>The bug is invisible. One count out of 1023 is 0.1% of full power. Nobody would ever see it on a wheel.</a:t>
-            </a:r>
-          </a:p>
-          <a:p>
-            <a:pPr algn="l">
-              <a:lnSpc>
-                <a:spcPct val="100000"/>
-              </a:lnSpc>
-              <a:spcAft>
-                <a:spcPts val="600"/>
-              </a:spcAft>
-              <a:defRPr sz="1800" b="0">
-                <a:solidFill>
-                  <a:srgbClr val="222222"/>
-                </a:solidFill>
-                <a:latin typeface="Calibri"/>
-              </a:defRPr>
-            </a:pPr>
-            <a:r>
-              <a:rPr sz="1800" b="0">
-                <a:solidFill>
-                  <a:srgbClr val="222222"/>
-                </a:solidFill>
-                <a:latin typeface="Calibri"/>
-              </a:rPr>
-              <a:t>It matters because comparisons against the target then never become true, and anything waiting for "ramp finished" waits forever.</a:t>
+                <a:spcPts val="700"/>
+              </a:spcAft>
+              <a:defRPr sz="2100" b="0">
+                <a:solidFill>
+                  <a:srgbClr val="222222"/>
+                </a:solidFill>
+                <a:latin typeface="Calibri"/>
+              </a:defRPr>
+            </a:pPr>
+            <a:r>
+              <a:rPr sz="2100" b="0">
+                <a:solidFill>
+                  <a:srgbClr val="222222"/>
+                </a:solidFill>
+                <a:latin typeface="Calibri"/>
+              </a:rPr>
+              <a:t>Full duty forward: IN1 = 1023, IN2 = 0. Driven hard.</a:t>
+            </a:r>
+          </a:p>
+          <a:p>
+            <a:pPr algn="l">
+              <a:lnSpc>
+                <a:spcPct val="100000"/>
+              </a:lnSpc>
+              <a:spcAft>
+                <a:spcPts val="700"/>
+              </a:spcAft>
+              <a:defRPr sz="2100" b="0">
+                <a:solidFill>
+                  <a:srgbClr val="222222"/>
+                </a:solidFill>
+                <a:latin typeface="Calibri"/>
+              </a:defRPr>
+            </a:pPr>
+            <a:r>
+              <a:rPr sz="2100" b="0">
+                <a:solidFill>
+                  <a:srgbClr val="222222"/>
+                </a:solidFill>
+                <a:latin typeface="Calibri"/>
+              </a:rPr>
+              <a:t>Half duty forward: IN1 = 1023, IN2 = 512. Half driven, half braked.</a:t>
+            </a:r>
+          </a:p>
+          <a:p>
+            <a:pPr algn="l">
+              <a:lnSpc>
+                <a:spcPct val="100000"/>
+              </a:lnSpc>
+              <a:spcAft>
+                <a:spcPts val="700"/>
+              </a:spcAft>
+              <a:defRPr sz="2100" b="0">
+                <a:solidFill>
+                  <a:srgbClr val="222222"/>
+                </a:solidFill>
+                <a:latin typeface="Calibri"/>
+              </a:defRPr>
+            </a:pPr>
+            <a:r>
+              <a:rPr sz="2100" b="0">
+                <a:solidFill>
+                  <a:srgbClr val="222222"/>
+                </a:solidFill>
+                <a:latin typeface="Calibri"/>
+              </a:rPr>
+              <a:t>Zero without the guard: IN1 = 1023, IN2 = 1023. Both high. That is a brake.</a:t>
+            </a:r>
+          </a:p>
+          <a:p>
+            <a:pPr algn="l">
+              <a:lnSpc>
+                <a:spcPct val="100000"/>
+              </a:lnSpc>
+              <a:spcAft>
+                <a:spcPts val="700"/>
+              </a:spcAft>
+              <a:defRPr sz="1050" b="0">
+                <a:solidFill>
+                  <a:srgbClr val="222222"/>
+                </a:solidFill>
+                <a:latin typeface="Calibri"/>
+              </a:defRPr>
+            </a:pPr>
+          </a:p>
+          <a:p>
+            <a:pPr algn="l">
+              <a:lnSpc>
+                <a:spcPct val="100000"/>
+              </a:lnSpc>
+              <a:spcAft>
+                <a:spcPts val="700"/>
+              </a:spcAft>
+              <a:defRPr sz="2100" b="0">
+                <a:solidFill>
+                  <a:srgbClr val="222222"/>
+                </a:solidFill>
+                <a:latin typeface="Calibri"/>
+              </a:defRPr>
+            </a:pPr>
+            <a:r>
+              <a:rPr sz="2100" b="0">
+                <a:solidFill>
+                  <a:srgbClr val="222222"/>
+                </a:solidFill>
+                <a:latin typeface="Calibri"/>
+              </a:rPr>
+              <a:t>A vehicle that will not coast, and cannot be pushed by hand when it is switched on, has this bug.</a:t>
             </a:r>
           </a:p>
         </p:txBody>
@@ -6414,116 +6430,66 @@
       <p:grpSpPr/>
       <p:sp>
         <p:nvSpPr>
-          <p:cNvPr id="2" name="TextBox 1"/>
-          <p:cNvSpPr txBox="1"/>
-          <p:nvPr/>
-        </p:nvSpPr>
-        <p:spPr>
-          <a:xfrm>
-            <a:off x="502920" y="6382512"/>
-            <a:ext cx="10545775" cy="274320"/>
+          <p:cNvPr id="2" name="Title 1"/>
+          <p:cNvSpPr>
+            <a:spLocks noGrp="1"/>
+          </p:cNvSpPr>
+          <p:nvPr>
+            <p:ph type="title"/>
+          </p:nvPr>
+        </p:nvSpPr>
+        <p:spPr>
+          <a:xfrm>
+            <a:off x="502920" y="274320"/>
+            <a:ext cx="11185855" cy="777240"/>
+          </a:xfrm>
+        </p:spPr>
+        <p:txBody>
+          <a:bodyPr wrap="square" anchor="b"/>
+          <a:lstStyle/>
+          <a:p>
+            <a:pPr algn="l">
+              <a:lnSpc>
+                <a:spcPct val="100000"/>
+              </a:lnSpc>
+              <a:spcAft>
+                <a:spcPts val="0"/>
+              </a:spcAft>
+              <a:defRPr sz="2800" b="1">
+                <a:solidFill>
+                  <a:srgbClr val="1F3A5F"/>
+                </a:solidFill>
+                <a:latin typeface="Calibri"/>
+              </a:defRPr>
+            </a:pPr>
+            <a:r>
+              <a:rPr sz="2800" b="1">
+                <a:solidFill>
+                  <a:srgbClr val="1F3A5F"/>
+                </a:solidFill>
+                <a:latin typeface="Calibri"/>
+              </a:rPr>
+              <a:t>The ramp, and the bug that hid in it for a year</a:t>
+            </a:r>
+          </a:p>
+        </p:txBody>
+      </p:sp>
+      <p:sp>
+        <p:nvSpPr>
+          <p:cNvPr id="3" name="Rectangle 2"/>
+          <p:cNvSpPr/>
+          <p:nvPr/>
+        </p:nvSpPr>
+        <p:spPr>
+          <a:xfrm>
+            <a:off x="502920" y="1097280"/>
+            <a:ext cx="11185855" cy="19050"/>
           </a:xfrm>
           <a:prstGeom prst="rect">
             <a:avLst/>
           </a:prstGeom>
-          <a:noFill/>
-        </p:spPr>
-        <p:txBody>
-          <a:bodyPr wrap="square" lIns="0" tIns="0">
-            <a:spAutoFit/>
-          </a:bodyPr>
-          <a:lstStyle/>
-          <a:p>
-            <a:pPr algn="l">
-              <a:lnSpc>
-                <a:spcPct val="100000"/>
-              </a:lnSpc>
-              <a:spcAft>
-                <a:spcPts val="0"/>
-              </a:spcAft>
-              <a:defRPr sz="1000" b="0">
-                <a:solidFill>
-                  <a:srgbClr val="666666"/>
-                </a:solidFill>
-                <a:latin typeface="Calibri"/>
-              </a:defRPr>
-            </a:pPr>
-            <a:r>
-              <a:rPr sz="1000" b="0">
-                <a:solidFill>
-                  <a:srgbClr val="666666"/>
-                </a:solidFill>
-                <a:latin typeface="Calibri"/>
-              </a:rPr>
-              <a:t>Pathfinder Advanced - Op Program 12  |  Lesson 2</a:t>
-            </a:r>
-          </a:p>
-        </p:txBody>
-      </p:sp>
-      <p:sp>
-        <p:nvSpPr>
-          <p:cNvPr id="3" name="TextBox 2"/>
-          <p:cNvSpPr txBox="1"/>
-          <p:nvPr/>
-        </p:nvSpPr>
-        <p:spPr>
-          <a:xfrm>
-            <a:off x="11231575" y="6382512"/>
-            <a:ext cx="457200" cy="274320"/>
-          </a:xfrm>
-          <a:prstGeom prst="rect">
-            <a:avLst/>
-          </a:prstGeom>
-          <a:noFill/>
-        </p:spPr>
-        <p:txBody>
-          <a:bodyPr wrap="square" lIns="0" tIns="0">
-            <a:spAutoFit/>
-          </a:bodyPr>
-          <a:lstStyle/>
-          <a:p>
-            <a:pPr algn="r">
-              <a:lnSpc>
-                <a:spcPct val="100000"/>
-              </a:lnSpc>
-              <a:spcAft>
-                <a:spcPts val="0"/>
-              </a:spcAft>
-              <a:defRPr sz="1000" b="0">
-                <a:solidFill>
-                  <a:srgbClr val="666666"/>
-                </a:solidFill>
-                <a:latin typeface="Calibri"/>
-              </a:defRPr>
-            </a:pPr>
-            <a:r>
-              <a:rPr sz="1000" b="0">
-                <a:solidFill>
-                  <a:srgbClr val="666666"/>
-                </a:solidFill>
-                <a:latin typeface="Calibri"/>
-              </a:rPr>
-              <a:t>10</a:t>
-            </a:r>
-          </a:p>
-        </p:txBody>
-      </p:sp>
-      <p:sp>
-        <p:nvSpPr>
-          <p:cNvPr id="4" name="Rectangle 3"/>
-          <p:cNvSpPr/>
-          <p:nvPr/>
-        </p:nvSpPr>
-        <p:spPr>
-          <a:xfrm>
-            <a:off x="0" y="1234440"/>
-            <a:ext cx="256032" cy="1554480"/>
-          </a:xfrm>
-          <a:prstGeom prst="rect">
-            <a:avLst/>
-          </a:prstGeom>
           <a:solidFill>
-            <a:srgbClr val="0E7C86"/>
+            <a:srgbClr val="C8D2DE"/>
           </a:solidFill>
           <a:ln>
             <a:noFill/>
@@ -6554,14 +6520,110 @@
       </p:sp>
       <p:sp>
         <p:nvSpPr>
+          <p:cNvPr id="4" name="TextBox 3"/>
+          <p:cNvSpPr txBox="1"/>
+          <p:nvPr/>
+        </p:nvSpPr>
+        <p:spPr>
+          <a:xfrm>
+            <a:off x="502920" y="6382512"/>
+            <a:ext cx="10545775" cy="274320"/>
+          </a:xfrm>
+          <a:prstGeom prst="rect">
+            <a:avLst/>
+          </a:prstGeom>
+          <a:noFill/>
+        </p:spPr>
+        <p:txBody>
+          <a:bodyPr wrap="square" lIns="0" tIns="0">
+            <a:spAutoFit/>
+          </a:bodyPr>
+          <a:lstStyle/>
+          <a:p>
+            <a:pPr algn="l">
+              <a:lnSpc>
+                <a:spcPct val="100000"/>
+              </a:lnSpc>
+              <a:spcAft>
+                <a:spcPts val="0"/>
+              </a:spcAft>
+              <a:defRPr sz="1000" b="0">
+                <a:solidFill>
+                  <a:srgbClr val="666666"/>
+                </a:solidFill>
+                <a:latin typeface="Calibri"/>
+              </a:defRPr>
+            </a:pPr>
+            <a:r>
+              <a:rPr sz="1000" b="0">
+                <a:solidFill>
+                  <a:srgbClr val="666666"/>
+                </a:solidFill>
+                <a:latin typeface="Calibri"/>
+              </a:rPr>
+              <a:t>Pathfinder Advanced - Op Program 12  |  Lesson 2</a:t>
+            </a:r>
+          </a:p>
+        </p:txBody>
+      </p:sp>
+      <p:sp>
+        <p:nvSpPr>
           <p:cNvPr id="5" name="TextBox 4"/>
           <p:cNvSpPr txBox="1"/>
           <p:nvPr/>
         </p:nvSpPr>
         <p:spPr>
           <a:xfrm>
-            <a:off x="777240" y="1325880"/>
-            <a:ext cx="10515600" cy="1051560"/>
+            <a:off x="11231575" y="6382512"/>
+            <a:ext cx="457200" cy="274320"/>
+          </a:xfrm>
+          <a:prstGeom prst="rect">
+            <a:avLst/>
+          </a:prstGeom>
+          <a:noFill/>
+        </p:spPr>
+        <p:txBody>
+          <a:bodyPr wrap="square" lIns="0" tIns="0">
+            <a:spAutoFit/>
+          </a:bodyPr>
+          <a:lstStyle/>
+          <a:p>
+            <a:pPr algn="r">
+              <a:lnSpc>
+                <a:spcPct val="100000"/>
+              </a:lnSpc>
+              <a:spcAft>
+                <a:spcPts val="0"/>
+              </a:spcAft>
+              <a:defRPr sz="1000" b="0">
+                <a:solidFill>
+                  <a:srgbClr val="666666"/>
+                </a:solidFill>
+                <a:latin typeface="Calibri"/>
+              </a:defRPr>
+            </a:pPr>
+            <a:r>
+              <a:rPr sz="1000" b="0">
+                <a:solidFill>
+                  <a:srgbClr val="666666"/>
+                </a:solidFill>
+                <a:latin typeface="Calibri"/>
+              </a:rPr>
+              <a:t>10</a:t>
+            </a:r>
+          </a:p>
+        </p:txBody>
+      </p:sp>
+      <p:sp>
+        <p:nvSpPr>
+          <p:cNvPr id="6" name="TextBox 5"/>
+          <p:cNvSpPr txBox="1"/>
+          <p:nvPr/>
+        </p:nvSpPr>
+        <p:spPr>
+          <a:xfrm>
+            <a:off x="502920" y="1188720"/>
+            <a:ext cx="7047088" cy="274320"/>
           </a:xfrm>
           <a:prstGeom prst="rect">
             <a:avLst/>
@@ -6579,97 +6641,49 @@
                 <a:spcPct val="100000"/>
               </a:lnSpc>
               <a:spcAft>
-                <a:spcPts val="0"/>
-              </a:spcAft>
-              <a:defRPr sz="3600" b="1">
-                <a:solidFill>
-                  <a:srgbClr val="1F3A5F"/>
-                </a:solidFill>
-                <a:latin typeface="Calibri"/>
-              </a:defRPr>
-            </a:pPr>
-            <a:r>
-              <a:rPr sz="3600" b="1">
-                <a:solidFill>
-                  <a:srgbClr val="1F3A5F"/>
-                </a:solidFill>
-                <a:latin typeface="Calibri"/>
-              </a:rPr>
-              <a:t>Decay and ramping</a:t>
-            </a:r>
-          </a:p>
-        </p:txBody>
-      </p:sp>
-      <p:sp>
-        <p:nvSpPr>
-          <p:cNvPr id="6" name="TextBox 5"/>
-          <p:cNvSpPr txBox="1"/>
-          <p:nvPr/>
-        </p:nvSpPr>
-        <p:spPr>
-          <a:xfrm>
-            <a:off x="777240" y="2423160"/>
-            <a:ext cx="10515600" cy="685800"/>
-          </a:xfrm>
-          <a:prstGeom prst="rect">
-            <a:avLst/>
-          </a:prstGeom>
-          <a:noFill/>
-        </p:spPr>
-        <p:txBody>
-          <a:bodyPr wrap="square" lIns="0" tIns="0" rIns="0" bIns="0">
-            <a:spAutoFit/>
-          </a:bodyPr>
-          <a:lstStyle/>
-          <a:p>
-            <a:pPr algn="l">
-              <a:lnSpc>
-                <a:spcPct val="100000"/>
-              </a:lnSpc>
-              <a:spcAft>
-                <a:spcPts val="400"/>
-              </a:spcAft>
-              <a:defRPr sz="1600" b="0">
-                <a:solidFill>
-                  <a:srgbClr val="666666"/>
-                </a:solidFill>
-                <a:latin typeface="Calibri"/>
-              </a:defRPr>
-            </a:pPr>
-            <a:r>
-              <a:rPr sz="1600" b="0">
-                <a:solidFill>
-                  <a:srgbClr val="666666"/>
-                </a:solidFill>
-                <a:latin typeface="Calibri"/>
-              </a:rPr>
-              <a:t>About 35 minutes</a:t>
-            </a:r>
-          </a:p>
-        </p:txBody>
-      </p:sp>
-      <p:sp>
-        <p:nvSpPr>
-          <p:cNvPr id="7" name="Rounded Rectangle 6"/>
+                <a:spcPts val="200"/>
+              </a:spcAft>
+              <a:defRPr sz="1200" b="1">
+                <a:solidFill>
+                  <a:srgbClr val="0E7C86"/>
+                </a:solidFill>
+                <a:latin typeface="Consolas"/>
+              </a:defRPr>
+            </a:pPr>
+            <a:r>
+              <a:rPr sz="1200" b="1">
+                <a:solidFill>
+                  <a:srgbClr val="0E7C86"/>
+                </a:solidFill>
+                <a:latin typeface="Consolas"/>
+              </a:rPr>
+              <a:t>Motors.ino</a:t>
+            </a:r>
+          </a:p>
+        </p:txBody>
+      </p:sp>
+      <p:sp>
+        <p:nvSpPr>
+          <p:cNvPr id="7" name="CODE_PANEL"/>
           <p:cNvSpPr/>
           <p:nvPr/>
         </p:nvSpPr>
         <p:spPr>
           <a:xfrm>
-            <a:off x="502920" y="3886200"/>
-            <a:ext cx="3631082" cy="1325880"/>
+            <a:off x="502920" y="1517904"/>
+            <a:ext cx="7047088" cy="4745736"/>
           </a:xfrm>
           <a:prstGeom prst="roundRect">
             <a:avLst>
-              <a:gd name="adj" fmla="val 8000"/>
+              <a:gd name="adj" fmla="val 4000"/>
             </a:avLst>
           </a:prstGeom>
           <a:solidFill>
-            <a:srgbClr val="EEF3F8"/>
+            <a:srgbClr val="F4F6F8"/>
           </a:solidFill>
           <a:ln w="12700">
             <a:solidFill>
-              <a:srgbClr val="0E7C86"/>
+              <a:srgbClr val="C8D2DE"/>
             </a:solidFill>
           </a:ln>
           <a:effectLst/>
@@ -6689,31 +6703,402 @@
           </a:fontRef>
         </p:style>
         <p:txBody>
-          <a:bodyPr rtlCol="0" anchor="ctr" wrap="square" lIns="73152" rIns="73152"/>
-          <a:lstStyle/>
-          <a:p>
-            <a:pPr algn="ctr">
+          <a:bodyPr rtlCol="0" anchor="t" wrap="square" lIns="146304" tIns="91440" bIns="73152"/>
+          <a:lstStyle/>
+          <a:p>
+            <a:pPr algn="l">
               <a:lnSpc>
                 <a:spcPct val="100000"/>
               </a:lnSpc>
               <a:spcAft>
                 <a:spcPts val="0"/>
               </a:spcAft>
-              <a:defRPr sz="1700" b="0">
-                <a:solidFill>
-                  <a:srgbClr val="1F3A5F"/>
-                </a:solidFill>
-                <a:latin typeface="Calibri"/>
-              </a:defRPr>
-            </a:pPr>
-            <a:r>
-              <a:rPr sz="1700" b="0">
-                <a:solidFill>
-                  <a:srgbClr val="1F3A5F"/>
-                </a:solidFill>
-                <a:latin typeface="Calibri"/>
-              </a:rPr>
-              <a:t>The LEDC peripheral</a:t>
+              <a:defRPr sz="1600">
+                <a:latin typeface="Consolas"/>
+              </a:defRPr>
+            </a:pPr>
+            <a:r>
+              <a:rPr sz="1600">
+                <a:solidFill>
+                  <a:srgbClr val="666666"/>
+                </a:solidFill>
+                <a:latin typeface="Consolas"/>
+              </a:rPr>
+              <a:t>// Op 11.2 wrote this:</a:t>
+            </a:r>
+          </a:p>
+          <a:p>
+            <a:pPr algn="l">
+              <a:lnSpc>
+                <a:spcPct val="100000"/>
+              </a:lnSpc>
+              <a:spcAft>
+                <a:spcPts val="0"/>
+              </a:spcAft>
+              <a:defRPr sz="1600">
+                <a:latin typeface="Consolas"/>
+              </a:defRPr>
+            </a:pPr>
+            <a:r>
+              <a:rPr sz="1600" b="1">
+                <a:solidFill>
+                  <a:srgbClr val="0E7C86"/>
+                </a:solidFill>
+                <a:latin typeface="Consolas"/>
+              </a:rPr>
+              <a:t>current += (target - current) * RAMP_FACTOR;</a:t>
+            </a:r>
+          </a:p>
+          <a:p>
+            <a:pPr algn="l">
+              <a:lnSpc>
+                <a:spcPct val="100000"/>
+              </a:lnSpc>
+              <a:spcAft>
+                <a:spcPts val="0"/>
+              </a:spcAft>
+              <a:defRPr sz="1600">
+                <a:latin typeface="Consolas"/>
+              </a:defRPr>
+            </a:pPr>
+            <a:r>
+              <a:rPr sz="1600">
+                <a:solidFill>
+                  <a:srgbClr val="222222"/>
+                </a:solidFill>
+                <a:latin typeface="Consolas"/>
+              </a:rPr>
+              <a:t> </a:t>
+            </a:r>
+          </a:p>
+          <a:p>
+            <a:pPr algn="l">
+              <a:lnSpc>
+                <a:spcPct val="100000"/>
+              </a:lnSpc>
+              <a:spcAft>
+                <a:spcPts val="0"/>
+              </a:spcAft>
+              <a:defRPr sz="1600">
+                <a:latin typeface="Consolas"/>
+              </a:defRPr>
+            </a:pPr>
+            <a:r>
+              <a:rPr sz="1600">
+                <a:solidFill>
+                  <a:srgbClr val="666666"/>
+                </a:solidFill>
+                <a:latin typeface="Consolas"/>
+              </a:rPr>
+              <a:t>// With RAMP_FACTOR = 0.5 and a gap of 1:</a:t>
+            </a:r>
+          </a:p>
+          <a:p>
+            <a:pPr algn="l">
+              <a:lnSpc>
+                <a:spcPct val="100000"/>
+              </a:lnSpc>
+              <a:spcAft>
+                <a:spcPts val="0"/>
+              </a:spcAft>
+              <a:defRPr sz="1600">
+                <a:latin typeface="Consolas"/>
+              </a:defRPr>
+            </a:pPr>
+            <a:r>
+              <a:rPr sz="1600">
+                <a:solidFill>
+                  <a:srgbClr val="666666"/>
+                </a:solidFill>
+                <a:latin typeface="Consolas"/>
+              </a:rPr>
+              <a:t>//    1 * 0.5 = 0.5,  truncated to 0</a:t>
+            </a:r>
+          </a:p>
+          <a:p>
+            <a:pPr algn="l">
+              <a:lnSpc>
+                <a:spcPct val="100000"/>
+              </a:lnSpc>
+              <a:spcAft>
+                <a:spcPts val="0"/>
+              </a:spcAft>
+              <a:defRPr sz="1600">
+                <a:latin typeface="Consolas"/>
+              </a:defRPr>
+            </a:pPr>
+            <a:r>
+              <a:rPr sz="1600">
+                <a:solidFill>
+                  <a:srgbClr val="666666"/>
+                </a:solidFill>
+                <a:latin typeface="Consolas"/>
+              </a:rPr>
+              <a:t>//    -&gt; current never changes again</a:t>
+            </a:r>
+          </a:p>
+          <a:p>
+            <a:pPr algn="l">
+              <a:lnSpc>
+                <a:spcPct val="100000"/>
+              </a:lnSpc>
+              <a:spcAft>
+                <a:spcPts val="0"/>
+              </a:spcAft>
+              <a:defRPr sz="1600">
+                <a:latin typeface="Consolas"/>
+              </a:defRPr>
+            </a:pPr>
+            <a:r>
+              <a:rPr sz="1600">
+                <a:solidFill>
+                  <a:srgbClr val="666666"/>
+                </a:solidFill>
+                <a:latin typeface="Consolas"/>
+              </a:rPr>
+              <a:t>//    -&gt; the ramp stalls ONE COUNT short, forever</a:t>
+            </a:r>
+          </a:p>
+          <a:p>
+            <a:pPr algn="l">
+              <a:lnSpc>
+                <a:spcPct val="100000"/>
+              </a:lnSpc>
+              <a:spcAft>
+                <a:spcPts val="0"/>
+              </a:spcAft>
+              <a:defRPr sz="1600">
+                <a:latin typeface="Consolas"/>
+              </a:defRPr>
+            </a:pPr>
+            <a:r>
+              <a:rPr sz="1600">
+                <a:solidFill>
+                  <a:srgbClr val="222222"/>
+                </a:solidFill>
+                <a:latin typeface="Consolas"/>
+              </a:rPr>
+              <a:t> </a:t>
+            </a:r>
+          </a:p>
+          <a:p>
+            <a:pPr algn="l">
+              <a:lnSpc>
+                <a:spcPct val="100000"/>
+              </a:lnSpc>
+              <a:spcAft>
+                <a:spcPts val="0"/>
+              </a:spcAft>
+              <a:defRPr sz="1600">
+                <a:latin typeface="Consolas"/>
+              </a:defRPr>
+            </a:pPr>
+            <a:r>
+              <a:rPr sz="1600">
+                <a:solidFill>
+                  <a:srgbClr val="666666"/>
+                </a:solidFill>
+                <a:latin typeface="Consolas"/>
+              </a:rPr>
+              <a:t>// Op 12:</a:t>
+            </a:r>
+          </a:p>
+          <a:p>
+            <a:pPr algn="l">
+              <a:lnSpc>
+                <a:spcPct val="100000"/>
+              </a:lnSpc>
+              <a:spcAft>
+                <a:spcPts val="0"/>
+              </a:spcAft>
+              <a:defRPr sz="1600">
+                <a:latin typeface="Consolas"/>
+              </a:defRPr>
+            </a:pPr>
+            <a:r>
+              <a:rPr sz="1600">
+                <a:solidFill>
+                  <a:srgbClr val="222222"/>
+                </a:solidFill>
+                <a:latin typeface="Consolas"/>
+              </a:rPr>
+              <a:t>int ramp_towards(int current, int target) {</a:t>
+            </a:r>
+          </a:p>
+          <a:p>
+            <a:pPr algn="l">
+              <a:lnSpc>
+                <a:spcPct val="100000"/>
+              </a:lnSpc>
+              <a:spcAft>
+                <a:spcPts val="0"/>
+              </a:spcAft>
+              <a:defRPr sz="1600">
+                <a:latin typeface="Consolas"/>
+              </a:defRPr>
+            </a:pPr>
+            <a:r>
+              <a:rPr sz="1600">
+                <a:solidFill>
+                  <a:srgbClr val="222222"/>
+                </a:solidFill>
+                <a:latin typeface="Consolas"/>
+              </a:rPr>
+              <a:t>  int gap = target - current;</a:t>
+            </a:r>
+          </a:p>
+          <a:p>
+            <a:pPr algn="l">
+              <a:lnSpc>
+                <a:spcPct val="100000"/>
+              </a:lnSpc>
+              <a:spcAft>
+                <a:spcPts val="0"/>
+              </a:spcAft>
+              <a:defRPr sz="1600">
+                <a:latin typeface="Consolas"/>
+              </a:defRPr>
+            </a:pPr>
+            <a:r>
+              <a:rPr sz="1600">
+                <a:solidFill>
+                  <a:srgbClr val="222222"/>
+                </a:solidFill>
+                <a:latin typeface="Consolas"/>
+              </a:rPr>
+              <a:t>  if (gap == 0) return current;</a:t>
+            </a:r>
+          </a:p>
+          <a:p>
+            <a:pPr algn="l">
+              <a:lnSpc>
+                <a:spcPct val="100000"/>
+              </a:lnSpc>
+              <a:spcAft>
+                <a:spcPts val="0"/>
+              </a:spcAft>
+              <a:defRPr sz="1600">
+                <a:latin typeface="Consolas"/>
+              </a:defRPr>
+            </a:pPr>
+            <a:r>
+              <a:rPr sz="1600">
+                <a:solidFill>
+                  <a:srgbClr val="222222"/>
+                </a:solidFill>
+                <a:latin typeface="Consolas"/>
+              </a:rPr>
+              <a:t> </a:t>
+            </a:r>
+          </a:p>
+          <a:p>
+            <a:pPr algn="l">
+              <a:lnSpc>
+                <a:spcPct val="100000"/>
+              </a:lnSpc>
+              <a:spcAft>
+                <a:spcPts val="0"/>
+              </a:spcAft>
+              <a:defRPr sz="1600">
+                <a:latin typeface="Consolas"/>
+              </a:defRPr>
+            </a:pPr>
+            <a:r>
+              <a:rPr sz="1600">
+                <a:solidFill>
+                  <a:srgbClr val="222222"/>
+                </a:solidFill>
+                <a:latin typeface="Consolas"/>
+              </a:rPr>
+              <a:t>  int step = (int)(gap * RAMP_FACTOR);</a:t>
+            </a:r>
+          </a:p>
+          <a:p>
+            <a:pPr algn="l">
+              <a:lnSpc>
+                <a:spcPct val="100000"/>
+              </a:lnSpc>
+              <a:spcAft>
+                <a:spcPts val="0"/>
+              </a:spcAft>
+              <a:defRPr sz="1600">
+                <a:latin typeface="Consolas"/>
+              </a:defRPr>
+            </a:pPr>
+            <a:r>
+              <a:rPr sz="1600" b="1">
+                <a:solidFill>
+                  <a:srgbClr val="0E7C86"/>
+                </a:solidFill>
+                <a:latin typeface="Consolas"/>
+              </a:rPr>
+              <a:t>  if (step == 0) step = (gap &gt; 0) ? 1 : -1;   // the fix</a:t>
+            </a:r>
+          </a:p>
+          <a:p>
+            <a:pPr algn="l">
+              <a:lnSpc>
+                <a:spcPct val="100000"/>
+              </a:lnSpc>
+              <a:spcAft>
+                <a:spcPts val="0"/>
+              </a:spcAft>
+              <a:defRPr sz="1600">
+                <a:latin typeface="Consolas"/>
+              </a:defRPr>
+            </a:pPr>
+            <a:r>
+              <a:rPr sz="1600">
+                <a:solidFill>
+                  <a:srgbClr val="222222"/>
+                </a:solidFill>
+                <a:latin typeface="Consolas"/>
+              </a:rPr>
+              <a:t> </a:t>
+            </a:r>
+          </a:p>
+          <a:p>
+            <a:pPr algn="l">
+              <a:lnSpc>
+                <a:spcPct val="100000"/>
+              </a:lnSpc>
+              <a:spcAft>
+                <a:spcPts val="0"/>
+              </a:spcAft>
+              <a:defRPr sz="1600">
+                <a:latin typeface="Consolas"/>
+              </a:defRPr>
+            </a:pPr>
+            <a:r>
+              <a:rPr sz="1600">
+                <a:solidFill>
+                  <a:srgbClr val="222222"/>
+                </a:solidFill>
+                <a:latin typeface="Consolas"/>
+              </a:rPr>
+              <a:t>  return current + step;</a:t>
+            </a:r>
+          </a:p>
+          <a:p>
+            <a:pPr algn="l">
+              <a:lnSpc>
+                <a:spcPct val="100000"/>
+              </a:lnSpc>
+              <a:spcAft>
+                <a:spcPts val="0"/>
+              </a:spcAft>
+              <a:defRPr sz="1600">
+                <a:latin typeface="Consolas"/>
+              </a:defRPr>
+            </a:pPr>
+            <a:r>
+              <a:rPr sz="1600">
+                <a:solidFill>
+                  <a:srgbClr val="222222"/>
+                </a:solidFill>
+                <a:latin typeface="Consolas"/>
+              </a:rPr>
+              <a:t>}</a:t>
             </a:r>
           </a:p>
         </p:txBody>
@@ -6726,8 +7111,8 @@
         </p:nvSpPr>
         <p:spPr>
           <a:xfrm>
-            <a:off x="502920" y="3520440"/>
-            <a:ext cx="3631082" cy="310896"/>
+            <a:off x="7870048" y="1517904"/>
+            <a:ext cx="3818727" cy="4745736"/>
           </a:xfrm>
           <a:prstGeom prst="rect">
             <a:avLst/>
@@ -6740,264 +7125,103 @@
           </a:bodyPr>
           <a:lstStyle/>
           <a:p>
-            <a:pPr algn="ctr">
-              <a:lnSpc>
-                <a:spcPct val="100000"/>
-              </a:lnSpc>
-              <a:spcAft>
-                <a:spcPts val="200"/>
-              </a:spcAft>
-              <a:defRPr sz="1100" b="1">
-                <a:solidFill>
-                  <a:srgbClr val="0E7C86"/>
-                </a:solidFill>
-                <a:latin typeface="Calibri"/>
-              </a:defRPr>
-            </a:pPr>
-            <a:r>
-              <a:rPr sz="1100" b="1">
-                <a:solidFill>
-                  <a:srgbClr val="0E7C86"/>
-                </a:solidFill>
-                <a:latin typeface="Calibri"/>
-              </a:rPr>
-              <a:t>done</a:t>
-            </a:r>
-          </a:p>
-        </p:txBody>
-      </p:sp>
-      <p:sp>
-        <p:nvSpPr>
-          <p:cNvPr id="9" name="Rounded Rectangle 8"/>
-          <p:cNvSpPr/>
-          <p:nvPr/>
-        </p:nvSpPr>
-        <p:spPr>
-          <a:xfrm>
-            <a:off x="4280306" y="3886200"/>
-            <a:ext cx="3631082" cy="1325880"/>
-          </a:xfrm>
-          <a:prstGeom prst="roundRect">
-            <a:avLst>
-              <a:gd name="adj" fmla="val 8000"/>
-            </a:avLst>
-          </a:prstGeom>
-          <a:solidFill>
-            <a:srgbClr val="EEF3F8"/>
-          </a:solidFill>
-          <a:ln w="12700">
-            <a:solidFill>
-              <a:srgbClr val="0E7C86"/>
-            </a:solidFill>
-          </a:ln>
-          <a:effectLst/>
-        </p:spPr>
-        <p:style>
-          <a:lnRef idx="1">
-            <a:schemeClr val="accent1"/>
-          </a:lnRef>
-          <a:fillRef idx="3">
-            <a:schemeClr val="accent1"/>
-          </a:fillRef>
-          <a:effectRef idx="2">
-            <a:schemeClr val="accent1"/>
-          </a:effectRef>
-          <a:fontRef idx="minor">
-            <a:schemeClr val="lt1"/>
-          </a:fontRef>
-        </p:style>
-        <p:txBody>
-          <a:bodyPr rtlCol="0" anchor="ctr" wrap="square" lIns="73152" rIns="73152"/>
-          <a:lstStyle/>
-          <a:p>
-            <a:pPr algn="ctr">
-              <a:lnSpc>
-                <a:spcPct val="100000"/>
-              </a:lnSpc>
-              <a:spcAft>
-                <a:spcPts val="0"/>
-              </a:spcAft>
-              <a:defRPr sz="1700" b="0">
-                <a:solidFill>
-                  <a:srgbClr val="1F3A5F"/>
-                </a:solidFill>
-                <a:latin typeface="Calibri"/>
-              </a:defRPr>
-            </a:pPr>
-            <a:r>
-              <a:rPr sz="1700" b="0">
-                <a:solidFill>
-                  <a:srgbClr val="1F3A5F"/>
-                </a:solidFill>
-                <a:latin typeface="Calibri"/>
-              </a:rPr>
-              <a:t>Resolution</a:t>
-            </a:r>
-          </a:p>
-        </p:txBody>
-      </p:sp>
-      <p:sp>
-        <p:nvSpPr>
-          <p:cNvPr id="10" name="TextBox 9"/>
-          <p:cNvSpPr txBox="1"/>
-          <p:nvPr/>
-        </p:nvSpPr>
-        <p:spPr>
-          <a:xfrm>
-            <a:off x="4280306" y="3520440"/>
-            <a:ext cx="3631082" cy="310896"/>
-          </a:xfrm>
-          <a:prstGeom prst="rect">
-            <a:avLst/>
-          </a:prstGeom>
-          <a:noFill/>
-        </p:spPr>
-        <p:txBody>
-          <a:bodyPr wrap="square" lIns="0" tIns="0" rIns="0" bIns="0">
-            <a:spAutoFit/>
-          </a:bodyPr>
-          <a:lstStyle/>
-          <a:p>
-            <a:pPr algn="ctr">
-              <a:lnSpc>
-                <a:spcPct val="100000"/>
-              </a:lnSpc>
-              <a:spcAft>
-                <a:spcPts val="200"/>
-              </a:spcAft>
-              <a:defRPr sz="1100" b="1">
-                <a:solidFill>
-                  <a:srgbClr val="0E7C86"/>
-                </a:solidFill>
-                <a:latin typeface="Calibri"/>
-              </a:defRPr>
-            </a:pPr>
-            <a:r>
-              <a:rPr sz="1100" b="1">
-                <a:solidFill>
-                  <a:srgbClr val="0E7C86"/>
-                </a:solidFill>
-                <a:latin typeface="Calibri"/>
-              </a:rPr>
-              <a:t>done</a:t>
-            </a:r>
-          </a:p>
-        </p:txBody>
-      </p:sp>
-      <p:sp>
-        <p:nvSpPr>
-          <p:cNvPr id="11" name="Rounded Rectangle 10"/>
-          <p:cNvSpPr/>
-          <p:nvPr/>
-        </p:nvSpPr>
-        <p:spPr>
-          <a:xfrm>
-            <a:off x="8057692" y="3886200"/>
-            <a:ext cx="3631082" cy="1325880"/>
-          </a:xfrm>
-          <a:prstGeom prst="roundRect">
-            <a:avLst>
-              <a:gd name="adj" fmla="val 8000"/>
-            </a:avLst>
-          </a:prstGeom>
-          <a:solidFill>
-            <a:srgbClr val="D6ECEE"/>
-          </a:solidFill>
-          <a:ln w="25400">
-            <a:solidFill>
-              <a:srgbClr val="0E7C86"/>
-            </a:solidFill>
-          </a:ln>
-          <a:effectLst/>
-        </p:spPr>
-        <p:style>
-          <a:lnRef idx="1">
-            <a:schemeClr val="accent1"/>
-          </a:lnRef>
-          <a:fillRef idx="3">
-            <a:schemeClr val="accent1"/>
-          </a:fillRef>
-          <a:effectRef idx="2">
-            <a:schemeClr val="accent1"/>
-          </a:effectRef>
-          <a:fontRef idx="minor">
-            <a:schemeClr val="lt1"/>
-          </a:fontRef>
-        </p:style>
-        <p:txBody>
-          <a:bodyPr rtlCol="0" anchor="ctr" wrap="square" lIns="73152" rIns="73152"/>
-          <a:lstStyle/>
-          <a:p>
-            <a:pPr algn="ctr">
-              <a:lnSpc>
-                <a:spcPct val="100000"/>
-              </a:lnSpc>
-              <a:spcAft>
-                <a:spcPts val="0"/>
-              </a:spcAft>
-              <a:defRPr sz="1700" b="1">
-                <a:solidFill>
-                  <a:srgbClr val="1F3A5F"/>
-                </a:solidFill>
-                <a:latin typeface="Calibri"/>
-              </a:defRPr>
-            </a:pPr>
-            <a:r>
-              <a:rPr sz="1700" b="1">
-                <a:solidFill>
-                  <a:srgbClr val="1F3A5F"/>
-                </a:solidFill>
-                <a:latin typeface="Calibri"/>
-              </a:rPr>
-              <a:t>Decay and ramping</a:t>
-            </a:r>
-          </a:p>
-        </p:txBody>
-      </p:sp>
-      <p:sp>
-        <p:nvSpPr>
-          <p:cNvPr id="12" name="TextBox 11"/>
-          <p:cNvSpPr txBox="1"/>
-          <p:nvPr/>
-        </p:nvSpPr>
-        <p:spPr>
-          <a:xfrm>
-            <a:off x="8057692" y="3520440"/>
-            <a:ext cx="3631082" cy="310896"/>
-          </a:xfrm>
-          <a:prstGeom prst="rect">
-            <a:avLst/>
-          </a:prstGeom>
-          <a:noFill/>
-        </p:spPr>
-        <p:txBody>
-          <a:bodyPr wrap="square" lIns="0" tIns="0" rIns="0" bIns="0">
-            <a:spAutoFit/>
-          </a:bodyPr>
-          <a:lstStyle/>
-          <a:p>
-            <a:pPr algn="ctr">
-              <a:lnSpc>
-                <a:spcPct val="100000"/>
-              </a:lnSpc>
-              <a:spcAft>
-                <a:spcPts val="200"/>
-              </a:spcAft>
-              <a:defRPr sz="1100" b="1">
-                <a:solidFill>
-                  <a:srgbClr val="0E7C86"/>
-                </a:solidFill>
-                <a:latin typeface="Calibri"/>
-              </a:defRPr>
-            </a:pPr>
-            <a:r>
-              <a:rPr sz="1100" b="1">
-                <a:solidFill>
-                  <a:srgbClr val="0E7C86"/>
-                </a:solidFill>
-                <a:latin typeface="Calibri"/>
-              </a:rPr>
-              <a:t>NOW</a:t>
+            <a:pPr algn="l">
+              <a:lnSpc>
+                <a:spcPct val="100000"/>
+              </a:lnSpc>
+              <a:spcAft>
+                <a:spcPts val="600"/>
+              </a:spcAft>
+              <a:defRPr sz="1800" b="0">
+                <a:solidFill>
+                  <a:srgbClr val="222222"/>
+                </a:solidFill>
+                <a:latin typeface="Calibri"/>
+              </a:defRPr>
+            </a:pPr>
+            <a:r>
+              <a:rPr sz="1800" b="0">
+                <a:solidFill>
+                  <a:srgbClr val="222222"/>
+                </a:solidFill>
+                <a:latin typeface="Calibri"/>
+              </a:rPr>
+              <a:t>Ramping stops the vehicle lurching and stops it yanking a large current out of the battery on every stick movement.</a:t>
+            </a:r>
+          </a:p>
+          <a:p>
+            <a:pPr algn="l">
+              <a:lnSpc>
+                <a:spcPct val="100000"/>
+              </a:lnSpc>
+              <a:spcAft>
+                <a:spcPts val="600"/>
+              </a:spcAft>
+              <a:defRPr sz="1800" b="0">
+                <a:solidFill>
+                  <a:srgbClr val="222222"/>
+                </a:solidFill>
+                <a:latin typeface="Calibri"/>
+              </a:defRPr>
+            </a:pPr>
+            <a:r>
+              <a:rPr sz="1800" b="0">
+                <a:solidFill>
+                  <a:srgbClr val="222222"/>
+                </a:solidFill>
+                <a:latin typeface="Calibri"/>
+              </a:rPr>
+              <a:t>Closing a FRACTION of the gap each step gives a smooth exponential approach - fast at first, gentle at the end.</a:t>
+            </a:r>
+          </a:p>
+          <a:p>
+            <a:pPr algn="l">
+              <a:lnSpc>
+                <a:spcPct val="100000"/>
+              </a:lnSpc>
+              <a:spcAft>
+                <a:spcPts val="600"/>
+              </a:spcAft>
+              <a:defRPr sz="1800" b="0">
+                <a:solidFill>
+                  <a:srgbClr val="222222"/>
+                </a:solidFill>
+                <a:latin typeface="Calibri"/>
+              </a:defRPr>
+            </a:pPr>
+            <a:r>
+              <a:rPr sz="1800" b="0">
+                <a:solidFill>
+                  <a:srgbClr val="222222"/>
+                </a:solidFill>
+                <a:latin typeface="Calibri"/>
+              </a:rPr>
+              <a:t>The bug is invisible. One count out of 1023 is 0.1% of full power. Nobody would ever see it on a wheel.</a:t>
+            </a:r>
+          </a:p>
+          <a:p>
+            <a:pPr algn="l">
+              <a:lnSpc>
+                <a:spcPct val="100000"/>
+              </a:lnSpc>
+              <a:spcAft>
+                <a:spcPts val="600"/>
+              </a:spcAft>
+              <a:defRPr sz="1800" b="0">
+                <a:solidFill>
+                  <a:srgbClr val="222222"/>
+                </a:solidFill>
+                <a:latin typeface="Calibri"/>
+              </a:defRPr>
+            </a:pPr>
+            <a:r>
+              <a:rPr sz="1800" b="0">
+                <a:solidFill>
+                  <a:srgbClr val="222222"/>
+                </a:solidFill>
+                <a:latin typeface="Calibri"/>
+              </a:rPr>
+              <a:t>It matters because comparisons against the target then never become true, and anything waiting for "ramp finished" waits forever.</a:t>
             </a:r>
           </a:p>
         </p:txBody>
@@ -17374,22 +17598,24 @@
       <p:grpSpPr/>
       <p:sp>
         <p:nvSpPr>
-          <p:cNvPr id="2" name="Title 1"/>
-          <p:cNvSpPr>
-            <a:spLocks noGrp="1"/>
-          </p:cNvSpPr>
-          <p:nvPr>
-            <p:ph type="title"/>
-          </p:nvPr>
-        </p:nvSpPr>
-        <p:spPr>
-          <a:xfrm>
-            <a:off x="502920" y="274320"/>
-            <a:ext cx="11185855" cy="777240"/>
-          </a:xfrm>
-        </p:spPr>
-        <p:txBody>
-          <a:bodyPr wrap="square" anchor="b"/>
+          <p:cNvPr id="2" name="TextBox 1"/>
+          <p:cNvSpPr txBox="1"/>
+          <p:nvPr/>
+        </p:nvSpPr>
+        <p:spPr>
+          <a:xfrm>
+            <a:off x="502920" y="6382512"/>
+            <a:ext cx="10545775" cy="274320"/>
+          </a:xfrm>
+          <a:prstGeom prst="rect">
+            <a:avLst/>
+          </a:prstGeom>
+          <a:noFill/>
+        </p:spPr>
+        <p:txBody>
+          <a:bodyPr wrap="square" lIns="0" tIns="0">
+            <a:spAutoFit/>
+          </a:bodyPr>
           <a:lstStyle/>
           <a:p>
             <a:pPr algn="l">
@@ -17399,41 +17625,89 @@
               <a:spcAft>
                 <a:spcPts val="0"/>
               </a:spcAft>
-              <a:defRPr sz="2800" b="1">
-                <a:solidFill>
-                  <a:srgbClr val="1F3A5F"/>
-                </a:solidFill>
-                <a:latin typeface="Calibri"/>
-              </a:defRPr>
-            </a:pPr>
-            <a:r>
-              <a:rPr sz="2800" b="1">
-                <a:solidFill>
-                  <a:srgbClr val="1F3A5F"/>
-                </a:solidFill>
-                <a:latin typeface="Calibri"/>
-              </a:rPr>
-              <a:t>Slow decay against fast decay</a:t>
-            </a:r>
-          </a:p>
-        </p:txBody>
-      </p:sp>
-      <p:sp>
-        <p:nvSpPr>
-          <p:cNvPr id="3" name="Rectangle 2"/>
+              <a:defRPr sz="1000" b="0">
+                <a:solidFill>
+                  <a:srgbClr val="666666"/>
+                </a:solidFill>
+                <a:latin typeface="Calibri"/>
+              </a:defRPr>
+            </a:pPr>
+            <a:r>
+              <a:rPr sz="1000" b="0">
+                <a:solidFill>
+                  <a:srgbClr val="666666"/>
+                </a:solidFill>
+                <a:latin typeface="Calibri"/>
+              </a:rPr>
+              <a:t>Pathfinder Advanced - Op Program 12  |  Lesson 2</a:t>
+            </a:r>
+          </a:p>
+        </p:txBody>
+      </p:sp>
+      <p:sp>
+        <p:nvSpPr>
+          <p:cNvPr id="3" name="TextBox 2"/>
+          <p:cNvSpPr txBox="1"/>
+          <p:nvPr/>
+        </p:nvSpPr>
+        <p:spPr>
+          <a:xfrm>
+            <a:off x="11231575" y="6382512"/>
+            <a:ext cx="457200" cy="274320"/>
+          </a:xfrm>
+          <a:prstGeom prst="rect">
+            <a:avLst/>
+          </a:prstGeom>
+          <a:noFill/>
+        </p:spPr>
+        <p:txBody>
+          <a:bodyPr wrap="square" lIns="0" tIns="0">
+            <a:spAutoFit/>
+          </a:bodyPr>
+          <a:lstStyle/>
+          <a:p>
+            <a:pPr algn="r">
+              <a:lnSpc>
+                <a:spcPct val="100000"/>
+              </a:lnSpc>
+              <a:spcAft>
+                <a:spcPts val="0"/>
+              </a:spcAft>
+              <a:defRPr sz="1000" b="0">
+                <a:solidFill>
+                  <a:srgbClr val="666666"/>
+                </a:solidFill>
+                <a:latin typeface="Calibri"/>
+              </a:defRPr>
+            </a:pPr>
+            <a:r>
+              <a:rPr sz="1000" b="0">
+                <a:solidFill>
+                  <a:srgbClr val="666666"/>
+                </a:solidFill>
+                <a:latin typeface="Calibri"/>
+              </a:rPr>
+              <a:t>7</a:t>
+            </a:r>
+          </a:p>
+        </p:txBody>
+      </p:sp>
+      <p:sp>
+        <p:nvSpPr>
+          <p:cNvPr id="4" name="Rectangle 3"/>
           <p:cNvSpPr/>
           <p:nvPr/>
         </p:nvSpPr>
         <p:spPr>
           <a:xfrm>
-            <a:off x="502920" y="1097280"/>
-            <a:ext cx="11185855" cy="19050"/>
+            <a:off x="0" y="1234440"/>
+            <a:ext cx="256032" cy="1554480"/>
           </a:xfrm>
           <a:prstGeom prst="rect">
             <a:avLst/>
           </a:prstGeom>
           <a:solidFill>
-            <a:srgbClr val="C8D2DE"/>
+            <a:srgbClr val="0E7C86"/>
           </a:solidFill>
           <a:ln>
             <a:noFill/>
@@ -17464,110 +17738,14 @@
       </p:sp>
       <p:sp>
         <p:nvSpPr>
-          <p:cNvPr id="4" name="TextBox 3"/>
-          <p:cNvSpPr txBox="1"/>
-          <p:nvPr/>
-        </p:nvSpPr>
-        <p:spPr>
-          <a:xfrm>
-            <a:off x="502920" y="6382512"/>
-            <a:ext cx="10545775" cy="274320"/>
-          </a:xfrm>
-          <a:prstGeom prst="rect">
-            <a:avLst/>
-          </a:prstGeom>
-          <a:noFill/>
-        </p:spPr>
-        <p:txBody>
-          <a:bodyPr wrap="square" lIns="0" tIns="0">
-            <a:spAutoFit/>
-          </a:bodyPr>
-          <a:lstStyle/>
-          <a:p>
-            <a:pPr algn="l">
-              <a:lnSpc>
-                <a:spcPct val="100000"/>
-              </a:lnSpc>
-              <a:spcAft>
-                <a:spcPts val="0"/>
-              </a:spcAft>
-              <a:defRPr sz="1000" b="0">
-                <a:solidFill>
-                  <a:srgbClr val="666666"/>
-                </a:solidFill>
-                <a:latin typeface="Calibri"/>
-              </a:defRPr>
-            </a:pPr>
-            <a:r>
-              <a:rPr sz="1000" b="0">
-                <a:solidFill>
-                  <a:srgbClr val="666666"/>
-                </a:solidFill>
-                <a:latin typeface="Calibri"/>
-              </a:rPr>
-              <a:t>Pathfinder Advanced - Op Program 12  |  Lesson 2</a:t>
-            </a:r>
-          </a:p>
-        </p:txBody>
-      </p:sp>
-      <p:sp>
-        <p:nvSpPr>
           <p:cNvPr id="5" name="TextBox 4"/>
           <p:cNvSpPr txBox="1"/>
           <p:nvPr/>
         </p:nvSpPr>
         <p:spPr>
           <a:xfrm>
-            <a:off x="11231575" y="6382512"/>
-            <a:ext cx="457200" cy="274320"/>
-          </a:xfrm>
-          <a:prstGeom prst="rect">
-            <a:avLst/>
-          </a:prstGeom>
-          <a:noFill/>
-        </p:spPr>
-        <p:txBody>
-          <a:bodyPr wrap="square" lIns="0" tIns="0">
-            <a:spAutoFit/>
-          </a:bodyPr>
-          <a:lstStyle/>
-          <a:p>
-            <a:pPr algn="r">
-              <a:lnSpc>
-                <a:spcPct val="100000"/>
-              </a:lnSpc>
-              <a:spcAft>
-                <a:spcPts val="0"/>
-              </a:spcAft>
-              <a:defRPr sz="1000" b="0">
-                <a:solidFill>
-                  <a:srgbClr val="666666"/>
-                </a:solidFill>
-                <a:latin typeface="Calibri"/>
-              </a:defRPr>
-            </a:pPr>
-            <a:r>
-              <a:rPr sz="1000" b="0">
-                <a:solidFill>
-                  <a:srgbClr val="666666"/>
-                </a:solidFill>
-                <a:latin typeface="Calibri"/>
-              </a:rPr>
-              <a:t>7</a:t>
-            </a:r>
-          </a:p>
-        </p:txBody>
-      </p:sp>
-      <p:sp>
-        <p:nvSpPr>
-          <p:cNvPr id="6" name="TextBox 5"/>
-          <p:cNvSpPr txBox="1"/>
-          <p:nvPr/>
-        </p:nvSpPr>
-        <p:spPr>
-          <a:xfrm>
-            <a:off x="502920" y="1188720"/>
-            <a:ext cx="5364327" cy="457200"/>
+            <a:off x="777240" y="1325880"/>
+            <a:ext cx="10515600" cy="1051560"/>
           </a:xfrm>
           <a:prstGeom prst="rect">
             <a:avLst/>
@@ -17585,37 +17763,37 @@
                 <a:spcPct val="100000"/>
               </a:lnSpc>
               <a:spcAft>
-                <a:spcPts val="600"/>
-              </a:spcAft>
-              <a:defRPr sz="1900" b="1">
-                <a:solidFill>
-                  <a:srgbClr val="0E7C86"/>
-                </a:solidFill>
-                <a:latin typeface="Calibri"/>
-              </a:defRPr>
-            </a:pPr>
-            <a:r>
-              <a:rPr sz="1900" b="1">
-                <a:solidFill>
-                  <a:srgbClr val="0E7C86"/>
-                </a:solidFill>
-                <a:latin typeface="Calibri"/>
-              </a:rPr>
-              <a:t>Sign-magnitude  (the beginner programs)</a:t>
-            </a:r>
-          </a:p>
-        </p:txBody>
-      </p:sp>
-      <p:sp>
-        <p:nvSpPr>
-          <p:cNvPr id="7" name="TextBox 6"/>
+                <a:spcPts val="0"/>
+              </a:spcAft>
+              <a:defRPr sz="3600" b="1">
+                <a:solidFill>
+                  <a:srgbClr val="1F3A5F"/>
+                </a:solidFill>
+                <a:latin typeface="Calibri"/>
+              </a:defRPr>
+            </a:pPr>
+            <a:r>
+              <a:rPr sz="3600" b="1">
+                <a:solidFill>
+                  <a:srgbClr val="1F3A5F"/>
+                </a:solidFill>
+                <a:latin typeface="Calibri"/>
+              </a:rPr>
+              <a:t>Decay and ramping</a:t>
+            </a:r>
+          </a:p>
+        </p:txBody>
+      </p:sp>
+      <p:sp>
+        <p:nvSpPr>
+          <p:cNvPr id="6" name="TextBox 5"/>
           <p:cNvSpPr txBox="1"/>
           <p:nvPr/>
         </p:nvSpPr>
         <p:spPr>
           <a:xfrm>
-            <a:off x="502920" y="1700784"/>
-            <a:ext cx="5364327" cy="3474720"/>
+            <a:off x="777240" y="2423160"/>
+            <a:ext cx="10515600" cy="685800"/>
           </a:xfrm>
           <a:prstGeom prst="rect">
             <a:avLst/>
@@ -17635,407 +17813,47 @@
               <a:spcAft>
                 <a:spcPts val="400"/>
               </a:spcAft>
-              <a:defRPr sz="1800" b="0">
-                <a:solidFill>
-                  <a:srgbClr val="222222"/>
-                </a:solidFill>
-                <a:latin typeface="Calibri"/>
-              </a:defRPr>
-            </a:pPr>
-            <a:r>
-              <a:rPr sz="1800" b="0">
-                <a:solidFill>
-                  <a:srgbClr val="222222"/>
-                </a:solidFill>
-                <a:latin typeface="Calibri"/>
-              </a:rPr>
-              <a:t>Pulse IN1 at the duty you want. Hold IN2 low.</a:t>
-            </a:r>
-          </a:p>
-          <a:p>
-            <a:pPr algn="l">
-              <a:lnSpc>
-                <a:spcPct val="100000"/>
-              </a:lnSpc>
-              <a:spcAft>
-                <a:spcPts val="400"/>
-              </a:spcAft>
-              <a:defRPr sz="1800" b="0">
-                <a:solidFill>
-                  <a:srgbClr val="222222"/>
-                </a:solidFill>
-                <a:latin typeface="Calibri"/>
-              </a:defRPr>
-            </a:pPr>
-            <a:r>
-              <a:rPr sz="1800" b="0">
-                <a:solidFill>
-                  <a:srgbClr val="222222"/>
-                </a:solidFill>
-                <a:latin typeface="Calibri"/>
-              </a:rPr>
-              <a:t>The motor alternates between DRIVEN and COAST.</a:t>
-            </a:r>
-          </a:p>
-          <a:p>
-            <a:pPr algn="l">
-              <a:lnSpc>
-                <a:spcPct val="100000"/>
-              </a:lnSpc>
-              <a:spcAft>
-                <a:spcPts val="400"/>
-              </a:spcAft>
-              <a:defRPr sz="1800" b="0">
-                <a:solidFill>
-                  <a:srgbClr val="222222"/>
-                </a:solidFill>
-                <a:latin typeface="Calibri"/>
-              </a:defRPr>
-            </a:pPr>
-            <a:r>
-              <a:rPr sz="1800" b="0">
-                <a:solidFill>
-                  <a:srgbClr val="222222"/>
-                </a:solidFill>
-                <a:latin typeface="Calibri"/>
-              </a:rPr>
-              <a:t>During the off part nothing controls the motor at all, so the current in the windings decays slowly and the actual speed depends heavily on the load.</a:t>
-            </a:r>
-          </a:p>
-          <a:p>
-            <a:pPr algn="l">
-              <a:lnSpc>
-                <a:spcPct val="100000"/>
-              </a:lnSpc>
-              <a:spcAft>
-                <a:spcPts val="400"/>
-              </a:spcAft>
-              <a:defRPr sz="900" b="0">
-                <a:solidFill>
-                  <a:srgbClr val="222222"/>
-                </a:solidFill>
-                <a:latin typeface="Calibri"/>
-              </a:defRPr>
-            </a:pPr>
-          </a:p>
-          <a:p>
-            <a:pPr algn="l">
-              <a:lnSpc>
-                <a:spcPct val="100000"/>
-              </a:lnSpc>
-              <a:spcAft>
-                <a:spcPts val="400"/>
-              </a:spcAft>
-              <a:defRPr sz="1800" b="0">
-                <a:solidFill>
-                  <a:srgbClr val="222222"/>
-                </a:solidFill>
-                <a:latin typeface="Calibri"/>
-              </a:defRPr>
-            </a:pPr>
-            <a:r>
-              <a:rPr sz="1800" b="0">
-                <a:solidFill>
-                  <a:srgbClr val="222222"/>
-                </a:solidFill>
-                <a:latin typeface="Calibri"/>
-              </a:rPr>
-              <a:t>Simple to read, and perfectly good for learning.</a:t>
-            </a:r>
-          </a:p>
-          <a:p>
-            <a:pPr algn="l">
-              <a:lnSpc>
-                <a:spcPct val="100000"/>
-              </a:lnSpc>
-              <a:spcAft>
-                <a:spcPts val="400"/>
-              </a:spcAft>
-              <a:defRPr sz="900" b="0">
-                <a:solidFill>
-                  <a:srgbClr val="222222"/>
-                </a:solidFill>
-                <a:latin typeface="Calibri"/>
-              </a:defRPr>
-            </a:pPr>
-          </a:p>
-          <a:p>
-            <a:pPr algn="l">
-              <a:lnSpc>
-                <a:spcPct val="100000"/>
-              </a:lnSpc>
-              <a:spcAft>
-                <a:spcPts val="400"/>
-              </a:spcAft>
-              <a:defRPr sz="1800" b="0">
-                <a:solidFill>
-                  <a:srgbClr val="222222"/>
-                </a:solidFill>
-                <a:latin typeface="Calibri"/>
-              </a:defRPr>
-            </a:pPr>
-            <a:r>
-              <a:rPr sz="1800" b="0">
-                <a:solidFill>
-                  <a:srgbClr val="222222"/>
-                </a:solidFill>
-                <a:latin typeface="Calibri"/>
-              </a:rPr>
-              <a:t>This is SLOW DECAY.</a:t>
-            </a:r>
-          </a:p>
-        </p:txBody>
-      </p:sp>
-      <p:sp>
-        <p:nvSpPr>
-          <p:cNvPr id="8" name="TextBox 7"/>
-          <p:cNvSpPr txBox="1"/>
-          <p:nvPr/>
-        </p:nvSpPr>
-        <p:spPr>
-          <a:xfrm>
-            <a:off x="6324447" y="1188720"/>
-            <a:ext cx="5364328" cy="457200"/>
-          </a:xfrm>
-          <a:prstGeom prst="rect">
-            <a:avLst/>
-          </a:prstGeom>
-          <a:noFill/>
-        </p:spPr>
-        <p:txBody>
-          <a:bodyPr wrap="square" lIns="0" tIns="0" rIns="0" bIns="0">
-            <a:spAutoFit/>
-          </a:bodyPr>
-          <a:lstStyle/>
-          <a:p>
-            <a:pPr algn="l">
-              <a:lnSpc>
-                <a:spcPct val="100000"/>
-              </a:lnSpc>
-              <a:spcAft>
-                <a:spcPts val="600"/>
-              </a:spcAft>
-              <a:defRPr sz="1900" b="1">
-                <a:solidFill>
-                  <a:srgbClr val="0E7C86"/>
-                </a:solidFill>
-                <a:latin typeface="Calibri"/>
-              </a:defRPr>
-            </a:pPr>
-            <a:r>
-              <a:rPr sz="1900" b="1">
-                <a:solidFill>
-                  <a:srgbClr val="0E7C86"/>
-                </a:solidFill>
-                <a:latin typeface="Calibri"/>
-              </a:rPr>
-              <a:t>Hybrid drive  (Op Program 12)</a:t>
-            </a:r>
-          </a:p>
-        </p:txBody>
-      </p:sp>
-      <p:sp>
-        <p:nvSpPr>
-          <p:cNvPr id="9" name="TextBox 8"/>
-          <p:cNvSpPr txBox="1"/>
-          <p:nvPr/>
-        </p:nvSpPr>
-        <p:spPr>
-          <a:xfrm>
-            <a:off x="6324447" y="1700784"/>
-            <a:ext cx="5364328" cy="3474720"/>
-          </a:xfrm>
-          <a:prstGeom prst="rect">
-            <a:avLst/>
-          </a:prstGeom>
-          <a:noFill/>
-        </p:spPr>
-        <p:txBody>
-          <a:bodyPr wrap="square" lIns="0" tIns="0" rIns="0" bIns="0">
-            <a:spAutoFit/>
-          </a:bodyPr>
-          <a:lstStyle/>
-          <a:p>
-            <a:pPr algn="l">
-              <a:lnSpc>
-                <a:spcPct val="100000"/>
-              </a:lnSpc>
-              <a:spcAft>
-                <a:spcPts val="400"/>
-              </a:spcAft>
-              <a:defRPr sz="1800" b="0">
-                <a:solidFill>
-                  <a:srgbClr val="222222"/>
-                </a:solidFill>
-                <a:latin typeface="Calibri"/>
-              </a:defRPr>
-            </a:pPr>
-            <a:r>
-              <a:rPr sz="1800" b="0">
-                <a:solidFill>
-                  <a:srgbClr val="222222"/>
-                </a:solidFill>
-                <a:latin typeface="Calibri"/>
-              </a:rPr>
-              <a:t>Hold IN1 HIGH. Pulse IN2 at the inverse of the duty.</a:t>
-            </a:r>
-          </a:p>
-          <a:p>
-            <a:pPr algn="l">
-              <a:lnSpc>
-                <a:spcPct val="100000"/>
-              </a:lnSpc>
-              <a:spcAft>
-                <a:spcPts val="400"/>
-              </a:spcAft>
-              <a:defRPr sz="1800" b="0">
-                <a:solidFill>
-                  <a:srgbClr val="222222"/>
-                </a:solidFill>
-                <a:latin typeface="Calibri"/>
-              </a:defRPr>
-            </a:pPr>
-            <a:r>
-              <a:rPr sz="1800" b="0">
-                <a:solidFill>
-                  <a:srgbClr val="222222"/>
-                </a:solidFill>
-                <a:latin typeface="Calibri"/>
-              </a:rPr>
-              <a:t>The motor alternates between DRIVEN and BRAKE.</a:t>
-            </a:r>
-          </a:p>
-          <a:p>
-            <a:pPr algn="l">
-              <a:lnSpc>
-                <a:spcPct val="100000"/>
-              </a:lnSpc>
-              <a:spcAft>
-                <a:spcPts val="400"/>
-              </a:spcAft>
-              <a:defRPr sz="1800" b="0">
-                <a:solidFill>
-                  <a:srgbClr val="222222"/>
-                </a:solidFill>
-                <a:latin typeface="Calibri"/>
-              </a:defRPr>
-            </a:pPr>
-            <a:r>
-              <a:rPr sz="1800" b="0">
-                <a:solidFill>
-                  <a:srgbClr val="222222"/>
-                </a:solidFill>
-                <a:latin typeface="Calibri"/>
-              </a:rPr>
-              <a:t>The braking part actively pulls the current down, so the average is much closer to what you asked for, and speed holds up under load.</a:t>
-            </a:r>
-          </a:p>
-          <a:p>
-            <a:pPr algn="l">
-              <a:lnSpc>
-                <a:spcPct val="100000"/>
-              </a:lnSpc>
-              <a:spcAft>
-                <a:spcPts val="400"/>
-              </a:spcAft>
-              <a:defRPr sz="900" b="0">
-                <a:solidFill>
-                  <a:srgbClr val="222222"/>
-                </a:solidFill>
-                <a:latin typeface="Calibri"/>
-              </a:defRPr>
-            </a:pPr>
-          </a:p>
-          <a:p>
-            <a:pPr algn="l">
-              <a:lnSpc>
-                <a:spcPct val="100000"/>
-              </a:lnSpc>
-              <a:spcAft>
-                <a:spcPts val="400"/>
-              </a:spcAft>
-              <a:defRPr sz="1800" b="0">
-                <a:solidFill>
-                  <a:srgbClr val="222222"/>
-                </a:solidFill>
-                <a:latin typeface="Calibri"/>
-              </a:defRPr>
-            </a:pPr>
-            <a:r>
-              <a:rPr sz="1800" b="0">
-                <a:solidFill>
-                  <a:srgbClr val="222222"/>
-                </a:solidFill>
-                <a:latin typeface="Calibri"/>
-              </a:rPr>
-              <a:t>Noticeably better control at low duty - exactly where you need it.</a:t>
-            </a:r>
-          </a:p>
-          <a:p>
-            <a:pPr algn="l">
-              <a:lnSpc>
-                <a:spcPct val="100000"/>
-              </a:lnSpc>
-              <a:spcAft>
-                <a:spcPts val="400"/>
-              </a:spcAft>
-              <a:defRPr sz="900" b="0">
-                <a:solidFill>
-                  <a:srgbClr val="222222"/>
-                </a:solidFill>
-                <a:latin typeface="Calibri"/>
-              </a:defRPr>
-            </a:pPr>
-          </a:p>
-          <a:p>
-            <a:pPr algn="l">
-              <a:lnSpc>
-                <a:spcPct val="100000"/>
-              </a:lnSpc>
-              <a:spcAft>
-                <a:spcPts val="400"/>
-              </a:spcAft>
-              <a:defRPr sz="1800" b="0">
-                <a:solidFill>
-                  <a:srgbClr val="222222"/>
-                </a:solidFill>
-                <a:latin typeface="Calibri"/>
-              </a:defRPr>
-            </a:pPr>
-            <a:r>
-              <a:rPr sz="1800" b="0">
-                <a:solidFill>
-                  <a:srgbClr val="222222"/>
-                </a:solidFill>
-                <a:latin typeface="Calibri"/>
-              </a:rPr>
-              <a:t>This is FAST DECAY.</a:t>
-            </a:r>
-          </a:p>
-        </p:txBody>
-      </p:sp>
-      <p:sp>
-        <p:nvSpPr>
-          <p:cNvPr id="10" name="Rounded Rectangle 9"/>
+              <a:defRPr sz="1600" b="0">
+                <a:solidFill>
+                  <a:srgbClr val="666666"/>
+                </a:solidFill>
+                <a:latin typeface="Calibri"/>
+              </a:defRPr>
+            </a:pPr>
+            <a:r>
+              <a:rPr sz="1600" b="0">
+                <a:solidFill>
+                  <a:srgbClr val="666666"/>
+                </a:solidFill>
+                <a:latin typeface="Calibri"/>
+              </a:rPr>
+              <a:t>About 75 minutes</a:t>
+            </a:r>
+          </a:p>
+        </p:txBody>
+      </p:sp>
+      <p:sp>
+        <p:nvSpPr>
+          <p:cNvPr id="7" name="Rounded Rectangle 6"/>
           <p:cNvSpPr/>
           <p:nvPr/>
         </p:nvSpPr>
         <p:spPr>
           <a:xfrm>
-            <a:off x="502920" y="5303520"/>
-            <a:ext cx="11185855" cy="960120"/>
+            <a:off x="502920" y="3886200"/>
+            <a:ext cx="3631082" cy="1325880"/>
           </a:xfrm>
           <a:prstGeom prst="roundRect">
             <a:avLst>
-              <a:gd name="adj" fmla="val 4000"/>
+              <a:gd name="adj" fmla="val 8000"/>
             </a:avLst>
           </a:prstGeom>
           <a:solidFill>
-            <a:srgbClr val="FDF3E3"/>
+            <a:srgbClr val="EEF3F8"/>
           </a:solidFill>
           <a:ln w="12700">
             <a:solidFill>
-              <a:srgbClr val="B46A0F"/>
+              <a:srgbClr val="0E7C86"/>
             </a:solidFill>
           </a:ln>
           <a:effectLst/>
@@ -18055,27 +17873,315 @@
           </a:fontRef>
         </p:style>
         <p:txBody>
-          <a:bodyPr rtlCol="0" anchor="ctr" wrap="square" lIns="164592" rIns="164592" tIns="73152" bIns="73152"/>
-          <a:lstStyle/>
-          <a:p>
-            <a:pPr algn="l"/>
-            <a:r>
-              <a:rPr sz="1300" b="1">
-                <a:solidFill>
-                  <a:srgbClr val="B46A0F"/>
-                </a:solidFill>
-                <a:latin typeface="Calibri"/>
-              </a:rPr>
-              <a:t>WATCH OUT   </a:t>
-            </a:r>
-            <a:r>
-              <a:rPr sz="1500">
-                <a:solidFill>
-                  <a:srgbClr val="222222"/>
-                </a:solidFill>
-                <a:latin typeface="Calibri"/>
-              </a:rPr>
-              <a:t>Watch the zero case. In hybrid, duty 0 puts PWM_MAX on BOTH pins, which is a hard brake, not a coast. Op 12 tests for zero separately and calls coast_all(). Miss that and the vehicle will not roll when you let go.</a:t>
+          <a:bodyPr rtlCol="0" anchor="ctr" wrap="square" lIns="73152" rIns="73152"/>
+          <a:lstStyle/>
+          <a:p>
+            <a:pPr algn="ctr">
+              <a:lnSpc>
+                <a:spcPct val="100000"/>
+              </a:lnSpc>
+              <a:spcAft>
+                <a:spcPts val="0"/>
+              </a:spcAft>
+              <a:defRPr sz="1700" b="0">
+                <a:solidFill>
+                  <a:srgbClr val="1F3A5F"/>
+                </a:solidFill>
+                <a:latin typeface="Calibri"/>
+              </a:defRPr>
+            </a:pPr>
+            <a:r>
+              <a:rPr sz="1700" b="0">
+                <a:solidFill>
+                  <a:srgbClr val="1F3A5F"/>
+                </a:solidFill>
+                <a:latin typeface="Calibri"/>
+              </a:rPr>
+              <a:t>The LEDC peripheral</a:t>
+            </a:r>
+          </a:p>
+        </p:txBody>
+      </p:sp>
+      <p:sp>
+        <p:nvSpPr>
+          <p:cNvPr id="8" name="TextBox 7"/>
+          <p:cNvSpPr txBox="1"/>
+          <p:nvPr/>
+        </p:nvSpPr>
+        <p:spPr>
+          <a:xfrm>
+            <a:off x="502920" y="3520440"/>
+            <a:ext cx="3631082" cy="310896"/>
+          </a:xfrm>
+          <a:prstGeom prst="rect">
+            <a:avLst/>
+          </a:prstGeom>
+          <a:noFill/>
+        </p:spPr>
+        <p:txBody>
+          <a:bodyPr wrap="square" lIns="0" tIns="0" rIns="0" bIns="0">
+            <a:spAutoFit/>
+          </a:bodyPr>
+          <a:lstStyle/>
+          <a:p>
+            <a:pPr algn="ctr">
+              <a:lnSpc>
+                <a:spcPct val="100000"/>
+              </a:lnSpc>
+              <a:spcAft>
+                <a:spcPts val="200"/>
+              </a:spcAft>
+              <a:defRPr sz="1100" b="1">
+                <a:solidFill>
+                  <a:srgbClr val="0E7C86"/>
+                </a:solidFill>
+                <a:latin typeface="Calibri"/>
+              </a:defRPr>
+            </a:pPr>
+            <a:r>
+              <a:rPr sz="1100" b="1">
+                <a:solidFill>
+                  <a:srgbClr val="0E7C86"/>
+                </a:solidFill>
+                <a:latin typeface="Calibri"/>
+              </a:rPr>
+              <a:t>done</a:t>
+            </a:r>
+          </a:p>
+        </p:txBody>
+      </p:sp>
+      <p:sp>
+        <p:nvSpPr>
+          <p:cNvPr id="9" name="Rounded Rectangle 8"/>
+          <p:cNvSpPr/>
+          <p:nvPr/>
+        </p:nvSpPr>
+        <p:spPr>
+          <a:xfrm>
+            <a:off x="4280306" y="3886200"/>
+            <a:ext cx="3631082" cy="1325880"/>
+          </a:xfrm>
+          <a:prstGeom prst="roundRect">
+            <a:avLst>
+              <a:gd name="adj" fmla="val 8000"/>
+            </a:avLst>
+          </a:prstGeom>
+          <a:solidFill>
+            <a:srgbClr val="EEF3F8"/>
+          </a:solidFill>
+          <a:ln w="12700">
+            <a:solidFill>
+              <a:srgbClr val="0E7C86"/>
+            </a:solidFill>
+          </a:ln>
+          <a:effectLst/>
+        </p:spPr>
+        <p:style>
+          <a:lnRef idx="1">
+            <a:schemeClr val="accent1"/>
+          </a:lnRef>
+          <a:fillRef idx="3">
+            <a:schemeClr val="accent1"/>
+          </a:fillRef>
+          <a:effectRef idx="2">
+            <a:schemeClr val="accent1"/>
+          </a:effectRef>
+          <a:fontRef idx="minor">
+            <a:schemeClr val="lt1"/>
+          </a:fontRef>
+        </p:style>
+        <p:txBody>
+          <a:bodyPr rtlCol="0" anchor="ctr" wrap="square" lIns="73152" rIns="73152"/>
+          <a:lstStyle/>
+          <a:p>
+            <a:pPr algn="ctr">
+              <a:lnSpc>
+                <a:spcPct val="100000"/>
+              </a:lnSpc>
+              <a:spcAft>
+                <a:spcPts val="0"/>
+              </a:spcAft>
+              <a:defRPr sz="1700" b="0">
+                <a:solidFill>
+                  <a:srgbClr val="1F3A5F"/>
+                </a:solidFill>
+                <a:latin typeface="Calibri"/>
+              </a:defRPr>
+            </a:pPr>
+            <a:r>
+              <a:rPr sz="1700" b="0">
+                <a:solidFill>
+                  <a:srgbClr val="1F3A5F"/>
+                </a:solidFill>
+                <a:latin typeface="Calibri"/>
+              </a:rPr>
+              <a:t>Resolution</a:t>
+            </a:r>
+          </a:p>
+        </p:txBody>
+      </p:sp>
+      <p:sp>
+        <p:nvSpPr>
+          <p:cNvPr id="10" name="TextBox 9"/>
+          <p:cNvSpPr txBox="1"/>
+          <p:nvPr/>
+        </p:nvSpPr>
+        <p:spPr>
+          <a:xfrm>
+            <a:off x="4280306" y="3520440"/>
+            <a:ext cx="3631082" cy="310896"/>
+          </a:xfrm>
+          <a:prstGeom prst="rect">
+            <a:avLst/>
+          </a:prstGeom>
+          <a:noFill/>
+        </p:spPr>
+        <p:txBody>
+          <a:bodyPr wrap="square" lIns="0" tIns="0" rIns="0" bIns="0">
+            <a:spAutoFit/>
+          </a:bodyPr>
+          <a:lstStyle/>
+          <a:p>
+            <a:pPr algn="ctr">
+              <a:lnSpc>
+                <a:spcPct val="100000"/>
+              </a:lnSpc>
+              <a:spcAft>
+                <a:spcPts val="200"/>
+              </a:spcAft>
+              <a:defRPr sz="1100" b="1">
+                <a:solidFill>
+                  <a:srgbClr val="0E7C86"/>
+                </a:solidFill>
+                <a:latin typeface="Calibri"/>
+              </a:defRPr>
+            </a:pPr>
+            <a:r>
+              <a:rPr sz="1100" b="1">
+                <a:solidFill>
+                  <a:srgbClr val="0E7C86"/>
+                </a:solidFill>
+                <a:latin typeface="Calibri"/>
+              </a:rPr>
+              <a:t>done</a:t>
+            </a:r>
+          </a:p>
+        </p:txBody>
+      </p:sp>
+      <p:sp>
+        <p:nvSpPr>
+          <p:cNvPr id="11" name="Rounded Rectangle 10"/>
+          <p:cNvSpPr/>
+          <p:nvPr/>
+        </p:nvSpPr>
+        <p:spPr>
+          <a:xfrm>
+            <a:off x="8057692" y="3886200"/>
+            <a:ext cx="3631082" cy="1325880"/>
+          </a:xfrm>
+          <a:prstGeom prst="roundRect">
+            <a:avLst>
+              <a:gd name="adj" fmla="val 8000"/>
+            </a:avLst>
+          </a:prstGeom>
+          <a:solidFill>
+            <a:srgbClr val="D6ECEE"/>
+          </a:solidFill>
+          <a:ln w="25400">
+            <a:solidFill>
+              <a:srgbClr val="0E7C86"/>
+            </a:solidFill>
+          </a:ln>
+          <a:effectLst/>
+        </p:spPr>
+        <p:style>
+          <a:lnRef idx="1">
+            <a:schemeClr val="accent1"/>
+          </a:lnRef>
+          <a:fillRef idx="3">
+            <a:schemeClr val="accent1"/>
+          </a:fillRef>
+          <a:effectRef idx="2">
+            <a:schemeClr val="accent1"/>
+          </a:effectRef>
+          <a:fontRef idx="minor">
+            <a:schemeClr val="lt1"/>
+          </a:fontRef>
+        </p:style>
+        <p:txBody>
+          <a:bodyPr rtlCol="0" anchor="ctr" wrap="square" lIns="73152" rIns="73152"/>
+          <a:lstStyle/>
+          <a:p>
+            <a:pPr algn="ctr">
+              <a:lnSpc>
+                <a:spcPct val="100000"/>
+              </a:lnSpc>
+              <a:spcAft>
+                <a:spcPts val="0"/>
+              </a:spcAft>
+              <a:defRPr sz="1700" b="1">
+                <a:solidFill>
+                  <a:srgbClr val="1F3A5F"/>
+                </a:solidFill>
+                <a:latin typeface="Calibri"/>
+              </a:defRPr>
+            </a:pPr>
+            <a:r>
+              <a:rPr sz="1700" b="1">
+                <a:solidFill>
+                  <a:srgbClr val="1F3A5F"/>
+                </a:solidFill>
+                <a:latin typeface="Calibri"/>
+              </a:rPr>
+              <a:t>Decay and ramping</a:t>
+            </a:r>
+          </a:p>
+        </p:txBody>
+      </p:sp>
+      <p:sp>
+        <p:nvSpPr>
+          <p:cNvPr id="12" name="TextBox 11"/>
+          <p:cNvSpPr txBox="1"/>
+          <p:nvPr/>
+        </p:nvSpPr>
+        <p:spPr>
+          <a:xfrm>
+            <a:off x="8057692" y="3520440"/>
+            <a:ext cx="3631082" cy="310896"/>
+          </a:xfrm>
+          <a:prstGeom prst="rect">
+            <a:avLst/>
+          </a:prstGeom>
+          <a:noFill/>
+        </p:spPr>
+        <p:txBody>
+          <a:bodyPr wrap="square" lIns="0" tIns="0" rIns="0" bIns="0">
+            <a:spAutoFit/>
+          </a:bodyPr>
+          <a:lstStyle/>
+          <a:p>
+            <a:pPr algn="ctr">
+              <a:lnSpc>
+                <a:spcPct val="100000"/>
+              </a:lnSpc>
+              <a:spcAft>
+                <a:spcPts val="200"/>
+              </a:spcAft>
+              <a:defRPr sz="1100" b="1">
+                <a:solidFill>
+                  <a:srgbClr val="0E7C86"/>
+                </a:solidFill>
+                <a:latin typeface="Calibri"/>
+              </a:defRPr>
+            </a:pPr>
+            <a:r>
+              <a:rPr sz="1100" b="1">
+                <a:solidFill>
+                  <a:srgbClr val="0E7C86"/>
+                </a:solidFill>
+                <a:latin typeface="Calibri"/>
+              </a:rPr>
+              <a:t>NOW</a:t>
             </a:r>
           </a:p>
         </p:txBody>
@@ -18139,7 +18245,7 @@
                 </a:solidFill>
                 <a:latin typeface="Calibri"/>
               </a:rPr>
-              <a:t>Hybrid drive, and the trap in it</a:t>
+              <a:t>Slow decay against fast decay</a:t>
             </a:r>
           </a:p>
         </p:txBody>
@@ -18293,7 +18399,7 @@
         <p:spPr>
           <a:xfrm>
             <a:off x="502920" y="1188720"/>
-            <a:ext cx="7047088" cy="274320"/>
+            <a:ext cx="5364327" cy="457200"/>
           </a:xfrm>
           <a:prstGeom prst="rect">
             <a:avLst/>
@@ -18311,37 +18417,445 @@
                 <a:spcPct val="100000"/>
               </a:lnSpc>
               <a:spcAft>
-                <a:spcPts val="200"/>
-              </a:spcAft>
-              <a:defRPr sz="1200" b="1">
+                <a:spcPts val="600"/>
+              </a:spcAft>
+              <a:defRPr sz="1900" b="1">
                 <a:solidFill>
                   <a:srgbClr val="0E7C86"/>
                 </a:solidFill>
-                <a:latin typeface="Consolas"/>
-              </a:defRPr>
-            </a:pPr>
-            <a:r>
-              <a:rPr sz="1200" b="1">
+                <a:latin typeface="Calibri"/>
+              </a:defRPr>
+            </a:pPr>
+            <a:r>
+              <a:rPr sz="1900" b="1">
                 <a:solidFill>
                   <a:srgbClr val="0E7C86"/>
                 </a:solidFill>
-                <a:latin typeface="Consolas"/>
-              </a:rPr>
-              <a:t>Motors.ino</a:t>
-            </a:r>
-          </a:p>
-        </p:txBody>
-      </p:sp>
-      <p:sp>
-        <p:nvSpPr>
-          <p:cNvPr id="7" name="CODE_PANEL"/>
+                <a:latin typeface="Calibri"/>
+              </a:rPr>
+              <a:t>Sign-magnitude  (the beginner programs)</a:t>
+            </a:r>
+          </a:p>
+        </p:txBody>
+      </p:sp>
+      <p:sp>
+        <p:nvSpPr>
+          <p:cNvPr id="7" name="TextBox 6"/>
+          <p:cNvSpPr txBox="1"/>
+          <p:nvPr/>
+        </p:nvSpPr>
+        <p:spPr>
+          <a:xfrm>
+            <a:off x="502920" y="1700784"/>
+            <a:ext cx="5364327" cy="3474720"/>
+          </a:xfrm>
+          <a:prstGeom prst="rect">
+            <a:avLst/>
+          </a:prstGeom>
+          <a:noFill/>
+        </p:spPr>
+        <p:txBody>
+          <a:bodyPr wrap="square" lIns="0" tIns="0" rIns="0" bIns="0">
+            <a:spAutoFit/>
+          </a:bodyPr>
+          <a:lstStyle/>
+          <a:p>
+            <a:pPr algn="l">
+              <a:lnSpc>
+                <a:spcPct val="100000"/>
+              </a:lnSpc>
+              <a:spcAft>
+                <a:spcPts val="400"/>
+              </a:spcAft>
+              <a:defRPr sz="1800" b="0">
+                <a:solidFill>
+                  <a:srgbClr val="222222"/>
+                </a:solidFill>
+                <a:latin typeface="Calibri"/>
+              </a:defRPr>
+            </a:pPr>
+            <a:r>
+              <a:rPr sz="1800" b="0">
+                <a:solidFill>
+                  <a:srgbClr val="222222"/>
+                </a:solidFill>
+                <a:latin typeface="Calibri"/>
+              </a:rPr>
+              <a:t>Pulse IN1 at the duty you want. Hold IN2 low.</a:t>
+            </a:r>
+          </a:p>
+          <a:p>
+            <a:pPr algn="l">
+              <a:lnSpc>
+                <a:spcPct val="100000"/>
+              </a:lnSpc>
+              <a:spcAft>
+                <a:spcPts val="400"/>
+              </a:spcAft>
+              <a:defRPr sz="1800" b="0">
+                <a:solidFill>
+                  <a:srgbClr val="222222"/>
+                </a:solidFill>
+                <a:latin typeface="Calibri"/>
+              </a:defRPr>
+            </a:pPr>
+            <a:r>
+              <a:rPr sz="1800" b="0">
+                <a:solidFill>
+                  <a:srgbClr val="222222"/>
+                </a:solidFill>
+                <a:latin typeface="Calibri"/>
+              </a:rPr>
+              <a:t>The motor alternates between DRIVEN and COAST.</a:t>
+            </a:r>
+          </a:p>
+          <a:p>
+            <a:pPr algn="l">
+              <a:lnSpc>
+                <a:spcPct val="100000"/>
+              </a:lnSpc>
+              <a:spcAft>
+                <a:spcPts val="400"/>
+              </a:spcAft>
+              <a:defRPr sz="1800" b="0">
+                <a:solidFill>
+                  <a:srgbClr val="222222"/>
+                </a:solidFill>
+                <a:latin typeface="Calibri"/>
+              </a:defRPr>
+            </a:pPr>
+            <a:r>
+              <a:rPr sz="1800" b="0">
+                <a:solidFill>
+                  <a:srgbClr val="222222"/>
+                </a:solidFill>
+                <a:latin typeface="Calibri"/>
+              </a:rPr>
+              <a:t>During the off part nothing controls the motor at all, so the current in the windings decays slowly and the actual speed depends heavily on the load.</a:t>
+            </a:r>
+          </a:p>
+          <a:p>
+            <a:pPr algn="l">
+              <a:lnSpc>
+                <a:spcPct val="100000"/>
+              </a:lnSpc>
+              <a:spcAft>
+                <a:spcPts val="400"/>
+              </a:spcAft>
+              <a:defRPr sz="900" b="0">
+                <a:solidFill>
+                  <a:srgbClr val="222222"/>
+                </a:solidFill>
+                <a:latin typeface="Calibri"/>
+              </a:defRPr>
+            </a:pPr>
+          </a:p>
+          <a:p>
+            <a:pPr algn="l">
+              <a:lnSpc>
+                <a:spcPct val="100000"/>
+              </a:lnSpc>
+              <a:spcAft>
+                <a:spcPts val="400"/>
+              </a:spcAft>
+              <a:defRPr sz="1800" b="0">
+                <a:solidFill>
+                  <a:srgbClr val="222222"/>
+                </a:solidFill>
+                <a:latin typeface="Calibri"/>
+              </a:defRPr>
+            </a:pPr>
+            <a:r>
+              <a:rPr sz="1800" b="0">
+                <a:solidFill>
+                  <a:srgbClr val="222222"/>
+                </a:solidFill>
+                <a:latin typeface="Calibri"/>
+              </a:rPr>
+              <a:t>Simple to read, and perfectly good for learning.</a:t>
+            </a:r>
+          </a:p>
+          <a:p>
+            <a:pPr algn="l">
+              <a:lnSpc>
+                <a:spcPct val="100000"/>
+              </a:lnSpc>
+              <a:spcAft>
+                <a:spcPts val="400"/>
+              </a:spcAft>
+              <a:defRPr sz="900" b="0">
+                <a:solidFill>
+                  <a:srgbClr val="222222"/>
+                </a:solidFill>
+                <a:latin typeface="Calibri"/>
+              </a:defRPr>
+            </a:pPr>
+          </a:p>
+          <a:p>
+            <a:pPr algn="l">
+              <a:lnSpc>
+                <a:spcPct val="100000"/>
+              </a:lnSpc>
+              <a:spcAft>
+                <a:spcPts val="400"/>
+              </a:spcAft>
+              <a:defRPr sz="1800" b="0">
+                <a:solidFill>
+                  <a:srgbClr val="222222"/>
+                </a:solidFill>
+                <a:latin typeface="Calibri"/>
+              </a:defRPr>
+            </a:pPr>
+            <a:r>
+              <a:rPr sz="1800" b="0">
+                <a:solidFill>
+                  <a:srgbClr val="222222"/>
+                </a:solidFill>
+                <a:latin typeface="Calibri"/>
+              </a:rPr>
+              <a:t>This is SLOW DECAY.</a:t>
+            </a:r>
+          </a:p>
+        </p:txBody>
+      </p:sp>
+      <p:sp>
+        <p:nvSpPr>
+          <p:cNvPr id="8" name="TextBox 7"/>
+          <p:cNvSpPr txBox="1"/>
+          <p:nvPr/>
+        </p:nvSpPr>
+        <p:spPr>
+          <a:xfrm>
+            <a:off x="6324447" y="1188720"/>
+            <a:ext cx="5364328" cy="457200"/>
+          </a:xfrm>
+          <a:prstGeom prst="rect">
+            <a:avLst/>
+          </a:prstGeom>
+          <a:noFill/>
+        </p:spPr>
+        <p:txBody>
+          <a:bodyPr wrap="square" lIns="0" tIns="0" rIns="0" bIns="0">
+            <a:spAutoFit/>
+          </a:bodyPr>
+          <a:lstStyle/>
+          <a:p>
+            <a:pPr algn="l">
+              <a:lnSpc>
+                <a:spcPct val="100000"/>
+              </a:lnSpc>
+              <a:spcAft>
+                <a:spcPts val="600"/>
+              </a:spcAft>
+              <a:defRPr sz="1900" b="1">
+                <a:solidFill>
+                  <a:srgbClr val="0E7C86"/>
+                </a:solidFill>
+                <a:latin typeface="Calibri"/>
+              </a:defRPr>
+            </a:pPr>
+            <a:r>
+              <a:rPr sz="1900" b="1">
+                <a:solidFill>
+                  <a:srgbClr val="0E7C86"/>
+                </a:solidFill>
+                <a:latin typeface="Calibri"/>
+              </a:rPr>
+              <a:t>Hybrid drive  (Op Program 12)</a:t>
+            </a:r>
+          </a:p>
+        </p:txBody>
+      </p:sp>
+      <p:sp>
+        <p:nvSpPr>
+          <p:cNvPr id="9" name="TextBox 8"/>
+          <p:cNvSpPr txBox="1"/>
+          <p:nvPr/>
+        </p:nvSpPr>
+        <p:spPr>
+          <a:xfrm>
+            <a:off x="6324447" y="1700784"/>
+            <a:ext cx="5364328" cy="3474720"/>
+          </a:xfrm>
+          <a:prstGeom prst="rect">
+            <a:avLst/>
+          </a:prstGeom>
+          <a:noFill/>
+        </p:spPr>
+        <p:txBody>
+          <a:bodyPr wrap="square" lIns="0" tIns="0" rIns="0" bIns="0">
+            <a:spAutoFit/>
+          </a:bodyPr>
+          <a:lstStyle/>
+          <a:p>
+            <a:pPr algn="l">
+              <a:lnSpc>
+                <a:spcPct val="100000"/>
+              </a:lnSpc>
+              <a:spcAft>
+                <a:spcPts val="400"/>
+              </a:spcAft>
+              <a:defRPr sz="1800" b="0">
+                <a:solidFill>
+                  <a:srgbClr val="222222"/>
+                </a:solidFill>
+                <a:latin typeface="Calibri"/>
+              </a:defRPr>
+            </a:pPr>
+            <a:r>
+              <a:rPr sz="1800" b="0">
+                <a:solidFill>
+                  <a:srgbClr val="222222"/>
+                </a:solidFill>
+                <a:latin typeface="Calibri"/>
+              </a:rPr>
+              <a:t>Hold IN1 HIGH. Pulse IN2 at the inverse of the duty.</a:t>
+            </a:r>
+          </a:p>
+          <a:p>
+            <a:pPr algn="l">
+              <a:lnSpc>
+                <a:spcPct val="100000"/>
+              </a:lnSpc>
+              <a:spcAft>
+                <a:spcPts val="400"/>
+              </a:spcAft>
+              <a:defRPr sz="1800" b="0">
+                <a:solidFill>
+                  <a:srgbClr val="222222"/>
+                </a:solidFill>
+                <a:latin typeface="Calibri"/>
+              </a:defRPr>
+            </a:pPr>
+            <a:r>
+              <a:rPr sz="1800" b="0">
+                <a:solidFill>
+                  <a:srgbClr val="222222"/>
+                </a:solidFill>
+                <a:latin typeface="Calibri"/>
+              </a:rPr>
+              <a:t>The motor alternates between DRIVEN and BRAKE.</a:t>
+            </a:r>
+          </a:p>
+          <a:p>
+            <a:pPr algn="l">
+              <a:lnSpc>
+                <a:spcPct val="100000"/>
+              </a:lnSpc>
+              <a:spcAft>
+                <a:spcPts val="400"/>
+              </a:spcAft>
+              <a:defRPr sz="1800" b="0">
+                <a:solidFill>
+                  <a:srgbClr val="222222"/>
+                </a:solidFill>
+                <a:latin typeface="Calibri"/>
+              </a:defRPr>
+            </a:pPr>
+            <a:r>
+              <a:rPr sz="1800" b="0">
+                <a:solidFill>
+                  <a:srgbClr val="222222"/>
+                </a:solidFill>
+                <a:latin typeface="Calibri"/>
+              </a:rPr>
+              <a:t>The braking part actively pulls the current down, so the average is much closer to what you asked for, and speed holds up under load.</a:t>
+            </a:r>
+          </a:p>
+          <a:p>
+            <a:pPr algn="l">
+              <a:lnSpc>
+                <a:spcPct val="100000"/>
+              </a:lnSpc>
+              <a:spcAft>
+                <a:spcPts val="400"/>
+              </a:spcAft>
+              <a:defRPr sz="900" b="0">
+                <a:solidFill>
+                  <a:srgbClr val="222222"/>
+                </a:solidFill>
+                <a:latin typeface="Calibri"/>
+              </a:defRPr>
+            </a:pPr>
+          </a:p>
+          <a:p>
+            <a:pPr algn="l">
+              <a:lnSpc>
+                <a:spcPct val="100000"/>
+              </a:lnSpc>
+              <a:spcAft>
+                <a:spcPts val="400"/>
+              </a:spcAft>
+              <a:defRPr sz="1800" b="0">
+                <a:solidFill>
+                  <a:srgbClr val="222222"/>
+                </a:solidFill>
+                <a:latin typeface="Calibri"/>
+              </a:defRPr>
+            </a:pPr>
+            <a:r>
+              <a:rPr sz="1800" b="0">
+                <a:solidFill>
+                  <a:srgbClr val="222222"/>
+                </a:solidFill>
+                <a:latin typeface="Calibri"/>
+              </a:rPr>
+              <a:t>Noticeably better control at low duty - exactly where you need it.</a:t>
+            </a:r>
+          </a:p>
+          <a:p>
+            <a:pPr algn="l">
+              <a:lnSpc>
+                <a:spcPct val="100000"/>
+              </a:lnSpc>
+              <a:spcAft>
+                <a:spcPts val="400"/>
+              </a:spcAft>
+              <a:defRPr sz="900" b="0">
+                <a:solidFill>
+                  <a:srgbClr val="222222"/>
+                </a:solidFill>
+                <a:latin typeface="Calibri"/>
+              </a:defRPr>
+            </a:pPr>
+          </a:p>
+          <a:p>
+            <a:pPr algn="l">
+              <a:lnSpc>
+                <a:spcPct val="100000"/>
+              </a:lnSpc>
+              <a:spcAft>
+                <a:spcPts val="400"/>
+              </a:spcAft>
+              <a:defRPr sz="1800" b="0">
+                <a:solidFill>
+                  <a:srgbClr val="222222"/>
+                </a:solidFill>
+                <a:latin typeface="Calibri"/>
+              </a:defRPr>
+            </a:pPr>
+            <a:r>
+              <a:rPr sz="1800" b="0">
+                <a:solidFill>
+                  <a:srgbClr val="222222"/>
+                </a:solidFill>
+                <a:latin typeface="Calibri"/>
+              </a:rPr>
+              <a:t>This is FAST DECAY.</a:t>
+            </a:r>
+          </a:p>
+        </p:txBody>
+      </p:sp>
+      <p:sp>
+        <p:nvSpPr>
+          <p:cNvPr id="10" name="Rounded Rectangle 9"/>
           <p:cNvSpPr/>
           <p:nvPr/>
         </p:nvSpPr>
         <p:spPr>
           <a:xfrm>
-            <a:off x="502920" y="1517904"/>
-            <a:ext cx="7047088" cy="4745736"/>
+            <a:off x="502920" y="5303520"/>
+            <a:ext cx="11185855" cy="960120"/>
           </a:xfrm>
           <a:prstGeom prst="roundRect">
             <a:avLst>
@@ -18349,11 +18863,11 @@
             </a:avLst>
           </a:prstGeom>
           <a:solidFill>
-            <a:srgbClr val="F4F6F8"/>
+            <a:srgbClr val="FDF3E3"/>
           </a:solidFill>
           <a:ln w="12700">
             <a:solidFill>
-              <a:srgbClr val="C8D2DE"/>
+              <a:srgbClr val="B46A0F"/>
             </a:solidFill>
           </a:ln>
           <a:effectLst/>
@@ -18373,541 +18887,27 @@
           </a:fontRef>
         </p:style>
         <p:txBody>
-          <a:bodyPr rtlCol="0" anchor="t" wrap="square" lIns="146304" tIns="91440" bIns="73152"/>
-          <a:lstStyle/>
-          <a:p>
-            <a:pPr algn="l">
-              <a:lnSpc>
-                <a:spcPct val="100000"/>
-              </a:lnSpc>
-              <a:spcAft>
-                <a:spcPts val="0"/>
-              </a:spcAft>
-              <a:defRPr sz="1450">
-                <a:latin typeface="Consolas"/>
-              </a:defRPr>
-            </a:pPr>
-            <a:r>
-              <a:rPr sz="1450">
-                <a:solidFill>
-                  <a:srgbClr val="222222"/>
-                </a:solidFill>
-                <a:latin typeface="Consolas"/>
-              </a:rPr>
-              <a:t>void set_motor_hybrid(uint8_t in1_ch, uint8_t in2_ch, int duty) {</a:t>
-            </a:r>
-          </a:p>
-          <a:p>
-            <a:pPr algn="l">
-              <a:lnSpc>
-                <a:spcPct val="100000"/>
-              </a:lnSpc>
-              <a:spcAft>
-                <a:spcPts val="0"/>
-              </a:spcAft>
-              <a:defRPr sz="1450">
-                <a:latin typeface="Consolas"/>
-              </a:defRPr>
-            </a:pPr>
-            <a:r>
-              <a:rPr sz="1450">
-                <a:solidFill>
-                  <a:srgbClr val="222222"/>
-                </a:solidFill>
-                <a:latin typeface="Consolas"/>
-              </a:rPr>
-              <a:t>  duty = constrain(duty, -PWM_MAX, PWM_MAX);</a:t>
-            </a:r>
-          </a:p>
-          <a:p>
-            <a:pPr algn="l">
-              <a:lnSpc>
-                <a:spcPct val="100000"/>
-              </a:lnSpc>
-              <a:spcAft>
-                <a:spcPts val="0"/>
-              </a:spcAft>
-              <a:defRPr sz="1450">
-                <a:latin typeface="Consolas"/>
-              </a:defRPr>
-            </a:pPr>
-            <a:r>
-              <a:rPr sz="1450">
-                <a:solidFill>
-                  <a:srgbClr val="222222"/>
-                </a:solidFill>
-                <a:latin typeface="Consolas"/>
-              </a:rPr>
-              <a:t> </a:t>
-            </a:r>
-          </a:p>
-          <a:p>
-            <a:pPr algn="l">
-              <a:lnSpc>
-                <a:spcPct val="100000"/>
-              </a:lnSpc>
-              <a:spcAft>
-                <a:spcPts val="0"/>
-              </a:spcAft>
-              <a:defRPr sz="1450">
-                <a:latin typeface="Consolas"/>
-              </a:defRPr>
-            </a:pPr>
-            <a:r>
-              <a:rPr sz="1450" b="1">
-                <a:solidFill>
-                  <a:srgbClr val="0E7C86"/>
-                </a:solidFill>
-                <a:latin typeface="Consolas"/>
-              </a:rPr>
-              <a:t>  if (duty == 0) {           // WITHOUT THIS, ZERO IS A BRAKE</a:t>
-            </a:r>
-          </a:p>
-          <a:p>
-            <a:pPr algn="l">
-              <a:lnSpc>
-                <a:spcPct val="100000"/>
-              </a:lnSpc>
-              <a:spcAft>
-                <a:spcPts val="0"/>
-              </a:spcAft>
-              <a:defRPr sz="1450">
-                <a:latin typeface="Consolas"/>
-              </a:defRPr>
-            </a:pPr>
-            <a:r>
-              <a:rPr sz="1450" b="1">
-                <a:solidFill>
-                  <a:srgbClr val="0E7C86"/>
-                </a:solidFill>
-                <a:latin typeface="Consolas"/>
-              </a:rPr>
-              <a:t>    ledcWrite(in1_ch, 0);</a:t>
-            </a:r>
-          </a:p>
-          <a:p>
-            <a:pPr algn="l">
-              <a:lnSpc>
-                <a:spcPct val="100000"/>
-              </a:lnSpc>
-              <a:spcAft>
-                <a:spcPts val="0"/>
-              </a:spcAft>
-              <a:defRPr sz="1450">
-                <a:latin typeface="Consolas"/>
-              </a:defRPr>
-            </a:pPr>
-            <a:r>
-              <a:rPr sz="1450" b="1">
-                <a:solidFill>
-                  <a:srgbClr val="0E7C86"/>
-                </a:solidFill>
-                <a:latin typeface="Consolas"/>
-              </a:rPr>
-              <a:t>    ledcWrite(in2_ch, 0);</a:t>
-            </a:r>
-          </a:p>
-          <a:p>
-            <a:pPr algn="l">
-              <a:lnSpc>
-                <a:spcPct val="100000"/>
-              </a:lnSpc>
-              <a:spcAft>
-                <a:spcPts val="0"/>
-              </a:spcAft>
-              <a:defRPr sz="1450">
-                <a:latin typeface="Consolas"/>
-              </a:defRPr>
-            </a:pPr>
-            <a:r>
-              <a:rPr sz="1450" b="1">
-                <a:solidFill>
-                  <a:srgbClr val="0E7C86"/>
-                </a:solidFill>
-                <a:latin typeface="Consolas"/>
-              </a:rPr>
-              <a:t>    return;</a:t>
-            </a:r>
-          </a:p>
-          <a:p>
-            <a:pPr algn="l">
-              <a:lnSpc>
-                <a:spcPct val="100000"/>
-              </a:lnSpc>
-              <a:spcAft>
-                <a:spcPts val="0"/>
-              </a:spcAft>
-              <a:defRPr sz="1450">
-                <a:latin typeface="Consolas"/>
-              </a:defRPr>
-            </a:pPr>
-            <a:r>
-              <a:rPr sz="1450" b="1">
-                <a:solidFill>
-                  <a:srgbClr val="0E7C86"/>
-                </a:solidFill>
-                <a:latin typeface="Consolas"/>
-              </a:rPr>
-              <a:t>  }</a:t>
-            </a:r>
-          </a:p>
-          <a:p>
-            <a:pPr algn="l">
-              <a:lnSpc>
-                <a:spcPct val="100000"/>
-              </a:lnSpc>
-              <a:spcAft>
-                <a:spcPts val="0"/>
-              </a:spcAft>
-              <a:defRPr sz="1450">
-                <a:latin typeface="Consolas"/>
-              </a:defRPr>
-            </a:pPr>
-            <a:r>
-              <a:rPr sz="1450">
-                <a:solidFill>
-                  <a:srgbClr val="222222"/>
-                </a:solidFill>
-                <a:latin typeface="Consolas"/>
-              </a:rPr>
-              <a:t> </a:t>
-            </a:r>
-          </a:p>
-          <a:p>
-            <a:pPr algn="l">
-              <a:lnSpc>
-                <a:spcPct val="100000"/>
-              </a:lnSpc>
-              <a:spcAft>
-                <a:spcPts val="0"/>
-              </a:spcAft>
-              <a:defRPr sz="1450">
-                <a:latin typeface="Consolas"/>
-              </a:defRPr>
-            </a:pPr>
-            <a:r>
-              <a:rPr sz="1450">
-                <a:solidFill>
-                  <a:srgbClr val="222222"/>
-                </a:solidFill>
-                <a:latin typeface="Consolas"/>
-              </a:rPr>
-              <a:t>  int inverse = PWM_MAX - abs(duty);</a:t>
-            </a:r>
-          </a:p>
-          <a:p>
-            <a:pPr algn="l">
-              <a:lnSpc>
-                <a:spcPct val="100000"/>
-              </a:lnSpc>
-              <a:spcAft>
-                <a:spcPts val="0"/>
-              </a:spcAft>
-              <a:defRPr sz="1450">
-                <a:latin typeface="Consolas"/>
-              </a:defRPr>
-            </a:pPr>
-            <a:r>
-              <a:rPr sz="1450">
-                <a:solidFill>
-                  <a:srgbClr val="222222"/>
-                </a:solidFill>
-                <a:latin typeface="Consolas"/>
-              </a:rPr>
-              <a:t>  if (duty &gt; 0) {</a:t>
-            </a:r>
-          </a:p>
-          <a:p>
-            <a:pPr algn="l">
-              <a:lnSpc>
-                <a:spcPct val="100000"/>
-              </a:lnSpc>
-              <a:spcAft>
-                <a:spcPts val="0"/>
-              </a:spcAft>
-              <a:defRPr sz="1450">
-                <a:latin typeface="Consolas"/>
-              </a:defRPr>
-            </a:pPr>
-            <a:r>
-              <a:rPr sz="1450">
-                <a:solidFill>
-                  <a:srgbClr val="222222"/>
-                </a:solidFill>
-                <a:latin typeface="Consolas"/>
-              </a:rPr>
-              <a:t>    ledcWrite(in1_ch, PWM_MAX);</a:t>
-            </a:r>
-          </a:p>
-          <a:p>
-            <a:pPr algn="l">
-              <a:lnSpc>
-                <a:spcPct val="100000"/>
-              </a:lnSpc>
-              <a:spcAft>
-                <a:spcPts val="0"/>
-              </a:spcAft>
-              <a:defRPr sz="1450">
-                <a:latin typeface="Consolas"/>
-              </a:defRPr>
-            </a:pPr>
-            <a:r>
-              <a:rPr sz="1450">
-                <a:solidFill>
-                  <a:srgbClr val="222222"/>
-                </a:solidFill>
-                <a:latin typeface="Consolas"/>
-              </a:rPr>
-              <a:t>    ledcWrite(in2_ch, inverse);</a:t>
-            </a:r>
-          </a:p>
-          <a:p>
-            <a:pPr algn="l">
-              <a:lnSpc>
-                <a:spcPct val="100000"/>
-              </a:lnSpc>
-              <a:spcAft>
-                <a:spcPts val="0"/>
-              </a:spcAft>
-              <a:defRPr sz="1450">
-                <a:latin typeface="Consolas"/>
-              </a:defRPr>
-            </a:pPr>
-            <a:r>
-              <a:rPr sz="1450">
-                <a:solidFill>
-                  <a:srgbClr val="222222"/>
-                </a:solidFill>
-                <a:latin typeface="Consolas"/>
-              </a:rPr>
-              <a:t>  } else {</a:t>
-            </a:r>
-          </a:p>
-          <a:p>
-            <a:pPr algn="l">
-              <a:lnSpc>
-                <a:spcPct val="100000"/>
-              </a:lnSpc>
-              <a:spcAft>
-                <a:spcPts val="0"/>
-              </a:spcAft>
-              <a:defRPr sz="1450">
-                <a:latin typeface="Consolas"/>
-              </a:defRPr>
-            </a:pPr>
-            <a:r>
-              <a:rPr sz="1450">
-                <a:solidFill>
-                  <a:srgbClr val="222222"/>
-                </a:solidFill>
-                <a:latin typeface="Consolas"/>
-              </a:rPr>
-              <a:t>    ledcWrite(in1_ch, inverse);</a:t>
-            </a:r>
-          </a:p>
-          <a:p>
-            <a:pPr algn="l">
-              <a:lnSpc>
-                <a:spcPct val="100000"/>
-              </a:lnSpc>
-              <a:spcAft>
-                <a:spcPts val="0"/>
-              </a:spcAft>
-              <a:defRPr sz="1450">
-                <a:latin typeface="Consolas"/>
-              </a:defRPr>
-            </a:pPr>
-            <a:r>
-              <a:rPr sz="1450">
-                <a:solidFill>
-                  <a:srgbClr val="222222"/>
-                </a:solidFill>
-                <a:latin typeface="Consolas"/>
-              </a:rPr>
-              <a:t>    ledcWrite(in2_ch, PWM_MAX);</a:t>
-            </a:r>
-          </a:p>
-          <a:p>
-            <a:pPr algn="l">
-              <a:lnSpc>
-                <a:spcPct val="100000"/>
-              </a:lnSpc>
-              <a:spcAft>
-                <a:spcPts val="0"/>
-              </a:spcAft>
-              <a:defRPr sz="1450">
-                <a:latin typeface="Consolas"/>
-              </a:defRPr>
-            </a:pPr>
-            <a:r>
-              <a:rPr sz="1450">
-                <a:solidFill>
-                  <a:srgbClr val="222222"/>
-                </a:solidFill>
-                <a:latin typeface="Consolas"/>
-              </a:rPr>
-              <a:t>  }</a:t>
-            </a:r>
-          </a:p>
-          <a:p>
-            <a:pPr algn="l">
-              <a:lnSpc>
-                <a:spcPct val="100000"/>
-              </a:lnSpc>
-              <a:spcAft>
-                <a:spcPts val="0"/>
-              </a:spcAft>
-              <a:defRPr sz="1450">
-                <a:latin typeface="Consolas"/>
-              </a:defRPr>
-            </a:pPr>
-            <a:r>
-              <a:rPr sz="1450">
-                <a:solidFill>
-                  <a:srgbClr val="222222"/>
-                </a:solidFill>
-                <a:latin typeface="Consolas"/>
-              </a:rPr>
-              <a:t>}</a:t>
-            </a:r>
-          </a:p>
-        </p:txBody>
-      </p:sp>
-      <p:sp>
-        <p:nvSpPr>
-          <p:cNvPr id="8" name="TextBox 7"/>
-          <p:cNvSpPr txBox="1"/>
-          <p:nvPr/>
-        </p:nvSpPr>
-        <p:spPr>
-          <a:xfrm>
-            <a:off x="7870048" y="1517904"/>
-            <a:ext cx="3818727" cy="4745736"/>
-          </a:xfrm>
-          <a:prstGeom prst="rect">
-            <a:avLst/>
-          </a:prstGeom>
-          <a:noFill/>
-        </p:spPr>
-        <p:txBody>
-          <a:bodyPr wrap="square" lIns="0" tIns="0" rIns="0" bIns="0">
-            <a:spAutoFit/>
-          </a:bodyPr>
-          <a:lstStyle/>
-          <a:p>
-            <a:pPr algn="l">
-              <a:lnSpc>
-                <a:spcPct val="100000"/>
-              </a:lnSpc>
-              <a:spcAft>
-                <a:spcPts val="700"/>
-              </a:spcAft>
-              <a:defRPr sz="2100" b="0">
-                <a:solidFill>
-                  <a:srgbClr val="222222"/>
-                </a:solidFill>
-                <a:latin typeface="Calibri"/>
-              </a:defRPr>
-            </a:pPr>
-            <a:r>
-              <a:rPr sz="2100" b="0">
-                <a:solidFill>
-                  <a:srgbClr val="222222"/>
-                </a:solidFill>
-                <a:latin typeface="Calibri"/>
-              </a:rPr>
-              <a:t>Full duty forward: IN1 = 1023, IN2 = 0. Driven hard.</a:t>
-            </a:r>
-          </a:p>
-          <a:p>
-            <a:pPr algn="l">
-              <a:lnSpc>
-                <a:spcPct val="100000"/>
-              </a:lnSpc>
-              <a:spcAft>
-                <a:spcPts val="700"/>
-              </a:spcAft>
-              <a:defRPr sz="2100" b="0">
-                <a:solidFill>
-                  <a:srgbClr val="222222"/>
-                </a:solidFill>
-                <a:latin typeface="Calibri"/>
-              </a:defRPr>
-            </a:pPr>
-            <a:r>
-              <a:rPr sz="2100" b="0">
-                <a:solidFill>
-                  <a:srgbClr val="222222"/>
-                </a:solidFill>
-                <a:latin typeface="Calibri"/>
-              </a:rPr>
-              <a:t>Half duty forward: IN1 = 1023, IN2 = 512. Half driven, half braked.</a:t>
-            </a:r>
-          </a:p>
-          <a:p>
-            <a:pPr algn="l">
-              <a:lnSpc>
-                <a:spcPct val="100000"/>
-              </a:lnSpc>
-              <a:spcAft>
-                <a:spcPts val="700"/>
-              </a:spcAft>
-              <a:defRPr sz="2100" b="0">
-                <a:solidFill>
-                  <a:srgbClr val="222222"/>
-                </a:solidFill>
-                <a:latin typeface="Calibri"/>
-              </a:defRPr>
-            </a:pPr>
-            <a:r>
-              <a:rPr sz="2100" b="0">
-                <a:solidFill>
-                  <a:srgbClr val="222222"/>
-                </a:solidFill>
-                <a:latin typeface="Calibri"/>
-              </a:rPr>
-              <a:t>Zero without the guard: IN1 = 1023, IN2 = 1023. Both high. That is a brake.</a:t>
-            </a:r>
-          </a:p>
-          <a:p>
-            <a:pPr algn="l">
-              <a:lnSpc>
-                <a:spcPct val="100000"/>
-              </a:lnSpc>
-              <a:spcAft>
-                <a:spcPts val="700"/>
-              </a:spcAft>
-              <a:defRPr sz="1050" b="0">
-                <a:solidFill>
-                  <a:srgbClr val="222222"/>
-                </a:solidFill>
-                <a:latin typeface="Calibri"/>
-              </a:defRPr>
-            </a:pPr>
-          </a:p>
-          <a:p>
-            <a:pPr algn="l">
-              <a:lnSpc>
-                <a:spcPct val="100000"/>
-              </a:lnSpc>
-              <a:spcAft>
-                <a:spcPts val="700"/>
-              </a:spcAft>
-              <a:defRPr sz="2100" b="0">
-                <a:solidFill>
-                  <a:srgbClr val="222222"/>
-                </a:solidFill>
-                <a:latin typeface="Calibri"/>
-              </a:defRPr>
-            </a:pPr>
-            <a:r>
-              <a:rPr sz="2100" b="0">
-                <a:solidFill>
-                  <a:srgbClr val="222222"/>
-                </a:solidFill>
-                <a:latin typeface="Calibri"/>
-              </a:rPr>
-              <a:t>A vehicle that will not coast, and cannot be pushed by hand when it is switched on, has this bug.</a:t>
+          <a:bodyPr rtlCol="0" anchor="ctr" wrap="square" lIns="164592" rIns="164592" tIns="73152" bIns="73152"/>
+          <a:lstStyle/>
+          <a:p>
+            <a:pPr algn="l"/>
+            <a:r>
+              <a:rPr sz="1300" b="1">
+                <a:solidFill>
+                  <a:srgbClr val="B46A0F"/>
+                </a:solidFill>
+                <a:latin typeface="Calibri"/>
+              </a:rPr>
+              <a:t>WATCH OUT   </a:t>
+            </a:r>
+            <a:r>
+              <a:rPr sz="1500">
+                <a:solidFill>
+                  <a:srgbClr val="222222"/>
+                </a:solidFill>
+                <a:latin typeface="Calibri"/>
+              </a:rPr>
+              <a:t>Watch the zero case. In hybrid, duty 0 puts PWM_MAX on BOTH pins, which is a hard brake, not a coast. Op 12 tests for zero separately and calls coast_all(). Miss that and the vehicle will not roll when you let go.</a:t>
             </a:r>
           </a:p>
         </p:txBody>

--- a/ground-vehicle/docs/courses/advanced/l2_motors_and_ramping.pptx
+++ b/ground-vehicle/docs/courses/advanced/l2_motors_and_ramping.pptx
@@ -5777,7 +5777,7 @@
                 </a:solidFill>
                 <a:latin typeface="Calibri"/>
               </a:rPr>
-              <a:t>9</a:t>
+              <a:t>10</a:t>
             </a:r>
           </a:p>
         </p:txBody>
@@ -6609,7 +6609,7 @@
                 </a:solidFill>
                 <a:latin typeface="Calibri"/>
               </a:rPr>
-              <a:t>10</a:t>
+              <a:t>11</a:t>
             </a:r>
           </a:p>
         </p:txBody>
@@ -7425,7 +7425,7 @@
                 </a:solidFill>
                 <a:latin typeface="Calibri"/>
               </a:rPr>
-              <a:t>11</a:t>
+              <a:t>12</a:t>
             </a:r>
           </a:p>
         </p:txBody>
@@ -8158,7 +8158,7 @@
                 </a:solidFill>
                 <a:latin typeface="Calibri"/>
               </a:rPr>
-              <a:t>12</a:t>
+              <a:t>13</a:t>
             </a:r>
           </a:p>
         </p:txBody>
@@ -10344,7 +10344,7 @@
                 </a:solidFill>
                 <a:latin typeface="Calibri"/>
               </a:rPr>
-              <a:t>13</a:t>
+              <a:t>14</a:t>
             </a:r>
           </a:p>
         </p:txBody>
@@ -11006,7 +11006,7 @@
                 </a:solidFill>
                 <a:latin typeface="Calibri"/>
               </a:rPr>
-              <a:t>14</a:t>
+              <a:t>15</a:t>
             </a:r>
           </a:p>
         </p:txBody>
@@ -11691,7 +11691,7 @@
                 </a:solidFill>
                 <a:latin typeface="Calibri"/>
               </a:rPr>
-              <a:t>15</a:t>
+              <a:t>16</a:t>
             </a:r>
           </a:p>
         </p:txBody>
@@ -12744,7 +12744,7 @@
                 </a:solidFill>
                 <a:latin typeface="Calibri"/>
               </a:rPr>
-              <a:t>16</a:t>
+              <a:t>17</a:t>
             </a:r>
           </a:p>
         </p:txBody>
@@ -13219,7 +13219,7 @@
                 </a:solidFill>
                 <a:latin typeface="Calibri"/>
               </a:rPr>
-              <a:t>1</a:t>
+              <a:t>2</a:t>
             </a:r>
           </a:p>
         </p:txBody>
@@ -13619,7 +13619,7 @@
                 </a:solidFill>
                 <a:latin typeface="Calibri"/>
               </a:rPr>
-              <a:t>2</a:t>
+              <a:t>3</a:t>
             </a:r>
           </a:p>
         </p:txBody>
@@ -14309,7 +14309,7 @@
                 </a:solidFill>
                 <a:latin typeface="Calibri"/>
               </a:rPr>
-              <a:t>3</a:t>
+              <a:t>4</a:t>
             </a:r>
           </a:p>
         </p:txBody>
@@ -14906,7 +14906,7 @@
                 </a:solidFill>
                 <a:latin typeface="Calibri"/>
               </a:rPr>
-              <a:t>4</a:t>
+              <a:t>5</a:t>
             </a:r>
           </a:p>
         </p:txBody>
@@ -15556,7 +15556,7 @@
                 </a:solidFill>
                 <a:latin typeface="Calibri"/>
               </a:rPr>
-              <a:t>5</a:t>
+              <a:t>6</a:t>
             </a:r>
           </a:p>
         </p:txBody>
@@ -16289,7 +16289,7 @@
                 </a:solidFill>
                 <a:latin typeface="Calibri"/>
               </a:rPr>
-              <a:t>6</a:t>
+              <a:t>7</a:t>
             </a:r>
           </a:p>
         </p:txBody>
@@ -17687,7 +17687,7 @@
                 </a:solidFill>
                 <a:latin typeface="Calibri"/>
               </a:rPr>
-              <a:t>7</a:t>
+              <a:t>8</a:t>
             </a:r>
           </a:p>
         </p:txBody>
@@ -18385,7 +18385,7 @@
                 </a:solidFill>
                 <a:latin typeface="Calibri"/>
               </a:rPr>
-              <a:t>8</a:t>
+              <a:t>9</a:t>
             </a:r>
           </a:p>
         </p:txBody>

--- a/ground-vehicle/docs/courses/advanced/l2_motors_and_ramping.pptx
+++ b/ground-vehicle/docs/courses/advanced/l2_motors_and_ramping.pptx
@@ -1119,7 +1119,7 @@
               <a:rPr sz="1200">
                 <a:latin typeface="Calibri"/>
               </a:rPr>
-              <a:t>The four-servo scheme surprises people. One stick, four servos, each owning one direction and centerd otherwise.</a:t>
+              <a:t>The four-servo scheme surprises people. One stick, four servos, each owning one direction and centered otherwise.</a:t>
             </a:r>
           </a:p>
           <a:p>
@@ -7948,7 +7948,7 @@
               <a:t>SAFETY   </a:t>
             </a:r>
             <a:r>
-              <a:rPr sz="1500">
+              <a:rPr sz="1800">
                 <a:solidFill>
                   <a:srgbClr val="222222"/>
                 </a:solidFill>
@@ -10134,7 +10134,7 @@
               <a:t>KEY POINT   </a:t>
             </a:r>
             <a:r>
-              <a:rPr sz="1500">
+              <a:rPr sz="1800">
                 <a:solidFill>
                   <a:srgbClr val="222222"/>
                 </a:solidFill>
@@ -11446,7 +11446,7 @@
                 </a:solidFill>
                 <a:latin typeface="Calibri"/>
               </a:rPr>
-              <a:t>Each sits centerd whenever the stick is not pushed its way, so one stick aims four independent things.</a:t>
+              <a:t>Each sits centered whenever the stick is not pushed its way, so one stick aims four independent things.</a:t>
             </a:r>
           </a:p>
           <a:p>
@@ -12163,7 +12163,7 @@
                 </a:solidFill>
                 <a:latin typeface="Calibri"/>
               </a:rPr>
-              <a:t>centerd</a:t>
+              <a:t>centered</a:t>
             </a:r>
           </a:p>
         </p:txBody>
@@ -14786,7 +14786,7 @@
               <a:t>WATCH OUT   </a:t>
             </a:r>
             <a:r>
-              <a:rPr sz="1500">
+              <a:rPr sz="1800">
                 <a:solidFill>
                   <a:srgbClr val="222222"/>
                 </a:solidFill>
@@ -16079,7 +16079,7 @@
               <a:t>SAFETY   </a:t>
             </a:r>
             <a:r>
-              <a:rPr sz="1500">
+              <a:rPr sz="1800">
                 <a:solidFill>
                   <a:srgbClr val="222222"/>
                 </a:solidFill>
@@ -18447,7 +18447,7 @@
         <p:spPr>
           <a:xfrm>
             <a:off x="502920" y="1700784"/>
-            <a:ext cx="5364327" cy="3474720"/>
+            <a:ext cx="5364327" cy="3369564"/>
           </a:xfrm>
           <a:prstGeom prst="rect">
             <a:avLst/>
@@ -18675,7 +18675,7 @@
         <p:spPr>
           <a:xfrm>
             <a:off x="6324447" y="1700784"/>
-            <a:ext cx="5364328" cy="3474720"/>
+            <a:ext cx="5364328" cy="3369564"/>
           </a:xfrm>
           <a:prstGeom prst="rect">
             <a:avLst/>
@@ -18854,8 +18854,8 @@
         </p:nvSpPr>
         <p:spPr>
           <a:xfrm>
-            <a:off x="502920" y="5303520"/>
-            <a:ext cx="11185855" cy="960120"/>
+            <a:off x="502920" y="5198364"/>
+            <a:ext cx="11185855" cy="1065276"/>
           </a:xfrm>
           <a:prstGeom prst="roundRect">
             <a:avLst>
@@ -18901,7 +18901,7 @@
               <a:t>WATCH OUT   </a:t>
             </a:r>
             <a:r>
-              <a:rPr sz="1500">
+              <a:rPr sz="1800">
                 <a:solidFill>
                   <a:srgbClr val="222222"/>
                 </a:solidFill>

--- a/ground-vehicle/docs/courses/advanced/l2_motors_and_ramping.pptx
+++ b/ground-vehicle/docs/courses/advanced/l2_motors_and_ramping.pptx
@@ -11102,7 +11102,7 @@
                 </a:solidFill>
                 <a:latin typeface="Calibri"/>
               </a:rPr>
-              <a:t>NORMAL - full forward speed, steering scaled to 0.5.</a:t>
+              <a:t>NORMAL - full forward speed, steering scaled to 0.75.</a:t>
             </a:r>
           </a:p>
           <a:p>
@@ -17236,8 +17236,8 @@
         </p:nvCxnSpPr>
         <p:spPr>
           <a:xfrm>
-            <a:off x="3611880" y="4526280"/>
-            <a:ext cx="2194560" cy="0"/>
+            <a:off x="4178808" y="4526280"/>
+            <a:ext cx="1627632" cy="0"/>
           </a:xfrm>
           <a:prstGeom prst="line">
             <a:avLst/>
@@ -17272,7 +17272,7 @@
         <p:spPr>
           <a:xfrm>
             <a:off x="7269480" y="4526280"/>
-            <a:ext cx="2194560" cy="0"/>
+            <a:ext cx="1627632" cy="0"/>
           </a:xfrm>
           <a:prstGeom prst="line">
             <a:avLst/>
@@ -17298,9 +17298,197 @@
           </a:fontRef>
         </p:style>
       </p:cxnSp>
-      <p:sp>
-        <p:nvSpPr>
-          <p:cNvPr id="24" name="Oval 23"/>
+      <p:cxnSp>
+        <p:nvCxnSpPr>
+          <p:cNvPr id="24" name="Connector 23"/>
+          <p:cNvCxnSpPr/>
+          <p:nvPr/>
+        </p:nvCxnSpPr>
+        <p:spPr>
+          <a:xfrm flipV="1">
+            <a:off x="3611880" y="4251960"/>
+            <a:ext cx="566928" cy="274320"/>
+          </a:xfrm>
+          <a:prstGeom prst="line">
+            <a:avLst/>
+          </a:prstGeom>
+          <a:ln w="28575">
+            <a:solidFill>
+              <a:srgbClr val="0E7C86"/>
+            </a:solidFill>
+          </a:ln>
+        </p:spPr>
+        <p:style>
+          <a:lnRef idx="2">
+            <a:schemeClr val="accent1"/>
+          </a:lnRef>
+          <a:fillRef idx="0">
+            <a:schemeClr val="accent1"/>
+          </a:fillRef>
+          <a:effectRef idx="1">
+            <a:schemeClr val="accent1"/>
+          </a:effectRef>
+          <a:fontRef idx="minor">
+            <a:schemeClr val="tx1"/>
+          </a:fontRef>
+        </p:style>
+      </p:cxnSp>
+      <p:sp>
+        <p:nvSpPr>
+          <p:cNvPr id="25" name="Oval 24"/>
+          <p:cNvSpPr/>
+          <p:nvPr/>
+        </p:nvSpPr>
+        <p:spPr>
+          <a:xfrm>
+            <a:off x="3547872" y="4462272"/>
+            <a:ext cx="128016" cy="128016"/>
+          </a:xfrm>
+          <a:prstGeom prst="ellipse">
+            <a:avLst/>
+          </a:prstGeom>
+          <a:solidFill>
+            <a:srgbClr val="0E7C86"/>
+          </a:solidFill>
+          <a:ln w="9525">
+            <a:solidFill>
+              <a:srgbClr val="0E7C86"/>
+            </a:solidFill>
+          </a:ln>
+          <a:effectLst/>
+        </p:spPr>
+        <p:style>
+          <a:lnRef idx="1">
+            <a:schemeClr val="accent1"/>
+          </a:lnRef>
+          <a:fillRef idx="3">
+            <a:schemeClr val="accent1"/>
+          </a:fillRef>
+          <a:effectRef idx="2">
+            <a:schemeClr val="accent1"/>
+          </a:effectRef>
+          <a:fontRef idx="minor">
+            <a:schemeClr val="lt1"/>
+          </a:fontRef>
+        </p:style>
+        <p:txBody>
+          <a:bodyPr rtlCol="0" anchor="ctr" wrap="square" lIns="45720" rIns="45720" tIns="18288" bIns="18288"/>
+          <a:lstStyle/>
+          <a:p>
+            <a:pPr algn="ctr">
+              <a:lnSpc>
+                <a:spcPct val="100000"/>
+              </a:lnSpc>
+              <a:spcAft>
+                <a:spcPts val="0"/>
+              </a:spcAft>
+              <a:defRPr sz="900" b="0">
+                <a:solidFill>
+                  <a:srgbClr val="222222"/>
+                </a:solidFill>
+                <a:latin typeface="Calibri"/>
+              </a:defRPr>
+            </a:pPr>
+          </a:p>
+        </p:txBody>
+      </p:sp>
+      <p:cxnSp>
+        <p:nvCxnSpPr>
+          <p:cNvPr id="26" name="Connector 25"/>
+          <p:cNvCxnSpPr/>
+          <p:nvPr/>
+        </p:nvCxnSpPr>
+        <p:spPr>
+          <a:xfrm flipH="1" flipV="1">
+            <a:off x="8897112" y="4251960"/>
+            <a:ext cx="566928" cy="274320"/>
+          </a:xfrm>
+          <a:prstGeom prst="line">
+            <a:avLst/>
+          </a:prstGeom>
+          <a:ln w="28575">
+            <a:solidFill>
+              <a:srgbClr val="0E7C86"/>
+            </a:solidFill>
+          </a:ln>
+        </p:spPr>
+        <p:style>
+          <a:lnRef idx="2">
+            <a:schemeClr val="accent1"/>
+          </a:lnRef>
+          <a:fillRef idx="0">
+            <a:schemeClr val="accent1"/>
+          </a:fillRef>
+          <a:effectRef idx="1">
+            <a:schemeClr val="accent1"/>
+          </a:effectRef>
+          <a:fontRef idx="minor">
+            <a:schemeClr val="tx1"/>
+          </a:fontRef>
+        </p:style>
+      </p:cxnSp>
+      <p:sp>
+        <p:nvSpPr>
+          <p:cNvPr id="27" name="Oval 26"/>
+          <p:cNvSpPr/>
+          <p:nvPr/>
+        </p:nvSpPr>
+        <p:spPr>
+          <a:xfrm>
+            <a:off x="9400032" y="4462272"/>
+            <a:ext cx="128016" cy="128016"/>
+          </a:xfrm>
+          <a:prstGeom prst="ellipse">
+            <a:avLst/>
+          </a:prstGeom>
+          <a:solidFill>
+            <a:srgbClr val="0E7C86"/>
+          </a:solidFill>
+          <a:ln w="9525">
+            <a:solidFill>
+              <a:srgbClr val="0E7C86"/>
+            </a:solidFill>
+          </a:ln>
+          <a:effectLst/>
+        </p:spPr>
+        <p:style>
+          <a:lnRef idx="1">
+            <a:schemeClr val="accent1"/>
+          </a:lnRef>
+          <a:fillRef idx="3">
+            <a:schemeClr val="accent1"/>
+          </a:fillRef>
+          <a:effectRef idx="2">
+            <a:schemeClr val="accent1"/>
+          </a:effectRef>
+          <a:fontRef idx="minor">
+            <a:schemeClr val="lt1"/>
+          </a:fontRef>
+        </p:style>
+        <p:txBody>
+          <a:bodyPr rtlCol="0" anchor="ctr" wrap="square" lIns="45720" rIns="45720" tIns="18288" bIns="18288"/>
+          <a:lstStyle/>
+          <a:p>
+            <a:pPr algn="ctr">
+              <a:lnSpc>
+                <a:spcPct val="100000"/>
+              </a:lnSpc>
+              <a:spcAft>
+                <a:spcPts val="0"/>
+              </a:spcAft>
+              <a:defRPr sz="900" b="0">
+                <a:solidFill>
+                  <a:srgbClr val="222222"/>
+                </a:solidFill>
+                <a:latin typeface="Calibri"/>
+              </a:defRPr>
+            </a:pPr>
+          </a:p>
+        </p:txBody>
+      </p:sp>
+      <p:sp>
+        <p:nvSpPr>
+          <p:cNvPr id="28" name="Oval 27"/>
           <p:cNvSpPr/>
           <p:nvPr/>
         </p:nvSpPr>
@@ -17366,16 +17554,127 @@
           </a:p>
         </p:txBody>
       </p:sp>
-      <p:sp>
-        <p:nvSpPr>
-          <p:cNvPr id="25" name="TextBox 24"/>
+      <p:cxnSp>
+        <p:nvCxnSpPr>
+          <p:cNvPr id="29" name="Connector 28"/>
+          <p:cNvCxnSpPr/>
+          <p:nvPr/>
+        </p:nvCxnSpPr>
+        <p:spPr>
+          <a:xfrm flipH="1">
+            <a:off x="4800600" y="3657600"/>
+            <a:ext cx="1463040" cy="0"/>
+          </a:xfrm>
+          <a:prstGeom prst="line">
+            <a:avLst/>
+          </a:prstGeom>
+          <a:ln w="19050">
+            <a:solidFill>
+              <a:srgbClr val="0E7C86"/>
+            </a:solidFill>
+            <a:headEnd/>
+            <a:tailEnd type="triangle" w="med" len="med"/>
+          </a:ln>
+        </p:spPr>
+        <p:style>
+          <a:lnRef idx="2">
+            <a:schemeClr val="accent1"/>
+          </a:lnRef>
+          <a:fillRef idx="0">
+            <a:schemeClr val="accent1"/>
+          </a:fillRef>
+          <a:effectRef idx="1">
+            <a:schemeClr val="accent1"/>
+          </a:effectRef>
+          <a:fontRef idx="minor">
+            <a:schemeClr val="tx1"/>
+          </a:fontRef>
+        </p:style>
+      </p:cxnSp>
+      <p:cxnSp>
+        <p:nvCxnSpPr>
+          <p:cNvPr id="30" name="Connector 29"/>
+          <p:cNvCxnSpPr/>
+          <p:nvPr/>
+        </p:nvCxnSpPr>
+        <p:spPr>
+          <a:xfrm flipH="1">
+            <a:off x="6995160" y="5394960"/>
+            <a:ext cx="1280160" cy="0"/>
+          </a:xfrm>
+          <a:prstGeom prst="line">
+            <a:avLst/>
+          </a:prstGeom>
+          <a:ln w="19050">
+            <a:solidFill>
+              <a:srgbClr val="0E7C86"/>
+            </a:solidFill>
+            <a:headEnd/>
+            <a:tailEnd type="triangle" w="med" len="med"/>
+          </a:ln>
+        </p:spPr>
+        <p:style>
+          <a:lnRef idx="2">
+            <a:schemeClr val="accent1"/>
+          </a:lnRef>
+          <a:fillRef idx="0">
+            <a:schemeClr val="accent1"/>
+          </a:fillRef>
+          <a:effectRef idx="1">
+            <a:schemeClr val="accent1"/>
+          </a:effectRef>
+          <a:fontRef idx="minor">
+            <a:schemeClr val="tx1"/>
+          </a:fontRef>
+        </p:style>
+      </p:cxnSp>
+      <p:cxnSp>
+        <p:nvCxnSpPr>
+          <p:cNvPr id="31" name="Connector 30"/>
+          <p:cNvCxnSpPr/>
+          <p:nvPr/>
+        </p:nvCxnSpPr>
+        <p:spPr>
+          <a:xfrm>
+            <a:off x="4846320" y="4233672"/>
+            <a:ext cx="822960" cy="0"/>
+          </a:xfrm>
+          <a:prstGeom prst="line">
+            <a:avLst/>
+          </a:prstGeom>
+          <a:ln w="19050">
+            <a:solidFill>
+              <a:srgbClr val="0E7C86"/>
+            </a:solidFill>
+            <a:headEnd/>
+            <a:tailEnd type="triangle" w="med" len="med"/>
+          </a:ln>
+        </p:spPr>
+        <p:style>
+          <a:lnRef idx="2">
+            <a:schemeClr val="accent1"/>
+          </a:lnRef>
+          <a:fillRef idx="0">
+            <a:schemeClr val="accent1"/>
+          </a:fillRef>
+          <a:effectRef idx="1">
+            <a:schemeClr val="accent1"/>
+          </a:effectRef>
+          <a:fontRef idx="minor">
+            <a:schemeClr val="tx1"/>
+          </a:fontRef>
+        </p:style>
+      </p:cxnSp>
+      <p:sp>
+        <p:nvSpPr>
+          <p:cNvPr id="32" name="TextBox 31"/>
           <p:cNvSpPr txBox="1"/>
           <p:nvPr/>
         </p:nvSpPr>
         <p:spPr>
           <a:xfrm>
-            <a:off x="2651760" y="4069080"/>
-            <a:ext cx="914400" cy="646684"/>
+            <a:off x="4663440" y="3739896"/>
+            <a:ext cx="2194560" cy="367792"/>
           </a:xfrm>
           <a:prstGeom prst="rect">
             <a:avLst/>
@@ -17388,7 +17687,7 @@
           </a:bodyPr>
           <a:lstStyle/>
           <a:p>
-            <a:pPr algn="r">
+            <a:pPr algn="ctr">
               <a:lnSpc>
                 <a:spcPct val="100000"/>
               </a:lnSpc>
@@ -17409,31 +17708,21 @@
                 </a:solidFill>
                 <a:latin typeface="Calibri"/>
               </a:rPr>
-              <a:t>IN1</a:t>
-            </a:r>
-            <a:br/>
-            <a:r>
-              <a:rPr sz="1800" b="1">
-                <a:solidFill>
-                  <a:srgbClr val="0E7C86"/>
-                </a:solidFill>
-                <a:latin typeface="Calibri"/>
-              </a:rPr>
-              <a:t>(pin A)</a:t>
-            </a:r>
-          </a:p>
-        </p:txBody>
-      </p:sp>
-      <p:sp>
-        <p:nvSpPr>
-          <p:cNvPr id="26" name="TextBox 25"/>
+              <a:t>Forward   CW</a:t>
+            </a:r>
+          </a:p>
+        </p:txBody>
+      </p:sp>
+      <p:sp>
+        <p:nvSpPr>
+          <p:cNvPr id="33" name="TextBox 32"/>
           <p:cNvSpPr txBox="1"/>
           <p:nvPr/>
         </p:nvSpPr>
         <p:spPr>
           <a:xfrm>
-            <a:off x="9555480" y="4069080"/>
-            <a:ext cx="1005840" cy="646684"/>
+            <a:off x="2496312" y="4069080"/>
+            <a:ext cx="914400" cy="646684"/>
           </a:xfrm>
           <a:prstGeom prst="rect">
             <a:avLst/>
@@ -17446,7 +17735,7 @@
           </a:bodyPr>
           <a:lstStyle/>
           <a:p>
-            <a:pPr algn="l">
+            <a:pPr algn="r">
               <a:lnSpc>
                 <a:spcPct val="100000"/>
               </a:lnSpc>
@@ -17467,7 +17756,7 @@
                 </a:solidFill>
                 <a:latin typeface="Calibri"/>
               </a:rPr>
-              <a:t>IN2</a:t>
+              <a:t>IN1</a:t>
             </a:r>
             <a:br/>
             <a:r>
@@ -17477,21 +17766,21 @@
                 </a:solidFill>
                 <a:latin typeface="Calibri"/>
               </a:rPr>
-              <a:t>(pin B)</a:t>
-            </a:r>
-          </a:p>
-        </p:txBody>
-      </p:sp>
-      <p:sp>
-        <p:nvSpPr>
-          <p:cNvPr id="27" name="TextBox 26"/>
+              <a:t>(pin A)</a:t>
+            </a:r>
+          </a:p>
+        </p:txBody>
+      </p:sp>
+      <p:sp>
+        <p:nvSpPr>
+          <p:cNvPr id="34" name="TextBox 33"/>
           <p:cNvSpPr txBox="1"/>
           <p:nvPr/>
         </p:nvSpPr>
         <p:spPr>
           <a:xfrm>
-            <a:off x="5989320" y="3328416"/>
-            <a:ext cx="1280160" cy="367792"/>
+            <a:off x="9665208" y="4069080"/>
+            <a:ext cx="1005840" cy="646684"/>
           </a:xfrm>
           <a:prstGeom prst="rect">
             <a:avLst/>
@@ -17504,7 +17793,7 @@
           </a:bodyPr>
           <a:lstStyle/>
           <a:p>
-            <a:pPr algn="ctr">
+            <a:pPr algn="l">
               <a:lnSpc>
                 <a:spcPct val="100000"/>
               </a:lnSpc>
@@ -17513,7 +17802,7 @@
               </a:spcAft>
               <a:defRPr sz="1800" b="1">
                 <a:solidFill>
-                  <a:srgbClr val="666666"/>
+                  <a:srgbClr val="0E7C86"/>
                 </a:solidFill>
                 <a:latin typeface="Calibri"/>
               </a:defRPr>
@@ -17521,24 +17810,34 @@
             <a:r>
               <a:rPr sz="1800" b="1">
                 <a:solidFill>
-                  <a:srgbClr val="666666"/>
-                </a:solidFill>
-                <a:latin typeface="Calibri"/>
-              </a:rPr>
-              <a:t>+ V</a:t>
-            </a:r>
-          </a:p>
-        </p:txBody>
-      </p:sp>
-      <p:sp>
-        <p:nvSpPr>
-          <p:cNvPr id="28" name="TextBox 27"/>
+                  <a:srgbClr val="0E7C86"/>
+                </a:solidFill>
+                <a:latin typeface="Calibri"/>
+              </a:rPr>
+              <a:t>IN2</a:t>
+            </a:r>
+            <a:br/>
+            <a:r>
+              <a:rPr sz="1800" b="1">
+                <a:solidFill>
+                  <a:srgbClr val="0E7C86"/>
+                </a:solidFill>
+                <a:latin typeface="Calibri"/>
+              </a:rPr>
+              <a:t>(pin B)</a:t>
+            </a:r>
+          </a:p>
+        </p:txBody>
+      </p:sp>
+      <p:sp>
+        <p:nvSpPr>
+          <p:cNvPr id="35" name="TextBox 34"/>
           <p:cNvSpPr txBox="1"/>
           <p:nvPr/>
         </p:nvSpPr>
         <p:spPr>
           <a:xfrm>
-            <a:off x="5989320" y="5449824"/>
+            <a:off x="5989320" y="3328416"/>
             <a:ext cx="1280160" cy="367792"/>
           </a:xfrm>
           <a:prstGeom prst="rect">
@@ -17573,7 +17872,103 @@
                 </a:solidFill>
                 <a:latin typeface="Calibri"/>
               </a:rPr>
+              <a:t>+ V</a:t>
+            </a:r>
+          </a:p>
+        </p:txBody>
+      </p:sp>
+      <p:sp>
+        <p:nvSpPr>
+          <p:cNvPr id="36" name="TextBox 35"/>
+          <p:cNvSpPr txBox="1"/>
+          <p:nvPr/>
+        </p:nvSpPr>
+        <p:spPr>
+          <a:xfrm>
+            <a:off x="5989320" y="5449824"/>
+            <a:ext cx="1280160" cy="367792"/>
+          </a:xfrm>
+          <a:prstGeom prst="rect">
+            <a:avLst/>
+          </a:prstGeom>
+          <a:noFill/>
+        </p:spPr>
+        <p:txBody>
+          <a:bodyPr wrap="square" lIns="0" tIns="0" rIns="0" bIns="0">
+            <a:spAutoFit/>
+          </a:bodyPr>
+          <a:lstStyle/>
+          <a:p>
+            <a:pPr algn="ctr">
+              <a:lnSpc>
+                <a:spcPct val="100000"/>
+              </a:lnSpc>
+              <a:spcAft>
+                <a:spcPts val="0"/>
+              </a:spcAft>
+              <a:defRPr sz="1800" b="1">
+                <a:solidFill>
+                  <a:srgbClr val="666666"/>
+                </a:solidFill>
+                <a:latin typeface="Calibri"/>
+              </a:defRPr>
+            </a:pPr>
+            <a:r>
+              <a:rPr sz="1800" b="1">
+                <a:solidFill>
+                  <a:srgbClr val="666666"/>
+                </a:solidFill>
+                <a:latin typeface="Calibri"/>
+              </a:rPr>
               <a:t>GND</a:t>
+            </a:r>
+          </a:p>
+        </p:txBody>
+      </p:sp>
+      <p:sp>
+        <p:nvSpPr>
+          <p:cNvPr id="37" name="TextBox 36"/>
+          <p:cNvSpPr txBox="1"/>
+          <p:nvPr/>
+        </p:nvSpPr>
+        <p:spPr>
+          <a:xfrm>
+            <a:off x="502920" y="5815584"/>
+            <a:ext cx="11185855" cy="646684"/>
+          </a:xfrm>
+          <a:prstGeom prst="rect">
+            <a:avLst/>
+          </a:prstGeom>
+          <a:noFill/>
+        </p:spPr>
+        <p:txBody>
+          <a:bodyPr wrap="square" lIns="0" tIns="0" rIns="0" bIns="0">
+            <a:spAutoFit/>
+          </a:bodyPr>
+          <a:lstStyle/>
+          <a:p>
+            <a:pPr algn="ctr">
+              <a:lnSpc>
+                <a:spcPct val="100000"/>
+              </a:lnSpc>
+              <a:spcAft>
+                <a:spcPts val="0"/>
+              </a:spcAft>
+              <a:defRPr sz="1800" b="0">
+                <a:solidFill>
+                  <a:srgbClr val="666666"/>
+                </a:solidFill>
+                <a:latin typeface="Calibri"/>
+              </a:defRPr>
+            </a:pPr>
+            <a:r>
+              <a:rPr sz="1800" b="0">
+                <a:solidFill>
+                  <a:srgbClr val="666666"/>
+                </a:solidFill>
+                <a:latin typeface="Calibri"/>
+              </a:rPr>
+              <a:t>Drawn in the first state: IN1 closed to + V, IN2 closed to GND. Reverse is the same picture with both switches thrown and the arrows running the other way.</a:t>
             </a:r>
           </a:p>
         </p:txBody>

--- a/ground-vehicle/docs/courses/advanced/l2_motors_and_ramping.pptx
+++ b/ground-vehicle/docs/courses/advanced/l2_motors_and_ramping.pptx
@@ -1839,7 +1839,23 @@
               <a:rPr sz="1200">
                 <a:latin typeface="Calibri"/>
               </a:rPr>
-              <a:t>Four switches, and only the two diagonal pairs are useful. Trace each path with a finger on the projected slide.</a:t>
+              <a:t>Four boxes across the top: those are the four things the motor can be told to do. The picture underneath is ONE of them actually happening - the first one - drawn by Kevin.</a:t>
+            </a:r>
+          </a:p>
+          <a:p>
+            <a:r>
+              <a:rPr sz="1200">
+                <a:latin typeface="Calibri"/>
+              </a:rPr>
+              <a:t>Say that before anybody asks why they can only see two switches in the picture. The other two are the ones that are open.</a:t>
+            </a:r>
+          </a:p>
+          <a:p>
+            <a:r>
+              <a:rPr sz="1200">
+                <a:latin typeface="Calibri"/>
+              </a:rPr>
+              <a:t>Then trace the arrows with a finger on the projected slide, slowly, all the way round: in at + V, along the top, down the left, through the motor, back to GND. Have them do it too.</a:t>
             </a:r>
           </a:p>
           <a:p>
@@ -17088,593 +17104,40 @@
           </a:p>
         </p:txBody>
       </p:sp>
-      <p:cxnSp>
-        <p:nvCxnSpPr>
-          <p:cNvPr id="18" name="Connector 17"/>
-          <p:cNvCxnSpPr/>
-          <p:nvPr/>
-        </p:nvCxnSpPr>
-        <p:spPr>
-          <a:xfrm>
-            <a:off x="3611880" y="3657600"/>
-            <a:ext cx="5852160" cy="0"/>
-          </a:xfrm>
-          <a:prstGeom prst="line">
+      <p:pic>
+        <p:nvPicPr>
+          <p:cNvPr id="18" name="Picture 17" descr="h-bridge-forward-current.png"/>
+          <p:cNvPicPr>
+            <a:picLocks noChangeAspect="1"/>
+          </p:cNvPicPr>
+          <p:nvPr/>
+        </p:nvPicPr>
+        <p:blipFill>
+          <a:blip r:embed="rId3"/>
+          <a:stretch>
+            <a:fillRect/>
+          </a:stretch>
+        </p:blipFill>
+        <p:spPr>
+          <a:xfrm>
+            <a:off x="2944904" y="3474720"/>
+            <a:ext cx="6301886" cy="2148840"/>
+          </a:xfrm>
+          <a:prstGeom prst="rect">
             <a:avLst/>
           </a:prstGeom>
-          <a:ln w="25400">
-            <a:solidFill>
-              <a:srgbClr val="1F3A5F"/>
-            </a:solidFill>
-          </a:ln>
-        </p:spPr>
-        <p:style>
-          <a:lnRef idx="2">
-            <a:schemeClr val="accent1"/>
-          </a:lnRef>
-          <a:fillRef idx="0">
-            <a:schemeClr val="accent1"/>
-          </a:fillRef>
-          <a:effectRef idx="1">
-            <a:schemeClr val="accent1"/>
-          </a:effectRef>
-          <a:fontRef idx="minor">
-            <a:schemeClr val="tx1"/>
-          </a:fontRef>
-        </p:style>
-      </p:cxnSp>
-      <p:cxnSp>
-        <p:nvCxnSpPr>
-          <p:cNvPr id="19" name="Connector 18"/>
-          <p:cNvCxnSpPr/>
-          <p:nvPr/>
-        </p:nvCxnSpPr>
-        <p:spPr>
-          <a:xfrm>
-            <a:off x="3611880" y="5394960"/>
-            <a:ext cx="5852160" cy="0"/>
-          </a:xfrm>
-          <a:prstGeom prst="line">
-            <a:avLst/>
-          </a:prstGeom>
-          <a:ln w="25400">
-            <a:solidFill>
-              <a:srgbClr val="1F3A5F"/>
-            </a:solidFill>
-          </a:ln>
-        </p:spPr>
-        <p:style>
-          <a:lnRef idx="2">
-            <a:schemeClr val="accent1"/>
-          </a:lnRef>
-          <a:fillRef idx="0">
-            <a:schemeClr val="accent1"/>
-          </a:fillRef>
-          <a:effectRef idx="1">
-            <a:schemeClr val="accent1"/>
-          </a:effectRef>
-          <a:fontRef idx="minor">
-            <a:schemeClr val="tx1"/>
-          </a:fontRef>
-        </p:style>
-      </p:cxnSp>
-      <p:cxnSp>
-        <p:nvCxnSpPr>
-          <p:cNvPr id="20" name="Connector 19"/>
-          <p:cNvCxnSpPr/>
-          <p:nvPr/>
-        </p:nvCxnSpPr>
-        <p:spPr>
-          <a:xfrm>
-            <a:off x="3611880" y="3657600"/>
-            <a:ext cx="0" cy="1737360"/>
-          </a:xfrm>
-          <a:prstGeom prst="line">
-            <a:avLst/>
-          </a:prstGeom>
-          <a:ln w="25400">
-            <a:solidFill>
-              <a:srgbClr val="1F3A5F"/>
-            </a:solidFill>
-          </a:ln>
-        </p:spPr>
-        <p:style>
-          <a:lnRef idx="2">
-            <a:schemeClr val="accent1"/>
-          </a:lnRef>
-          <a:fillRef idx="0">
-            <a:schemeClr val="accent1"/>
-          </a:fillRef>
-          <a:effectRef idx="1">
-            <a:schemeClr val="accent1"/>
-          </a:effectRef>
-          <a:fontRef idx="minor">
-            <a:schemeClr val="tx1"/>
-          </a:fontRef>
-        </p:style>
-      </p:cxnSp>
-      <p:cxnSp>
-        <p:nvCxnSpPr>
-          <p:cNvPr id="21" name="Connector 20"/>
-          <p:cNvCxnSpPr/>
-          <p:nvPr/>
-        </p:nvCxnSpPr>
-        <p:spPr>
-          <a:xfrm>
-            <a:off x="9464040" y="3657600"/>
-            <a:ext cx="0" cy="1737360"/>
-          </a:xfrm>
-          <a:prstGeom prst="line">
-            <a:avLst/>
-          </a:prstGeom>
-          <a:ln w="25400">
-            <a:solidFill>
-              <a:srgbClr val="1F3A5F"/>
-            </a:solidFill>
-          </a:ln>
-        </p:spPr>
-        <p:style>
-          <a:lnRef idx="2">
-            <a:schemeClr val="accent1"/>
-          </a:lnRef>
-          <a:fillRef idx="0">
-            <a:schemeClr val="accent1"/>
-          </a:fillRef>
-          <a:effectRef idx="1">
-            <a:schemeClr val="accent1"/>
-          </a:effectRef>
-          <a:fontRef idx="minor">
-            <a:schemeClr val="tx1"/>
-          </a:fontRef>
-        </p:style>
-      </p:cxnSp>
-      <p:cxnSp>
-        <p:nvCxnSpPr>
-          <p:cNvPr id="22" name="Connector 21"/>
-          <p:cNvCxnSpPr/>
-          <p:nvPr/>
-        </p:nvCxnSpPr>
-        <p:spPr>
-          <a:xfrm>
-            <a:off x="4178808" y="4526280"/>
-            <a:ext cx="1627632" cy="0"/>
-          </a:xfrm>
-          <a:prstGeom prst="line">
-            <a:avLst/>
-          </a:prstGeom>
-          <a:ln w="25400">
-            <a:solidFill>
-              <a:srgbClr val="1F3A5F"/>
-            </a:solidFill>
-          </a:ln>
-        </p:spPr>
-        <p:style>
-          <a:lnRef idx="2">
-            <a:schemeClr val="accent1"/>
-          </a:lnRef>
-          <a:fillRef idx="0">
-            <a:schemeClr val="accent1"/>
-          </a:fillRef>
-          <a:effectRef idx="1">
-            <a:schemeClr val="accent1"/>
-          </a:effectRef>
-          <a:fontRef idx="minor">
-            <a:schemeClr val="tx1"/>
-          </a:fontRef>
-        </p:style>
-      </p:cxnSp>
-      <p:cxnSp>
-        <p:nvCxnSpPr>
-          <p:cNvPr id="23" name="Connector 22"/>
-          <p:cNvCxnSpPr/>
-          <p:nvPr/>
-        </p:nvCxnSpPr>
-        <p:spPr>
-          <a:xfrm>
-            <a:off x="7269480" y="4526280"/>
-            <a:ext cx="1627632" cy="0"/>
-          </a:xfrm>
-          <a:prstGeom prst="line">
-            <a:avLst/>
-          </a:prstGeom>
-          <a:ln w="25400">
-            <a:solidFill>
-              <a:srgbClr val="1F3A5F"/>
-            </a:solidFill>
-          </a:ln>
-        </p:spPr>
-        <p:style>
-          <a:lnRef idx="2">
-            <a:schemeClr val="accent1"/>
-          </a:lnRef>
-          <a:fillRef idx="0">
-            <a:schemeClr val="accent1"/>
-          </a:fillRef>
-          <a:effectRef idx="1">
-            <a:schemeClr val="accent1"/>
-          </a:effectRef>
-          <a:fontRef idx="minor">
-            <a:schemeClr val="tx1"/>
-          </a:fontRef>
-        </p:style>
-      </p:cxnSp>
-      <p:cxnSp>
-        <p:nvCxnSpPr>
-          <p:cNvPr id="24" name="Connector 23"/>
-          <p:cNvCxnSpPr/>
-          <p:nvPr/>
-        </p:nvCxnSpPr>
-        <p:spPr>
-          <a:xfrm flipV="1">
-            <a:off x="3611880" y="4251960"/>
-            <a:ext cx="566928" cy="274320"/>
-          </a:xfrm>
-          <a:prstGeom prst="line">
-            <a:avLst/>
-          </a:prstGeom>
-          <a:ln w="28575">
-            <a:solidFill>
-              <a:srgbClr val="0E7C86"/>
-            </a:solidFill>
-          </a:ln>
-        </p:spPr>
-        <p:style>
-          <a:lnRef idx="2">
-            <a:schemeClr val="accent1"/>
-          </a:lnRef>
-          <a:fillRef idx="0">
-            <a:schemeClr val="accent1"/>
-          </a:fillRef>
-          <a:effectRef idx="1">
-            <a:schemeClr val="accent1"/>
-          </a:effectRef>
-          <a:fontRef idx="minor">
-            <a:schemeClr val="tx1"/>
-          </a:fontRef>
-        </p:style>
-      </p:cxnSp>
-      <p:sp>
-        <p:nvSpPr>
-          <p:cNvPr id="25" name="Oval 24"/>
-          <p:cNvSpPr/>
-          <p:nvPr/>
-        </p:nvSpPr>
-        <p:spPr>
-          <a:xfrm>
-            <a:off x="3547872" y="4462272"/>
-            <a:ext cx="128016" cy="128016"/>
-          </a:xfrm>
-          <a:prstGeom prst="ellipse">
-            <a:avLst/>
-          </a:prstGeom>
-          <a:solidFill>
-            <a:srgbClr val="0E7C86"/>
-          </a:solidFill>
-          <a:ln w="9525">
-            <a:solidFill>
-              <a:srgbClr val="0E7C86"/>
-            </a:solidFill>
-          </a:ln>
-          <a:effectLst/>
-        </p:spPr>
-        <p:style>
-          <a:lnRef idx="1">
-            <a:schemeClr val="accent1"/>
-          </a:lnRef>
-          <a:fillRef idx="3">
-            <a:schemeClr val="accent1"/>
-          </a:fillRef>
-          <a:effectRef idx="2">
-            <a:schemeClr val="accent1"/>
-          </a:effectRef>
-          <a:fontRef idx="minor">
-            <a:schemeClr val="lt1"/>
-          </a:fontRef>
-        </p:style>
-        <p:txBody>
-          <a:bodyPr rtlCol="0" anchor="ctr" wrap="square" lIns="45720" rIns="45720" tIns="18288" bIns="18288"/>
-          <a:lstStyle/>
-          <a:p>
-            <a:pPr algn="ctr">
-              <a:lnSpc>
-                <a:spcPct val="100000"/>
-              </a:lnSpc>
-              <a:spcAft>
-                <a:spcPts val="0"/>
-              </a:spcAft>
-              <a:defRPr sz="900" b="0">
-                <a:solidFill>
-                  <a:srgbClr val="222222"/>
-                </a:solidFill>
-                <a:latin typeface="Calibri"/>
-              </a:defRPr>
-            </a:pPr>
-          </a:p>
-        </p:txBody>
-      </p:sp>
-      <p:cxnSp>
-        <p:nvCxnSpPr>
-          <p:cNvPr id="26" name="Connector 25"/>
-          <p:cNvCxnSpPr/>
-          <p:nvPr/>
-        </p:nvCxnSpPr>
-        <p:spPr>
-          <a:xfrm flipH="1" flipV="1">
-            <a:off x="8897112" y="4251960"/>
-            <a:ext cx="566928" cy="274320"/>
-          </a:xfrm>
-          <a:prstGeom prst="line">
-            <a:avLst/>
-          </a:prstGeom>
-          <a:ln w="28575">
-            <a:solidFill>
-              <a:srgbClr val="0E7C86"/>
-            </a:solidFill>
-          </a:ln>
-        </p:spPr>
-        <p:style>
-          <a:lnRef idx="2">
-            <a:schemeClr val="accent1"/>
-          </a:lnRef>
-          <a:fillRef idx="0">
-            <a:schemeClr val="accent1"/>
-          </a:fillRef>
-          <a:effectRef idx="1">
-            <a:schemeClr val="accent1"/>
-          </a:effectRef>
-          <a:fontRef idx="minor">
-            <a:schemeClr val="tx1"/>
-          </a:fontRef>
-        </p:style>
-      </p:cxnSp>
-      <p:sp>
-        <p:nvSpPr>
-          <p:cNvPr id="27" name="Oval 26"/>
-          <p:cNvSpPr/>
-          <p:nvPr/>
-        </p:nvSpPr>
-        <p:spPr>
-          <a:xfrm>
-            <a:off x="9400032" y="4462272"/>
-            <a:ext cx="128016" cy="128016"/>
-          </a:xfrm>
-          <a:prstGeom prst="ellipse">
-            <a:avLst/>
-          </a:prstGeom>
-          <a:solidFill>
-            <a:srgbClr val="0E7C86"/>
-          </a:solidFill>
-          <a:ln w="9525">
-            <a:solidFill>
-              <a:srgbClr val="0E7C86"/>
-            </a:solidFill>
-          </a:ln>
-          <a:effectLst/>
-        </p:spPr>
-        <p:style>
-          <a:lnRef idx="1">
-            <a:schemeClr val="accent1"/>
-          </a:lnRef>
-          <a:fillRef idx="3">
-            <a:schemeClr val="accent1"/>
-          </a:fillRef>
-          <a:effectRef idx="2">
-            <a:schemeClr val="accent1"/>
-          </a:effectRef>
-          <a:fontRef idx="minor">
-            <a:schemeClr val="lt1"/>
-          </a:fontRef>
-        </p:style>
-        <p:txBody>
-          <a:bodyPr rtlCol="0" anchor="ctr" wrap="square" lIns="45720" rIns="45720" tIns="18288" bIns="18288"/>
-          <a:lstStyle/>
-          <a:p>
-            <a:pPr algn="ctr">
-              <a:lnSpc>
-                <a:spcPct val="100000"/>
-              </a:lnSpc>
-              <a:spcAft>
-                <a:spcPts val="0"/>
-              </a:spcAft>
-              <a:defRPr sz="900" b="0">
-                <a:solidFill>
-                  <a:srgbClr val="222222"/>
-                </a:solidFill>
-                <a:latin typeface="Calibri"/>
-              </a:defRPr>
-            </a:pPr>
-          </a:p>
-        </p:txBody>
-      </p:sp>
-      <p:sp>
-        <p:nvSpPr>
-          <p:cNvPr id="28" name="Oval 27"/>
-          <p:cNvSpPr/>
-          <p:nvPr/>
-        </p:nvSpPr>
-        <p:spPr>
-          <a:xfrm>
-            <a:off x="5806440" y="4206240"/>
-            <a:ext cx="1463040" cy="640080"/>
-          </a:xfrm>
-          <a:prstGeom prst="ellipse">
-            <a:avLst/>
-          </a:prstGeom>
-          <a:solidFill>
-            <a:srgbClr val="FFFFFF"/>
-          </a:solidFill>
-          <a:ln w="15875">
-            <a:solidFill>
-              <a:srgbClr val="1F3A5F"/>
-            </a:solidFill>
-          </a:ln>
-          <a:effectLst/>
-        </p:spPr>
-        <p:style>
-          <a:lnRef idx="1">
-            <a:schemeClr val="accent1"/>
-          </a:lnRef>
-          <a:fillRef idx="3">
-            <a:schemeClr val="accent1"/>
-          </a:fillRef>
-          <a:effectRef idx="2">
-            <a:schemeClr val="accent1"/>
-          </a:effectRef>
-          <a:fontRef idx="minor">
-            <a:schemeClr val="lt1"/>
-          </a:fontRef>
-        </p:style>
-        <p:txBody>
-          <a:bodyPr rtlCol="0" anchor="ctr" wrap="square" lIns="45720" rIns="45720" tIns="18288" bIns="18288"/>
-          <a:lstStyle/>
-          <a:p>
-            <a:pPr algn="ctr">
-              <a:lnSpc>
-                <a:spcPct val="100000"/>
-              </a:lnSpc>
-              <a:spcAft>
-                <a:spcPts val="0"/>
-              </a:spcAft>
-              <a:defRPr sz="1800" b="1">
-                <a:solidFill>
-                  <a:srgbClr val="222222"/>
-                </a:solidFill>
-                <a:latin typeface="Calibri"/>
-              </a:defRPr>
-            </a:pPr>
-            <a:r>
-              <a:rPr sz="1800" b="1">
-                <a:solidFill>
-                  <a:srgbClr val="222222"/>
-                </a:solidFill>
-                <a:latin typeface="Calibri"/>
-              </a:rPr>
-              <a:t>MOTOR</a:t>
-            </a:r>
-          </a:p>
-        </p:txBody>
-      </p:sp>
-      <p:cxnSp>
-        <p:nvCxnSpPr>
-          <p:cNvPr id="29" name="Connector 28"/>
-          <p:cNvCxnSpPr/>
-          <p:nvPr/>
-        </p:nvCxnSpPr>
-        <p:spPr>
-          <a:xfrm flipH="1">
-            <a:off x="4800600" y="3657600"/>
-            <a:ext cx="1463040" cy="0"/>
-          </a:xfrm>
-          <a:prstGeom prst="line">
-            <a:avLst/>
-          </a:prstGeom>
-          <a:ln w="19050">
-            <a:solidFill>
-              <a:srgbClr val="0E7C86"/>
-            </a:solidFill>
-            <a:headEnd/>
-            <a:tailEnd type="triangle" w="med" len="med"/>
-          </a:ln>
-        </p:spPr>
-        <p:style>
-          <a:lnRef idx="2">
-            <a:schemeClr val="accent1"/>
-          </a:lnRef>
-          <a:fillRef idx="0">
-            <a:schemeClr val="accent1"/>
-          </a:fillRef>
-          <a:effectRef idx="1">
-            <a:schemeClr val="accent1"/>
-          </a:effectRef>
-          <a:fontRef idx="minor">
-            <a:schemeClr val="tx1"/>
-          </a:fontRef>
-        </p:style>
-      </p:cxnSp>
-      <p:cxnSp>
-        <p:nvCxnSpPr>
-          <p:cNvPr id="30" name="Connector 29"/>
-          <p:cNvCxnSpPr/>
-          <p:nvPr/>
-        </p:nvCxnSpPr>
-        <p:spPr>
-          <a:xfrm flipH="1">
-            <a:off x="6995160" y="5394960"/>
-            <a:ext cx="1280160" cy="0"/>
-          </a:xfrm>
-          <a:prstGeom prst="line">
-            <a:avLst/>
-          </a:prstGeom>
-          <a:ln w="19050">
-            <a:solidFill>
-              <a:srgbClr val="0E7C86"/>
-            </a:solidFill>
-            <a:headEnd/>
-            <a:tailEnd type="triangle" w="med" len="med"/>
-          </a:ln>
-        </p:spPr>
-        <p:style>
-          <a:lnRef idx="2">
-            <a:schemeClr val="accent1"/>
-          </a:lnRef>
-          <a:fillRef idx="0">
-            <a:schemeClr val="accent1"/>
-          </a:fillRef>
-          <a:effectRef idx="1">
-            <a:schemeClr val="accent1"/>
-          </a:effectRef>
-          <a:fontRef idx="minor">
-            <a:schemeClr val="tx1"/>
-          </a:fontRef>
-        </p:style>
-      </p:cxnSp>
-      <p:cxnSp>
-        <p:nvCxnSpPr>
-          <p:cNvPr id="31" name="Connector 30"/>
-          <p:cNvCxnSpPr/>
-          <p:nvPr/>
-        </p:nvCxnSpPr>
-        <p:spPr>
-          <a:xfrm>
-            <a:off x="4846320" y="4233672"/>
-            <a:ext cx="822960" cy="0"/>
-          </a:xfrm>
-          <a:prstGeom prst="line">
-            <a:avLst/>
-          </a:prstGeom>
-          <a:ln w="19050">
-            <a:solidFill>
-              <a:srgbClr val="0E7C86"/>
-            </a:solidFill>
-            <a:headEnd/>
-            <a:tailEnd type="triangle" w="med" len="med"/>
-          </a:ln>
-        </p:spPr>
-        <p:style>
-          <a:lnRef idx="2">
-            <a:schemeClr val="accent1"/>
-          </a:lnRef>
-          <a:fillRef idx="0">
-            <a:schemeClr val="accent1"/>
-          </a:fillRef>
-          <a:effectRef idx="1">
-            <a:schemeClr val="accent1"/>
-          </a:effectRef>
-          <a:fontRef idx="minor">
-            <a:schemeClr val="tx1"/>
-          </a:fontRef>
-        </p:style>
-      </p:cxnSp>
-      <p:sp>
-        <p:nvSpPr>
-          <p:cNvPr id="32" name="TextBox 31"/>
+        </p:spPr>
+      </p:pic>
+      <p:sp>
+        <p:nvSpPr>
+          <p:cNvPr id="19" name="TextBox 18"/>
           <p:cNvSpPr txBox="1"/>
           <p:nvPr/>
         </p:nvSpPr>
         <p:spPr>
           <a:xfrm>
-            <a:off x="4663440" y="3739896"/>
-            <a:ext cx="2194560" cy="367792"/>
+            <a:off x="502920" y="5687568"/>
+            <a:ext cx="11185855" cy="646684"/>
           </a:xfrm>
           <a:prstGeom prst="rect">
             <a:avLst/>
@@ -17694,171 +17157,7 @@
               <a:spcAft>
                 <a:spcPts val="0"/>
               </a:spcAft>
-              <a:defRPr sz="1800" b="1">
-                <a:solidFill>
-                  <a:srgbClr val="0E7C86"/>
-                </a:solidFill>
-                <a:latin typeface="Calibri"/>
-              </a:defRPr>
-            </a:pPr>
-            <a:r>
-              <a:rPr sz="1800" b="1">
-                <a:solidFill>
-                  <a:srgbClr val="0E7C86"/>
-                </a:solidFill>
-                <a:latin typeface="Calibri"/>
-              </a:rPr>
-              <a:t>Forward   CW</a:t>
-            </a:r>
-          </a:p>
-        </p:txBody>
-      </p:sp>
-      <p:sp>
-        <p:nvSpPr>
-          <p:cNvPr id="33" name="TextBox 32"/>
-          <p:cNvSpPr txBox="1"/>
-          <p:nvPr/>
-        </p:nvSpPr>
-        <p:spPr>
-          <a:xfrm>
-            <a:off x="2496312" y="4069080"/>
-            <a:ext cx="914400" cy="646684"/>
-          </a:xfrm>
-          <a:prstGeom prst="rect">
-            <a:avLst/>
-          </a:prstGeom>
-          <a:noFill/>
-        </p:spPr>
-        <p:txBody>
-          <a:bodyPr wrap="square" lIns="0" tIns="0" rIns="0" bIns="0">
-            <a:spAutoFit/>
-          </a:bodyPr>
-          <a:lstStyle/>
-          <a:p>
-            <a:pPr algn="r">
-              <a:lnSpc>
-                <a:spcPct val="100000"/>
-              </a:lnSpc>
-              <a:spcAft>
-                <a:spcPts val="0"/>
-              </a:spcAft>
-              <a:defRPr sz="1800" b="1">
-                <a:solidFill>
-                  <a:srgbClr val="0E7C86"/>
-                </a:solidFill>
-                <a:latin typeface="Calibri"/>
-              </a:defRPr>
-            </a:pPr>
-            <a:r>
-              <a:rPr sz="1800" b="1">
-                <a:solidFill>
-                  <a:srgbClr val="0E7C86"/>
-                </a:solidFill>
-                <a:latin typeface="Calibri"/>
-              </a:rPr>
-              <a:t>IN1</a:t>
-            </a:r>
-            <a:br/>
-            <a:r>
-              <a:rPr sz="1800" b="1">
-                <a:solidFill>
-                  <a:srgbClr val="0E7C86"/>
-                </a:solidFill>
-                <a:latin typeface="Calibri"/>
-              </a:rPr>
-              <a:t>(pin A)</a:t>
-            </a:r>
-          </a:p>
-        </p:txBody>
-      </p:sp>
-      <p:sp>
-        <p:nvSpPr>
-          <p:cNvPr id="34" name="TextBox 33"/>
-          <p:cNvSpPr txBox="1"/>
-          <p:nvPr/>
-        </p:nvSpPr>
-        <p:spPr>
-          <a:xfrm>
-            <a:off x="9665208" y="4069080"/>
-            <a:ext cx="1005840" cy="646684"/>
-          </a:xfrm>
-          <a:prstGeom prst="rect">
-            <a:avLst/>
-          </a:prstGeom>
-          <a:noFill/>
-        </p:spPr>
-        <p:txBody>
-          <a:bodyPr wrap="square" lIns="0" tIns="0" rIns="0" bIns="0">
-            <a:spAutoFit/>
-          </a:bodyPr>
-          <a:lstStyle/>
-          <a:p>
-            <a:pPr algn="l">
-              <a:lnSpc>
-                <a:spcPct val="100000"/>
-              </a:lnSpc>
-              <a:spcAft>
-                <a:spcPts val="0"/>
-              </a:spcAft>
-              <a:defRPr sz="1800" b="1">
-                <a:solidFill>
-                  <a:srgbClr val="0E7C86"/>
-                </a:solidFill>
-                <a:latin typeface="Calibri"/>
-              </a:defRPr>
-            </a:pPr>
-            <a:r>
-              <a:rPr sz="1800" b="1">
-                <a:solidFill>
-                  <a:srgbClr val="0E7C86"/>
-                </a:solidFill>
-                <a:latin typeface="Calibri"/>
-              </a:rPr>
-              <a:t>IN2</a:t>
-            </a:r>
-            <a:br/>
-            <a:r>
-              <a:rPr sz="1800" b="1">
-                <a:solidFill>
-                  <a:srgbClr val="0E7C86"/>
-                </a:solidFill>
-                <a:latin typeface="Calibri"/>
-              </a:rPr>
-              <a:t>(pin B)</a:t>
-            </a:r>
-          </a:p>
-        </p:txBody>
-      </p:sp>
-      <p:sp>
-        <p:nvSpPr>
-          <p:cNvPr id="35" name="TextBox 34"/>
-          <p:cNvSpPr txBox="1"/>
-          <p:nvPr/>
-        </p:nvSpPr>
-        <p:spPr>
-          <a:xfrm>
-            <a:off x="5989320" y="3328416"/>
-            <a:ext cx="1280160" cy="367792"/>
-          </a:xfrm>
-          <a:prstGeom prst="rect">
-            <a:avLst/>
-          </a:prstGeom>
-          <a:noFill/>
-        </p:spPr>
-        <p:txBody>
-          <a:bodyPr wrap="square" lIns="0" tIns="0" rIns="0" bIns="0">
-            <a:spAutoFit/>
-          </a:bodyPr>
-          <a:lstStyle/>
-          <a:p>
-            <a:pPr algn="ctr">
-              <a:lnSpc>
-                <a:spcPct val="100000"/>
-              </a:lnSpc>
-              <a:spcAft>
-                <a:spcPts val="0"/>
-              </a:spcAft>
-              <a:defRPr sz="1800" b="1">
+              <a:defRPr sz="1800" b="0">
                 <a:solidFill>
                   <a:srgbClr val="666666"/>
                 </a:solidFill>
@@ -17866,109 +17165,13 @@
               </a:defRPr>
             </a:pPr>
             <a:r>
-              <a:rPr sz="1800" b="1">
+              <a:rPr sz="1800" b="0">
                 <a:solidFill>
                   <a:srgbClr val="666666"/>
                 </a:solidFill>
                 <a:latin typeface="Calibri"/>
               </a:rPr>
-              <a:t>+ V</a:t>
-            </a:r>
-          </a:p>
-        </p:txBody>
-      </p:sp>
-      <p:sp>
-        <p:nvSpPr>
-          <p:cNvPr id="36" name="TextBox 35"/>
-          <p:cNvSpPr txBox="1"/>
-          <p:nvPr/>
-        </p:nvSpPr>
-        <p:spPr>
-          <a:xfrm>
-            <a:off x="5989320" y="5449824"/>
-            <a:ext cx="1280160" cy="367792"/>
-          </a:xfrm>
-          <a:prstGeom prst="rect">
-            <a:avLst/>
-          </a:prstGeom>
-          <a:noFill/>
-        </p:spPr>
-        <p:txBody>
-          <a:bodyPr wrap="square" lIns="0" tIns="0" rIns="0" bIns="0">
-            <a:spAutoFit/>
-          </a:bodyPr>
-          <a:lstStyle/>
-          <a:p>
-            <a:pPr algn="ctr">
-              <a:lnSpc>
-                <a:spcPct val="100000"/>
-              </a:lnSpc>
-              <a:spcAft>
-                <a:spcPts val="0"/>
-              </a:spcAft>
-              <a:defRPr sz="1800" b="1">
-                <a:solidFill>
-                  <a:srgbClr val="666666"/>
-                </a:solidFill>
-                <a:latin typeface="Calibri"/>
-              </a:defRPr>
-            </a:pPr>
-            <a:r>
-              <a:rPr sz="1800" b="1">
-                <a:solidFill>
-                  <a:srgbClr val="666666"/>
-                </a:solidFill>
-                <a:latin typeface="Calibri"/>
-              </a:rPr>
-              <a:t>GND</a:t>
-            </a:r>
-          </a:p>
-        </p:txBody>
-      </p:sp>
-      <p:sp>
-        <p:nvSpPr>
-          <p:cNvPr id="37" name="TextBox 36"/>
-          <p:cNvSpPr txBox="1"/>
-          <p:nvPr/>
-        </p:nvSpPr>
-        <p:spPr>
-          <a:xfrm>
-            <a:off x="502920" y="5815584"/>
-            <a:ext cx="11185855" cy="646684"/>
-          </a:xfrm>
-          <a:prstGeom prst="rect">
-            <a:avLst/>
-          </a:prstGeom>
-          <a:noFill/>
-        </p:spPr>
-        <p:txBody>
-          <a:bodyPr wrap="square" lIns="0" tIns="0" rIns="0" bIns="0">
-            <a:spAutoFit/>
-          </a:bodyPr>
-          <a:lstStyle/>
-          <a:p>
-            <a:pPr algn="ctr">
-              <a:lnSpc>
-                <a:spcPct val="100000"/>
-              </a:lnSpc>
-              <a:spcAft>
-                <a:spcPts val="0"/>
-              </a:spcAft>
-              <a:defRPr sz="1800" b="0">
-                <a:solidFill>
-                  <a:srgbClr val="666666"/>
-                </a:solidFill>
-                <a:latin typeface="Calibri"/>
-              </a:defRPr>
-            </a:pPr>
-            <a:r>
-              <a:rPr sz="1800" b="0">
-                <a:solidFill>
-                  <a:srgbClr val="666666"/>
-                </a:solidFill>
-                <a:latin typeface="Calibri"/>
-              </a:rPr>
-              <a:t>Drawn in the first state: IN1 closed to + V, IN2 closed to GND. Reverse is the same picture with both switches thrown and the arrows running the other way.</a:t>
+              <a:t>The arrows are the current: in at + V, along the top, down the left, through the motor, back to GND. That is the FORWARD box above. Turn pin B on instead of pin A and it all runs backwards.</a:t>
             </a:r>
           </a:p>
         </p:txBody>
